--- a/slides/Module-08-Fund-Administration-NAV.pptx
+++ b/slides/Module-08-Fund-Administration-NAV.pptx
@@ -14,6 +14,11 @@
     <p:sldId id="262" r:id="rId13"/>
     <p:sldId id="263" r:id="rId14"/>
     <p:sldId id="264" r:id="rId15"/>
+    <p:sldId id="265" r:id="rId16"/>
+    <p:sldId id="266" r:id="rId17"/>
+    <p:sldId id="267" r:id="rId18"/>
+    <p:sldId id="268" r:id="rId19"/>
+    <p:sldId id="269" r:id="rId20"/>
   </p:sldIdLst>
   <p:sldSz cx="12191695" cy="6858000" type="screen4x3"/>
   <p:notesSz cx="6858000" cy="9144000"/>
@@ -3764,6 +3769,6214 @@
 </p:sld>
 </file>
 
+<file path=ppt/slides/slide10.xml><?xml version="1.0" encoding="utf-8"?>
+<p:sld xmlns:a="http://schemas.openxmlformats.org/drawingml/2006/main" xmlns:p="http://schemas.openxmlformats.org/presentationml/2006/main" xmlns:r="http://schemas.openxmlformats.org/officeDocument/2006/relationships">
+  <p:cSld>
+    <p:bg>
+      <p:bgPr>
+        <a:solidFill>
+          <a:srgbClr val="F7F8FA"/>
+        </a:solidFill>
+        <a:effectLst/>
+      </p:bgPr>
+    </p:bg>
+    <p:spTree>
+      <p:nvGrpSpPr>
+        <p:cNvPr id="1" name=""/>
+        <p:cNvGrpSpPr/>
+        <p:nvPr/>
+      </p:nvGrpSpPr>
+      <p:grpSpPr/>
+      <p:sp>
+        <p:nvSpPr>
+          <p:cNvPr id="2" name="Rectangle 1"/>
+          <p:cNvSpPr/>
+          <p:nvPr/>
+        </p:nvSpPr>
+        <p:spPr>
+          <a:xfrm>
+            <a:off x="548640" y="402336"/>
+            <a:ext cx="118872" cy="118872"/>
+          </a:xfrm>
+          <a:prstGeom prst="rect">
+            <a:avLst/>
+          </a:prstGeom>
+          <a:solidFill>
+            <a:srgbClr val="C9A227"/>
+          </a:solidFill>
+          <a:ln>
+            <a:noFill/>
+          </a:ln>
+          <a:effectLst/>
+        </p:spPr>
+        <p:style>
+          <a:lnRef idx="1">
+            <a:schemeClr val="accent1"/>
+          </a:lnRef>
+          <a:fillRef idx="3">
+            <a:schemeClr val="accent1"/>
+          </a:fillRef>
+          <a:effectRef idx="2">
+            <a:schemeClr val="accent1"/>
+          </a:effectRef>
+          <a:fontRef idx="minor">
+            <a:schemeClr val="lt1"/>
+          </a:fontRef>
+        </p:style>
+        <p:txBody>
+          <a:bodyPr rtlCol="0" anchor="ctr"/>
+          <a:lstStyle/>
+          <a:p>
+            <a:pPr algn="ctr"/>
+          </a:p>
+        </p:txBody>
+      </p:sp>
+      <p:sp>
+        <p:nvSpPr>
+          <p:cNvPr id="3" name="TextBox 2"/>
+          <p:cNvSpPr txBox="1"/>
+          <p:nvPr/>
+        </p:nvSpPr>
+        <p:spPr>
+          <a:xfrm>
+            <a:off x="786384" y="310896"/>
+            <a:ext cx="10817352" cy="274320"/>
+          </a:xfrm>
+          <a:prstGeom prst="rect">
+            <a:avLst/>
+          </a:prstGeom>
+          <a:noFill/>
+        </p:spPr>
+        <p:txBody>
+          <a:bodyPr wrap="square" anchor="t" lIns="0" rIns="0" tIns="0" bIns="0">
+            <a:spAutoFit/>
+          </a:bodyPr>
+          <a:lstStyle/>
+          <a:p>
+            <a:pPr algn="l"/>
+            <a:r>
+              <a:rPr sz="1100" b="1">
+                <a:solidFill>
+                  <a:srgbClr val="C9A227"/>
+                </a:solidFill>
+              </a:rPr>
+              <a:t>HOUR 2 · BREAK 3 OF 3 · INVESTOR UNITS</a:t>
+            </a:r>
+          </a:p>
+        </p:txBody>
+      </p:sp>
+      <p:sp>
+        <p:nvSpPr>
+          <p:cNvPr id="4" name="TextBox 3"/>
+          <p:cNvSpPr txBox="1"/>
+          <p:nvPr/>
+        </p:nvSpPr>
+        <p:spPr>
+          <a:xfrm>
+            <a:off x="548640" y="621792"/>
+            <a:ext cx="11091672" cy="731520"/>
+          </a:xfrm>
+          <a:prstGeom prst="rect">
+            <a:avLst/>
+          </a:prstGeom>
+          <a:noFill/>
+        </p:spPr>
+        <p:txBody>
+          <a:bodyPr wrap="square" anchor="t" lIns="0" rIns="0" tIns="0" bIns="0">
+            <a:spAutoFit/>
+          </a:bodyPr>
+          <a:lstStyle/>
+          <a:p>
+            <a:pPr algn="l"/>
+            <a:r>
+              <a:rPr sz="2900" b="1">
+                <a:solidFill>
+                  <a:srgbClr val="0F2145"/>
+                </a:solidFill>
+                <a:latin typeface="Georgia"/>
+              </a:rPr>
+              <a:t>Break 3: a redemption the books missed</a:t>
+            </a:r>
+          </a:p>
+        </p:txBody>
+      </p:sp>
+      <p:sp>
+        <p:nvSpPr>
+          <p:cNvPr id="5" name="Rectangle 4"/>
+          <p:cNvSpPr/>
+          <p:nvPr/>
+        </p:nvSpPr>
+        <p:spPr>
+          <a:xfrm>
+            <a:off x="548640" y="1463040"/>
+            <a:ext cx="3611880" cy="1417320"/>
+          </a:xfrm>
+          <a:prstGeom prst="rect">
+            <a:avLst/>
+          </a:prstGeom>
+          <a:solidFill>
+            <a:srgbClr val="FFFFFF"/>
+          </a:solidFill>
+          <a:ln>
+            <a:noFill/>
+          </a:ln>
+          <a:effectLst/>
+        </p:spPr>
+        <p:style>
+          <a:lnRef idx="1">
+            <a:schemeClr val="accent1"/>
+          </a:lnRef>
+          <a:fillRef idx="3">
+            <a:schemeClr val="accent1"/>
+          </a:fillRef>
+          <a:effectRef idx="2">
+            <a:schemeClr val="accent1"/>
+          </a:effectRef>
+          <a:fontRef idx="minor">
+            <a:schemeClr val="lt1"/>
+          </a:fontRef>
+        </p:style>
+        <p:txBody>
+          <a:bodyPr rtlCol="0" anchor="ctr"/>
+          <a:lstStyle/>
+          <a:p>
+            <a:pPr algn="ctr"/>
+          </a:p>
+        </p:txBody>
+      </p:sp>
+      <p:sp>
+        <p:nvSpPr>
+          <p:cNvPr id="6" name="Rectangle 5"/>
+          <p:cNvSpPr/>
+          <p:nvPr/>
+        </p:nvSpPr>
+        <p:spPr>
+          <a:xfrm>
+            <a:off x="548640" y="1463040"/>
+            <a:ext cx="3611880" cy="45720"/>
+          </a:xfrm>
+          <a:prstGeom prst="rect">
+            <a:avLst/>
+          </a:prstGeom>
+          <a:solidFill>
+            <a:srgbClr val="C9A227"/>
+          </a:solidFill>
+          <a:ln>
+            <a:noFill/>
+          </a:ln>
+          <a:effectLst/>
+        </p:spPr>
+        <p:style>
+          <a:lnRef idx="1">
+            <a:schemeClr val="accent1"/>
+          </a:lnRef>
+          <a:fillRef idx="3">
+            <a:schemeClr val="accent1"/>
+          </a:fillRef>
+          <a:effectRef idx="2">
+            <a:schemeClr val="accent1"/>
+          </a:effectRef>
+          <a:fontRef idx="minor">
+            <a:schemeClr val="lt1"/>
+          </a:fontRef>
+        </p:style>
+        <p:txBody>
+          <a:bodyPr rtlCol="0" anchor="ctr"/>
+          <a:lstStyle/>
+          <a:p>
+            <a:pPr algn="ctr"/>
+          </a:p>
+        </p:txBody>
+      </p:sp>
+      <p:sp>
+        <p:nvSpPr>
+          <p:cNvPr id="7" name="TextBox 6"/>
+          <p:cNvSpPr txBox="1"/>
+          <p:nvPr/>
+        </p:nvSpPr>
+        <p:spPr>
+          <a:xfrm>
+            <a:off x="804672" y="1600200"/>
+            <a:ext cx="3154680" cy="1234440"/>
+          </a:xfrm>
+          <a:prstGeom prst="rect">
+            <a:avLst/>
+          </a:prstGeom>
+          <a:noFill/>
+        </p:spPr>
+        <p:txBody>
+          <a:bodyPr wrap="square" anchor="t" lIns="0" rIns="0" tIns="0" bIns="0">
+            <a:spAutoFit/>
+          </a:bodyPr>
+          <a:lstStyle/>
+          <a:p>
+            <a:pPr algn="l"/>
+            <a:r>
+              <a:rPr sz="1000" b="1">
+                <a:solidFill>
+                  <a:srgbClr val="3A5C9E"/>
+                </a:solidFill>
+              </a:rPr>
+              <a:t>THE FUND'S BOOKS</a:t>
+            </a:r>
+          </a:p>
+          <a:p>
+            <a:pPr algn="l">
+              <a:spcBef>
+                <a:spcPts val="400"/>
+              </a:spcBef>
+            </a:pPr>
+            <a:r>
+              <a:rPr sz="2400" b="1">
+                <a:solidFill>
+                  <a:srgbClr val="0F2145"/>
+                </a:solidFill>
+                <a:latin typeface="Georgia"/>
+              </a:rPr>
+              <a:t>1,00,00,000</a:t>
+            </a:r>
+          </a:p>
+          <a:p>
+            <a:pPr algn="l">
+              <a:spcBef>
+                <a:spcPts val="400"/>
+              </a:spcBef>
+            </a:pPr>
+            <a:r>
+              <a:rPr sz="1100" b="0">
+                <a:solidFill>
+                  <a:srgbClr val="5D6B7E"/>
+                </a:solidFill>
+              </a:rPr>
+              <a:t>units the books show</a:t>
+            </a:r>
+          </a:p>
+        </p:txBody>
+      </p:sp>
+      <p:sp>
+        <p:nvSpPr>
+          <p:cNvPr id="8" name="Rectangle 7"/>
+          <p:cNvSpPr/>
+          <p:nvPr/>
+        </p:nvSpPr>
+        <p:spPr>
+          <a:xfrm>
+            <a:off x="4315968" y="1463040"/>
+            <a:ext cx="3611880" cy="1417320"/>
+          </a:xfrm>
+          <a:prstGeom prst="rect">
+            <a:avLst/>
+          </a:prstGeom>
+          <a:solidFill>
+            <a:srgbClr val="FFFFFF"/>
+          </a:solidFill>
+          <a:ln>
+            <a:noFill/>
+          </a:ln>
+          <a:effectLst/>
+        </p:spPr>
+        <p:style>
+          <a:lnRef idx="1">
+            <a:schemeClr val="accent1"/>
+          </a:lnRef>
+          <a:fillRef idx="3">
+            <a:schemeClr val="accent1"/>
+          </a:fillRef>
+          <a:effectRef idx="2">
+            <a:schemeClr val="accent1"/>
+          </a:effectRef>
+          <a:fontRef idx="minor">
+            <a:schemeClr val="lt1"/>
+          </a:fontRef>
+        </p:style>
+        <p:txBody>
+          <a:bodyPr rtlCol="0" anchor="ctr"/>
+          <a:lstStyle/>
+          <a:p>
+            <a:pPr algn="ctr"/>
+          </a:p>
+        </p:txBody>
+      </p:sp>
+      <p:sp>
+        <p:nvSpPr>
+          <p:cNvPr id="9" name="Rectangle 8"/>
+          <p:cNvSpPr/>
+          <p:nvPr/>
+        </p:nvSpPr>
+        <p:spPr>
+          <a:xfrm>
+            <a:off x="4315968" y="1463040"/>
+            <a:ext cx="3611880" cy="45720"/>
+          </a:xfrm>
+          <a:prstGeom prst="rect">
+            <a:avLst/>
+          </a:prstGeom>
+          <a:solidFill>
+            <a:srgbClr val="C9A227"/>
+          </a:solidFill>
+          <a:ln>
+            <a:noFill/>
+          </a:ln>
+          <a:effectLst/>
+        </p:spPr>
+        <p:style>
+          <a:lnRef idx="1">
+            <a:schemeClr val="accent1"/>
+          </a:lnRef>
+          <a:fillRef idx="3">
+            <a:schemeClr val="accent1"/>
+          </a:fillRef>
+          <a:effectRef idx="2">
+            <a:schemeClr val="accent1"/>
+          </a:effectRef>
+          <a:fontRef idx="minor">
+            <a:schemeClr val="lt1"/>
+          </a:fontRef>
+        </p:style>
+        <p:txBody>
+          <a:bodyPr rtlCol="0" anchor="ctr"/>
+          <a:lstStyle/>
+          <a:p>
+            <a:pPr algn="ctr"/>
+          </a:p>
+        </p:txBody>
+      </p:sp>
+      <p:sp>
+        <p:nvSpPr>
+          <p:cNvPr id="10" name="TextBox 9"/>
+          <p:cNvSpPr txBox="1"/>
+          <p:nvPr/>
+        </p:nvSpPr>
+        <p:spPr>
+          <a:xfrm>
+            <a:off x="4572000" y="1600200"/>
+            <a:ext cx="3154680" cy="1234440"/>
+          </a:xfrm>
+          <a:prstGeom prst="rect">
+            <a:avLst/>
+          </a:prstGeom>
+          <a:noFill/>
+        </p:spPr>
+        <p:txBody>
+          <a:bodyPr wrap="square" anchor="t" lIns="0" rIns="0" tIns="0" bIns="0">
+            <a:spAutoFit/>
+          </a:bodyPr>
+          <a:lstStyle/>
+          <a:p>
+            <a:pPr algn="l"/>
+            <a:r>
+              <a:rPr sz="1000" b="1">
+                <a:solidFill>
+                  <a:srgbClr val="3A5C9E"/>
+                </a:solidFill>
+              </a:rPr>
+              <a:t>THE TRANSFER AGENT</a:t>
+            </a:r>
+          </a:p>
+          <a:p>
+            <a:pPr algn="l">
+              <a:spcBef>
+                <a:spcPts val="400"/>
+              </a:spcBef>
+            </a:pPr>
+            <a:r>
+              <a:rPr sz="2400" b="1">
+                <a:solidFill>
+                  <a:srgbClr val="0F2145"/>
+                </a:solidFill>
+                <a:latin typeface="Georgia"/>
+              </a:rPr>
+              <a:t>99,80,000</a:t>
+            </a:r>
+          </a:p>
+          <a:p>
+            <a:pPr algn="l">
+              <a:spcBef>
+                <a:spcPts val="400"/>
+              </a:spcBef>
+            </a:pPr>
+            <a:r>
+              <a:rPr sz="1100" b="0">
+                <a:solidFill>
+                  <a:srgbClr val="5D6B7E"/>
+                </a:solidFill>
+              </a:rPr>
+              <a:t>units investors actually own</a:t>
+            </a:r>
+          </a:p>
+        </p:txBody>
+      </p:sp>
+      <p:sp>
+        <p:nvSpPr>
+          <p:cNvPr id="11" name="Rectangle 10"/>
+          <p:cNvSpPr/>
+          <p:nvPr/>
+        </p:nvSpPr>
+        <p:spPr>
+          <a:xfrm>
+            <a:off x="8083296" y="1463040"/>
+            <a:ext cx="3557016" cy="1417320"/>
+          </a:xfrm>
+          <a:prstGeom prst="rect">
+            <a:avLst/>
+          </a:prstGeom>
+          <a:solidFill>
+            <a:srgbClr val="0F2145"/>
+          </a:solidFill>
+          <a:ln>
+            <a:noFill/>
+          </a:ln>
+          <a:effectLst/>
+        </p:spPr>
+        <p:style>
+          <a:lnRef idx="1">
+            <a:schemeClr val="accent1"/>
+          </a:lnRef>
+          <a:fillRef idx="3">
+            <a:schemeClr val="accent1"/>
+          </a:fillRef>
+          <a:effectRef idx="2">
+            <a:schemeClr val="accent1"/>
+          </a:effectRef>
+          <a:fontRef idx="minor">
+            <a:schemeClr val="lt1"/>
+          </a:fontRef>
+        </p:style>
+        <p:txBody>
+          <a:bodyPr rtlCol="0" anchor="ctr"/>
+          <a:lstStyle/>
+          <a:p>
+            <a:pPr algn="ctr"/>
+          </a:p>
+        </p:txBody>
+      </p:sp>
+      <p:sp>
+        <p:nvSpPr>
+          <p:cNvPr id="12" name="Rectangle 11"/>
+          <p:cNvSpPr/>
+          <p:nvPr/>
+        </p:nvSpPr>
+        <p:spPr>
+          <a:xfrm>
+            <a:off x="8083296" y="1463040"/>
+            <a:ext cx="3557016" cy="45720"/>
+          </a:xfrm>
+          <a:prstGeom prst="rect">
+            <a:avLst/>
+          </a:prstGeom>
+          <a:solidFill>
+            <a:srgbClr val="C9A227"/>
+          </a:solidFill>
+          <a:ln>
+            <a:noFill/>
+          </a:ln>
+          <a:effectLst/>
+        </p:spPr>
+        <p:style>
+          <a:lnRef idx="1">
+            <a:schemeClr val="accent1"/>
+          </a:lnRef>
+          <a:fillRef idx="3">
+            <a:schemeClr val="accent1"/>
+          </a:fillRef>
+          <a:effectRef idx="2">
+            <a:schemeClr val="accent1"/>
+          </a:effectRef>
+          <a:fontRef idx="minor">
+            <a:schemeClr val="lt1"/>
+          </a:fontRef>
+        </p:style>
+        <p:txBody>
+          <a:bodyPr rtlCol="0" anchor="ctr"/>
+          <a:lstStyle/>
+          <a:p>
+            <a:pPr algn="ctr"/>
+          </a:p>
+        </p:txBody>
+      </p:sp>
+      <p:sp>
+        <p:nvSpPr>
+          <p:cNvPr id="13" name="TextBox 12"/>
+          <p:cNvSpPr txBox="1"/>
+          <p:nvPr/>
+        </p:nvSpPr>
+        <p:spPr>
+          <a:xfrm>
+            <a:off x="8339327" y="1600200"/>
+            <a:ext cx="3099816" cy="1234440"/>
+          </a:xfrm>
+          <a:prstGeom prst="rect">
+            <a:avLst/>
+          </a:prstGeom>
+          <a:noFill/>
+        </p:spPr>
+        <p:txBody>
+          <a:bodyPr wrap="square" anchor="t" lIns="0" rIns="0" tIns="0" bIns="0">
+            <a:spAutoFit/>
+          </a:bodyPr>
+          <a:lstStyle/>
+          <a:p>
+            <a:pPr algn="l"/>
+            <a:r>
+              <a:rPr sz="1000" b="1">
+                <a:solidFill>
+                  <a:srgbClr val="C9A227"/>
+                </a:solidFill>
+              </a:rPr>
+              <a:t>THE DIFFERENCE</a:t>
+            </a:r>
+          </a:p>
+          <a:p>
+            <a:pPr algn="l">
+              <a:spcBef>
+                <a:spcPts val="400"/>
+              </a:spcBef>
+            </a:pPr>
+            <a:r>
+              <a:rPr sz="2400" b="1">
+                <a:solidFill>
+                  <a:srgbClr val="C9A227"/>
+                </a:solidFill>
+                <a:latin typeface="Georgia"/>
+              </a:rPr>
+              <a:t>−20,000 units</a:t>
+            </a:r>
+          </a:p>
+          <a:p>
+            <a:pPr algn="l">
+              <a:spcBef>
+                <a:spcPts val="400"/>
+              </a:spcBef>
+            </a:pPr>
+            <a:r>
+              <a:rPr sz="1100" b="0">
+                <a:solidFill>
+                  <a:srgbClr val="C9D6EE"/>
+                </a:solidFill>
+              </a:rPr>
+              <a:t>fewer units at the transfer agent</a:t>
+            </a:r>
+          </a:p>
+        </p:txBody>
+      </p:sp>
+      <p:sp>
+        <p:nvSpPr>
+          <p:cNvPr id="14" name="Rectangle 13"/>
+          <p:cNvSpPr/>
+          <p:nvPr/>
+        </p:nvSpPr>
+        <p:spPr>
+          <a:xfrm>
+            <a:off x="548640" y="3063240"/>
+            <a:ext cx="3593592" cy="2560320"/>
+          </a:xfrm>
+          <a:prstGeom prst="rect">
+            <a:avLst/>
+          </a:prstGeom>
+          <a:solidFill>
+            <a:srgbClr val="FFFFFF"/>
+          </a:solidFill>
+          <a:ln>
+            <a:noFill/>
+          </a:ln>
+          <a:effectLst/>
+        </p:spPr>
+        <p:style>
+          <a:lnRef idx="1">
+            <a:schemeClr val="accent1"/>
+          </a:lnRef>
+          <a:fillRef idx="3">
+            <a:schemeClr val="accent1"/>
+          </a:fillRef>
+          <a:effectRef idx="2">
+            <a:schemeClr val="accent1"/>
+          </a:effectRef>
+          <a:fontRef idx="minor">
+            <a:schemeClr val="lt1"/>
+          </a:fontRef>
+        </p:style>
+        <p:txBody>
+          <a:bodyPr rtlCol="0" anchor="ctr"/>
+          <a:lstStyle/>
+          <a:p>
+            <a:pPr algn="ctr"/>
+          </a:p>
+        </p:txBody>
+      </p:sp>
+      <p:sp>
+        <p:nvSpPr>
+          <p:cNvPr id="15" name="Rectangle 14"/>
+          <p:cNvSpPr/>
+          <p:nvPr/>
+        </p:nvSpPr>
+        <p:spPr>
+          <a:xfrm>
+            <a:off x="548640" y="3063240"/>
+            <a:ext cx="3593592" cy="45720"/>
+          </a:xfrm>
+          <a:prstGeom prst="rect">
+            <a:avLst/>
+          </a:prstGeom>
+          <a:solidFill>
+            <a:srgbClr val="C9A227"/>
+          </a:solidFill>
+          <a:ln>
+            <a:noFill/>
+          </a:ln>
+          <a:effectLst/>
+        </p:spPr>
+        <p:style>
+          <a:lnRef idx="1">
+            <a:schemeClr val="accent1"/>
+          </a:lnRef>
+          <a:fillRef idx="3">
+            <a:schemeClr val="accent1"/>
+          </a:fillRef>
+          <a:effectRef idx="2">
+            <a:schemeClr val="accent1"/>
+          </a:effectRef>
+          <a:fontRef idx="minor">
+            <a:schemeClr val="lt1"/>
+          </a:fontRef>
+        </p:style>
+        <p:txBody>
+          <a:bodyPr rtlCol="0" anchor="ctr"/>
+          <a:lstStyle/>
+          <a:p>
+            <a:pPr algn="ctr"/>
+          </a:p>
+        </p:txBody>
+      </p:sp>
+      <p:sp>
+        <p:nvSpPr>
+          <p:cNvPr id="16" name="TextBox 15"/>
+          <p:cNvSpPr txBox="1"/>
+          <p:nvPr/>
+        </p:nvSpPr>
+        <p:spPr>
+          <a:xfrm>
+            <a:off x="804672" y="3264408"/>
+            <a:ext cx="3081528" cy="2286000"/>
+          </a:xfrm>
+          <a:prstGeom prst="rect">
+            <a:avLst/>
+          </a:prstGeom>
+          <a:noFill/>
+        </p:spPr>
+        <p:txBody>
+          <a:bodyPr wrap="square" anchor="t" lIns="0" rIns="0" tIns="0" bIns="0">
+            <a:spAutoFit/>
+          </a:bodyPr>
+          <a:lstStyle/>
+          <a:p>
+            <a:pPr algn="l"/>
+            <a:r>
+              <a:rPr sz="1000" b="1">
+                <a:solidFill>
+                  <a:srgbClr val="3A5C9E"/>
+                </a:solidFill>
+              </a:rPr>
+              <a:t>WHAT HAPPENED</a:t>
+            </a:r>
+          </a:p>
+          <a:p>
+            <a:pPr algn="l">
+              <a:spcBef>
+                <a:spcPts val="400"/>
+              </a:spcBef>
+            </a:pPr>
+            <a:r>
+              <a:rPr sz="1600" b="1">
+                <a:solidFill>
+                  <a:srgbClr val="0F2145"/>
+                </a:solidFill>
+                <a:latin typeface="Georgia"/>
+              </a:rPr>
+              <a:t>The story</a:t>
+            </a:r>
+          </a:p>
+          <a:p>
+            <a:pPr algn="l">
+              <a:spcBef>
+                <a:spcPts val="600"/>
+              </a:spcBef>
+            </a:pPr>
+            <a:r>
+              <a:rPr sz="1200" b="0">
+                <a:solidFill>
+                  <a:srgbClr val="1B2A41"/>
+                </a:solidFill>
+              </a:rPr>
+              <a:t>An investor sold 20,000 units back to the fund. The transfer agent processed it. The fund's books did not.</a:t>
+            </a:r>
+          </a:p>
+        </p:txBody>
+      </p:sp>
+      <p:sp>
+        <p:nvSpPr>
+          <p:cNvPr id="17" name="Rectangle 16"/>
+          <p:cNvSpPr/>
+          <p:nvPr/>
+        </p:nvSpPr>
+        <p:spPr>
+          <a:xfrm>
+            <a:off x="4297680" y="3063240"/>
+            <a:ext cx="3593592" cy="2560320"/>
+          </a:xfrm>
+          <a:prstGeom prst="rect">
+            <a:avLst/>
+          </a:prstGeom>
+          <a:solidFill>
+            <a:srgbClr val="FFFFFF"/>
+          </a:solidFill>
+          <a:ln>
+            <a:noFill/>
+          </a:ln>
+          <a:effectLst/>
+        </p:spPr>
+        <p:style>
+          <a:lnRef idx="1">
+            <a:schemeClr val="accent1"/>
+          </a:lnRef>
+          <a:fillRef idx="3">
+            <a:schemeClr val="accent1"/>
+          </a:fillRef>
+          <a:effectRef idx="2">
+            <a:schemeClr val="accent1"/>
+          </a:effectRef>
+          <a:fontRef idx="minor">
+            <a:schemeClr val="lt1"/>
+          </a:fontRef>
+        </p:style>
+        <p:txBody>
+          <a:bodyPr rtlCol="0" anchor="ctr"/>
+          <a:lstStyle/>
+          <a:p>
+            <a:pPr algn="ctr"/>
+          </a:p>
+        </p:txBody>
+      </p:sp>
+      <p:sp>
+        <p:nvSpPr>
+          <p:cNvPr id="18" name="Rectangle 17"/>
+          <p:cNvSpPr/>
+          <p:nvPr/>
+        </p:nvSpPr>
+        <p:spPr>
+          <a:xfrm>
+            <a:off x="4297680" y="3063240"/>
+            <a:ext cx="3593592" cy="45720"/>
+          </a:xfrm>
+          <a:prstGeom prst="rect">
+            <a:avLst/>
+          </a:prstGeom>
+          <a:solidFill>
+            <a:srgbClr val="C9A227"/>
+          </a:solidFill>
+          <a:ln>
+            <a:noFill/>
+          </a:ln>
+          <a:effectLst/>
+        </p:spPr>
+        <p:style>
+          <a:lnRef idx="1">
+            <a:schemeClr val="accent1"/>
+          </a:lnRef>
+          <a:fillRef idx="3">
+            <a:schemeClr val="accent1"/>
+          </a:fillRef>
+          <a:effectRef idx="2">
+            <a:schemeClr val="accent1"/>
+          </a:effectRef>
+          <a:fontRef idx="minor">
+            <a:schemeClr val="lt1"/>
+          </a:fontRef>
+        </p:style>
+        <p:txBody>
+          <a:bodyPr rtlCol="0" anchor="ctr"/>
+          <a:lstStyle/>
+          <a:p>
+            <a:pPr algn="ctr"/>
+          </a:p>
+        </p:txBody>
+      </p:sp>
+      <p:sp>
+        <p:nvSpPr>
+          <p:cNvPr id="19" name="TextBox 18"/>
+          <p:cNvSpPr txBox="1"/>
+          <p:nvPr/>
+        </p:nvSpPr>
+        <p:spPr>
+          <a:xfrm>
+            <a:off x="4553712" y="3264408"/>
+            <a:ext cx="3081528" cy="2286000"/>
+          </a:xfrm>
+          <a:prstGeom prst="rect">
+            <a:avLst/>
+          </a:prstGeom>
+          <a:noFill/>
+        </p:spPr>
+        <p:txBody>
+          <a:bodyPr wrap="square" anchor="t" lIns="0" rIns="0" tIns="0" bIns="0">
+            <a:spAutoFit/>
+          </a:bodyPr>
+          <a:lstStyle/>
+          <a:p>
+            <a:pPr algn="l"/>
+            <a:r>
+              <a:rPr sz="1000" b="1">
+                <a:solidFill>
+                  <a:srgbClr val="3A5C9E"/>
+                </a:solidFill>
+              </a:rPr>
+              <a:t>THE FIX</a:t>
+            </a:r>
+          </a:p>
+          <a:p>
+            <a:pPr algn="l">
+              <a:spcBef>
+                <a:spcPts val="400"/>
+              </a:spcBef>
+            </a:pPr>
+            <a:r>
+              <a:rPr sz="1600" b="1">
+                <a:solidFill>
+                  <a:srgbClr val="0F2145"/>
+                </a:solidFill>
+                <a:latin typeface="Georgia"/>
+              </a:rPr>
+              <a:t>What the accountant books</a:t>
+            </a:r>
+          </a:p>
+          <a:p>
+            <a:pPr algn="l">
+              <a:spcBef>
+                <a:spcPts val="600"/>
+              </a:spcBef>
+            </a:pPr>
+            <a:r>
+              <a:rPr sz="1200" b="0">
+                <a:solidFill>
+                  <a:srgbClr val="1B2A41"/>
+                </a:solidFill>
+              </a:rPr>
+              <a:t>Cut units by 20,000. Debit unit capital ₹9,17,840. Credit redemption payable ₹9,17,840, which is 20,000 × ₹45.8920 owed to the investor.</a:t>
+            </a:r>
+          </a:p>
+        </p:txBody>
+      </p:sp>
+      <p:sp>
+        <p:nvSpPr>
+          <p:cNvPr id="20" name="Rectangle 19"/>
+          <p:cNvSpPr/>
+          <p:nvPr/>
+        </p:nvSpPr>
+        <p:spPr>
+          <a:xfrm>
+            <a:off x="8046720" y="3063240"/>
+            <a:ext cx="3593592" cy="2560320"/>
+          </a:xfrm>
+          <a:prstGeom prst="rect">
+            <a:avLst/>
+          </a:prstGeom>
+          <a:solidFill>
+            <a:srgbClr val="0F2145"/>
+          </a:solidFill>
+          <a:ln>
+            <a:noFill/>
+          </a:ln>
+          <a:effectLst/>
+        </p:spPr>
+        <p:style>
+          <a:lnRef idx="1">
+            <a:schemeClr val="accent1"/>
+          </a:lnRef>
+          <a:fillRef idx="3">
+            <a:schemeClr val="accent1"/>
+          </a:fillRef>
+          <a:effectRef idx="2">
+            <a:schemeClr val="accent1"/>
+          </a:effectRef>
+          <a:fontRef idx="minor">
+            <a:schemeClr val="lt1"/>
+          </a:fontRef>
+        </p:style>
+        <p:txBody>
+          <a:bodyPr rtlCol="0" anchor="ctr"/>
+          <a:lstStyle/>
+          <a:p>
+            <a:pPr algn="ctr"/>
+          </a:p>
+        </p:txBody>
+      </p:sp>
+      <p:sp>
+        <p:nvSpPr>
+          <p:cNvPr id="21" name="Rectangle 20"/>
+          <p:cNvSpPr/>
+          <p:nvPr/>
+        </p:nvSpPr>
+        <p:spPr>
+          <a:xfrm>
+            <a:off x="8046720" y="3063240"/>
+            <a:ext cx="3593592" cy="45720"/>
+          </a:xfrm>
+          <a:prstGeom prst="rect">
+            <a:avLst/>
+          </a:prstGeom>
+          <a:solidFill>
+            <a:srgbClr val="C9A227"/>
+          </a:solidFill>
+          <a:ln>
+            <a:noFill/>
+          </a:ln>
+          <a:effectLst/>
+        </p:spPr>
+        <p:style>
+          <a:lnRef idx="1">
+            <a:schemeClr val="accent1"/>
+          </a:lnRef>
+          <a:fillRef idx="3">
+            <a:schemeClr val="accent1"/>
+          </a:fillRef>
+          <a:effectRef idx="2">
+            <a:schemeClr val="accent1"/>
+          </a:effectRef>
+          <a:fontRef idx="minor">
+            <a:schemeClr val="lt1"/>
+          </a:fontRef>
+        </p:style>
+        <p:txBody>
+          <a:bodyPr rtlCol="0" anchor="ctr"/>
+          <a:lstStyle/>
+          <a:p>
+            <a:pPr algn="ctr"/>
+          </a:p>
+        </p:txBody>
+      </p:sp>
+      <p:sp>
+        <p:nvSpPr>
+          <p:cNvPr id="22" name="TextBox 21"/>
+          <p:cNvSpPr txBox="1"/>
+          <p:nvPr/>
+        </p:nvSpPr>
+        <p:spPr>
+          <a:xfrm>
+            <a:off x="8302752" y="3264408"/>
+            <a:ext cx="3081528" cy="2286000"/>
+          </a:xfrm>
+          <a:prstGeom prst="rect">
+            <a:avLst/>
+          </a:prstGeom>
+          <a:noFill/>
+        </p:spPr>
+        <p:txBody>
+          <a:bodyPr wrap="square" anchor="t" lIns="0" rIns="0" tIns="0" bIns="0">
+            <a:spAutoFit/>
+          </a:bodyPr>
+          <a:lstStyle/>
+          <a:p>
+            <a:pPr algn="l"/>
+            <a:r>
+              <a:rPr sz="1000" b="1">
+                <a:solidFill>
+                  <a:srgbClr val="C9A227"/>
+                </a:solidFill>
+              </a:rPr>
+              <a:t>NAV EFFECT</a:t>
+            </a:r>
+          </a:p>
+          <a:p>
+            <a:pPr algn="l">
+              <a:spcBef>
+                <a:spcPts val="400"/>
+              </a:spcBef>
+            </a:pPr>
+            <a:r>
+              <a:rPr sz="1600" b="1">
+                <a:solidFill>
+                  <a:srgbClr val="FFFFFF"/>
+                </a:solidFill>
+                <a:latin typeface="Georgia"/>
+              </a:rPr>
+              <a:t>Does the NAV move?</a:t>
+            </a:r>
+          </a:p>
+          <a:p>
+            <a:pPr algn="l">
+              <a:spcBef>
+                <a:spcPts val="600"/>
+              </a:spcBef>
+            </a:pPr>
+            <a:r>
+              <a:rPr sz="1200" b="0">
+                <a:solidFill>
+                  <a:srgbClr val="C9D6EE"/>
+                </a:solidFill>
+              </a:rPr>
+              <a:t>No. Money and units leave together, so the NAV stays ₹45.8920. If it is missed, the fund owes ₹9,17,840 that its books do not show.</a:t>
+            </a:r>
+          </a:p>
+        </p:txBody>
+      </p:sp>
+      <p:sp>
+        <p:nvSpPr>
+          <p:cNvPr id="23" name="Rectangle 22"/>
+          <p:cNvSpPr/>
+          <p:nvPr/>
+        </p:nvSpPr>
+        <p:spPr>
+          <a:xfrm>
+            <a:off x="548640" y="5760720"/>
+            <a:ext cx="11091672" cy="603504"/>
+          </a:xfrm>
+          <a:prstGeom prst="rect">
+            <a:avLst/>
+          </a:prstGeom>
+          <a:solidFill>
+            <a:srgbClr val="0F2145"/>
+          </a:solidFill>
+          <a:ln>
+            <a:noFill/>
+          </a:ln>
+          <a:effectLst/>
+        </p:spPr>
+        <p:style>
+          <a:lnRef idx="1">
+            <a:schemeClr val="accent1"/>
+          </a:lnRef>
+          <a:fillRef idx="3">
+            <a:schemeClr val="accent1"/>
+          </a:fillRef>
+          <a:effectRef idx="2">
+            <a:schemeClr val="accent1"/>
+          </a:effectRef>
+          <a:fontRef idx="minor">
+            <a:schemeClr val="lt1"/>
+          </a:fontRef>
+        </p:style>
+        <p:txBody>
+          <a:bodyPr rtlCol="0" anchor="ctr"/>
+          <a:lstStyle/>
+          <a:p>
+            <a:pPr algn="ctr"/>
+          </a:p>
+        </p:txBody>
+      </p:sp>
+      <p:sp>
+        <p:nvSpPr>
+          <p:cNvPr id="24" name="Rectangle 23"/>
+          <p:cNvSpPr/>
+          <p:nvPr/>
+        </p:nvSpPr>
+        <p:spPr>
+          <a:xfrm>
+            <a:off x="548640" y="5760720"/>
+            <a:ext cx="64008" cy="603504"/>
+          </a:xfrm>
+          <a:prstGeom prst="rect">
+            <a:avLst/>
+          </a:prstGeom>
+          <a:solidFill>
+            <a:srgbClr val="C9A227"/>
+          </a:solidFill>
+          <a:ln>
+            <a:noFill/>
+          </a:ln>
+          <a:effectLst/>
+        </p:spPr>
+        <p:style>
+          <a:lnRef idx="1">
+            <a:schemeClr val="accent1"/>
+          </a:lnRef>
+          <a:fillRef idx="3">
+            <a:schemeClr val="accent1"/>
+          </a:fillRef>
+          <a:effectRef idx="2">
+            <a:schemeClr val="accent1"/>
+          </a:effectRef>
+          <a:fontRef idx="minor">
+            <a:schemeClr val="lt1"/>
+          </a:fontRef>
+        </p:style>
+        <p:txBody>
+          <a:bodyPr rtlCol="0" anchor="ctr"/>
+          <a:lstStyle/>
+          <a:p>
+            <a:pPr algn="ctr"/>
+          </a:p>
+        </p:txBody>
+      </p:sp>
+      <p:sp>
+        <p:nvSpPr>
+          <p:cNvPr id="25" name="TextBox 24"/>
+          <p:cNvSpPr txBox="1"/>
+          <p:nvPr/>
+        </p:nvSpPr>
+        <p:spPr>
+          <a:xfrm>
+            <a:off x="822960" y="5760720"/>
+            <a:ext cx="10543032" cy="603504"/>
+          </a:xfrm>
+          <a:prstGeom prst="rect">
+            <a:avLst/>
+          </a:prstGeom>
+          <a:noFill/>
+        </p:spPr>
+        <p:txBody>
+          <a:bodyPr wrap="square" anchor="ctr" lIns="0" rIns="0" tIns="0" bIns="0">
+            <a:spAutoFit/>
+          </a:bodyPr>
+          <a:lstStyle/>
+          <a:p>
+            <a:pPr algn="l"/>
+            <a:r>
+              <a:rPr sz="1200" b="1">
+                <a:solidFill>
+                  <a:srgbClr val="C9A227"/>
+                </a:solidFill>
+              </a:rPr>
+              <a:t>How to spot it:  </a:t>
+            </a:r>
+            <a:r>
+              <a:rPr sz="1200" b="0">
+                <a:solidFill>
+                  <a:srgbClr val="FFFFFF"/>
+                </a:solidFill>
+              </a:rPr>
+              <a:t>fewer units at the transfer agent means a redemption is not booked. More units means a subscription is not booked.</a:t>
+            </a:r>
+          </a:p>
+        </p:txBody>
+      </p:sp>
+      <p:sp>
+        <p:nvSpPr>
+          <p:cNvPr id="26" name="TextBox 25"/>
+          <p:cNvSpPr txBox="1"/>
+          <p:nvPr/>
+        </p:nvSpPr>
+        <p:spPr>
+          <a:xfrm>
+            <a:off x="548640" y="6473952"/>
+            <a:ext cx="7315200" cy="228600"/>
+          </a:xfrm>
+          <a:prstGeom prst="rect">
+            <a:avLst/>
+          </a:prstGeom>
+          <a:noFill/>
+        </p:spPr>
+        <p:txBody>
+          <a:bodyPr wrap="square" anchor="t" lIns="0" rIns="0" tIns="0" bIns="0">
+            <a:spAutoFit/>
+          </a:bodyPr>
+          <a:lstStyle/>
+          <a:p>
+            <a:pPr algn="l"/>
+            <a:r>
+              <a:rPr sz="800" b="0">
+                <a:solidFill>
+                  <a:srgbClr val="5D6B7E"/>
+                </a:solidFill>
+              </a:rPr>
+              <a:t>ISBMS · PGDM 2025–27 · AGENTIC AI &amp; ADVANCED ANALYTICS IN FINANCE</a:t>
+            </a:r>
+          </a:p>
+        </p:txBody>
+      </p:sp>
+      <p:sp>
+        <p:nvSpPr>
+          <p:cNvPr id="27" name="TextBox 26"/>
+          <p:cNvSpPr txBox="1"/>
+          <p:nvPr/>
+        </p:nvSpPr>
+        <p:spPr>
+          <a:xfrm>
+            <a:off x="9262872" y="6473952"/>
+            <a:ext cx="2377440" cy="228600"/>
+          </a:xfrm>
+          <a:prstGeom prst="rect">
+            <a:avLst/>
+          </a:prstGeom>
+          <a:noFill/>
+        </p:spPr>
+        <p:txBody>
+          <a:bodyPr wrap="square" anchor="t" lIns="0" rIns="0" tIns="0" bIns="0">
+            <a:spAutoFit/>
+          </a:bodyPr>
+          <a:lstStyle/>
+          <a:p>
+            <a:pPr algn="r"/>
+            <a:r>
+              <a:rPr sz="800" b="0">
+                <a:solidFill>
+                  <a:srgbClr val="5D6B7E"/>
+                </a:solidFill>
+              </a:rPr>
+              <a:t>MODULE 8  ·  08</a:t>
+            </a:r>
+          </a:p>
+        </p:txBody>
+      </p:sp>
+    </p:spTree>
+  </p:cSld>
+  <p:clrMapOvr>
+    <a:masterClrMapping/>
+  </p:clrMapOvr>
+</p:sld>
+</file>
+
+<file path=ppt/slides/slide11.xml><?xml version="1.0" encoding="utf-8"?>
+<p:sld xmlns:a="http://schemas.openxmlformats.org/drawingml/2006/main" xmlns:p="http://schemas.openxmlformats.org/presentationml/2006/main" xmlns:r="http://schemas.openxmlformats.org/officeDocument/2006/relationships">
+  <p:cSld>
+    <p:bg>
+      <p:bgPr>
+        <a:solidFill>
+          <a:srgbClr val="F7F8FA"/>
+        </a:solidFill>
+        <a:effectLst/>
+      </p:bgPr>
+    </p:bg>
+    <p:spTree>
+      <p:nvGrpSpPr>
+        <p:cNvPr id="1" name=""/>
+        <p:cNvGrpSpPr/>
+        <p:nvPr/>
+      </p:nvGrpSpPr>
+      <p:grpSpPr/>
+      <p:sp>
+        <p:nvSpPr>
+          <p:cNvPr id="2" name="Rectangle 1"/>
+          <p:cNvSpPr/>
+          <p:nvPr/>
+        </p:nvSpPr>
+        <p:spPr>
+          <a:xfrm>
+            <a:off x="548640" y="402336"/>
+            <a:ext cx="118872" cy="118872"/>
+          </a:xfrm>
+          <a:prstGeom prst="rect">
+            <a:avLst/>
+          </a:prstGeom>
+          <a:solidFill>
+            <a:srgbClr val="C9A227"/>
+          </a:solidFill>
+          <a:ln>
+            <a:noFill/>
+          </a:ln>
+          <a:effectLst/>
+        </p:spPr>
+        <p:style>
+          <a:lnRef idx="1">
+            <a:schemeClr val="accent1"/>
+          </a:lnRef>
+          <a:fillRef idx="3">
+            <a:schemeClr val="accent1"/>
+          </a:fillRef>
+          <a:effectRef idx="2">
+            <a:schemeClr val="accent1"/>
+          </a:effectRef>
+          <a:fontRef idx="minor">
+            <a:schemeClr val="lt1"/>
+          </a:fontRef>
+        </p:style>
+        <p:txBody>
+          <a:bodyPr rtlCol="0" anchor="ctr"/>
+          <a:lstStyle/>
+          <a:p>
+            <a:pPr algn="ctr"/>
+          </a:p>
+        </p:txBody>
+      </p:sp>
+      <p:sp>
+        <p:nvSpPr>
+          <p:cNvPr id="3" name="TextBox 2"/>
+          <p:cNvSpPr txBox="1"/>
+          <p:nvPr/>
+        </p:nvSpPr>
+        <p:spPr>
+          <a:xfrm>
+            <a:off x="786384" y="310896"/>
+            <a:ext cx="10817352" cy="274320"/>
+          </a:xfrm>
+          <a:prstGeom prst="rect">
+            <a:avLst/>
+          </a:prstGeom>
+          <a:noFill/>
+        </p:spPr>
+        <p:txBody>
+          <a:bodyPr wrap="square" anchor="t" lIns="0" rIns="0" tIns="0" bIns="0">
+            <a:spAutoFit/>
+          </a:bodyPr>
+          <a:lstStyle/>
+          <a:p>
+            <a:pPr algn="l"/>
+            <a:r>
+              <a:rPr sz="1100" b="1">
+                <a:solidFill>
+                  <a:srgbClr val="C9A227"/>
+                </a:solidFill>
+              </a:rPr>
+              <a:t>HOUR 2 · THE ACCOUNTING SKILL DEMO</a:t>
+            </a:r>
+          </a:p>
+        </p:txBody>
+      </p:sp>
+      <p:sp>
+        <p:nvSpPr>
+          <p:cNvPr id="4" name="TextBox 3"/>
+          <p:cNvSpPr txBox="1"/>
+          <p:nvPr/>
+        </p:nvSpPr>
+        <p:spPr>
+          <a:xfrm>
+            <a:off x="548640" y="621792"/>
+            <a:ext cx="11091672" cy="731520"/>
+          </a:xfrm>
+          <a:prstGeom prst="rect">
+            <a:avLst/>
+          </a:prstGeom>
+          <a:noFill/>
+        </p:spPr>
+        <p:txBody>
+          <a:bodyPr wrap="square" anchor="t" lIns="0" rIns="0" tIns="0" bIns="0">
+            <a:spAutoFit/>
+          </a:bodyPr>
+          <a:lstStyle/>
+          <a:p>
+            <a:pPr algn="l"/>
+            <a:r>
+              <a:rPr sz="2900" b="1">
+                <a:solidFill>
+                  <a:srgbClr val="0F2145"/>
+                </a:solidFill>
+                <a:latin typeface="Georgia"/>
+              </a:rPr>
+              <a:t>Claude's reconciliation skill does the checking</a:t>
+            </a:r>
+          </a:p>
+        </p:txBody>
+      </p:sp>
+      <p:sp>
+        <p:nvSpPr>
+          <p:cNvPr id="5" name="Rectangle 4"/>
+          <p:cNvSpPr/>
+          <p:nvPr/>
+        </p:nvSpPr>
+        <p:spPr>
+          <a:xfrm>
+            <a:off x="548640" y="1463040"/>
+            <a:ext cx="3593592" cy="2002536"/>
+          </a:xfrm>
+          <a:prstGeom prst="rect">
+            <a:avLst/>
+          </a:prstGeom>
+          <a:solidFill>
+            <a:srgbClr val="FFFFFF"/>
+          </a:solidFill>
+          <a:ln>
+            <a:noFill/>
+          </a:ln>
+          <a:effectLst/>
+        </p:spPr>
+        <p:style>
+          <a:lnRef idx="1">
+            <a:schemeClr val="accent1"/>
+          </a:lnRef>
+          <a:fillRef idx="3">
+            <a:schemeClr val="accent1"/>
+          </a:fillRef>
+          <a:effectRef idx="2">
+            <a:schemeClr val="accent1"/>
+          </a:effectRef>
+          <a:fontRef idx="minor">
+            <a:schemeClr val="lt1"/>
+          </a:fontRef>
+        </p:style>
+        <p:txBody>
+          <a:bodyPr rtlCol="0" anchor="ctr"/>
+          <a:lstStyle/>
+          <a:p>
+            <a:pPr algn="ctr"/>
+          </a:p>
+        </p:txBody>
+      </p:sp>
+      <p:sp>
+        <p:nvSpPr>
+          <p:cNvPr id="6" name="Rectangle 5"/>
+          <p:cNvSpPr/>
+          <p:nvPr/>
+        </p:nvSpPr>
+        <p:spPr>
+          <a:xfrm>
+            <a:off x="548640" y="1463040"/>
+            <a:ext cx="3593592" cy="45720"/>
+          </a:xfrm>
+          <a:prstGeom prst="rect">
+            <a:avLst/>
+          </a:prstGeom>
+          <a:solidFill>
+            <a:srgbClr val="C9A227"/>
+          </a:solidFill>
+          <a:ln>
+            <a:noFill/>
+          </a:ln>
+          <a:effectLst/>
+        </p:spPr>
+        <p:style>
+          <a:lnRef idx="1">
+            <a:schemeClr val="accent1"/>
+          </a:lnRef>
+          <a:fillRef idx="3">
+            <a:schemeClr val="accent1"/>
+          </a:fillRef>
+          <a:effectRef idx="2">
+            <a:schemeClr val="accent1"/>
+          </a:effectRef>
+          <a:fontRef idx="minor">
+            <a:schemeClr val="lt1"/>
+          </a:fontRef>
+        </p:style>
+        <p:txBody>
+          <a:bodyPr rtlCol="0" anchor="ctr"/>
+          <a:lstStyle/>
+          <a:p>
+            <a:pPr algn="ctr"/>
+          </a:p>
+        </p:txBody>
+      </p:sp>
+      <p:sp>
+        <p:nvSpPr>
+          <p:cNvPr id="7" name="TextBox 6"/>
+          <p:cNvSpPr txBox="1"/>
+          <p:nvPr/>
+        </p:nvSpPr>
+        <p:spPr>
+          <a:xfrm>
+            <a:off x="804672" y="1664208"/>
+            <a:ext cx="3081528" cy="1728216"/>
+          </a:xfrm>
+          <a:prstGeom prst="rect">
+            <a:avLst/>
+          </a:prstGeom>
+          <a:noFill/>
+        </p:spPr>
+        <p:txBody>
+          <a:bodyPr wrap="square" anchor="t" lIns="0" rIns="0" tIns="0" bIns="0">
+            <a:spAutoFit/>
+          </a:bodyPr>
+          <a:lstStyle/>
+          <a:p>
+            <a:pPr algn="l"/>
+            <a:r>
+              <a:rPr sz="1000" b="1">
+                <a:solidFill>
+                  <a:srgbClr val="3A5C9E"/>
+                </a:solidFill>
+              </a:rPr>
+              <a:t>WHAT A SKILL IS</a:t>
+            </a:r>
+          </a:p>
+          <a:p>
+            <a:pPr algn="l">
+              <a:spcBef>
+                <a:spcPts val="400"/>
+              </a:spcBef>
+            </a:pPr>
+            <a:r>
+              <a:rPr sz="1600" b="1">
+                <a:solidFill>
+                  <a:srgbClr val="0F2145"/>
+                </a:solidFill>
+                <a:latin typeface="Georgia"/>
+              </a:rPr>
+              <a:t>Saved instructions for one job</a:t>
+            </a:r>
+          </a:p>
+          <a:p>
+            <a:pPr algn="l">
+              <a:spcBef>
+                <a:spcPts val="600"/>
+              </a:spcBef>
+            </a:pPr>
+            <a:r>
+              <a:rPr sz="1200" b="0">
+                <a:solidFill>
+                  <a:srgbClr val="1B2A41"/>
+                </a:solidFill>
+              </a:rPr>
+              <a:t>A skill tells Claude how accountants do a task. The finance reconciliation skill knows how a reconciliation is done.</a:t>
+            </a:r>
+          </a:p>
+        </p:txBody>
+      </p:sp>
+      <p:sp>
+        <p:nvSpPr>
+          <p:cNvPr id="8" name="Rectangle 7"/>
+          <p:cNvSpPr/>
+          <p:nvPr/>
+        </p:nvSpPr>
+        <p:spPr>
+          <a:xfrm>
+            <a:off x="4297680" y="1463040"/>
+            <a:ext cx="3593592" cy="2002536"/>
+          </a:xfrm>
+          <a:prstGeom prst="rect">
+            <a:avLst/>
+          </a:prstGeom>
+          <a:solidFill>
+            <a:srgbClr val="FFFFFF"/>
+          </a:solidFill>
+          <a:ln>
+            <a:noFill/>
+          </a:ln>
+          <a:effectLst/>
+        </p:spPr>
+        <p:style>
+          <a:lnRef idx="1">
+            <a:schemeClr val="accent1"/>
+          </a:lnRef>
+          <a:fillRef idx="3">
+            <a:schemeClr val="accent1"/>
+          </a:fillRef>
+          <a:effectRef idx="2">
+            <a:schemeClr val="accent1"/>
+          </a:effectRef>
+          <a:fontRef idx="minor">
+            <a:schemeClr val="lt1"/>
+          </a:fontRef>
+        </p:style>
+        <p:txBody>
+          <a:bodyPr rtlCol="0" anchor="ctr"/>
+          <a:lstStyle/>
+          <a:p>
+            <a:pPr algn="ctr"/>
+          </a:p>
+        </p:txBody>
+      </p:sp>
+      <p:sp>
+        <p:nvSpPr>
+          <p:cNvPr id="9" name="Rectangle 8"/>
+          <p:cNvSpPr/>
+          <p:nvPr/>
+        </p:nvSpPr>
+        <p:spPr>
+          <a:xfrm>
+            <a:off x="4297680" y="1463040"/>
+            <a:ext cx="3593592" cy="45720"/>
+          </a:xfrm>
+          <a:prstGeom prst="rect">
+            <a:avLst/>
+          </a:prstGeom>
+          <a:solidFill>
+            <a:srgbClr val="C9A227"/>
+          </a:solidFill>
+          <a:ln>
+            <a:noFill/>
+          </a:ln>
+          <a:effectLst/>
+        </p:spPr>
+        <p:style>
+          <a:lnRef idx="1">
+            <a:schemeClr val="accent1"/>
+          </a:lnRef>
+          <a:fillRef idx="3">
+            <a:schemeClr val="accent1"/>
+          </a:fillRef>
+          <a:effectRef idx="2">
+            <a:schemeClr val="accent1"/>
+          </a:effectRef>
+          <a:fontRef idx="minor">
+            <a:schemeClr val="lt1"/>
+          </a:fontRef>
+        </p:style>
+        <p:txBody>
+          <a:bodyPr rtlCol="0" anchor="ctr"/>
+          <a:lstStyle/>
+          <a:p>
+            <a:pPr algn="ctr"/>
+          </a:p>
+        </p:txBody>
+      </p:sp>
+      <p:sp>
+        <p:nvSpPr>
+          <p:cNvPr id="10" name="TextBox 9"/>
+          <p:cNvSpPr txBox="1"/>
+          <p:nvPr/>
+        </p:nvSpPr>
+        <p:spPr>
+          <a:xfrm>
+            <a:off x="4553712" y="1664208"/>
+            <a:ext cx="3081528" cy="1728216"/>
+          </a:xfrm>
+          <a:prstGeom prst="rect">
+            <a:avLst/>
+          </a:prstGeom>
+          <a:noFill/>
+        </p:spPr>
+        <p:txBody>
+          <a:bodyPr wrap="square" anchor="t" lIns="0" rIns="0" tIns="0" bIns="0">
+            <a:spAutoFit/>
+          </a:bodyPr>
+          <a:lstStyle/>
+          <a:p>
+            <a:pPr algn="l"/>
+            <a:r>
+              <a:rPr sz="1000" b="1">
+                <a:solidFill>
+                  <a:srgbClr val="3A5C9E"/>
+                </a:solidFill>
+              </a:rPr>
+              <a:t>WHAT IT DOES · 1</a:t>
+            </a:r>
+          </a:p>
+          <a:p>
+            <a:pPr algn="l">
+              <a:spcBef>
+                <a:spcPts val="400"/>
+              </a:spcBef>
+            </a:pPr>
+            <a:r>
+              <a:rPr sz="1600" b="1">
+                <a:solidFill>
+                  <a:srgbClr val="0F2145"/>
+                </a:solidFill>
+                <a:latin typeface="Georgia"/>
+              </a:rPr>
+              <a:t>Compares two records</a:t>
+            </a:r>
+          </a:p>
+          <a:p>
+            <a:pPr algn="l">
+              <a:spcBef>
+                <a:spcPts val="600"/>
+              </a:spcBef>
+            </a:pPr>
+            <a:r>
+              <a:rPr sz="1200" b="0">
+                <a:solidFill>
+                  <a:srgbClr val="1B2A41"/>
+                </a:solidFill>
+              </a:rPr>
+              <a:t>It lines up the fund's books against the custodian and the transfer agent.</a:t>
+            </a:r>
+          </a:p>
+        </p:txBody>
+      </p:sp>
+      <p:sp>
+        <p:nvSpPr>
+          <p:cNvPr id="11" name="Rectangle 10"/>
+          <p:cNvSpPr/>
+          <p:nvPr/>
+        </p:nvSpPr>
+        <p:spPr>
+          <a:xfrm>
+            <a:off x="8046720" y="1463040"/>
+            <a:ext cx="3593592" cy="2002536"/>
+          </a:xfrm>
+          <a:prstGeom prst="rect">
+            <a:avLst/>
+          </a:prstGeom>
+          <a:solidFill>
+            <a:srgbClr val="FFFFFF"/>
+          </a:solidFill>
+          <a:ln>
+            <a:noFill/>
+          </a:ln>
+          <a:effectLst/>
+        </p:spPr>
+        <p:style>
+          <a:lnRef idx="1">
+            <a:schemeClr val="accent1"/>
+          </a:lnRef>
+          <a:fillRef idx="3">
+            <a:schemeClr val="accent1"/>
+          </a:fillRef>
+          <a:effectRef idx="2">
+            <a:schemeClr val="accent1"/>
+          </a:effectRef>
+          <a:fontRef idx="minor">
+            <a:schemeClr val="lt1"/>
+          </a:fontRef>
+        </p:style>
+        <p:txBody>
+          <a:bodyPr rtlCol="0" anchor="ctr"/>
+          <a:lstStyle/>
+          <a:p>
+            <a:pPr algn="ctr"/>
+          </a:p>
+        </p:txBody>
+      </p:sp>
+      <p:sp>
+        <p:nvSpPr>
+          <p:cNvPr id="12" name="Rectangle 11"/>
+          <p:cNvSpPr/>
+          <p:nvPr/>
+        </p:nvSpPr>
+        <p:spPr>
+          <a:xfrm>
+            <a:off x="8046720" y="1463040"/>
+            <a:ext cx="3593592" cy="45720"/>
+          </a:xfrm>
+          <a:prstGeom prst="rect">
+            <a:avLst/>
+          </a:prstGeom>
+          <a:solidFill>
+            <a:srgbClr val="C9A227"/>
+          </a:solidFill>
+          <a:ln>
+            <a:noFill/>
+          </a:ln>
+          <a:effectLst/>
+        </p:spPr>
+        <p:style>
+          <a:lnRef idx="1">
+            <a:schemeClr val="accent1"/>
+          </a:lnRef>
+          <a:fillRef idx="3">
+            <a:schemeClr val="accent1"/>
+          </a:fillRef>
+          <a:effectRef idx="2">
+            <a:schemeClr val="accent1"/>
+          </a:effectRef>
+          <a:fontRef idx="minor">
+            <a:schemeClr val="lt1"/>
+          </a:fontRef>
+        </p:style>
+        <p:txBody>
+          <a:bodyPr rtlCol="0" anchor="ctr"/>
+          <a:lstStyle/>
+          <a:p>
+            <a:pPr algn="ctr"/>
+          </a:p>
+        </p:txBody>
+      </p:sp>
+      <p:sp>
+        <p:nvSpPr>
+          <p:cNvPr id="13" name="TextBox 12"/>
+          <p:cNvSpPr txBox="1"/>
+          <p:nvPr/>
+        </p:nvSpPr>
+        <p:spPr>
+          <a:xfrm>
+            <a:off x="8302752" y="1664208"/>
+            <a:ext cx="3081528" cy="1728216"/>
+          </a:xfrm>
+          <a:prstGeom prst="rect">
+            <a:avLst/>
+          </a:prstGeom>
+          <a:noFill/>
+        </p:spPr>
+        <p:txBody>
+          <a:bodyPr wrap="square" anchor="t" lIns="0" rIns="0" tIns="0" bIns="0">
+            <a:spAutoFit/>
+          </a:bodyPr>
+          <a:lstStyle/>
+          <a:p>
+            <a:pPr algn="l"/>
+            <a:r>
+              <a:rPr sz="1000" b="1">
+                <a:solidFill>
+                  <a:srgbClr val="3A5C9E"/>
+                </a:solidFill>
+              </a:rPr>
+              <a:t>WHAT IT DOES · 2</a:t>
+            </a:r>
+          </a:p>
+          <a:p>
+            <a:pPr algn="l">
+              <a:spcBef>
+                <a:spcPts val="400"/>
+              </a:spcBef>
+            </a:pPr>
+            <a:r>
+              <a:rPr sz="1600" b="1">
+                <a:solidFill>
+                  <a:srgbClr val="0F2145"/>
+                </a:solidFill>
+                <a:latin typeface="Georgia"/>
+              </a:rPr>
+              <a:t>Sorts every difference</a:t>
+            </a:r>
+          </a:p>
+          <a:p>
+            <a:pPr algn="l">
+              <a:spcBef>
+                <a:spcPts val="600"/>
+              </a:spcBef>
+            </a:pPr>
+            <a:r>
+              <a:rPr sz="1200" b="0">
+                <a:solidFill>
+                  <a:srgbClr val="1B2A41"/>
+                </a:solidFill>
+              </a:rPr>
+              <a:t>Timing, error or missing entry. It says how old each break is.</a:t>
+            </a:r>
+          </a:p>
+        </p:txBody>
+      </p:sp>
+      <p:sp>
+        <p:nvSpPr>
+          <p:cNvPr id="14" name="Rectangle 13"/>
+          <p:cNvSpPr/>
+          <p:nvPr/>
+        </p:nvSpPr>
+        <p:spPr>
+          <a:xfrm>
+            <a:off x="548640" y="3621024"/>
+            <a:ext cx="3593592" cy="2002536"/>
+          </a:xfrm>
+          <a:prstGeom prst="rect">
+            <a:avLst/>
+          </a:prstGeom>
+          <a:solidFill>
+            <a:srgbClr val="FFFFFF"/>
+          </a:solidFill>
+          <a:ln>
+            <a:noFill/>
+          </a:ln>
+          <a:effectLst/>
+        </p:spPr>
+        <p:style>
+          <a:lnRef idx="1">
+            <a:schemeClr val="accent1"/>
+          </a:lnRef>
+          <a:fillRef idx="3">
+            <a:schemeClr val="accent1"/>
+          </a:fillRef>
+          <a:effectRef idx="2">
+            <a:schemeClr val="accent1"/>
+          </a:effectRef>
+          <a:fontRef idx="minor">
+            <a:schemeClr val="lt1"/>
+          </a:fontRef>
+        </p:style>
+        <p:txBody>
+          <a:bodyPr rtlCol="0" anchor="ctr"/>
+          <a:lstStyle/>
+          <a:p>
+            <a:pPr algn="ctr"/>
+          </a:p>
+        </p:txBody>
+      </p:sp>
+      <p:sp>
+        <p:nvSpPr>
+          <p:cNvPr id="15" name="Rectangle 14"/>
+          <p:cNvSpPr/>
+          <p:nvPr/>
+        </p:nvSpPr>
+        <p:spPr>
+          <a:xfrm>
+            <a:off x="548640" y="3621024"/>
+            <a:ext cx="3593592" cy="45720"/>
+          </a:xfrm>
+          <a:prstGeom prst="rect">
+            <a:avLst/>
+          </a:prstGeom>
+          <a:solidFill>
+            <a:srgbClr val="C9A227"/>
+          </a:solidFill>
+          <a:ln>
+            <a:noFill/>
+          </a:ln>
+          <a:effectLst/>
+        </p:spPr>
+        <p:style>
+          <a:lnRef idx="1">
+            <a:schemeClr val="accent1"/>
+          </a:lnRef>
+          <a:fillRef idx="3">
+            <a:schemeClr val="accent1"/>
+          </a:fillRef>
+          <a:effectRef idx="2">
+            <a:schemeClr val="accent1"/>
+          </a:effectRef>
+          <a:fontRef idx="minor">
+            <a:schemeClr val="lt1"/>
+          </a:fontRef>
+        </p:style>
+        <p:txBody>
+          <a:bodyPr rtlCol="0" anchor="ctr"/>
+          <a:lstStyle/>
+          <a:p>
+            <a:pPr algn="ctr"/>
+          </a:p>
+        </p:txBody>
+      </p:sp>
+      <p:sp>
+        <p:nvSpPr>
+          <p:cNvPr id="16" name="TextBox 15"/>
+          <p:cNvSpPr txBox="1"/>
+          <p:nvPr/>
+        </p:nvSpPr>
+        <p:spPr>
+          <a:xfrm>
+            <a:off x="804672" y="3822192"/>
+            <a:ext cx="3081528" cy="1728216"/>
+          </a:xfrm>
+          <a:prstGeom prst="rect">
+            <a:avLst/>
+          </a:prstGeom>
+          <a:noFill/>
+        </p:spPr>
+        <p:txBody>
+          <a:bodyPr wrap="square" anchor="t" lIns="0" rIns="0" tIns="0" bIns="0">
+            <a:spAutoFit/>
+          </a:bodyPr>
+          <a:lstStyle/>
+          <a:p>
+            <a:pPr algn="l"/>
+            <a:r>
+              <a:rPr sz="1000" b="1">
+                <a:solidFill>
+                  <a:srgbClr val="3A5C9E"/>
+                </a:solidFill>
+              </a:rPr>
+              <a:t>WHAT IT DOES · 3</a:t>
+            </a:r>
+          </a:p>
+          <a:p>
+            <a:pPr algn="l">
+              <a:spcBef>
+                <a:spcPts val="400"/>
+              </a:spcBef>
+            </a:pPr>
+            <a:r>
+              <a:rPr sz="1600" b="1">
+                <a:solidFill>
+                  <a:srgbClr val="0F2145"/>
+                </a:solidFill>
+                <a:latin typeface="Georgia"/>
+              </a:rPr>
+              <a:t>Suggests the fix</a:t>
+            </a:r>
+          </a:p>
+          <a:p>
+            <a:pPr algn="l">
+              <a:spcBef>
+                <a:spcPts val="600"/>
+              </a:spcBef>
+            </a:pPr>
+            <a:r>
+              <a:rPr sz="1200" b="0">
+                <a:solidFill>
+                  <a:srgbClr val="1B2A41"/>
+                </a:solidFill>
+              </a:rPr>
+              <a:t>It proposes the correcting entry. The journal-entry skill drafts it.</a:t>
+            </a:r>
+          </a:p>
+        </p:txBody>
+      </p:sp>
+      <p:sp>
+        <p:nvSpPr>
+          <p:cNvPr id="17" name="Rectangle 16"/>
+          <p:cNvSpPr/>
+          <p:nvPr/>
+        </p:nvSpPr>
+        <p:spPr>
+          <a:xfrm>
+            <a:off x="4297680" y="3621024"/>
+            <a:ext cx="3593592" cy="2002536"/>
+          </a:xfrm>
+          <a:prstGeom prst="rect">
+            <a:avLst/>
+          </a:prstGeom>
+          <a:solidFill>
+            <a:srgbClr val="FFFFFF"/>
+          </a:solidFill>
+          <a:ln>
+            <a:noFill/>
+          </a:ln>
+          <a:effectLst/>
+        </p:spPr>
+        <p:style>
+          <a:lnRef idx="1">
+            <a:schemeClr val="accent1"/>
+          </a:lnRef>
+          <a:fillRef idx="3">
+            <a:schemeClr val="accent1"/>
+          </a:fillRef>
+          <a:effectRef idx="2">
+            <a:schemeClr val="accent1"/>
+          </a:effectRef>
+          <a:fontRef idx="minor">
+            <a:schemeClr val="lt1"/>
+          </a:fontRef>
+        </p:style>
+        <p:txBody>
+          <a:bodyPr rtlCol="0" anchor="ctr"/>
+          <a:lstStyle/>
+          <a:p>
+            <a:pPr algn="ctr"/>
+          </a:p>
+        </p:txBody>
+      </p:sp>
+      <p:sp>
+        <p:nvSpPr>
+          <p:cNvPr id="18" name="Rectangle 17"/>
+          <p:cNvSpPr/>
+          <p:nvPr/>
+        </p:nvSpPr>
+        <p:spPr>
+          <a:xfrm>
+            <a:off x="4297680" y="3621024"/>
+            <a:ext cx="3593592" cy="45720"/>
+          </a:xfrm>
+          <a:prstGeom prst="rect">
+            <a:avLst/>
+          </a:prstGeom>
+          <a:solidFill>
+            <a:srgbClr val="C9A227"/>
+          </a:solidFill>
+          <a:ln>
+            <a:noFill/>
+          </a:ln>
+          <a:effectLst/>
+        </p:spPr>
+        <p:style>
+          <a:lnRef idx="1">
+            <a:schemeClr val="accent1"/>
+          </a:lnRef>
+          <a:fillRef idx="3">
+            <a:schemeClr val="accent1"/>
+          </a:fillRef>
+          <a:effectRef idx="2">
+            <a:schemeClr val="accent1"/>
+          </a:effectRef>
+          <a:fontRef idx="minor">
+            <a:schemeClr val="lt1"/>
+          </a:fontRef>
+        </p:style>
+        <p:txBody>
+          <a:bodyPr rtlCol="0" anchor="ctr"/>
+          <a:lstStyle/>
+          <a:p>
+            <a:pPr algn="ctr"/>
+          </a:p>
+        </p:txBody>
+      </p:sp>
+      <p:sp>
+        <p:nvSpPr>
+          <p:cNvPr id="19" name="TextBox 18"/>
+          <p:cNvSpPr txBox="1"/>
+          <p:nvPr/>
+        </p:nvSpPr>
+        <p:spPr>
+          <a:xfrm>
+            <a:off x="4553712" y="3822192"/>
+            <a:ext cx="3081528" cy="1728216"/>
+          </a:xfrm>
+          <a:prstGeom prst="rect">
+            <a:avLst/>
+          </a:prstGeom>
+          <a:noFill/>
+        </p:spPr>
+        <p:txBody>
+          <a:bodyPr wrap="square" anchor="t" lIns="0" rIns="0" tIns="0" bIns="0">
+            <a:spAutoFit/>
+          </a:bodyPr>
+          <a:lstStyle/>
+          <a:p>
+            <a:pPr algn="l"/>
+            <a:r>
+              <a:rPr sz="1000" b="1">
+                <a:solidFill>
+                  <a:srgbClr val="3A5C9E"/>
+                </a:solidFill>
+              </a:rPr>
+              <a:t>RELATED SKILL</a:t>
+            </a:r>
+          </a:p>
+          <a:p>
+            <a:pPr algn="l">
+              <a:spcBef>
+                <a:spcPts val="400"/>
+              </a:spcBef>
+            </a:pPr>
+            <a:r>
+              <a:rPr sz="1600" b="1">
+                <a:solidFill>
+                  <a:srgbClr val="0F2145"/>
+                </a:solidFill>
+                <a:latin typeface="Georgia"/>
+              </a:rPr>
+              <a:t>Variance analysis</a:t>
+            </a:r>
+          </a:p>
+          <a:p>
+            <a:pPr algn="l">
+              <a:spcBef>
+                <a:spcPts val="600"/>
+              </a:spcBef>
+            </a:pPr>
+            <a:r>
+              <a:rPr sz="1200" b="0">
+                <a:solidFill>
+                  <a:srgbClr val="1B2A41"/>
+                </a:solidFill>
+              </a:rPr>
+              <a:t>Explains why the NAV moved from yesterday to today.</a:t>
+            </a:r>
+          </a:p>
+        </p:txBody>
+      </p:sp>
+      <p:sp>
+        <p:nvSpPr>
+          <p:cNvPr id="20" name="Rectangle 19"/>
+          <p:cNvSpPr/>
+          <p:nvPr/>
+        </p:nvSpPr>
+        <p:spPr>
+          <a:xfrm>
+            <a:off x="8046720" y="3621024"/>
+            <a:ext cx="3593592" cy="2002536"/>
+          </a:xfrm>
+          <a:prstGeom prst="rect">
+            <a:avLst/>
+          </a:prstGeom>
+          <a:solidFill>
+            <a:srgbClr val="0F2145"/>
+          </a:solidFill>
+          <a:ln>
+            <a:noFill/>
+          </a:ln>
+          <a:effectLst/>
+        </p:spPr>
+        <p:style>
+          <a:lnRef idx="1">
+            <a:schemeClr val="accent1"/>
+          </a:lnRef>
+          <a:fillRef idx="3">
+            <a:schemeClr val="accent1"/>
+          </a:fillRef>
+          <a:effectRef idx="2">
+            <a:schemeClr val="accent1"/>
+          </a:effectRef>
+          <a:fontRef idx="minor">
+            <a:schemeClr val="lt1"/>
+          </a:fontRef>
+        </p:style>
+        <p:txBody>
+          <a:bodyPr rtlCol="0" anchor="ctr"/>
+          <a:lstStyle/>
+          <a:p>
+            <a:pPr algn="ctr"/>
+          </a:p>
+        </p:txBody>
+      </p:sp>
+      <p:sp>
+        <p:nvSpPr>
+          <p:cNvPr id="21" name="Rectangle 20"/>
+          <p:cNvSpPr/>
+          <p:nvPr/>
+        </p:nvSpPr>
+        <p:spPr>
+          <a:xfrm>
+            <a:off x="8046720" y="3621024"/>
+            <a:ext cx="3593592" cy="45720"/>
+          </a:xfrm>
+          <a:prstGeom prst="rect">
+            <a:avLst/>
+          </a:prstGeom>
+          <a:solidFill>
+            <a:srgbClr val="C9A227"/>
+          </a:solidFill>
+          <a:ln>
+            <a:noFill/>
+          </a:ln>
+          <a:effectLst/>
+        </p:spPr>
+        <p:style>
+          <a:lnRef idx="1">
+            <a:schemeClr val="accent1"/>
+          </a:lnRef>
+          <a:fillRef idx="3">
+            <a:schemeClr val="accent1"/>
+          </a:fillRef>
+          <a:effectRef idx="2">
+            <a:schemeClr val="accent1"/>
+          </a:effectRef>
+          <a:fontRef idx="minor">
+            <a:schemeClr val="lt1"/>
+          </a:fontRef>
+        </p:style>
+        <p:txBody>
+          <a:bodyPr rtlCol="0" anchor="ctr"/>
+          <a:lstStyle/>
+          <a:p>
+            <a:pPr algn="ctr"/>
+          </a:p>
+        </p:txBody>
+      </p:sp>
+      <p:sp>
+        <p:nvSpPr>
+          <p:cNvPr id="22" name="TextBox 21"/>
+          <p:cNvSpPr txBox="1"/>
+          <p:nvPr/>
+        </p:nvSpPr>
+        <p:spPr>
+          <a:xfrm>
+            <a:off x="8302752" y="3822192"/>
+            <a:ext cx="3081528" cy="1728216"/>
+          </a:xfrm>
+          <a:prstGeom prst="rect">
+            <a:avLst/>
+          </a:prstGeom>
+          <a:noFill/>
+        </p:spPr>
+        <p:txBody>
+          <a:bodyPr wrap="square" anchor="t" lIns="0" rIns="0" tIns="0" bIns="0">
+            <a:spAutoFit/>
+          </a:bodyPr>
+          <a:lstStyle/>
+          <a:p>
+            <a:pPr algn="l"/>
+            <a:r>
+              <a:rPr sz="1000" b="1">
+                <a:solidFill>
+                  <a:srgbClr val="C9A227"/>
+                </a:solidFill>
+              </a:rPr>
+              <a:t>THE HUMAN</a:t>
+            </a:r>
+          </a:p>
+          <a:p>
+            <a:pPr algn="l">
+              <a:spcBef>
+                <a:spcPts val="400"/>
+              </a:spcBef>
+            </a:pPr>
+            <a:r>
+              <a:rPr sz="1600" b="1">
+                <a:solidFill>
+                  <a:srgbClr val="FFFFFF"/>
+                </a:solidFill>
+                <a:latin typeface="Georgia"/>
+              </a:rPr>
+              <a:t>Reviews and signs</a:t>
+            </a:r>
+          </a:p>
+          <a:p>
+            <a:pPr algn="l">
+              <a:spcBef>
+                <a:spcPts val="600"/>
+              </a:spcBef>
+            </a:pPr>
+            <a:r>
+              <a:rPr sz="1200" b="0">
+                <a:solidFill>
+                  <a:srgbClr val="C9D6EE"/>
+                </a:solidFill>
+              </a:rPr>
+              <a:t>The skill never posts an entry. The fund accountant approves every fix.</a:t>
+            </a:r>
+          </a:p>
+        </p:txBody>
+      </p:sp>
+      <p:sp>
+        <p:nvSpPr>
+          <p:cNvPr id="23" name="Rectangle 22"/>
+          <p:cNvSpPr/>
+          <p:nvPr/>
+        </p:nvSpPr>
+        <p:spPr>
+          <a:xfrm>
+            <a:off x="548640" y="5760720"/>
+            <a:ext cx="11091672" cy="603504"/>
+          </a:xfrm>
+          <a:prstGeom prst="rect">
+            <a:avLst/>
+          </a:prstGeom>
+          <a:solidFill>
+            <a:srgbClr val="0F2145"/>
+          </a:solidFill>
+          <a:ln>
+            <a:noFill/>
+          </a:ln>
+          <a:effectLst/>
+        </p:spPr>
+        <p:style>
+          <a:lnRef idx="1">
+            <a:schemeClr val="accent1"/>
+          </a:lnRef>
+          <a:fillRef idx="3">
+            <a:schemeClr val="accent1"/>
+          </a:fillRef>
+          <a:effectRef idx="2">
+            <a:schemeClr val="accent1"/>
+          </a:effectRef>
+          <a:fontRef idx="minor">
+            <a:schemeClr val="lt1"/>
+          </a:fontRef>
+        </p:style>
+        <p:txBody>
+          <a:bodyPr rtlCol="0" anchor="ctr"/>
+          <a:lstStyle/>
+          <a:p>
+            <a:pPr algn="ctr"/>
+          </a:p>
+        </p:txBody>
+      </p:sp>
+      <p:sp>
+        <p:nvSpPr>
+          <p:cNvPr id="24" name="Rectangle 23"/>
+          <p:cNvSpPr/>
+          <p:nvPr/>
+        </p:nvSpPr>
+        <p:spPr>
+          <a:xfrm>
+            <a:off x="548640" y="5760720"/>
+            <a:ext cx="64008" cy="603504"/>
+          </a:xfrm>
+          <a:prstGeom prst="rect">
+            <a:avLst/>
+          </a:prstGeom>
+          <a:solidFill>
+            <a:srgbClr val="C9A227"/>
+          </a:solidFill>
+          <a:ln>
+            <a:noFill/>
+          </a:ln>
+          <a:effectLst/>
+        </p:spPr>
+        <p:style>
+          <a:lnRef idx="1">
+            <a:schemeClr val="accent1"/>
+          </a:lnRef>
+          <a:fillRef idx="3">
+            <a:schemeClr val="accent1"/>
+          </a:fillRef>
+          <a:effectRef idx="2">
+            <a:schemeClr val="accent1"/>
+          </a:effectRef>
+          <a:fontRef idx="minor">
+            <a:schemeClr val="lt1"/>
+          </a:fontRef>
+        </p:style>
+        <p:txBody>
+          <a:bodyPr rtlCol="0" anchor="ctr"/>
+          <a:lstStyle/>
+          <a:p>
+            <a:pPr algn="ctr"/>
+          </a:p>
+        </p:txBody>
+      </p:sp>
+      <p:sp>
+        <p:nvSpPr>
+          <p:cNvPr id="25" name="TextBox 24"/>
+          <p:cNvSpPr txBox="1"/>
+          <p:nvPr/>
+        </p:nvSpPr>
+        <p:spPr>
+          <a:xfrm>
+            <a:off x="822960" y="5760720"/>
+            <a:ext cx="10543032" cy="603504"/>
+          </a:xfrm>
+          <a:prstGeom prst="rect">
+            <a:avLst/>
+          </a:prstGeom>
+          <a:noFill/>
+        </p:spPr>
+        <p:txBody>
+          <a:bodyPr wrap="square" anchor="ctr" lIns="0" rIns="0" tIns="0" bIns="0">
+            <a:spAutoFit/>
+          </a:bodyPr>
+          <a:lstStyle/>
+          <a:p>
+            <a:pPr algn="l"/>
+            <a:r>
+              <a:rPr sz="1200" b="1">
+                <a:solidFill>
+                  <a:srgbClr val="C9A227"/>
+                </a:solidFill>
+              </a:rPr>
+              <a:t>No subscription?  </a:t>
+            </a:r>
+            <a:r>
+              <a:rPr sz="1200" b="0">
+                <a:solidFill>
+                  <a:srgbClr val="FFFFFF"/>
+                </a:solidFill>
+              </a:rPr>
+              <a:t>the lab does the same steps with a free Python script and any free AI chat.</a:t>
+            </a:r>
+          </a:p>
+        </p:txBody>
+      </p:sp>
+      <p:sp>
+        <p:nvSpPr>
+          <p:cNvPr id="26" name="TextBox 25"/>
+          <p:cNvSpPr txBox="1"/>
+          <p:nvPr/>
+        </p:nvSpPr>
+        <p:spPr>
+          <a:xfrm>
+            <a:off x="548640" y="6473952"/>
+            <a:ext cx="7315200" cy="228600"/>
+          </a:xfrm>
+          <a:prstGeom prst="rect">
+            <a:avLst/>
+          </a:prstGeom>
+          <a:noFill/>
+        </p:spPr>
+        <p:txBody>
+          <a:bodyPr wrap="square" anchor="t" lIns="0" rIns="0" tIns="0" bIns="0">
+            <a:spAutoFit/>
+          </a:bodyPr>
+          <a:lstStyle/>
+          <a:p>
+            <a:pPr algn="l"/>
+            <a:r>
+              <a:rPr sz="800" b="0">
+                <a:solidFill>
+                  <a:srgbClr val="5D6B7E"/>
+                </a:solidFill>
+              </a:rPr>
+              <a:t>ISBMS · PGDM 2025–27 · AGENTIC AI &amp; ADVANCED ANALYTICS IN FINANCE</a:t>
+            </a:r>
+          </a:p>
+        </p:txBody>
+      </p:sp>
+      <p:sp>
+        <p:nvSpPr>
+          <p:cNvPr id="27" name="TextBox 26"/>
+          <p:cNvSpPr txBox="1"/>
+          <p:nvPr/>
+        </p:nvSpPr>
+        <p:spPr>
+          <a:xfrm>
+            <a:off x="9262872" y="6473952"/>
+            <a:ext cx="2377440" cy="228600"/>
+          </a:xfrm>
+          <a:prstGeom prst="rect">
+            <a:avLst/>
+          </a:prstGeom>
+          <a:noFill/>
+        </p:spPr>
+        <p:txBody>
+          <a:bodyPr wrap="square" anchor="t" lIns="0" rIns="0" tIns="0" bIns="0">
+            <a:spAutoFit/>
+          </a:bodyPr>
+          <a:lstStyle/>
+          <a:p>
+            <a:pPr algn="r"/>
+            <a:r>
+              <a:rPr sz="800" b="0">
+                <a:solidFill>
+                  <a:srgbClr val="5D6B7E"/>
+                </a:solidFill>
+              </a:rPr>
+              <a:t>MODULE 8  ·  09</a:t>
+            </a:r>
+          </a:p>
+        </p:txBody>
+      </p:sp>
+    </p:spTree>
+  </p:cSld>
+  <p:clrMapOvr>
+    <a:masterClrMapping/>
+  </p:clrMapOvr>
+</p:sld>
+</file>
+
+<file path=ppt/slides/slide12.xml><?xml version="1.0" encoding="utf-8"?>
+<p:sld xmlns:a="http://schemas.openxmlformats.org/drawingml/2006/main" xmlns:p="http://schemas.openxmlformats.org/presentationml/2006/main" xmlns:r="http://schemas.openxmlformats.org/officeDocument/2006/relationships">
+  <p:cSld>
+    <p:bg>
+      <p:bgPr>
+        <a:solidFill>
+          <a:srgbClr val="F7F8FA"/>
+        </a:solidFill>
+        <a:effectLst/>
+      </p:bgPr>
+    </p:bg>
+    <p:spTree>
+      <p:nvGrpSpPr>
+        <p:cNvPr id="1" name=""/>
+        <p:cNvGrpSpPr/>
+        <p:nvPr/>
+      </p:nvGrpSpPr>
+      <p:grpSpPr/>
+      <p:sp>
+        <p:nvSpPr>
+          <p:cNvPr id="2" name="Rectangle 1"/>
+          <p:cNvSpPr/>
+          <p:nvPr/>
+        </p:nvSpPr>
+        <p:spPr>
+          <a:xfrm>
+            <a:off x="548640" y="402336"/>
+            <a:ext cx="118872" cy="118872"/>
+          </a:xfrm>
+          <a:prstGeom prst="rect">
+            <a:avLst/>
+          </a:prstGeom>
+          <a:solidFill>
+            <a:srgbClr val="C9A227"/>
+          </a:solidFill>
+          <a:ln>
+            <a:noFill/>
+          </a:ln>
+          <a:effectLst/>
+        </p:spPr>
+        <p:style>
+          <a:lnRef idx="1">
+            <a:schemeClr val="accent1"/>
+          </a:lnRef>
+          <a:fillRef idx="3">
+            <a:schemeClr val="accent1"/>
+          </a:fillRef>
+          <a:effectRef idx="2">
+            <a:schemeClr val="accent1"/>
+          </a:effectRef>
+          <a:fontRef idx="minor">
+            <a:schemeClr val="lt1"/>
+          </a:fontRef>
+        </p:style>
+        <p:txBody>
+          <a:bodyPr rtlCol="0" anchor="ctr"/>
+          <a:lstStyle/>
+          <a:p>
+            <a:pPr algn="ctr"/>
+          </a:p>
+        </p:txBody>
+      </p:sp>
+      <p:sp>
+        <p:nvSpPr>
+          <p:cNvPr id="3" name="TextBox 2"/>
+          <p:cNvSpPr txBox="1"/>
+          <p:nvPr/>
+        </p:nvSpPr>
+        <p:spPr>
+          <a:xfrm>
+            <a:off x="786384" y="310896"/>
+            <a:ext cx="10817352" cy="274320"/>
+          </a:xfrm>
+          <a:prstGeom prst="rect">
+            <a:avLst/>
+          </a:prstGeom>
+          <a:noFill/>
+        </p:spPr>
+        <p:txBody>
+          <a:bodyPr wrap="square" anchor="t" lIns="0" rIns="0" tIns="0" bIns="0">
+            <a:spAutoFit/>
+          </a:bodyPr>
+          <a:lstStyle/>
+          <a:p>
+            <a:pPr algn="l"/>
+            <a:r>
+              <a:rPr sz="1100" b="1">
+                <a:solidFill>
+                  <a:srgbClr val="C9A227"/>
+                </a:solidFill>
+              </a:rPr>
+              <a:t>HOUR 2 · USE CASE</a:t>
+            </a:r>
+          </a:p>
+        </p:txBody>
+      </p:sp>
+      <p:sp>
+        <p:nvSpPr>
+          <p:cNvPr id="4" name="TextBox 3"/>
+          <p:cNvSpPr txBox="1"/>
+          <p:nvPr/>
+        </p:nvSpPr>
+        <p:spPr>
+          <a:xfrm>
+            <a:off x="548640" y="621792"/>
+            <a:ext cx="11091672" cy="731520"/>
+          </a:xfrm>
+          <a:prstGeom prst="rect">
+            <a:avLst/>
+          </a:prstGeom>
+          <a:noFill/>
+        </p:spPr>
+        <p:txBody>
+          <a:bodyPr wrap="square" anchor="t" lIns="0" rIns="0" tIns="0" bIns="0">
+            <a:spAutoFit/>
+          </a:bodyPr>
+          <a:lstStyle/>
+          <a:p>
+            <a:pPr algn="l"/>
+            <a:r>
+              <a:rPr sz="2900" b="1">
+                <a:solidFill>
+                  <a:srgbClr val="0F2145"/>
+                </a:solidFill>
+                <a:latin typeface="Georgia"/>
+              </a:rPr>
+              <a:t>Use case: Opus Fund Services, and where Claude fits</a:t>
+            </a:r>
+          </a:p>
+        </p:txBody>
+      </p:sp>
+      <p:sp>
+        <p:nvSpPr>
+          <p:cNvPr id="5" name="Rectangle 4"/>
+          <p:cNvSpPr/>
+          <p:nvPr/>
+        </p:nvSpPr>
+        <p:spPr>
+          <a:xfrm>
+            <a:off x="548640" y="1463040"/>
+            <a:ext cx="3593592" cy="2002536"/>
+          </a:xfrm>
+          <a:prstGeom prst="rect">
+            <a:avLst/>
+          </a:prstGeom>
+          <a:solidFill>
+            <a:srgbClr val="FFFFFF"/>
+          </a:solidFill>
+          <a:ln>
+            <a:noFill/>
+          </a:ln>
+          <a:effectLst/>
+        </p:spPr>
+        <p:style>
+          <a:lnRef idx="1">
+            <a:schemeClr val="accent1"/>
+          </a:lnRef>
+          <a:fillRef idx="3">
+            <a:schemeClr val="accent1"/>
+          </a:fillRef>
+          <a:effectRef idx="2">
+            <a:schemeClr val="accent1"/>
+          </a:effectRef>
+          <a:fontRef idx="minor">
+            <a:schemeClr val="lt1"/>
+          </a:fontRef>
+        </p:style>
+        <p:txBody>
+          <a:bodyPr rtlCol="0" anchor="ctr"/>
+          <a:lstStyle/>
+          <a:p>
+            <a:pPr algn="ctr"/>
+          </a:p>
+        </p:txBody>
+      </p:sp>
+      <p:sp>
+        <p:nvSpPr>
+          <p:cNvPr id="6" name="Rectangle 5"/>
+          <p:cNvSpPr/>
+          <p:nvPr/>
+        </p:nvSpPr>
+        <p:spPr>
+          <a:xfrm>
+            <a:off x="548640" y="1463040"/>
+            <a:ext cx="3593592" cy="45720"/>
+          </a:xfrm>
+          <a:prstGeom prst="rect">
+            <a:avLst/>
+          </a:prstGeom>
+          <a:solidFill>
+            <a:srgbClr val="C9A227"/>
+          </a:solidFill>
+          <a:ln>
+            <a:noFill/>
+          </a:ln>
+          <a:effectLst/>
+        </p:spPr>
+        <p:style>
+          <a:lnRef idx="1">
+            <a:schemeClr val="accent1"/>
+          </a:lnRef>
+          <a:fillRef idx="3">
+            <a:schemeClr val="accent1"/>
+          </a:fillRef>
+          <a:effectRef idx="2">
+            <a:schemeClr val="accent1"/>
+          </a:effectRef>
+          <a:fontRef idx="minor">
+            <a:schemeClr val="lt1"/>
+          </a:fontRef>
+        </p:style>
+        <p:txBody>
+          <a:bodyPr rtlCol="0" anchor="ctr"/>
+          <a:lstStyle/>
+          <a:p>
+            <a:pPr algn="ctr"/>
+          </a:p>
+        </p:txBody>
+      </p:sp>
+      <p:sp>
+        <p:nvSpPr>
+          <p:cNvPr id="7" name="TextBox 6"/>
+          <p:cNvSpPr txBox="1"/>
+          <p:nvPr/>
+        </p:nvSpPr>
+        <p:spPr>
+          <a:xfrm>
+            <a:off x="804672" y="1664208"/>
+            <a:ext cx="3081528" cy="1728216"/>
+          </a:xfrm>
+          <a:prstGeom prst="rect">
+            <a:avLst/>
+          </a:prstGeom>
+          <a:noFill/>
+        </p:spPr>
+        <p:txBody>
+          <a:bodyPr wrap="square" anchor="t" lIns="0" rIns="0" tIns="0" bIns="0">
+            <a:spAutoFit/>
+          </a:bodyPr>
+          <a:lstStyle/>
+          <a:p>
+            <a:pPr algn="l"/>
+            <a:r>
+              <a:rPr sz="1000" b="1">
+                <a:solidFill>
+                  <a:srgbClr val="3A5C9E"/>
+                </a:solidFill>
+              </a:rPr>
+              <a:t>WHO OPUS IS</a:t>
+            </a:r>
+          </a:p>
+          <a:p>
+            <a:pPr algn="l">
+              <a:spcBef>
+                <a:spcPts val="400"/>
+              </a:spcBef>
+            </a:pPr>
+            <a:r>
+              <a:rPr sz="1600" b="1">
+                <a:solidFill>
+                  <a:srgbClr val="0F2145"/>
+                </a:solidFill>
+                <a:latin typeface="Georgia"/>
+              </a:rPr>
+              <a:t>A fund administrator</a:t>
+            </a:r>
+          </a:p>
+          <a:p>
+            <a:pPr algn="l">
+              <a:spcBef>
+                <a:spcPts val="600"/>
+              </a:spcBef>
+            </a:pPr>
+            <a:r>
+              <a:rPr sz="1200" b="0">
+                <a:solidFill>
+                  <a:srgbClr val="1B2A41"/>
+                </a:solidFill>
+              </a:rPr>
+              <a:t>It keeps the books and calculates the NAV for hedge funds and other funds.</a:t>
+            </a:r>
+          </a:p>
+        </p:txBody>
+      </p:sp>
+      <p:sp>
+        <p:nvSpPr>
+          <p:cNvPr id="8" name="Rectangle 7"/>
+          <p:cNvSpPr/>
+          <p:nvPr/>
+        </p:nvSpPr>
+        <p:spPr>
+          <a:xfrm>
+            <a:off x="4297680" y="1463040"/>
+            <a:ext cx="3593592" cy="2002536"/>
+          </a:xfrm>
+          <a:prstGeom prst="rect">
+            <a:avLst/>
+          </a:prstGeom>
+          <a:solidFill>
+            <a:srgbClr val="FFFFFF"/>
+          </a:solidFill>
+          <a:ln>
+            <a:noFill/>
+          </a:ln>
+          <a:effectLst/>
+        </p:spPr>
+        <p:style>
+          <a:lnRef idx="1">
+            <a:schemeClr val="accent1"/>
+          </a:lnRef>
+          <a:fillRef idx="3">
+            <a:schemeClr val="accent1"/>
+          </a:fillRef>
+          <a:effectRef idx="2">
+            <a:schemeClr val="accent1"/>
+          </a:effectRef>
+          <a:fontRef idx="minor">
+            <a:schemeClr val="lt1"/>
+          </a:fontRef>
+        </p:style>
+        <p:txBody>
+          <a:bodyPr rtlCol="0" anchor="ctr"/>
+          <a:lstStyle/>
+          <a:p>
+            <a:pPr algn="ctr"/>
+          </a:p>
+        </p:txBody>
+      </p:sp>
+      <p:sp>
+        <p:nvSpPr>
+          <p:cNvPr id="9" name="Rectangle 8"/>
+          <p:cNvSpPr/>
+          <p:nvPr/>
+        </p:nvSpPr>
+        <p:spPr>
+          <a:xfrm>
+            <a:off x="4297680" y="1463040"/>
+            <a:ext cx="3593592" cy="45720"/>
+          </a:xfrm>
+          <a:prstGeom prst="rect">
+            <a:avLst/>
+          </a:prstGeom>
+          <a:solidFill>
+            <a:srgbClr val="C9A227"/>
+          </a:solidFill>
+          <a:ln>
+            <a:noFill/>
+          </a:ln>
+          <a:effectLst/>
+        </p:spPr>
+        <p:style>
+          <a:lnRef idx="1">
+            <a:schemeClr val="accent1"/>
+          </a:lnRef>
+          <a:fillRef idx="3">
+            <a:schemeClr val="accent1"/>
+          </a:fillRef>
+          <a:effectRef idx="2">
+            <a:schemeClr val="accent1"/>
+          </a:effectRef>
+          <a:fontRef idx="minor">
+            <a:schemeClr val="lt1"/>
+          </a:fontRef>
+        </p:style>
+        <p:txBody>
+          <a:bodyPr rtlCol="0" anchor="ctr"/>
+          <a:lstStyle/>
+          <a:p>
+            <a:pPr algn="ctr"/>
+          </a:p>
+        </p:txBody>
+      </p:sp>
+      <p:sp>
+        <p:nvSpPr>
+          <p:cNvPr id="10" name="TextBox 9"/>
+          <p:cNvSpPr txBox="1"/>
+          <p:nvPr/>
+        </p:nvSpPr>
+        <p:spPr>
+          <a:xfrm>
+            <a:off x="4553712" y="1664208"/>
+            <a:ext cx="3081528" cy="1728216"/>
+          </a:xfrm>
+          <a:prstGeom prst="rect">
+            <a:avLst/>
+          </a:prstGeom>
+          <a:noFill/>
+        </p:spPr>
+        <p:txBody>
+          <a:bodyPr wrap="square" anchor="t" lIns="0" rIns="0" tIns="0" bIns="0">
+            <a:spAutoFit/>
+          </a:bodyPr>
+          <a:lstStyle/>
+          <a:p>
+            <a:pPr algn="l"/>
+            <a:r>
+              <a:rPr sz="1000" b="1">
+                <a:solidFill>
+                  <a:srgbClr val="3A5C9E"/>
+                </a:solidFill>
+              </a:rPr>
+              <a:t>ITS DAILY WORK</a:t>
+            </a:r>
+          </a:p>
+          <a:p>
+            <a:pPr algn="l">
+              <a:spcBef>
+                <a:spcPts val="400"/>
+              </a:spcBef>
+            </a:pPr>
+            <a:r>
+              <a:rPr sz="1600" b="1">
+                <a:solidFill>
+                  <a:srgbClr val="0F2145"/>
+                </a:solidFill>
+                <a:latin typeface="Georgia"/>
+              </a:rPr>
+              <a:t>The same three jobs as our lab</a:t>
+            </a:r>
+          </a:p>
+          <a:p>
+            <a:pPr algn="l">
+              <a:spcBef>
+                <a:spcPts val="600"/>
+              </a:spcBef>
+            </a:pPr>
+            <a:r>
+              <a:rPr sz="1200" b="0">
+                <a:solidFill>
+                  <a:srgbClr val="1B2A41"/>
+                </a:solidFill>
+              </a:rPr>
+              <a:t>It reconciles positions and cash every day, processes corporate actions and prices the portfolio.</a:t>
+            </a:r>
+          </a:p>
+        </p:txBody>
+      </p:sp>
+      <p:sp>
+        <p:nvSpPr>
+          <p:cNvPr id="11" name="Rectangle 10"/>
+          <p:cNvSpPr/>
+          <p:nvPr/>
+        </p:nvSpPr>
+        <p:spPr>
+          <a:xfrm>
+            <a:off x="8046720" y="1463040"/>
+            <a:ext cx="3593592" cy="2002536"/>
+          </a:xfrm>
+          <a:prstGeom prst="rect">
+            <a:avLst/>
+          </a:prstGeom>
+          <a:solidFill>
+            <a:srgbClr val="FFFFFF"/>
+          </a:solidFill>
+          <a:ln>
+            <a:noFill/>
+          </a:ln>
+          <a:effectLst/>
+        </p:spPr>
+        <p:style>
+          <a:lnRef idx="1">
+            <a:schemeClr val="accent1"/>
+          </a:lnRef>
+          <a:fillRef idx="3">
+            <a:schemeClr val="accent1"/>
+          </a:fillRef>
+          <a:effectRef idx="2">
+            <a:schemeClr val="accent1"/>
+          </a:effectRef>
+          <a:fontRef idx="minor">
+            <a:schemeClr val="lt1"/>
+          </a:fontRef>
+        </p:style>
+        <p:txBody>
+          <a:bodyPr rtlCol="0" anchor="ctr"/>
+          <a:lstStyle/>
+          <a:p>
+            <a:pPr algn="ctr"/>
+          </a:p>
+        </p:txBody>
+      </p:sp>
+      <p:sp>
+        <p:nvSpPr>
+          <p:cNvPr id="12" name="Rectangle 11"/>
+          <p:cNvSpPr/>
+          <p:nvPr/>
+        </p:nvSpPr>
+        <p:spPr>
+          <a:xfrm>
+            <a:off x="8046720" y="1463040"/>
+            <a:ext cx="3593592" cy="45720"/>
+          </a:xfrm>
+          <a:prstGeom prst="rect">
+            <a:avLst/>
+          </a:prstGeom>
+          <a:solidFill>
+            <a:srgbClr val="C9A227"/>
+          </a:solidFill>
+          <a:ln>
+            <a:noFill/>
+          </a:ln>
+          <a:effectLst/>
+        </p:spPr>
+        <p:style>
+          <a:lnRef idx="1">
+            <a:schemeClr val="accent1"/>
+          </a:lnRef>
+          <a:fillRef idx="3">
+            <a:schemeClr val="accent1"/>
+          </a:fillRef>
+          <a:effectRef idx="2">
+            <a:schemeClr val="accent1"/>
+          </a:effectRef>
+          <a:fontRef idx="minor">
+            <a:schemeClr val="lt1"/>
+          </a:fontRef>
+        </p:style>
+        <p:txBody>
+          <a:bodyPr rtlCol="0" anchor="ctr"/>
+          <a:lstStyle/>
+          <a:p>
+            <a:pPr algn="ctr"/>
+          </a:p>
+        </p:txBody>
+      </p:sp>
+      <p:sp>
+        <p:nvSpPr>
+          <p:cNvPr id="13" name="TextBox 12"/>
+          <p:cNvSpPr txBox="1"/>
+          <p:nvPr/>
+        </p:nvSpPr>
+        <p:spPr>
+          <a:xfrm>
+            <a:off x="8302752" y="1664208"/>
+            <a:ext cx="3081528" cy="1728216"/>
+          </a:xfrm>
+          <a:prstGeom prst="rect">
+            <a:avLst/>
+          </a:prstGeom>
+          <a:noFill/>
+        </p:spPr>
+        <p:txBody>
+          <a:bodyPr wrap="square" anchor="t" lIns="0" rIns="0" tIns="0" bIns="0">
+            <a:spAutoFit/>
+          </a:bodyPr>
+          <a:lstStyle/>
+          <a:p>
+            <a:pPr algn="l"/>
+            <a:r>
+              <a:rPr sz="1000" b="1">
+                <a:solidFill>
+                  <a:srgbClr val="3A5C9E"/>
+                </a:solidFill>
+              </a:rPr>
+              <a:t>AI IT ALREADY USES</a:t>
+            </a:r>
+          </a:p>
+          <a:p>
+            <a:pPr algn="l">
+              <a:spcBef>
+                <a:spcPts val="400"/>
+              </a:spcBef>
+            </a:pPr>
+            <a:r>
+              <a:rPr sz="1600" b="1">
+                <a:solidFill>
+                  <a:srgbClr val="0F2145"/>
+                </a:solidFill>
+                <a:latin typeface="Georgia"/>
+              </a:rPr>
+              <a:t>Digital agents</a:t>
+            </a:r>
+          </a:p>
+          <a:p>
+            <a:pPr algn="l">
+              <a:spcBef>
+                <a:spcPts val="600"/>
+              </a:spcBef>
+            </a:pPr>
+            <a:r>
+              <a:rPr sz="1200" b="0">
+                <a:solidFill>
+                  <a:srgbClr val="1B2A41"/>
+                </a:solidFill>
+              </a:rPr>
+              <a:t>Its website says digital agents use desktop tools and machine learning to calculate NAVs.</a:t>
+            </a:r>
+          </a:p>
+        </p:txBody>
+      </p:sp>
+      <p:sp>
+        <p:nvSpPr>
+          <p:cNvPr id="14" name="Rectangle 13"/>
+          <p:cNvSpPr/>
+          <p:nvPr/>
+        </p:nvSpPr>
+        <p:spPr>
+          <a:xfrm>
+            <a:off x="548640" y="3621024"/>
+            <a:ext cx="3593592" cy="2002536"/>
+          </a:xfrm>
+          <a:prstGeom prst="rect">
+            <a:avLst/>
+          </a:prstGeom>
+          <a:solidFill>
+            <a:srgbClr val="FFFFFF"/>
+          </a:solidFill>
+          <a:ln>
+            <a:noFill/>
+          </a:ln>
+          <a:effectLst/>
+        </p:spPr>
+        <p:style>
+          <a:lnRef idx="1">
+            <a:schemeClr val="accent1"/>
+          </a:lnRef>
+          <a:fillRef idx="3">
+            <a:schemeClr val="accent1"/>
+          </a:fillRef>
+          <a:effectRef idx="2">
+            <a:schemeClr val="accent1"/>
+          </a:effectRef>
+          <a:fontRef idx="minor">
+            <a:schemeClr val="lt1"/>
+          </a:fontRef>
+        </p:style>
+        <p:txBody>
+          <a:bodyPr rtlCol="0" anchor="ctr"/>
+          <a:lstStyle/>
+          <a:p>
+            <a:pPr algn="ctr"/>
+          </a:p>
+        </p:txBody>
+      </p:sp>
+      <p:sp>
+        <p:nvSpPr>
+          <p:cNvPr id="15" name="Rectangle 14"/>
+          <p:cNvSpPr/>
+          <p:nvPr/>
+        </p:nvSpPr>
+        <p:spPr>
+          <a:xfrm>
+            <a:off x="548640" y="3621024"/>
+            <a:ext cx="3593592" cy="45720"/>
+          </a:xfrm>
+          <a:prstGeom prst="rect">
+            <a:avLst/>
+          </a:prstGeom>
+          <a:solidFill>
+            <a:srgbClr val="C9A227"/>
+          </a:solidFill>
+          <a:ln>
+            <a:noFill/>
+          </a:ln>
+          <a:effectLst/>
+        </p:spPr>
+        <p:style>
+          <a:lnRef idx="1">
+            <a:schemeClr val="accent1"/>
+          </a:lnRef>
+          <a:fillRef idx="3">
+            <a:schemeClr val="accent1"/>
+          </a:fillRef>
+          <a:effectRef idx="2">
+            <a:schemeClr val="accent1"/>
+          </a:effectRef>
+          <a:fontRef idx="minor">
+            <a:schemeClr val="lt1"/>
+          </a:fontRef>
+        </p:style>
+        <p:txBody>
+          <a:bodyPr rtlCol="0" anchor="ctr"/>
+          <a:lstStyle/>
+          <a:p>
+            <a:pPr algn="ctr"/>
+          </a:p>
+        </p:txBody>
+      </p:sp>
+      <p:sp>
+        <p:nvSpPr>
+          <p:cNvPr id="16" name="TextBox 15"/>
+          <p:cNvSpPr txBox="1"/>
+          <p:nvPr/>
+        </p:nvSpPr>
+        <p:spPr>
+          <a:xfrm>
+            <a:off x="804672" y="3822192"/>
+            <a:ext cx="3081528" cy="1728216"/>
+          </a:xfrm>
+          <a:prstGeom prst="rect">
+            <a:avLst/>
+          </a:prstGeom>
+          <a:noFill/>
+        </p:spPr>
+        <p:txBody>
+          <a:bodyPr wrap="square" anchor="t" lIns="0" rIns="0" tIns="0" bIns="0">
+            <a:spAutoFit/>
+          </a:bodyPr>
+          <a:lstStyle/>
+          <a:p>
+            <a:pPr algn="l"/>
+            <a:r>
+              <a:rPr sz="1000" b="1">
+                <a:solidFill>
+                  <a:srgbClr val="3A5C9E"/>
+                </a:solidFill>
+              </a:rPr>
+              <a:t>CLAUDE · RECONCILIATION SKILL</a:t>
+            </a:r>
+          </a:p>
+          <a:p>
+            <a:pPr algn="l">
+              <a:spcBef>
+                <a:spcPts val="400"/>
+              </a:spcBef>
+            </a:pPr>
+            <a:r>
+              <a:rPr sz="1600" b="1">
+                <a:solidFill>
+                  <a:srgbClr val="0F2145"/>
+                </a:solidFill>
+                <a:latin typeface="Georgia"/>
+              </a:rPr>
+              <a:t>Finds the breaks</a:t>
+            </a:r>
+          </a:p>
+          <a:p>
+            <a:pPr algn="l">
+              <a:spcBef>
+                <a:spcPts val="600"/>
+              </a:spcBef>
+            </a:pPr>
+            <a:r>
+              <a:rPr sz="1200" b="0">
+                <a:solidFill>
+                  <a:srgbClr val="1B2A41"/>
+                </a:solidFill>
+              </a:rPr>
+              <a:t>Lines up the books, the custodian and the transfer agent, like breaks 1, 2 and 3.</a:t>
+            </a:r>
+          </a:p>
+        </p:txBody>
+      </p:sp>
+      <p:sp>
+        <p:nvSpPr>
+          <p:cNvPr id="17" name="Rectangle 16"/>
+          <p:cNvSpPr/>
+          <p:nvPr/>
+        </p:nvSpPr>
+        <p:spPr>
+          <a:xfrm>
+            <a:off x="4297680" y="3621024"/>
+            <a:ext cx="3593592" cy="2002536"/>
+          </a:xfrm>
+          <a:prstGeom prst="rect">
+            <a:avLst/>
+          </a:prstGeom>
+          <a:solidFill>
+            <a:srgbClr val="FFFFFF"/>
+          </a:solidFill>
+          <a:ln>
+            <a:noFill/>
+          </a:ln>
+          <a:effectLst/>
+        </p:spPr>
+        <p:style>
+          <a:lnRef idx="1">
+            <a:schemeClr val="accent1"/>
+          </a:lnRef>
+          <a:fillRef idx="3">
+            <a:schemeClr val="accent1"/>
+          </a:fillRef>
+          <a:effectRef idx="2">
+            <a:schemeClr val="accent1"/>
+          </a:effectRef>
+          <a:fontRef idx="minor">
+            <a:schemeClr val="lt1"/>
+          </a:fontRef>
+        </p:style>
+        <p:txBody>
+          <a:bodyPr rtlCol="0" anchor="ctr"/>
+          <a:lstStyle/>
+          <a:p>
+            <a:pPr algn="ctr"/>
+          </a:p>
+        </p:txBody>
+      </p:sp>
+      <p:sp>
+        <p:nvSpPr>
+          <p:cNvPr id="18" name="Rectangle 17"/>
+          <p:cNvSpPr/>
+          <p:nvPr/>
+        </p:nvSpPr>
+        <p:spPr>
+          <a:xfrm>
+            <a:off x="4297680" y="3621024"/>
+            <a:ext cx="3593592" cy="45720"/>
+          </a:xfrm>
+          <a:prstGeom prst="rect">
+            <a:avLst/>
+          </a:prstGeom>
+          <a:solidFill>
+            <a:srgbClr val="C9A227"/>
+          </a:solidFill>
+          <a:ln>
+            <a:noFill/>
+          </a:ln>
+          <a:effectLst/>
+        </p:spPr>
+        <p:style>
+          <a:lnRef idx="1">
+            <a:schemeClr val="accent1"/>
+          </a:lnRef>
+          <a:fillRef idx="3">
+            <a:schemeClr val="accent1"/>
+          </a:fillRef>
+          <a:effectRef idx="2">
+            <a:schemeClr val="accent1"/>
+          </a:effectRef>
+          <a:fontRef idx="minor">
+            <a:schemeClr val="lt1"/>
+          </a:fontRef>
+        </p:style>
+        <p:txBody>
+          <a:bodyPr rtlCol="0" anchor="ctr"/>
+          <a:lstStyle/>
+          <a:p>
+            <a:pPr algn="ctr"/>
+          </a:p>
+        </p:txBody>
+      </p:sp>
+      <p:sp>
+        <p:nvSpPr>
+          <p:cNvPr id="19" name="TextBox 18"/>
+          <p:cNvSpPr txBox="1"/>
+          <p:nvPr/>
+        </p:nvSpPr>
+        <p:spPr>
+          <a:xfrm>
+            <a:off x="4553712" y="3822192"/>
+            <a:ext cx="3081528" cy="1728216"/>
+          </a:xfrm>
+          <a:prstGeom prst="rect">
+            <a:avLst/>
+          </a:prstGeom>
+          <a:noFill/>
+        </p:spPr>
+        <p:txBody>
+          <a:bodyPr wrap="square" anchor="t" lIns="0" rIns="0" tIns="0" bIns="0">
+            <a:spAutoFit/>
+          </a:bodyPr>
+          <a:lstStyle/>
+          <a:p>
+            <a:pPr algn="l"/>
+            <a:r>
+              <a:rPr sz="1000" b="1">
+                <a:solidFill>
+                  <a:srgbClr val="3A5C9E"/>
+                </a:solidFill>
+              </a:rPr>
+              <a:t>CLAUDE · JOURNAL ENTRY AND VARIANCE SKILLS</a:t>
+            </a:r>
+          </a:p>
+          <a:p>
+            <a:pPr algn="l">
+              <a:spcBef>
+                <a:spcPts val="400"/>
+              </a:spcBef>
+            </a:pPr>
+            <a:r>
+              <a:rPr sz="1600" b="1">
+                <a:solidFill>
+                  <a:srgbClr val="0F2145"/>
+                </a:solidFill>
+                <a:latin typeface="Georgia"/>
+              </a:rPr>
+              <a:t>Drafts the fix, explains the move</a:t>
+            </a:r>
+          </a:p>
+          <a:p>
+            <a:pPr algn="l">
+              <a:spcBef>
+                <a:spcPts val="600"/>
+              </a:spcBef>
+            </a:pPr>
+            <a:r>
+              <a:rPr sz="1200" b="0">
+                <a:solidFill>
+                  <a:srgbClr val="1B2A41"/>
+                </a:solidFill>
+              </a:rPr>
+              <a:t>Writes the entry for each break, and says why today's NAV moved.</a:t>
+            </a:r>
+          </a:p>
+        </p:txBody>
+      </p:sp>
+      <p:sp>
+        <p:nvSpPr>
+          <p:cNvPr id="20" name="Rectangle 19"/>
+          <p:cNvSpPr/>
+          <p:nvPr/>
+        </p:nvSpPr>
+        <p:spPr>
+          <a:xfrm>
+            <a:off x="8046720" y="3621024"/>
+            <a:ext cx="3593592" cy="2002536"/>
+          </a:xfrm>
+          <a:prstGeom prst="rect">
+            <a:avLst/>
+          </a:prstGeom>
+          <a:solidFill>
+            <a:srgbClr val="0F2145"/>
+          </a:solidFill>
+          <a:ln>
+            <a:noFill/>
+          </a:ln>
+          <a:effectLst/>
+        </p:spPr>
+        <p:style>
+          <a:lnRef idx="1">
+            <a:schemeClr val="accent1"/>
+          </a:lnRef>
+          <a:fillRef idx="3">
+            <a:schemeClr val="accent1"/>
+          </a:fillRef>
+          <a:effectRef idx="2">
+            <a:schemeClr val="accent1"/>
+          </a:effectRef>
+          <a:fontRef idx="minor">
+            <a:schemeClr val="lt1"/>
+          </a:fontRef>
+        </p:style>
+        <p:txBody>
+          <a:bodyPr rtlCol="0" anchor="ctr"/>
+          <a:lstStyle/>
+          <a:p>
+            <a:pPr algn="ctr"/>
+          </a:p>
+        </p:txBody>
+      </p:sp>
+      <p:sp>
+        <p:nvSpPr>
+          <p:cNvPr id="21" name="Rectangle 20"/>
+          <p:cNvSpPr/>
+          <p:nvPr/>
+        </p:nvSpPr>
+        <p:spPr>
+          <a:xfrm>
+            <a:off x="8046720" y="3621024"/>
+            <a:ext cx="3593592" cy="45720"/>
+          </a:xfrm>
+          <a:prstGeom prst="rect">
+            <a:avLst/>
+          </a:prstGeom>
+          <a:solidFill>
+            <a:srgbClr val="C9A227"/>
+          </a:solidFill>
+          <a:ln>
+            <a:noFill/>
+          </a:ln>
+          <a:effectLst/>
+        </p:spPr>
+        <p:style>
+          <a:lnRef idx="1">
+            <a:schemeClr val="accent1"/>
+          </a:lnRef>
+          <a:fillRef idx="3">
+            <a:schemeClr val="accent1"/>
+          </a:fillRef>
+          <a:effectRef idx="2">
+            <a:schemeClr val="accent1"/>
+          </a:effectRef>
+          <a:fontRef idx="minor">
+            <a:schemeClr val="lt1"/>
+          </a:fontRef>
+        </p:style>
+        <p:txBody>
+          <a:bodyPr rtlCol="0" anchor="ctr"/>
+          <a:lstStyle/>
+          <a:p>
+            <a:pPr algn="ctr"/>
+          </a:p>
+        </p:txBody>
+      </p:sp>
+      <p:sp>
+        <p:nvSpPr>
+          <p:cNvPr id="22" name="TextBox 21"/>
+          <p:cNvSpPr txBox="1"/>
+          <p:nvPr/>
+        </p:nvSpPr>
+        <p:spPr>
+          <a:xfrm>
+            <a:off x="8302752" y="3822192"/>
+            <a:ext cx="3081528" cy="1728216"/>
+          </a:xfrm>
+          <a:prstGeom prst="rect">
+            <a:avLst/>
+          </a:prstGeom>
+          <a:noFill/>
+        </p:spPr>
+        <p:txBody>
+          <a:bodyPr wrap="square" anchor="t" lIns="0" rIns="0" tIns="0" bIns="0">
+            <a:spAutoFit/>
+          </a:bodyPr>
+          <a:lstStyle/>
+          <a:p>
+            <a:pPr algn="l"/>
+            <a:r>
+              <a:rPr sz="1000" b="1">
+                <a:solidFill>
+                  <a:srgbClr val="C9A227"/>
+                </a:solidFill>
+              </a:rPr>
+              <a:t>THE HUMAN</a:t>
+            </a:r>
+          </a:p>
+          <a:p>
+            <a:pPr algn="l">
+              <a:spcBef>
+                <a:spcPts val="400"/>
+              </a:spcBef>
+            </a:pPr>
+            <a:r>
+              <a:rPr sz="1600" b="1">
+                <a:solidFill>
+                  <a:srgbClr val="FFFFFF"/>
+                </a:solidFill>
+                <a:latin typeface="Georgia"/>
+              </a:rPr>
+              <a:t>The fund accountant signs</a:t>
+            </a:r>
+          </a:p>
+          <a:p>
+            <a:pPr algn="l">
+              <a:spcBef>
+                <a:spcPts val="600"/>
+              </a:spcBef>
+            </a:pPr>
+            <a:r>
+              <a:rPr sz="1200" b="0">
+                <a:solidFill>
+                  <a:srgbClr val="C9D6EE"/>
+                </a:solidFill>
+              </a:rPr>
+              <a:t>Approves every entry and releases the NAV.</a:t>
+            </a:r>
+          </a:p>
+        </p:txBody>
+      </p:sp>
+      <p:sp>
+        <p:nvSpPr>
+          <p:cNvPr id="23" name="Rectangle 22"/>
+          <p:cNvSpPr/>
+          <p:nvPr/>
+        </p:nvSpPr>
+        <p:spPr>
+          <a:xfrm>
+            <a:off x="548640" y="5760720"/>
+            <a:ext cx="11091672" cy="603504"/>
+          </a:xfrm>
+          <a:prstGeom prst="rect">
+            <a:avLst/>
+          </a:prstGeom>
+          <a:solidFill>
+            <a:srgbClr val="0F2145"/>
+          </a:solidFill>
+          <a:ln>
+            <a:noFill/>
+          </a:ln>
+          <a:effectLst/>
+        </p:spPr>
+        <p:style>
+          <a:lnRef idx="1">
+            <a:schemeClr val="accent1"/>
+          </a:lnRef>
+          <a:fillRef idx="3">
+            <a:schemeClr val="accent1"/>
+          </a:fillRef>
+          <a:effectRef idx="2">
+            <a:schemeClr val="accent1"/>
+          </a:effectRef>
+          <a:fontRef idx="minor">
+            <a:schemeClr val="lt1"/>
+          </a:fontRef>
+        </p:style>
+        <p:txBody>
+          <a:bodyPr rtlCol="0" anchor="ctr"/>
+          <a:lstStyle/>
+          <a:p>
+            <a:pPr algn="ctr"/>
+          </a:p>
+        </p:txBody>
+      </p:sp>
+      <p:sp>
+        <p:nvSpPr>
+          <p:cNvPr id="24" name="Rectangle 23"/>
+          <p:cNvSpPr/>
+          <p:nvPr/>
+        </p:nvSpPr>
+        <p:spPr>
+          <a:xfrm>
+            <a:off x="548640" y="5760720"/>
+            <a:ext cx="64008" cy="603504"/>
+          </a:xfrm>
+          <a:prstGeom prst="rect">
+            <a:avLst/>
+          </a:prstGeom>
+          <a:solidFill>
+            <a:srgbClr val="C9A227"/>
+          </a:solidFill>
+          <a:ln>
+            <a:noFill/>
+          </a:ln>
+          <a:effectLst/>
+        </p:spPr>
+        <p:style>
+          <a:lnRef idx="1">
+            <a:schemeClr val="accent1"/>
+          </a:lnRef>
+          <a:fillRef idx="3">
+            <a:schemeClr val="accent1"/>
+          </a:fillRef>
+          <a:effectRef idx="2">
+            <a:schemeClr val="accent1"/>
+          </a:effectRef>
+          <a:fontRef idx="minor">
+            <a:schemeClr val="lt1"/>
+          </a:fontRef>
+        </p:style>
+        <p:txBody>
+          <a:bodyPr rtlCol="0" anchor="ctr"/>
+          <a:lstStyle/>
+          <a:p>
+            <a:pPr algn="ctr"/>
+          </a:p>
+        </p:txBody>
+      </p:sp>
+      <p:sp>
+        <p:nvSpPr>
+          <p:cNvPr id="25" name="TextBox 24"/>
+          <p:cNvSpPr txBox="1"/>
+          <p:nvPr/>
+        </p:nvSpPr>
+        <p:spPr>
+          <a:xfrm>
+            <a:off x="822960" y="5760720"/>
+            <a:ext cx="10543032" cy="603504"/>
+          </a:xfrm>
+          <a:prstGeom prst="rect">
+            <a:avLst/>
+          </a:prstGeom>
+          <a:noFill/>
+        </p:spPr>
+        <p:txBody>
+          <a:bodyPr wrap="square" anchor="ctr" lIns="0" rIns="0" tIns="0" bIns="0">
+            <a:spAutoFit/>
+          </a:bodyPr>
+          <a:lstStyle/>
+          <a:p>
+            <a:pPr algn="l"/>
+            <a:r>
+              <a:rPr sz="1200" b="1">
+                <a:solidFill>
+                  <a:srgbClr val="C9A227"/>
+                </a:solidFill>
+              </a:rPr>
+              <a:t>How it applies to us:  </a:t>
+            </a:r>
+            <a:r>
+              <a:rPr sz="1200" b="0">
+                <a:solidFill>
+                  <a:srgbClr val="FFFFFF"/>
+                </a:solidFill>
+              </a:rPr>
+              <a:t>our lab is a small copy of this daily job. The Claude mapping is our example, not Opus's own setup.</a:t>
+            </a:r>
+          </a:p>
+        </p:txBody>
+      </p:sp>
+      <p:sp>
+        <p:nvSpPr>
+          <p:cNvPr id="26" name="TextBox 25"/>
+          <p:cNvSpPr txBox="1"/>
+          <p:nvPr/>
+        </p:nvSpPr>
+        <p:spPr>
+          <a:xfrm>
+            <a:off x="548640" y="6473952"/>
+            <a:ext cx="7315200" cy="228600"/>
+          </a:xfrm>
+          <a:prstGeom prst="rect">
+            <a:avLst/>
+          </a:prstGeom>
+          <a:noFill/>
+        </p:spPr>
+        <p:txBody>
+          <a:bodyPr wrap="square" anchor="t" lIns="0" rIns="0" tIns="0" bIns="0">
+            <a:spAutoFit/>
+          </a:bodyPr>
+          <a:lstStyle/>
+          <a:p>
+            <a:pPr algn="l"/>
+            <a:r>
+              <a:rPr sz="800" b="0">
+                <a:solidFill>
+                  <a:srgbClr val="5D6B7E"/>
+                </a:solidFill>
+              </a:rPr>
+              <a:t>ISBMS · PGDM 2025–27 · AGENTIC AI &amp; ADVANCED ANALYTICS IN FINANCE</a:t>
+            </a:r>
+          </a:p>
+        </p:txBody>
+      </p:sp>
+      <p:sp>
+        <p:nvSpPr>
+          <p:cNvPr id="27" name="TextBox 26"/>
+          <p:cNvSpPr txBox="1"/>
+          <p:nvPr/>
+        </p:nvSpPr>
+        <p:spPr>
+          <a:xfrm>
+            <a:off x="9262872" y="6473952"/>
+            <a:ext cx="2377440" cy="228600"/>
+          </a:xfrm>
+          <a:prstGeom prst="rect">
+            <a:avLst/>
+          </a:prstGeom>
+          <a:noFill/>
+        </p:spPr>
+        <p:txBody>
+          <a:bodyPr wrap="square" anchor="t" lIns="0" rIns="0" tIns="0" bIns="0">
+            <a:spAutoFit/>
+          </a:bodyPr>
+          <a:lstStyle/>
+          <a:p>
+            <a:pPr algn="r"/>
+            <a:r>
+              <a:rPr sz="800" b="0">
+                <a:solidFill>
+                  <a:srgbClr val="5D6B7E"/>
+                </a:solidFill>
+              </a:rPr>
+              <a:t>MODULE 8  ·  10</a:t>
+            </a:r>
+          </a:p>
+        </p:txBody>
+      </p:sp>
+    </p:spTree>
+  </p:cSld>
+  <p:clrMapOvr>
+    <a:masterClrMapping/>
+  </p:clrMapOvr>
+</p:sld>
+</file>
+
+<file path=ppt/slides/slide13.xml><?xml version="1.0" encoding="utf-8"?>
+<p:sld xmlns:a="http://schemas.openxmlformats.org/drawingml/2006/main" xmlns:p="http://schemas.openxmlformats.org/presentationml/2006/main" xmlns:r="http://schemas.openxmlformats.org/officeDocument/2006/relationships">
+  <p:cSld>
+    <p:bg>
+      <p:bgPr>
+        <a:solidFill>
+          <a:srgbClr val="F7F8FA"/>
+        </a:solidFill>
+        <a:effectLst/>
+      </p:bgPr>
+    </p:bg>
+    <p:spTree>
+      <p:nvGrpSpPr>
+        <p:cNvPr id="1" name=""/>
+        <p:cNvGrpSpPr/>
+        <p:nvPr/>
+      </p:nvGrpSpPr>
+      <p:grpSpPr/>
+      <p:sp>
+        <p:nvSpPr>
+          <p:cNvPr id="2" name="Rectangle 1"/>
+          <p:cNvSpPr/>
+          <p:nvPr/>
+        </p:nvSpPr>
+        <p:spPr>
+          <a:xfrm>
+            <a:off x="548640" y="402336"/>
+            <a:ext cx="118872" cy="118872"/>
+          </a:xfrm>
+          <a:prstGeom prst="rect">
+            <a:avLst/>
+          </a:prstGeom>
+          <a:solidFill>
+            <a:srgbClr val="C9A227"/>
+          </a:solidFill>
+          <a:ln>
+            <a:noFill/>
+          </a:ln>
+          <a:effectLst/>
+        </p:spPr>
+        <p:style>
+          <a:lnRef idx="1">
+            <a:schemeClr val="accent1"/>
+          </a:lnRef>
+          <a:fillRef idx="3">
+            <a:schemeClr val="accent1"/>
+          </a:fillRef>
+          <a:effectRef idx="2">
+            <a:schemeClr val="accent1"/>
+          </a:effectRef>
+          <a:fontRef idx="minor">
+            <a:schemeClr val="lt1"/>
+          </a:fontRef>
+        </p:style>
+        <p:txBody>
+          <a:bodyPr rtlCol="0" anchor="ctr"/>
+          <a:lstStyle/>
+          <a:p>
+            <a:pPr algn="ctr"/>
+          </a:p>
+        </p:txBody>
+      </p:sp>
+      <p:sp>
+        <p:nvSpPr>
+          <p:cNvPr id="3" name="TextBox 2"/>
+          <p:cNvSpPr txBox="1"/>
+          <p:nvPr/>
+        </p:nvSpPr>
+        <p:spPr>
+          <a:xfrm>
+            <a:off x="786384" y="310896"/>
+            <a:ext cx="10817352" cy="274320"/>
+          </a:xfrm>
+          <a:prstGeom prst="rect">
+            <a:avLst/>
+          </a:prstGeom>
+          <a:noFill/>
+        </p:spPr>
+        <p:txBody>
+          <a:bodyPr wrap="square" anchor="t" lIns="0" rIns="0" tIns="0" bIns="0">
+            <a:spAutoFit/>
+          </a:bodyPr>
+          <a:lstStyle/>
+          <a:p>
+            <a:pPr algn="l"/>
+            <a:r>
+              <a:rPr sz="1100" b="1">
+                <a:solidFill>
+                  <a:srgbClr val="C9A227"/>
+                </a:solidFill>
+              </a:rPr>
+              <a:t>HOUR 3 · THE LIVE LAB</a:t>
+            </a:r>
+          </a:p>
+        </p:txBody>
+      </p:sp>
+      <p:sp>
+        <p:nvSpPr>
+          <p:cNvPr id="4" name="TextBox 3"/>
+          <p:cNvSpPr txBox="1"/>
+          <p:nvPr/>
+        </p:nvSpPr>
+        <p:spPr>
+          <a:xfrm>
+            <a:off x="548640" y="621792"/>
+            <a:ext cx="11091672" cy="731520"/>
+          </a:xfrm>
+          <a:prstGeom prst="rect">
+            <a:avLst/>
+          </a:prstGeom>
+          <a:noFill/>
+        </p:spPr>
+        <p:txBody>
+          <a:bodyPr wrap="square" anchor="t" lIns="0" rIns="0" tIns="0" bIns="0">
+            <a:spAutoFit/>
+          </a:bodyPr>
+          <a:lstStyle/>
+          <a:p>
+            <a:pPr algn="l"/>
+            <a:r>
+              <a:rPr sz="2900" b="1">
+                <a:solidFill>
+                  <a:srgbClr val="0F2145"/>
+                </a:solidFill>
+                <a:latin typeface="Georgia"/>
+              </a:rPr>
+              <a:t>Build a NAV report, reconcile it, explain it</a:t>
+            </a:r>
+          </a:p>
+        </p:txBody>
+      </p:sp>
+      <p:sp>
+        <p:nvSpPr>
+          <p:cNvPr id="5" name="Rectangle 4"/>
+          <p:cNvSpPr/>
+          <p:nvPr/>
+        </p:nvSpPr>
+        <p:spPr>
+          <a:xfrm>
+            <a:off x="548640" y="1463040"/>
+            <a:ext cx="3593592" cy="4160520"/>
+          </a:xfrm>
+          <a:prstGeom prst="rect">
+            <a:avLst/>
+          </a:prstGeom>
+          <a:solidFill>
+            <a:srgbClr val="FFFFFF"/>
+          </a:solidFill>
+          <a:ln>
+            <a:noFill/>
+          </a:ln>
+          <a:effectLst/>
+        </p:spPr>
+        <p:style>
+          <a:lnRef idx="1">
+            <a:schemeClr val="accent1"/>
+          </a:lnRef>
+          <a:fillRef idx="3">
+            <a:schemeClr val="accent1"/>
+          </a:fillRef>
+          <a:effectRef idx="2">
+            <a:schemeClr val="accent1"/>
+          </a:effectRef>
+          <a:fontRef idx="minor">
+            <a:schemeClr val="lt1"/>
+          </a:fontRef>
+        </p:style>
+        <p:txBody>
+          <a:bodyPr rtlCol="0" anchor="ctr"/>
+          <a:lstStyle/>
+          <a:p>
+            <a:pPr algn="ctr"/>
+          </a:p>
+        </p:txBody>
+      </p:sp>
+      <p:sp>
+        <p:nvSpPr>
+          <p:cNvPr id="6" name="Rectangle 5"/>
+          <p:cNvSpPr/>
+          <p:nvPr/>
+        </p:nvSpPr>
+        <p:spPr>
+          <a:xfrm>
+            <a:off x="548640" y="1463040"/>
+            <a:ext cx="3593592" cy="45720"/>
+          </a:xfrm>
+          <a:prstGeom prst="rect">
+            <a:avLst/>
+          </a:prstGeom>
+          <a:solidFill>
+            <a:srgbClr val="C9A227"/>
+          </a:solidFill>
+          <a:ln>
+            <a:noFill/>
+          </a:ln>
+          <a:effectLst/>
+        </p:spPr>
+        <p:style>
+          <a:lnRef idx="1">
+            <a:schemeClr val="accent1"/>
+          </a:lnRef>
+          <a:fillRef idx="3">
+            <a:schemeClr val="accent1"/>
+          </a:fillRef>
+          <a:effectRef idx="2">
+            <a:schemeClr val="accent1"/>
+          </a:effectRef>
+          <a:fontRef idx="minor">
+            <a:schemeClr val="lt1"/>
+          </a:fontRef>
+        </p:style>
+        <p:txBody>
+          <a:bodyPr rtlCol="0" anchor="ctr"/>
+          <a:lstStyle/>
+          <a:p>
+            <a:pPr algn="ctr"/>
+          </a:p>
+        </p:txBody>
+      </p:sp>
+      <p:sp>
+        <p:nvSpPr>
+          <p:cNvPr id="7" name="TextBox 6"/>
+          <p:cNvSpPr txBox="1"/>
+          <p:nvPr/>
+        </p:nvSpPr>
+        <p:spPr>
+          <a:xfrm>
+            <a:off x="804672" y="1664208"/>
+            <a:ext cx="3081528" cy="3886200"/>
+          </a:xfrm>
+          <a:prstGeom prst="rect">
+            <a:avLst/>
+          </a:prstGeom>
+          <a:noFill/>
+        </p:spPr>
+        <p:txBody>
+          <a:bodyPr wrap="square" anchor="t" lIns="0" rIns="0" tIns="0" bIns="0">
+            <a:spAutoFit/>
+          </a:bodyPr>
+          <a:lstStyle/>
+          <a:p>
+            <a:pPr algn="l"/>
+            <a:r>
+              <a:rPr sz="1000" b="1">
+                <a:solidFill>
+                  <a:srgbClr val="3A5C9E"/>
+                </a:solidFill>
+              </a:rPr>
+              <a:t>PART A · 20 MIN</a:t>
+            </a:r>
+          </a:p>
+          <a:p>
+            <a:pPr algn="l">
+              <a:spcBef>
+                <a:spcPts val="400"/>
+              </a:spcBef>
+            </a:pPr>
+            <a:r>
+              <a:rPr sz="1600" b="1">
+                <a:solidFill>
+                  <a:srgbClr val="0F2145"/>
+                </a:solidFill>
+                <a:latin typeface="Georgia"/>
+              </a:rPr>
+              <a:t>Watch the skill</a:t>
+            </a:r>
+          </a:p>
+          <a:p>
+            <a:pPr algn="l">
+              <a:spcBef>
+                <a:spcPts val="600"/>
+              </a:spcBef>
+            </a:pPr>
+            <a:r>
+              <a:rPr sz="1200" b="0">
+                <a:solidFill>
+                  <a:srgbClr val="1B2A41"/>
+                </a:solidFill>
+              </a:rPr>
+              <a:t>The instructor runs Claude's reconciliation skill on the lab files and it finds the three breaks.</a:t>
+            </a:r>
+          </a:p>
+        </p:txBody>
+      </p:sp>
+      <p:sp>
+        <p:nvSpPr>
+          <p:cNvPr id="8" name="Rectangle 7"/>
+          <p:cNvSpPr/>
+          <p:nvPr/>
+        </p:nvSpPr>
+        <p:spPr>
+          <a:xfrm>
+            <a:off x="4297680" y="1463040"/>
+            <a:ext cx="3593592" cy="4160520"/>
+          </a:xfrm>
+          <a:prstGeom prst="rect">
+            <a:avLst/>
+          </a:prstGeom>
+          <a:solidFill>
+            <a:srgbClr val="FFFFFF"/>
+          </a:solidFill>
+          <a:ln>
+            <a:noFill/>
+          </a:ln>
+          <a:effectLst/>
+        </p:spPr>
+        <p:style>
+          <a:lnRef idx="1">
+            <a:schemeClr val="accent1"/>
+          </a:lnRef>
+          <a:fillRef idx="3">
+            <a:schemeClr val="accent1"/>
+          </a:fillRef>
+          <a:effectRef idx="2">
+            <a:schemeClr val="accent1"/>
+          </a:effectRef>
+          <a:fontRef idx="minor">
+            <a:schemeClr val="lt1"/>
+          </a:fontRef>
+        </p:style>
+        <p:txBody>
+          <a:bodyPr rtlCol="0" anchor="ctr"/>
+          <a:lstStyle/>
+          <a:p>
+            <a:pPr algn="ctr"/>
+          </a:p>
+        </p:txBody>
+      </p:sp>
+      <p:sp>
+        <p:nvSpPr>
+          <p:cNvPr id="9" name="Rectangle 8"/>
+          <p:cNvSpPr/>
+          <p:nvPr/>
+        </p:nvSpPr>
+        <p:spPr>
+          <a:xfrm>
+            <a:off x="4297680" y="1463040"/>
+            <a:ext cx="3593592" cy="45720"/>
+          </a:xfrm>
+          <a:prstGeom prst="rect">
+            <a:avLst/>
+          </a:prstGeom>
+          <a:solidFill>
+            <a:srgbClr val="C9A227"/>
+          </a:solidFill>
+          <a:ln>
+            <a:noFill/>
+          </a:ln>
+          <a:effectLst/>
+        </p:spPr>
+        <p:style>
+          <a:lnRef idx="1">
+            <a:schemeClr val="accent1"/>
+          </a:lnRef>
+          <a:fillRef idx="3">
+            <a:schemeClr val="accent1"/>
+          </a:fillRef>
+          <a:effectRef idx="2">
+            <a:schemeClr val="accent1"/>
+          </a:effectRef>
+          <a:fontRef idx="minor">
+            <a:schemeClr val="lt1"/>
+          </a:fontRef>
+        </p:style>
+        <p:txBody>
+          <a:bodyPr rtlCol="0" anchor="ctr"/>
+          <a:lstStyle/>
+          <a:p>
+            <a:pPr algn="ctr"/>
+          </a:p>
+        </p:txBody>
+      </p:sp>
+      <p:sp>
+        <p:nvSpPr>
+          <p:cNvPr id="10" name="TextBox 9"/>
+          <p:cNvSpPr txBox="1"/>
+          <p:nvPr/>
+        </p:nvSpPr>
+        <p:spPr>
+          <a:xfrm>
+            <a:off x="4553712" y="1664208"/>
+            <a:ext cx="3081528" cy="3886200"/>
+          </a:xfrm>
+          <a:prstGeom prst="rect">
+            <a:avLst/>
+          </a:prstGeom>
+          <a:noFill/>
+        </p:spPr>
+        <p:txBody>
+          <a:bodyPr wrap="square" anchor="t" lIns="0" rIns="0" tIns="0" bIns="0">
+            <a:spAutoFit/>
+          </a:bodyPr>
+          <a:lstStyle/>
+          <a:p>
+            <a:pPr algn="l"/>
+            <a:r>
+              <a:rPr sz="1000" b="1">
+                <a:solidFill>
+                  <a:srgbClr val="3A5C9E"/>
+                </a:solidFill>
+              </a:rPr>
+              <a:t>PART B · 30 MIN</a:t>
+            </a:r>
+          </a:p>
+          <a:p>
+            <a:pPr algn="l">
+              <a:spcBef>
+                <a:spcPts val="400"/>
+              </a:spcBef>
+            </a:pPr>
+            <a:r>
+              <a:rPr sz="1600" b="1">
+                <a:solidFill>
+                  <a:srgbClr val="0F2145"/>
+                </a:solidFill>
+                <a:latin typeface="Georgia"/>
+              </a:rPr>
+              <a:t>Run the NAV engine</a:t>
+            </a:r>
+          </a:p>
+          <a:p>
+            <a:pPr algn="l">
+              <a:spcBef>
+                <a:spcPts val="600"/>
+              </a:spcBef>
+            </a:pPr>
+            <a:r>
+              <a:rPr sz="1200" b="0">
+                <a:solidFill>
+                  <a:srgbClr val="1B2A41"/>
+                </a:solidFill>
+              </a:rPr>
+              <a:t>Run nav_engine.py in Codex, Colab or any Python. It prices the fund, finds the breaks and writes nav_report.csv.</a:t>
+            </a:r>
+          </a:p>
+        </p:txBody>
+      </p:sp>
+      <p:sp>
+        <p:nvSpPr>
+          <p:cNvPr id="11" name="Rectangle 10"/>
+          <p:cNvSpPr/>
+          <p:nvPr/>
+        </p:nvSpPr>
+        <p:spPr>
+          <a:xfrm>
+            <a:off x="8046720" y="1463040"/>
+            <a:ext cx="3593592" cy="4160520"/>
+          </a:xfrm>
+          <a:prstGeom prst="rect">
+            <a:avLst/>
+          </a:prstGeom>
+          <a:solidFill>
+            <a:srgbClr val="0F2145"/>
+          </a:solidFill>
+          <a:ln>
+            <a:noFill/>
+          </a:ln>
+          <a:effectLst/>
+        </p:spPr>
+        <p:style>
+          <a:lnRef idx="1">
+            <a:schemeClr val="accent1"/>
+          </a:lnRef>
+          <a:fillRef idx="3">
+            <a:schemeClr val="accent1"/>
+          </a:fillRef>
+          <a:effectRef idx="2">
+            <a:schemeClr val="accent1"/>
+          </a:effectRef>
+          <a:fontRef idx="minor">
+            <a:schemeClr val="lt1"/>
+          </a:fontRef>
+        </p:style>
+        <p:txBody>
+          <a:bodyPr rtlCol="0" anchor="ctr"/>
+          <a:lstStyle/>
+          <a:p>
+            <a:pPr algn="ctr"/>
+          </a:p>
+        </p:txBody>
+      </p:sp>
+      <p:sp>
+        <p:nvSpPr>
+          <p:cNvPr id="12" name="Rectangle 11"/>
+          <p:cNvSpPr/>
+          <p:nvPr/>
+        </p:nvSpPr>
+        <p:spPr>
+          <a:xfrm>
+            <a:off x="8046720" y="1463040"/>
+            <a:ext cx="3593592" cy="45720"/>
+          </a:xfrm>
+          <a:prstGeom prst="rect">
+            <a:avLst/>
+          </a:prstGeom>
+          <a:solidFill>
+            <a:srgbClr val="C9A227"/>
+          </a:solidFill>
+          <a:ln>
+            <a:noFill/>
+          </a:ln>
+          <a:effectLst/>
+        </p:spPr>
+        <p:style>
+          <a:lnRef idx="1">
+            <a:schemeClr val="accent1"/>
+          </a:lnRef>
+          <a:fillRef idx="3">
+            <a:schemeClr val="accent1"/>
+          </a:fillRef>
+          <a:effectRef idx="2">
+            <a:schemeClr val="accent1"/>
+          </a:effectRef>
+          <a:fontRef idx="minor">
+            <a:schemeClr val="lt1"/>
+          </a:fontRef>
+        </p:style>
+        <p:txBody>
+          <a:bodyPr rtlCol="0" anchor="ctr"/>
+          <a:lstStyle/>
+          <a:p>
+            <a:pPr algn="ctr"/>
+          </a:p>
+        </p:txBody>
+      </p:sp>
+      <p:sp>
+        <p:nvSpPr>
+          <p:cNvPr id="13" name="TextBox 12"/>
+          <p:cNvSpPr txBox="1"/>
+          <p:nvPr/>
+        </p:nvSpPr>
+        <p:spPr>
+          <a:xfrm>
+            <a:off x="8302752" y="1664208"/>
+            <a:ext cx="3081528" cy="3886200"/>
+          </a:xfrm>
+          <a:prstGeom prst="rect">
+            <a:avLst/>
+          </a:prstGeom>
+          <a:noFill/>
+        </p:spPr>
+        <p:txBody>
+          <a:bodyPr wrap="square" anchor="t" lIns="0" rIns="0" tIns="0" bIns="0">
+            <a:spAutoFit/>
+          </a:bodyPr>
+          <a:lstStyle/>
+          <a:p>
+            <a:pPr algn="l"/>
+            <a:r>
+              <a:rPr sz="1000" b="1">
+                <a:solidFill>
+                  <a:srgbClr val="C9A227"/>
+                </a:solidFill>
+              </a:rPr>
+              <a:t>PART C · 30 MIN</a:t>
+            </a:r>
+          </a:p>
+          <a:p>
+            <a:pPr algn="l">
+              <a:spcBef>
+                <a:spcPts val="400"/>
+              </a:spcBef>
+            </a:pPr>
+            <a:r>
+              <a:rPr sz="1600" b="1">
+                <a:solidFill>
+                  <a:srgbClr val="FFFFFF"/>
+                </a:solidFill>
+                <a:latin typeface="Georgia"/>
+              </a:rPr>
+              <a:t>Write the commentary</a:t>
+            </a:r>
+          </a:p>
+          <a:p>
+            <a:pPr algn="l">
+              <a:spcBef>
+                <a:spcPts val="600"/>
+              </a:spcBef>
+            </a:pPr>
+            <a:r>
+              <a:rPr sz="1200" b="0">
+                <a:solidFill>
+                  <a:srgbClr val="C9D6EE"/>
+                </a:solidFill>
+              </a:rPr>
+              <a:t>Paste the printed prompt into any free AI chat. Check every number against nav_report.csv. Swap reports with the next desk.</a:t>
+            </a:r>
+          </a:p>
+        </p:txBody>
+      </p:sp>
+      <p:sp>
+        <p:nvSpPr>
+          <p:cNvPr id="14" name="Rectangle 13"/>
+          <p:cNvSpPr/>
+          <p:nvPr/>
+        </p:nvSpPr>
+        <p:spPr>
+          <a:xfrm>
+            <a:off x="548640" y="5760720"/>
+            <a:ext cx="11091672" cy="603504"/>
+          </a:xfrm>
+          <a:prstGeom prst="rect">
+            <a:avLst/>
+          </a:prstGeom>
+          <a:solidFill>
+            <a:srgbClr val="0F2145"/>
+          </a:solidFill>
+          <a:ln>
+            <a:noFill/>
+          </a:ln>
+          <a:effectLst/>
+        </p:spPr>
+        <p:style>
+          <a:lnRef idx="1">
+            <a:schemeClr val="accent1"/>
+          </a:lnRef>
+          <a:fillRef idx="3">
+            <a:schemeClr val="accent1"/>
+          </a:fillRef>
+          <a:effectRef idx="2">
+            <a:schemeClr val="accent1"/>
+          </a:effectRef>
+          <a:fontRef idx="minor">
+            <a:schemeClr val="lt1"/>
+          </a:fontRef>
+        </p:style>
+        <p:txBody>
+          <a:bodyPr rtlCol="0" anchor="ctr"/>
+          <a:lstStyle/>
+          <a:p>
+            <a:pPr algn="ctr"/>
+          </a:p>
+        </p:txBody>
+      </p:sp>
+      <p:sp>
+        <p:nvSpPr>
+          <p:cNvPr id="15" name="Rectangle 14"/>
+          <p:cNvSpPr/>
+          <p:nvPr/>
+        </p:nvSpPr>
+        <p:spPr>
+          <a:xfrm>
+            <a:off x="548640" y="5760720"/>
+            <a:ext cx="64008" cy="603504"/>
+          </a:xfrm>
+          <a:prstGeom prst="rect">
+            <a:avLst/>
+          </a:prstGeom>
+          <a:solidFill>
+            <a:srgbClr val="C9A227"/>
+          </a:solidFill>
+          <a:ln>
+            <a:noFill/>
+          </a:ln>
+          <a:effectLst/>
+        </p:spPr>
+        <p:style>
+          <a:lnRef idx="1">
+            <a:schemeClr val="accent1"/>
+          </a:lnRef>
+          <a:fillRef idx="3">
+            <a:schemeClr val="accent1"/>
+          </a:fillRef>
+          <a:effectRef idx="2">
+            <a:schemeClr val="accent1"/>
+          </a:effectRef>
+          <a:fontRef idx="minor">
+            <a:schemeClr val="lt1"/>
+          </a:fontRef>
+        </p:style>
+        <p:txBody>
+          <a:bodyPr rtlCol="0" anchor="ctr"/>
+          <a:lstStyle/>
+          <a:p>
+            <a:pPr algn="ctr"/>
+          </a:p>
+        </p:txBody>
+      </p:sp>
+      <p:sp>
+        <p:nvSpPr>
+          <p:cNvPr id="16" name="TextBox 15"/>
+          <p:cNvSpPr txBox="1"/>
+          <p:nvPr/>
+        </p:nvSpPr>
+        <p:spPr>
+          <a:xfrm>
+            <a:off x="822960" y="5760720"/>
+            <a:ext cx="10543032" cy="603504"/>
+          </a:xfrm>
+          <a:prstGeom prst="rect">
+            <a:avLst/>
+          </a:prstGeom>
+          <a:noFill/>
+        </p:spPr>
+        <p:txBody>
+          <a:bodyPr wrap="square" anchor="ctr" lIns="0" rIns="0" tIns="0" bIns="0">
+            <a:spAutoFit/>
+          </a:bodyPr>
+          <a:lstStyle/>
+          <a:p>
+            <a:pPr algn="l"/>
+            <a:r>
+              <a:rPr sz="1200" b="1">
+                <a:solidFill>
+                  <a:srgbClr val="C9A227"/>
+                </a:solidFill>
+              </a:rPr>
+              <a:t>Free and keyless:  </a:t>
+            </a:r>
+            <a:r>
+              <a:rPr sz="1200" b="0">
+                <a:solidFill>
+                  <a:srgbClr val="FFFFFF"/>
+                </a:solidFill>
+              </a:rPr>
+              <a:t>built-in Python only, no API key and no installs. The fund is made up and the prices are illustrative.</a:t>
+            </a:r>
+          </a:p>
+        </p:txBody>
+      </p:sp>
+      <p:sp>
+        <p:nvSpPr>
+          <p:cNvPr id="17" name="TextBox 16"/>
+          <p:cNvSpPr txBox="1"/>
+          <p:nvPr/>
+        </p:nvSpPr>
+        <p:spPr>
+          <a:xfrm>
+            <a:off x="548640" y="6473952"/>
+            <a:ext cx="7315200" cy="228600"/>
+          </a:xfrm>
+          <a:prstGeom prst="rect">
+            <a:avLst/>
+          </a:prstGeom>
+          <a:noFill/>
+        </p:spPr>
+        <p:txBody>
+          <a:bodyPr wrap="square" anchor="t" lIns="0" rIns="0" tIns="0" bIns="0">
+            <a:spAutoFit/>
+          </a:bodyPr>
+          <a:lstStyle/>
+          <a:p>
+            <a:pPr algn="l"/>
+            <a:r>
+              <a:rPr sz="800" b="0">
+                <a:solidFill>
+                  <a:srgbClr val="5D6B7E"/>
+                </a:solidFill>
+              </a:rPr>
+              <a:t>ISBMS · PGDM 2025–27 · AGENTIC AI &amp; ADVANCED ANALYTICS IN FINANCE</a:t>
+            </a:r>
+          </a:p>
+        </p:txBody>
+      </p:sp>
+      <p:sp>
+        <p:nvSpPr>
+          <p:cNvPr id="18" name="TextBox 17"/>
+          <p:cNvSpPr txBox="1"/>
+          <p:nvPr/>
+        </p:nvSpPr>
+        <p:spPr>
+          <a:xfrm>
+            <a:off x="9262872" y="6473952"/>
+            <a:ext cx="2377440" cy="228600"/>
+          </a:xfrm>
+          <a:prstGeom prst="rect">
+            <a:avLst/>
+          </a:prstGeom>
+          <a:noFill/>
+        </p:spPr>
+        <p:txBody>
+          <a:bodyPr wrap="square" anchor="t" lIns="0" rIns="0" tIns="0" bIns="0">
+            <a:spAutoFit/>
+          </a:bodyPr>
+          <a:lstStyle/>
+          <a:p>
+            <a:pPr algn="r"/>
+            <a:r>
+              <a:rPr sz="800" b="0">
+                <a:solidFill>
+                  <a:srgbClr val="5D6B7E"/>
+                </a:solidFill>
+              </a:rPr>
+              <a:t>MODULE 8  ·  11</a:t>
+            </a:r>
+          </a:p>
+        </p:txBody>
+      </p:sp>
+    </p:spTree>
+  </p:cSld>
+  <p:clrMapOvr>
+    <a:masterClrMapping/>
+  </p:clrMapOvr>
+</p:sld>
+</file>
+
+<file path=ppt/slides/slide14.xml><?xml version="1.0" encoding="utf-8"?>
+<p:sld xmlns:a="http://schemas.openxmlformats.org/drawingml/2006/main" xmlns:p="http://schemas.openxmlformats.org/presentationml/2006/main" xmlns:r="http://schemas.openxmlformats.org/officeDocument/2006/relationships">
+  <p:cSld>
+    <p:bg>
+      <p:bgPr>
+        <a:solidFill>
+          <a:srgbClr val="F7F8FA"/>
+        </a:solidFill>
+        <a:effectLst/>
+      </p:bgPr>
+    </p:bg>
+    <p:spTree>
+      <p:nvGrpSpPr>
+        <p:cNvPr id="1" name=""/>
+        <p:cNvGrpSpPr/>
+        <p:nvPr/>
+      </p:nvGrpSpPr>
+      <p:grpSpPr/>
+      <p:sp>
+        <p:nvSpPr>
+          <p:cNvPr id="2" name="Rectangle 1"/>
+          <p:cNvSpPr/>
+          <p:nvPr/>
+        </p:nvSpPr>
+        <p:spPr>
+          <a:xfrm>
+            <a:off x="548640" y="402336"/>
+            <a:ext cx="118872" cy="118872"/>
+          </a:xfrm>
+          <a:prstGeom prst="rect">
+            <a:avLst/>
+          </a:prstGeom>
+          <a:solidFill>
+            <a:srgbClr val="C9A227"/>
+          </a:solidFill>
+          <a:ln>
+            <a:noFill/>
+          </a:ln>
+          <a:effectLst/>
+        </p:spPr>
+        <p:style>
+          <a:lnRef idx="1">
+            <a:schemeClr val="accent1"/>
+          </a:lnRef>
+          <a:fillRef idx="3">
+            <a:schemeClr val="accent1"/>
+          </a:fillRef>
+          <a:effectRef idx="2">
+            <a:schemeClr val="accent1"/>
+          </a:effectRef>
+          <a:fontRef idx="minor">
+            <a:schemeClr val="lt1"/>
+          </a:fontRef>
+        </p:style>
+        <p:txBody>
+          <a:bodyPr rtlCol="0" anchor="ctr"/>
+          <a:lstStyle/>
+          <a:p>
+            <a:pPr algn="ctr"/>
+          </a:p>
+        </p:txBody>
+      </p:sp>
+      <p:sp>
+        <p:nvSpPr>
+          <p:cNvPr id="3" name="TextBox 2"/>
+          <p:cNvSpPr txBox="1"/>
+          <p:nvPr/>
+        </p:nvSpPr>
+        <p:spPr>
+          <a:xfrm>
+            <a:off x="786384" y="310896"/>
+            <a:ext cx="10817352" cy="274320"/>
+          </a:xfrm>
+          <a:prstGeom prst="rect">
+            <a:avLst/>
+          </a:prstGeom>
+          <a:noFill/>
+        </p:spPr>
+        <p:txBody>
+          <a:bodyPr wrap="square" anchor="t" lIns="0" rIns="0" tIns="0" bIns="0">
+            <a:spAutoFit/>
+          </a:bodyPr>
+          <a:lstStyle/>
+          <a:p>
+            <a:pPr algn="l"/>
+            <a:r>
+              <a:rPr sz="1100" b="1">
+                <a:solidFill>
+                  <a:srgbClr val="C9A227"/>
+                </a:solidFill>
+              </a:rPr>
+              <a:t>PRACTICE QUESTIONS</a:t>
+            </a:r>
+          </a:p>
+        </p:txBody>
+      </p:sp>
+      <p:sp>
+        <p:nvSpPr>
+          <p:cNvPr id="4" name="TextBox 3"/>
+          <p:cNvSpPr txBox="1"/>
+          <p:nvPr/>
+        </p:nvSpPr>
+        <p:spPr>
+          <a:xfrm>
+            <a:off x="548640" y="621792"/>
+            <a:ext cx="11091672" cy="731520"/>
+          </a:xfrm>
+          <a:prstGeom prst="rect">
+            <a:avLst/>
+          </a:prstGeom>
+          <a:noFill/>
+        </p:spPr>
+        <p:txBody>
+          <a:bodyPr wrap="square" anchor="t" lIns="0" rIns="0" tIns="0" bIns="0">
+            <a:spAutoFit/>
+          </a:bodyPr>
+          <a:lstStyle/>
+          <a:p>
+            <a:pPr algn="l"/>
+            <a:r>
+              <a:rPr sz="2900" b="1">
+                <a:solidFill>
+                  <a:srgbClr val="0F2145"/>
+                </a:solidFill>
+                <a:latin typeface="Georgia"/>
+              </a:rPr>
+              <a:t>Simple questions before the exam</a:t>
+            </a:r>
+          </a:p>
+        </p:txBody>
+      </p:sp>
+      <p:sp>
+        <p:nvSpPr>
+          <p:cNvPr id="5" name="Rectangle 4"/>
+          <p:cNvSpPr/>
+          <p:nvPr/>
+        </p:nvSpPr>
+        <p:spPr>
+          <a:xfrm>
+            <a:off x="548640" y="1371600"/>
+            <a:ext cx="11091672" cy="548640"/>
+          </a:xfrm>
+          <a:prstGeom prst="rect">
+            <a:avLst/>
+          </a:prstGeom>
+          <a:solidFill>
+            <a:srgbClr val="FFFFFF"/>
+          </a:solidFill>
+          <a:ln>
+            <a:noFill/>
+          </a:ln>
+          <a:effectLst/>
+        </p:spPr>
+        <p:style>
+          <a:lnRef idx="1">
+            <a:schemeClr val="accent1"/>
+          </a:lnRef>
+          <a:fillRef idx="3">
+            <a:schemeClr val="accent1"/>
+          </a:fillRef>
+          <a:effectRef idx="2">
+            <a:schemeClr val="accent1"/>
+          </a:effectRef>
+          <a:fontRef idx="minor">
+            <a:schemeClr val="lt1"/>
+          </a:fontRef>
+        </p:style>
+        <p:txBody>
+          <a:bodyPr rtlCol="0" anchor="ctr"/>
+          <a:lstStyle/>
+          <a:p>
+            <a:pPr algn="ctr"/>
+          </a:p>
+        </p:txBody>
+      </p:sp>
+      <p:sp>
+        <p:nvSpPr>
+          <p:cNvPr id="6" name="Rectangle 5"/>
+          <p:cNvSpPr/>
+          <p:nvPr/>
+        </p:nvSpPr>
+        <p:spPr>
+          <a:xfrm>
+            <a:off x="548640" y="1371600"/>
+            <a:ext cx="64008" cy="548640"/>
+          </a:xfrm>
+          <a:prstGeom prst="rect">
+            <a:avLst/>
+          </a:prstGeom>
+          <a:solidFill>
+            <a:srgbClr val="3A5C9E"/>
+          </a:solidFill>
+          <a:ln>
+            <a:noFill/>
+          </a:ln>
+          <a:effectLst/>
+        </p:spPr>
+        <p:style>
+          <a:lnRef idx="1">
+            <a:schemeClr val="accent1"/>
+          </a:lnRef>
+          <a:fillRef idx="3">
+            <a:schemeClr val="accent1"/>
+          </a:fillRef>
+          <a:effectRef idx="2">
+            <a:schemeClr val="accent1"/>
+          </a:effectRef>
+          <a:fontRef idx="minor">
+            <a:schemeClr val="lt1"/>
+          </a:fontRef>
+        </p:style>
+        <p:txBody>
+          <a:bodyPr rtlCol="0" anchor="ctr"/>
+          <a:lstStyle/>
+          <a:p>
+            <a:pPr algn="ctr"/>
+          </a:p>
+        </p:txBody>
+      </p:sp>
+      <p:sp>
+        <p:nvSpPr>
+          <p:cNvPr id="7" name="TextBox 6"/>
+          <p:cNvSpPr txBox="1"/>
+          <p:nvPr/>
+        </p:nvSpPr>
+        <p:spPr>
+          <a:xfrm>
+            <a:off x="822960" y="1481328"/>
+            <a:ext cx="640080" cy="365760"/>
+          </a:xfrm>
+          <a:prstGeom prst="rect">
+            <a:avLst/>
+          </a:prstGeom>
+          <a:noFill/>
+        </p:spPr>
+        <p:txBody>
+          <a:bodyPr wrap="square" anchor="t" lIns="0" rIns="0" tIns="0" bIns="0">
+            <a:spAutoFit/>
+          </a:bodyPr>
+          <a:lstStyle/>
+          <a:p>
+            <a:pPr algn="l"/>
+            <a:r>
+              <a:rPr sz="1300" b="1">
+                <a:solidFill>
+                  <a:srgbClr val="3A5C9E"/>
+                </a:solidFill>
+                <a:latin typeface="Georgia"/>
+              </a:rPr>
+              <a:t>Q1</a:t>
+            </a:r>
+          </a:p>
+        </p:txBody>
+      </p:sp>
+      <p:sp>
+        <p:nvSpPr>
+          <p:cNvPr id="8" name="TextBox 7"/>
+          <p:cNvSpPr txBox="1"/>
+          <p:nvPr/>
+        </p:nvSpPr>
+        <p:spPr>
+          <a:xfrm>
+            <a:off x="1508760" y="1426464"/>
+            <a:ext cx="9966960" cy="502920"/>
+          </a:xfrm>
+          <a:prstGeom prst="rect">
+            <a:avLst/>
+          </a:prstGeom>
+          <a:noFill/>
+        </p:spPr>
+        <p:txBody>
+          <a:bodyPr wrap="square" anchor="t" lIns="0" rIns="0" tIns="0" bIns="0">
+            <a:spAutoFit/>
+          </a:bodyPr>
+          <a:lstStyle/>
+          <a:p>
+            <a:pPr algn="l"/>
+            <a:r>
+              <a:rPr sz="1100" b="1">
+                <a:solidFill>
+                  <a:srgbClr val="1B2A41"/>
+                </a:solidFill>
+              </a:rPr>
+              <a:t>What is NAV, and how is it calculated?</a:t>
+            </a:r>
+          </a:p>
+          <a:p>
+            <a:pPr algn="l">
+              <a:spcBef>
+                <a:spcPts val="100"/>
+              </a:spcBef>
+            </a:pPr>
+            <a:r>
+              <a:rPr sz="900" b="1">
+                <a:solidFill>
+                  <a:srgbClr val="C9A227"/>
+                </a:solidFill>
+              </a:rPr>
+              <a:t>TIP  </a:t>
+            </a:r>
+            <a:r>
+              <a:rPr sz="950" b="0">
+                <a:solidFill>
+                  <a:srgbClr val="5D6B7E"/>
+                </a:solidFill>
+              </a:rPr>
+              <a:t>Net asset value per unit: holdings at market price plus cash minus expenses, divided by units.</a:t>
+            </a:r>
+          </a:p>
+        </p:txBody>
+      </p:sp>
+      <p:sp>
+        <p:nvSpPr>
+          <p:cNvPr id="9" name="Rectangle 8"/>
+          <p:cNvSpPr/>
+          <p:nvPr/>
+        </p:nvSpPr>
+        <p:spPr>
+          <a:xfrm>
+            <a:off x="548640" y="1984248"/>
+            <a:ext cx="11091672" cy="548640"/>
+          </a:xfrm>
+          <a:prstGeom prst="rect">
+            <a:avLst/>
+          </a:prstGeom>
+          <a:solidFill>
+            <a:srgbClr val="FFFFFF"/>
+          </a:solidFill>
+          <a:ln>
+            <a:noFill/>
+          </a:ln>
+          <a:effectLst/>
+        </p:spPr>
+        <p:style>
+          <a:lnRef idx="1">
+            <a:schemeClr val="accent1"/>
+          </a:lnRef>
+          <a:fillRef idx="3">
+            <a:schemeClr val="accent1"/>
+          </a:fillRef>
+          <a:effectRef idx="2">
+            <a:schemeClr val="accent1"/>
+          </a:effectRef>
+          <a:fontRef idx="minor">
+            <a:schemeClr val="lt1"/>
+          </a:fontRef>
+        </p:style>
+        <p:txBody>
+          <a:bodyPr rtlCol="0" anchor="ctr"/>
+          <a:lstStyle/>
+          <a:p>
+            <a:pPr algn="ctr"/>
+          </a:p>
+        </p:txBody>
+      </p:sp>
+      <p:sp>
+        <p:nvSpPr>
+          <p:cNvPr id="10" name="Rectangle 9"/>
+          <p:cNvSpPr/>
+          <p:nvPr/>
+        </p:nvSpPr>
+        <p:spPr>
+          <a:xfrm>
+            <a:off x="548640" y="1984248"/>
+            <a:ext cx="64008" cy="548640"/>
+          </a:xfrm>
+          <a:prstGeom prst="rect">
+            <a:avLst/>
+          </a:prstGeom>
+          <a:solidFill>
+            <a:srgbClr val="3A5C9E"/>
+          </a:solidFill>
+          <a:ln>
+            <a:noFill/>
+          </a:ln>
+          <a:effectLst/>
+        </p:spPr>
+        <p:style>
+          <a:lnRef idx="1">
+            <a:schemeClr val="accent1"/>
+          </a:lnRef>
+          <a:fillRef idx="3">
+            <a:schemeClr val="accent1"/>
+          </a:fillRef>
+          <a:effectRef idx="2">
+            <a:schemeClr val="accent1"/>
+          </a:effectRef>
+          <a:fontRef idx="minor">
+            <a:schemeClr val="lt1"/>
+          </a:fontRef>
+        </p:style>
+        <p:txBody>
+          <a:bodyPr rtlCol="0" anchor="ctr"/>
+          <a:lstStyle/>
+          <a:p>
+            <a:pPr algn="ctr"/>
+          </a:p>
+        </p:txBody>
+      </p:sp>
+      <p:sp>
+        <p:nvSpPr>
+          <p:cNvPr id="11" name="TextBox 10"/>
+          <p:cNvSpPr txBox="1"/>
+          <p:nvPr/>
+        </p:nvSpPr>
+        <p:spPr>
+          <a:xfrm>
+            <a:off x="822960" y="2093976"/>
+            <a:ext cx="640080" cy="365760"/>
+          </a:xfrm>
+          <a:prstGeom prst="rect">
+            <a:avLst/>
+          </a:prstGeom>
+          <a:noFill/>
+        </p:spPr>
+        <p:txBody>
+          <a:bodyPr wrap="square" anchor="t" lIns="0" rIns="0" tIns="0" bIns="0">
+            <a:spAutoFit/>
+          </a:bodyPr>
+          <a:lstStyle/>
+          <a:p>
+            <a:pPr algn="l"/>
+            <a:r>
+              <a:rPr sz="1300" b="1">
+                <a:solidFill>
+                  <a:srgbClr val="3A5C9E"/>
+                </a:solidFill>
+                <a:latin typeface="Georgia"/>
+              </a:rPr>
+              <a:t>Q2</a:t>
+            </a:r>
+          </a:p>
+        </p:txBody>
+      </p:sp>
+      <p:sp>
+        <p:nvSpPr>
+          <p:cNvPr id="12" name="TextBox 11"/>
+          <p:cNvSpPr txBox="1"/>
+          <p:nvPr/>
+        </p:nvSpPr>
+        <p:spPr>
+          <a:xfrm>
+            <a:off x="1508760" y="2039112"/>
+            <a:ext cx="9966960" cy="502920"/>
+          </a:xfrm>
+          <a:prstGeom prst="rect">
+            <a:avLst/>
+          </a:prstGeom>
+          <a:noFill/>
+        </p:spPr>
+        <p:txBody>
+          <a:bodyPr wrap="square" anchor="t" lIns="0" rIns="0" tIns="0" bIns="0">
+            <a:spAutoFit/>
+          </a:bodyPr>
+          <a:lstStyle/>
+          <a:p>
+            <a:pPr algn="l"/>
+            <a:r>
+              <a:rPr sz="1100" b="1">
+                <a:solidFill>
+                  <a:srgbClr val="1B2A41"/>
+                </a:solidFill>
+              </a:rPr>
+              <a:t>What does a custodian do, and what does a transfer agent do?</a:t>
+            </a:r>
+          </a:p>
+          <a:p>
+            <a:pPr algn="l">
+              <a:spcBef>
+                <a:spcPts val="100"/>
+              </a:spcBef>
+            </a:pPr>
+            <a:r>
+              <a:rPr sz="900" b="1">
+                <a:solidFill>
+                  <a:srgbClr val="C9A227"/>
+                </a:solidFill>
+              </a:rPr>
+              <a:t>TIP  </a:t>
+            </a:r>
+            <a:r>
+              <a:rPr sz="950" b="0">
+                <a:solidFill>
+                  <a:srgbClr val="5D6B7E"/>
+                </a:solidFill>
+              </a:rPr>
+              <a:t>The custodian holds the fund's shares and cash. The transfer agent keeps the list of investors and their units.</a:t>
+            </a:r>
+          </a:p>
+        </p:txBody>
+      </p:sp>
+      <p:sp>
+        <p:nvSpPr>
+          <p:cNvPr id="13" name="Rectangle 12"/>
+          <p:cNvSpPr/>
+          <p:nvPr/>
+        </p:nvSpPr>
+        <p:spPr>
+          <a:xfrm>
+            <a:off x="548640" y="2596896"/>
+            <a:ext cx="11091672" cy="548640"/>
+          </a:xfrm>
+          <a:prstGeom prst="rect">
+            <a:avLst/>
+          </a:prstGeom>
+          <a:solidFill>
+            <a:srgbClr val="FFFFFF"/>
+          </a:solidFill>
+          <a:ln>
+            <a:noFill/>
+          </a:ln>
+          <a:effectLst/>
+        </p:spPr>
+        <p:style>
+          <a:lnRef idx="1">
+            <a:schemeClr val="accent1"/>
+          </a:lnRef>
+          <a:fillRef idx="3">
+            <a:schemeClr val="accent1"/>
+          </a:fillRef>
+          <a:effectRef idx="2">
+            <a:schemeClr val="accent1"/>
+          </a:effectRef>
+          <a:fontRef idx="minor">
+            <a:schemeClr val="lt1"/>
+          </a:fontRef>
+        </p:style>
+        <p:txBody>
+          <a:bodyPr rtlCol="0" anchor="ctr"/>
+          <a:lstStyle/>
+          <a:p>
+            <a:pPr algn="ctr"/>
+          </a:p>
+        </p:txBody>
+      </p:sp>
+      <p:sp>
+        <p:nvSpPr>
+          <p:cNvPr id="14" name="Rectangle 13"/>
+          <p:cNvSpPr/>
+          <p:nvPr/>
+        </p:nvSpPr>
+        <p:spPr>
+          <a:xfrm>
+            <a:off x="548640" y="2596896"/>
+            <a:ext cx="64008" cy="548640"/>
+          </a:xfrm>
+          <a:prstGeom prst="rect">
+            <a:avLst/>
+          </a:prstGeom>
+          <a:solidFill>
+            <a:srgbClr val="3A5C9E"/>
+          </a:solidFill>
+          <a:ln>
+            <a:noFill/>
+          </a:ln>
+          <a:effectLst/>
+        </p:spPr>
+        <p:style>
+          <a:lnRef idx="1">
+            <a:schemeClr val="accent1"/>
+          </a:lnRef>
+          <a:fillRef idx="3">
+            <a:schemeClr val="accent1"/>
+          </a:fillRef>
+          <a:effectRef idx="2">
+            <a:schemeClr val="accent1"/>
+          </a:effectRef>
+          <a:fontRef idx="minor">
+            <a:schemeClr val="lt1"/>
+          </a:fontRef>
+        </p:style>
+        <p:txBody>
+          <a:bodyPr rtlCol="0" anchor="ctr"/>
+          <a:lstStyle/>
+          <a:p>
+            <a:pPr algn="ctr"/>
+          </a:p>
+        </p:txBody>
+      </p:sp>
+      <p:sp>
+        <p:nvSpPr>
+          <p:cNvPr id="15" name="TextBox 14"/>
+          <p:cNvSpPr txBox="1"/>
+          <p:nvPr/>
+        </p:nvSpPr>
+        <p:spPr>
+          <a:xfrm>
+            <a:off x="822960" y="2706624"/>
+            <a:ext cx="640080" cy="365760"/>
+          </a:xfrm>
+          <a:prstGeom prst="rect">
+            <a:avLst/>
+          </a:prstGeom>
+          <a:noFill/>
+        </p:spPr>
+        <p:txBody>
+          <a:bodyPr wrap="square" anchor="t" lIns="0" rIns="0" tIns="0" bIns="0">
+            <a:spAutoFit/>
+          </a:bodyPr>
+          <a:lstStyle/>
+          <a:p>
+            <a:pPr algn="l"/>
+            <a:r>
+              <a:rPr sz="1300" b="1">
+                <a:solidFill>
+                  <a:srgbClr val="3A5C9E"/>
+                </a:solidFill>
+                <a:latin typeface="Georgia"/>
+              </a:rPr>
+              <a:t>Q3</a:t>
+            </a:r>
+          </a:p>
+        </p:txBody>
+      </p:sp>
+      <p:sp>
+        <p:nvSpPr>
+          <p:cNvPr id="16" name="TextBox 15"/>
+          <p:cNvSpPr txBox="1"/>
+          <p:nvPr/>
+        </p:nvSpPr>
+        <p:spPr>
+          <a:xfrm>
+            <a:off x="1508760" y="2651760"/>
+            <a:ext cx="9966960" cy="502920"/>
+          </a:xfrm>
+          <a:prstGeom prst="rect">
+            <a:avLst/>
+          </a:prstGeom>
+          <a:noFill/>
+        </p:spPr>
+        <p:txBody>
+          <a:bodyPr wrap="square" anchor="t" lIns="0" rIns="0" tIns="0" bIns="0">
+            <a:spAutoFit/>
+          </a:bodyPr>
+          <a:lstStyle/>
+          <a:p>
+            <a:pPr algn="l"/>
+            <a:r>
+              <a:rPr sz="1100" b="1">
+                <a:solidFill>
+                  <a:srgbClr val="1B2A41"/>
+                </a:solidFill>
+              </a:rPr>
+              <a:t>What is an accrued expense? Give one fund example.</a:t>
+            </a:r>
+          </a:p>
+          <a:p>
+            <a:pPr algn="l">
+              <a:spcBef>
+                <a:spcPts val="100"/>
+              </a:spcBef>
+            </a:pPr>
+            <a:r>
+              <a:rPr sz="900" b="1">
+                <a:solidFill>
+                  <a:srgbClr val="C9A227"/>
+                </a:solidFill>
+              </a:rPr>
+              <a:t>TIP  </a:t>
+            </a:r>
+            <a:r>
+              <a:rPr sz="950" b="0">
+                <a:solidFill>
+                  <a:srgbClr val="5D6B7E"/>
+                </a:solidFill>
+              </a:rPr>
+              <a:t>Money owed but not yet paid. Example: this month's fee to the fund manager.</a:t>
+            </a:r>
+          </a:p>
+        </p:txBody>
+      </p:sp>
+      <p:sp>
+        <p:nvSpPr>
+          <p:cNvPr id="17" name="Rectangle 16"/>
+          <p:cNvSpPr/>
+          <p:nvPr/>
+        </p:nvSpPr>
+        <p:spPr>
+          <a:xfrm>
+            <a:off x="548640" y="3209544"/>
+            <a:ext cx="11091672" cy="548640"/>
+          </a:xfrm>
+          <a:prstGeom prst="rect">
+            <a:avLst/>
+          </a:prstGeom>
+          <a:solidFill>
+            <a:srgbClr val="FFFFFF"/>
+          </a:solidFill>
+          <a:ln>
+            <a:noFill/>
+          </a:ln>
+          <a:effectLst/>
+        </p:spPr>
+        <p:style>
+          <a:lnRef idx="1">
+            <a:schemeClr val="accent1"/>
+          </a:lnRef>
+          <a:fillRef idx="3">
+            <a:schemeClr val="accent1"/>
+          </a:fillRef>
+          <a:effectRef idx="2">
+            <a:schemeClr val="accent1"/>
+          </a:effectRef>
+          <a:fontRef idx="minor">
+            <a:schemeClr val="lt1"/>
+          </a:fontRef>
+        </p:style>
+        <p:txBody>
+          <a:bodyPr rtlCol="0" anchor="ctr"/>
+          <a:lstStyle/>
+          <a:p>
+            <a:pPr algn="ctr"/>
+          </a:p>
+        </p:txBody>
+      </p:sp>
+      <p:sp>
+        <p:nvSpPr>
+          <p:cNvPr id="18" name="Rectangle 17"/>
+          <p:cNvSpPr/>
+          <p:nvPr/>
+        </p:nvSpPr>
+        <p:spPr>
+          <a:xfrm>
+            <a:off x="548640" y="3209544"/>
+            <a:ext cx="64008" cy="548640"/>
+          </a:xfrm>
+          <a:prstGeom prst="rect">
+            <a:avLst/>
+          </a:prstGeom>
+          <a:solidFill>
+            <a:srgbClr val="3A5C9E"/>
+          </a:solidFill>
+          <a:ln>
+            <a:noFill/>
+          </a:ln>
+          <a:effectLst/>
+        </p:spPr>
+        <p:style>
+          <a:lnRef idx="1">
+            <a:schemeClr val="accent1"/>
+          </a:lnRef>
+          <a:fillRef idx="3">
+            <a:schemeClr val="accent1"/>
+          </a:fillRef>
+          <a:effectRef idx="2">
+            <a:schemeClr val="accent1"/>
+          </a:effectRef>
+          <a:fontRef idx="minor">
+            <a:schemeClr val="lt1"/>
+          </a:fontRef>
+        </p:style>
+        <p:txBody>
+          <a:bodyPr rtlCol="0" anchor="ctr"/>
+          <a:lstStyle/>
+          <a:p>
+            <a:pPr algn="ctr"/>
+          </a:p>
+        </p:txBody>
+      </p:sp>
+      <p:sp>
+        <p:nvSpPr>
+          <p:cNvPr id="19" name="TextBox 18"/>
+          <p:cNvSpPr txBox="1"/>
+          <p:nvPr/>
+        </p:nvSpPr>
+        <p:spPr>
+          <a:xfrm>
+            <a:off x="822960" y="3319272"/>
+            <a:ext cx="640080" cy="365760"/>
+          </a:xfrm>
+          <a:prstGeom prst="rect">
+            <a:avLst/>
+          </a:prstGeom>
+          <a:noFill/>
+        </p:spPr>
+        <p:txBody>
+          <a:bodyPr wrap="square" anchor="t" lIns="0" rIns="0" tIns="0" bIns="0">
+            <a:spAutoFit/>
+          </a:bodyPr>
+          <a:lstStyle/>
+          <a:p>
+            <a:pPr algn="l"/>
+            <a:r>
+              <a:rPr sz="1300" b="1">
+                <a:solidFill>
+                  <a:srgbClr val="3A5C9E"/>
+                </a:solidFill>
+                <a:latin typeface="Georgia"/>
+              </a:rPr>
+              <a:t>Q4</a:t>
+            </a:r>
+          </a:p>
+        </p:txBody>
+      </p:sp>
+      <p:sp>
+        <p:nvSpPr>
+          <p:cNvPr id="20" name="TextBox 19"/>
+          <p:cNvSpPr txBox="1"/>
+          <p:nvPr/>
+        </p:nvSpPr>
+        <p:spPr>
+          <a:xfrm>
+            <a:off x="1508760" y="3264408"/>
+            <a:ext cx="9966960" cy="502920"/>
+          </a:xfrm>
+          <a:prstGeom prst="rect">
+            <a:avLst/>
+          </a:prstGeom>
+          <a:noFill/>
+        </p:spPr>
+        <p:txBody>
+          <a:bodyPr wrap="square" anchor="t" lIns="0" rIns="0" tIns="0" bIns="0">
+            <a:spAutoFit/>
+          </a:bodyPr>
+          <a:lstStyle/>
+          <a:p>
+            <a:pPr algn="l"/>
+            <a:r>
+              <a:rPr sz="1100" b="1">
+                <a:solidFill>
+                  <a:srgbClr val="1B2A41"/>
+                </a:solidFill>
+              </a:rPr>
+              <a:t>An investor puts in ₹10,000 at a NAV of ₹25. How many units does the investor get?</a:t>
+            </a:r>
+          </a:p>
+          <a:p>
+            <a:pPr algn="l">
+              <a:spcBef>
+                <a:spcPts val="100"/>
+              </a:spcBef>
+            </a:pPr>
+            <a:r>
+              <a:rPr sz="900" b="1">
+                <a:solidFill>
+                  <a:srgbClr val="C9A227"/>
+                </a:solidFill>
+              </a:rPr>
+              <a:t>TIP  </a:t>
+            </a:r>
+            <a:r>
+              <a:rPr sz="950" b="0">
+                <a:solidFill>
+                  <a:srgbClr val="5D6B7E"/>
+                </a:solidFill>
+              </a:rPr>
+              <a:t>₹10,000 ÷ ₹25 = 400 units.</a:t>
+            </a:r>
+          </a:p>
+        </p:txBody>
+      </p:sp>
+      <p:sp>
+        <p:nvSpPr>
+          <p:cNvPr id="21" name="Rectangle 20"/>
+          <p:cNvSpPr/>
+          <p:nvPr/>
+        </p:nvSpPr>
+        <p:spPr>
+          <a:xfrm>
+            <a:off x="548640" y="3822191"/>
+            <a:ext cx="11091672" cy="548640"/>
+          </a:xfrm>
+          <a:prstGeom prst="rect">
+            <a:avLst/>
+          </a:prstGeom>
+          <a:solidFill>
+            <a:srgbClr val="FFFFFF"/>
+          </a:solidFill>
+          <a:ln>
+            <a:noFill/>
+          </a:ln>
+          <a:effectLst/>
+        </p:spPr>
+        <p:style>
+          <a:lnRef idx="1">
+            <a:schemeClr val="accent1"/>
+          </a:lnRef>
+          <a:fillRef idx="3">
+            <a:schemeClr val="accent1"/>
+          </a:fillRef>
+          <a:effectRef idx="2">
+            <a:schemeClr val="accent1"/>
+          </a:effectRef>
+          <a:fontRef idx="minor">
+            <a:schemeClr val="lt1"/>
+          </a:fontRef>
+        </p:style>
+        <p:txBody>
+          <a:bodyPr rtlCol="0" anchor="ctr"/>
+          <a:lstStyle/>
+          <a:p>
+            <a:pPr algn="ctr"/>
+          </a:p>
+        </p:txBody>
+      </p:sp>
+      <p:sp>
+        <p:nvSpPr>
+          <p:cNvPr id="22" name="Rectangle 21"/>
+          <p:cNvSpPr/>
+          <p:nvPr/>
+        </p:nvSpPr>
+        <p:spPr>
+          <a:xfrm>
+            <a:off x="548640" y="3822191"/>
+            <a:ext cx="64008" cy="548640"/>
+          </a:xfrm>
+          <a:prstGeom prst="rect">
+            <a:avLst/>
+          </a:prstGeom>
+          <a:solidFill>
+            <a:srgbClr val="3A5C9E"/>
+          </a:solidFill>
+          <a:ln>
+            <a:noFill/>
+          </a:ln>
+          <a:effectLst/>
+        </p:spPr>
+        <p:style>
+          <a:lnRef idx="1">
+            <a:schemeClr val="accent1"/>
+          </a:lnRef>
+          <a:fillRef idx="3">
+            <a:schemeClr val="accent1"/>
+          </a:fillRef>
+          <a:effectRef idx="2">
+            <a:schemeClr val="accent1"/>
+          </a:effectRef>
+          <a:fontRef idx="minor">
+            <a:schemeClr val="lt1"/>
+          </a:fontRef>
+        </p:style>
+        <p:txBody>
+          <a:bodyPr rtlCol="0" anchor="ctr"/>
+          <a:lstStyle/>
+          <a:p>
+            <a:pPr algn="ctr"/>
+          </a:p>
+        </p:txBody>
+      </p:sp>
+      <p:sp>
+        <p:nvSpPr>
+          <p:cNvPr id="23" name="TextBox 22"/>
+          <p:cNvSpPr txBox="1"/>
+          <p:nvPr/>
+        </p:nvSpPr>
+        <p:spPr>
+          <a:xfrm>
+            <a:off x="822960" y="3931920"/>
+            <a:ext cx="640080" cy="365760"/>
+          </a:xfrm>
+          <a:prstGeom prst="rect">
+            <a:avLst/>
+          </a:prstGeom>
+          <a:noFill/>
+        </p:spPr>
+        <p:txBody>
+          <a:bodyPr wrap="square" anchor="t" lIns="0" rIns="0" tIns="0" bIns="0">
+            <a:spAutoFit/>
+          </a:bodyPr>
+          <a:lstStyle/>
+          <a:p>
+            <a:pPr algn="l"/>
+            <a:r>
+              <a:rPr sz="1300" b="1">
+                <a:solidFill>
+                  <a:srgbClr val="3A5C9E"/>
+                </a:solidFill>
+                <a:latin typeface="Georgia"/>
+              </a:rPr>
+              <a:t>Q5</a:t>
+            </a:r>
+          </a:p>
+        </p:txBody>
+      </p:sp>
+      <p:sp>
+        <p:nvSpPr>
+          <p:cNvPr id="24" name="TextBox 23"/>
+          <p:cNvSpPr txBox="1"/>
+          <p:nvPr/>
+        </p:nvSpPr>
+        <p:spPr>
+          <a:xfrm>
+            <a:off x="1508760" y="3877055"/>
+            <a:ext cx="9966960" cy="502920"/>
+          </a:xfrm>
+          <a:prstGeom prst="rect">
+            <a:avLst/>
+          </a:prstGeom>
+          <a:noFill/>
+        </p:spPr>
+        <p:txBody>
+          <a:bodyPr wrap="square" anchor="t" lIns="0" rIns="0" tIns="0" bIns="0">
+            <a:spAutoFit/>
+          </a:bodyPr>
+          <a:lstStyle/>
+          <a:p>
+            <a:pPr algn="l"/>
+            <a:r>
+              <a:rPr sz="1100" b="1">
+                <a:solidFill>
+                  <a:srgbClr val="1B2A41"/>
+                </a:solidFill>
+              </a:rPr>
+              <a:t>What is a reconciliation break? Give one example.</a:t>
+            </a:r>
+          </a:p>
+          <a:p>
+            <a:pPr algn="l">
+              <a:spcBef>
+                <a:spcPts val="100"/>
+              </a:spcBef>
+            </a:pPr>
+            <a:r>
+              <a:rPr sz="900" b="1">
+                <a:solidFill>
+                  <a:srgbClr val="C9A227"/>
+                </a:solidFill>
+              </a:rPr>
+              <a:t>TIP  </a:t>
+            </a:r>
+            <a:r>
+              <a:rPr sz="950" b="0">
+                <a:solidFill>
+                  <a:srgbClr val="5D6B7E"/>
+                </a:solidFill>
+              </a:rPr>
+              <a:t>A difference between two records. Example: a dividend the custodian received that the books did not record.</a:t>
+            </a:r>
+          </a:p>
+        </p:txBody>
+      </p:sp>
+      <p:sp>
+        <p:nvSpPr>
+          <p:cNvPr id="25" name="Rectangle 24"/>
+          <p:cNvSpPr/>
+          <p:nvPr/>
+        </p:nvSpPr>
+        <p:spPr>
+          <a:xfrm>
+            <a:off x="548640" y="4434840"/>
+            <a:ext cx="11091672" cy="548640"/>
+          </a:xfrm>
+          <a:prstGeom prst="rect">
+            <a:avLst/>
+          </a:prstGeom>
+          <a:solidFill>
+            <a:srgbClr val="FFFFFF"/>
+          </a:solidFill>
+          <a:ln>
+            <a:noFill/>
+          </a:ln>
+          <a:effectLst/>
+        </p:spPr>
+        <p:style>
+          <a:lnRef idx="1">
+            <a:schemeClr val="accent1"/>
+          </a:lnRef>
+          <a:fillRef idx="3">
+            <a:schemeClr val="accent1"/>
+          </a:fillRef>
+          <a:effectRef idx="2">
+            <a:schemeClr val="accent1"/>
+          </a:effectRef>
+          <a:fontRef idx="minor">
+            <a:schemeClr val="lt1"/>
+          </a:fontRef>
+        </p:style>
+        <p:txBody>
+          <a:bodyPr rtlCol="0" anchor="ctr"/>
+          <a:lstStyle/>
+          <a:p>
+            <a:pPr algn="ctr"/>
+          </a:p>
+        </p:txBody>
+      </p:sp>
+      <p:sp>
+        <p:nvSpPr>
+          <p:cNvPr id="26" name="Rectangle 25"/>
+          <p:cNvSpPr/>
+          <p:nvPr/>
+        </p:nvSpPr>
+        <p:spPr>
+          <a:xfrm>
+            <a:off x="548640" y="4434840"/>
+            <a:ext cx="64008" cy="548640"/>
+          </a:xfrm>
+          <a:prstGeom prst="rect">
+            <a:avLst/>
+          </a:prstGeom>
+          <a:solidFill>
+            <a:srgbClr val="3A5C9E"/>
+          </a:solidFill>
+          <a:ln>
+            <a:noFill/>
+          </a:ln>
+          <a:effectLst/>
+        </p:spPr>
+        <p:style>
+          <a:lnRef idx="1">
+            <a:schemeClr val="accent1"/>
+          </a:lnRef>
+          <a:fillRef idx="3">
+            <a:schemeClr val="accent1"/>
+          </a:fillRef>
+          <a:effectRef idx="2">
+            <a:schemeClr val="accent1"/>
+          </a:effectRef>
+          <a:fontRef idx="minor">
+            <a:schemeClr val="lt1"/>
+          </a:fontRef>
+        </p:style>
+        <p:txBody>
+          <a:bodyPr rtlCol="0" anchor="ctr"/>
+          <a:lstStyle/>
+          <a:p>
+            <a:pPr algn="ctr"/>
+          </a:p>
+        </p:txBody>
+      </p:sp>
+      <p:sp>
+        <p:nvSpPr>
+          <p:cNvPr id="27" name="TextBox 26"/>
+          <p:cNvSpPr txBox="1"/>
+          <p:nvPr/>
+        </p:nvSpPr>
+        <p:spPr>
+          <a:xfrm>
+            <a:off x="822960" y="4544568"/>
+            <a:ext cx="640080" cy="365760"/>
+          </a:xfrm>
+          <a:prstGeom prst="rect">
+            <a:avLst/>
+          </a:prstGeom>
+          <a:noFill/>
+        </p:spPr>
+        <p:txBody>
+          <a:bodyPr wrap="square" anchor="t" lIns="0" rIns="0" tIns="0" bIns="0">
+            <a:spAutoFit/>
+          </a:bodyPr>
+          <a:lstStyle/>
+          <a:p>
+            <a:pPr algn="l"/>
+            <a:r>
+              <a:rPr sz="1300" b="1">
+                <a:solidFill>
+                  <a:srgbClr val="3A5C9E"/>
+                </a:solidFill>
+                <a:latin typeface="Georgia"/>
+              </a:rPr>
+              <a:t>Q6</a:t>
+            </a:r>
+          </a:p>
+        </p:txBody>
+      </p:sp>
+      <p:sp>
+        <p:nvSpPr>
+          <p:cNvPr id="28" name="TextBox 27"/>
+          <p:cNvSpPr txBox="1"/>
+          <p:nvPr/>
+        </p:nvSpPr>
+        <p:spPr>
+          <a:xfrm>
+            <a:off x="1508760" y="4489703"/>
+            <a:ext cx="9966960" cy="502920"/>
+          </a:xfrm>
+          <a:prstGeom prst="rect">
+            <a:avLst/>
+          </a:prstGeom>
+          <a:noFill/>
+        </p:spPr>
+        <p:txBody>
+          <a:bodyPr wrap="square" anchor="t" lIns="0" rIns="0" tIns="0" bIns="0">
+            <a:spAutoFit/>
+          </a:bodyPr>
+          <a:lstStyle/>
+          <a:p>
+            <a:pPr algn="l"/>
+            <a:r>
+              <a:rPr sz="1100" b="1">
+                <a:solidFill>
+                  <a:srgbClr val="1B2A41"/>
+                </a:solidFill>
+              </a:rPr>
+              <a:t>What is STP?</a:t>
+            </a:r>
+          </a:p>
+          <a:p>
+            <a:pPr algn="l">
+              <a:spcBef>
+                <a:spcPts val="100"/>
+              </a:spcBef>
+            </a:pPr>
+            <a:r>
+              <a:rPr sz="900" b="1">
+                <a:solidFill>
+                  <a:srgbClr val="C9A227"/>
+                </a:solidFill>
+              </a:rPr>
+              <a:t>TIP  </a:t>
+            </a:r>
+            <a:r>
+              <a:rPr sz="950" b="0">
+                <a:solidFill>
+                  <a:srgbClr val="5D6B7E"/>
+                </a:solidFill>
+              </a:rPr>
+              <a:t>Straight-through processing: a transaction runs end to end with no manual step.</a:t>
+            </a:r>
+          </a:p>
+        </p:txBody>
+      </p:sp>
+      <p:sp>
+        <p:nvSpPr>
+          <p:cNvPr id="29" name="Rectangle 28"/>
+          <p:cNvSpPr/>
+          <p:nvPr/>
+        </p:nvSpPr>
+        <p:spPr>
+          <a:xfrm>
+            <a:off x="548640" y="5047488"/>
+            <a:ext cx="11091672" cy="548640"/>
+          </a:xfrm>
+          <a:prstGeom prst="rect">
+            <a:avLst/>
+          </a:prstGeom>
+          <a:solidFill>
+            <a:srgbClr val="FFFFFF"/>
+          </a:solidFill>
+          <a:ln>
+            <a:noFill/>
+          </a:ln>
+          <a:effectLst/>
+        </p:spPr>
+        <p:style>
+          <a:lnRef idx="1">
+            <a:schemeClr val="accent1"/>
+          </a:lnRef>
+          <a:fillRef idx="3">
+            <a:schemeClr val="accent1"/>
+          </a:fillRef>
+          <a:effectRef idx="2">
+            <a:schemeClr val="accent1"/>
+          </a:effectRef>
+          <a:fontRef idx="minor">
+            <a:schemeClr val="lt1"/>
+          </a:fontRef>
+        </p:style>
+        <p:txBody>
+          <a:bodyPr rtlCol="0" anchor="ctr"/>
+          <a:lstStyle/>
+          <a:p>
+            <a:pPr algn="ctr"/>
+          </a:p>
+        </p:txBody>
+      </p:sp>
+      <p:sp>
+        <p:nvSpPr>
+          <p:cNvPr id="30" name="Rectangle 29"/>
+          <p:cNvSpPr/>
+          <p:nvPr/>
+        </p:nvSpPr>
+        <p:spPr>
+          <a:xfrm>
+            <a:off x="548640" y="5047488"/>
+            <a:ext cx="64008" cy="548640"/>
+          </a:xfrm>
+          <a:prstGeom prst="rect">
+            <a:avLst/>
+          </a:prstGeom>
+          <a:solidFill>
+            <a:srgbClr val="3A5C9E"/>
+          </a:solidFill>
+          <a:ln>
+            <a:noFill/>
+          </a:ln>
+          <a:effectLst/>
+        </p:spPr>
+        <p:style>
+          <a:lnRef idx="1">
+            <a:schemeClr val="accent1"/>
+          </a:lnRef>
+          <a:fillRef idx="3">
+            <a:schemeClr val="accent1"/>
+          </a:fillRef>
+          <a:effectRef idx="2">
+            <a:schemeClr val="accent1"/>
+          </a:effectRef>
+          <a:fontRef idx="minor">
+            <a:schemeClr val="lt1"/>
+          </a:fontRef>
+        </p:style>
+        <p:txBody>
+          <a:bodyPr rtlCol="0" anchor="ctr"/>
+          <a:lstStyle/>
+          <a:p>
+            <a:pPr algn="ctr"/>
+          </a:p>
+        </p:txBody>
+      </p:sp>
+      <p:sp>
+        <p:nvSpPr>
+          <p:cNvPr id="31" name="TextBox 30"/>
+          <p:cNvSpPr txBox="1"/>
+          <p:nvPr/>
+        </p:nvSpPr>
+        <p:spPr>
+          <a:xfrm>
+            <a:off x="822960" y="5157216"/>
+            <a:ext cx="640080" cy="365760"/>
+          </a:xfrm>
+          <a:prstGeom prst="rect">
+            <a:avLst/>
+          </a:prstGeom>
+          <a:noFill/>
+        </p:spPr>
+        <p:txBody>
+          <a:bodyPr wrap="square" anchor="t" lIns="0" rIns="0" tIns="0" bIns="0">
+            <a:spAutoFit/>
+          </a:bodyPr>
+          <a:lstStyle/>
+          <a:p>
+            <a:pPr algn="l"/>
+            <a:r>
+              <a:rPr sz="1300" b="1">
+                <a:solidFill>
+                  <a:srgbClr val="3A5C9E"/>
+                </a:solidFill>
+                <a:latin typeface="Georgia"/>
+              </a:rPr>
+              <a:t>Q7</a:t>
+            </a:r>
+          </a:p>
+        </p:txBody>
+      </p:sp>
+      <p:sp>
+        <p:nvSpPr>
+          <p:cNvPr id="32" name="TextBox 31"/>
+          <p:cNvSpPr txBox="1"/>
+          <p:nvPr/>
+        </p:nvSpPr>
+        <p:spPr>
+          <a:xfrm>
+            <a:off x="1508760" y="5102351"/>
+            <a:ext cx="9966960" cy="502920"/>
+          </a:xfrm>
+          <a:prstGeom prst="rect">
+            <a:avLst/>
+          </a:prstGeom>
+          <a:noFill/>
+        </p:spPr>
+        <p:txBody>
+          <a:bodyPr wrap="square" anchor="t" lIns="0" rIns="0" tIns="0" bIns="0">
+            <a:spAutoFit/>
+          </a:bodyPr>
+          <a:lstStyle/>
+          <a:p>
+            <a:pPr algn="l"/>
+            <a:r>
+              <a:rPr sz="1100" b="1">
+                <a:solidFill>
+                  <a:srgbClr val="1B2A41"/>
+                </a:solidFill>
+              </a:rPr>
+              <a:t>What is a Claude skill, and which one helps a fund accountant?</a:t>
+            </a:r>
+          </a:p>
+          <a:p>
+            <a:pPr algn="l">
+              <a:spcBef>
+                <a:spcPts val="100"/>
+              </a:spcBef>
+            </a:pPr>
+            <a:r>
+              <a:rPr sz="900" b="1">
+                <a:solidFill>
+                  <a:srgbClr val="C9A227"/>
+                </a:solidFill>
+              </a:rPr>
+              <a:t>TIP  </a:t>
+            </a:r>
+            <a:r>
+              <a:rPr sz="950" b="0">
+                <a:solidFill>
+                  <a:srgbClr val="5D6B7E"/>
+                </a:solidFill>
+              </a:rPr>
+              <a:t>Saved instructions for one job. The reconciliation skill compares records and sorts the breaks.</a:t>
+            </a:r>
+          </a:p>
+        </p:txBody>
+      </p:sp>
+      <p:sp>
+        <p:nvSpPr>
+          <p:cNvPr id="33" name="Rectangle 32"/>
+          <p:cNvSpPr/>
+          <p:nvPr/>
+        </p:nvSpPr>
+        <p:spPr>
+          <a:xfrm>
+            <a:off x="548640" y="5660136"/>
+            <a:ext cx="11091672" cy="548640"/>
+          </a:xfrm>
+          <a:prstGeom prst="rect">
+            <a:avLst/>
+          </a:prstGeom>
+          <a:solidFill>
+            <a:srgbClr val="FFFFFF"/>
+          </a:solidFill>
+          <a:ln>
+            <a:noFill/>
+          </a:ln>
+          <a:effectLst/>
+        </p:spPr>
+        <p:style>
+          <a:lnRef idx="1">
+            <a:schemeClr val="accent1"/>
+          </a:lnRef>
+          <a:fillRef idx="3">
+            <a:schemeClr val="accent1"/>
+          </a:fillRef>
+          <a:effectRef idx="2">
+            <a:schemeClr val="accent1"/>
+          </a:effectRef>
+          <a:fontRef idx="minor">
+            <a:schemeClr val="lt1"/>
+          </a:fontRef>
+        </p:style>
+        <p:txBody>
+          <a:bodyPr rtlCol="0" anchor="ctr"/>
+          <a:lstStyle/>
+          <a:p>
+            <a:pPr algn="ctr"/>
+          </a:p>
+        </p:txBody>
+      </p:sp>
+      <p:sp>
+        <p:nvSpPr>
+          <p:cNvPr id="34" name="Rectangle 33"/>
+          <p:cNvSpPr/>
+          <p:nvPr/>
+        </p:nvSpPr>
+        <p:spPr>
+          <a:xfrm>
+            <a:off x="548640" y="5660136"/>
+            <a:ext cx="64008" cy="548640"/>
+          </a:xfrm>
+          <a:prstGeom prst="rect">
+            <a:avLst/>
+          </a:prstGeom>
+          <a:solidFill>
+            <a:srgbClr val="3A5C9E"/>
+          </a:solidFill>
+          <a:ln>
+            <a:noFill/>
+          </a:ln>
+          <a:effectLst/>
+        </p:spPr>
+        <p:style>
+          <a:lnRef idx="1">
+            <a:schemeClr val="accent1"/>
+          </a:lnRef>
+          <a:fillRef idx="3">
+            <a:schemeClr val="accent1"/>
+          </a:fillRef>
+          <a:effectRef idx="2">
+            <a:schemeClr val="accent1"/>
+          </a:effectRef>
+          <a:fontRef idx="minor">
+            <a:schemeClr val="lt1"/>
+          </a:fontRef>
+        </p:style>
+        <p:txBody>
+          <a:bodyPr rtlCol="0" anchor="ctr"/>
+          <a:lstStyle/>
+          <a:p>
+            <a:pPr algn="ctr"/>
+          </a:p>
+        </p:txBody>
+      </p:sp>
+      <p:sp>
+        <p:nvSpPr>
+          <p:cNvPr id="35" name="TextBox 34"/>
+          <p:cNvSpPr txBox="1"/>
+          <p:nvPr/>
+        </p:nvSpPr>
+        <p:spPr>
+          <a:xfrm>
+            <a:off x="822960" y="5769864"/>
+            <a:ext cx="640080" cy="365760"/>
+          </a:xfrm>
+          <a:prstGeom prst="rect">
+            <a:avLst/>
+          </a:prstGeom>
+          <a:noFill/>
+        </p:spPr>
+        <p:txBody>
+          <a:bodyPr wrap="square" anchor="t" lIns="0" rIns="0" tIns="0" bIns="0">
+            <a:spAutoFit/>
+          </a:bodyPr>
+          <a:lstStyle/>
+          <a:p>
+            <a:pPr algn="l"/>
+            <a:r>
+              <a:rPr sz="1300" b="1">
+                <a:solidFill>
+                  <a:srgbClr val="3A5C9E"/>
+                </a:solidFill>
+                <a:latin typeface="Georgia"/>
+              </a:rPr>
+              <a:t>Q8</a:t>
+            </a:r>
+          </a:p>
+        </p:txBody>
+      </p:sp>
+      <p:sp>
+        <p:nvSpPr>
+          <p:cNvPr id="36" name="TextBox 35"/>
+          <p:cNvSpPr txBox="1"/>
+          <p:nvPr/>
+        </p:nvSpPr>
+        <p:spPr>
+          <a:xfrm>
+            <a:off x="1508760" y="5714999"/>
+            <a:ext cx="9966960" cy="502920"/>
+          </a:xfrm>
+          <a:prstGeom prst="rect">
+            <a:avLst/>
+          </a:prstGeom>
+          <a:noFill/>
+        </p:spPr>
+        <p:txBody>
+          <a:bodyPr wrap="square" anchor="t" lIns="0" rIns="0" tIns="0" bIns="0">
+            <a:spAutoFit/>
+          </a:bodyPr>
+          <a:lstStyle/>
+          <a:p>
+            <a:pPr algn="l"/>
+            <a:r>
+              <a:rPr sz="1100" b="1">
+                <a:solidFill>
+                  <a:srgbClr val="1B2A41"/>
+                </a:solidFill>
+              </a:rPr>
+              <a:t>Where can AI help in KYC, and what must a person still do?</a:t>
+            </a:r>
+          </a:p>
+          <a:p>
+            <a:pPr algn="l">
+              <a:spcBef>
+                <a:spcPts val="100"/>
+              </a:spcBef>
+            </a:pPr>
+            <a:r>
+              <a:rPr sz="900" b="1">
+                <a:solidFill>
+                  <a:srgbClr val="C9A227"/>
+                </a:solidFill>
+              </a:rPr>
+              <a:t>TIP  </a:t>
+            </a:r>
+            <a:r>
+              <a:rPr sz="950" b="0">
+                <a:solidFill>
+                  <a:srgbClr val="5D6B7E"/>
+                </a:solidFill>
+              </a:rPr>
+              <a:t>AI reads documents and matches names. A person approves the investor.</a:t>
+            </a:r>
+          </a:p>
+        </p:txBody>
+      </p:sp>
+      <p:sp>
+        <p:nvSpPr>
+          <p:cNvPr id="37" name="TextBox 36"/>
+          <p:cNvSpPr txBox="1"/>
+          <p:nvPr/>
+        </p:nvSpPr>
+        <p:spPr>
+          <a:xfrm>
+            <a:off x="548640" y="6473952"/>
+            <a:ext cx="7315200" cy="228600"/>
+          </a:xfrm>
+          <a:prstGeom prst="rect">
+            <a:avLst/>
+          </a:prstGeom>
+          <a:noFill/>
+        </p:spPr>
+        <p:txBody>
+          <a:bodyPr wrap="square" anchor="t" lIns="0" rIns="0" tIns="0" bIns="0">
+            <a:spAutoFit/>
+          </a:bodyPr>
+          <a:lstStyle/>
+          <a:p>
+            <a:pPr algn="l"/>
+            <a:r>
+              <a:rPr sz="800" b="0">
+                <a:solidFill>
+                  <a:srgbClr val="5D6B7E"/>
+                </a:solidFill>
+              </a:rPr>
+              <a:t>ISBMS · PGDM 2025–27 · AGENTIC AI &amp; ADVANCED ANALYTICS IN FINANCE</a:t>
+            </a:r>
+          </a:p>
+        </p:txBody>
+      </p:sp>
+      <p:sp>
+        <p:nvSpPr>
+          <p:cNvPr id="38" name="TextBox 37"/>
+          <p:cNvSpPr txBox="1"/>
+          <p:nvPr/>
+        </p:nvSpPr>
+        <p:spPr>
+          <a:xfrm>
+            <a:off x="9262872" y="6473952"/>
+            <a:ext cx="2377440" cy="228600"/>
+          </a:xfrm>
+          <a:prstGeom prst="rect">
+            <a:avLst/>
+          </a:prstGeom>
+          <a:noFill/>
+        </p:spPr>
+        <p:txBody>
+          <a:bodyPr wrap="square" anchor="t" lIns="0" rIns="0" tIns="0" bIns="0">
+            <a:spAutoFit/>
+          </a:bodyPr>
+          <a:lstStyle/>
+          <a:p>
+            <a:pPr algn="r"/>
+            <a:r>
+              <a:rPr sz="800" b="0">
+                <a:solidFill>
+                  <a:srgbClr val="5D6B7E"/>
+                </a:solidFill>
+              </a:rPr>
+              <a:t>MODULE 8  ·  12</a:t>
+            </a:r>
+          </a:p>
+        </p:txBody>
+      </p:sp>
+    </p:spTree>
+  </p:cSld>
+  <p:clrMapOvr>
+    <a:masterClrMapping/>
+  </p:clrMapOvr>
+</p:sld>
+</file>
+
 <file path=ppt/slides/slide2.xml><?xml version="1.0" encoding="utf-8"?>
 <p:sld xmlns:a="http://schemas.openxmlformats.org/drawingml/2006/main" xmlns:p="http://schemas.openxmlformats.org/presentationml/2006/main" xmlns:r="http://schemas.openxmlformats.org/officeDocument/2006/relationships">
   <p:cSld>
@@ -6193,7 +12406,7 @@
                   <a:srgbClr val="FFFFFF"/>
                 </a:solidFill>
               </a:rPr>
-              <a:t>Opus Fund Services and AI-powered fund automation, run from a GCC in Pune.</a:t>
+              <a:t>Opus Fund Services, a fund administrator that uses AI to automate NAV work.</a:t>
             </a:r>
           </a:p>
         </p:txBody>
@@ -10240,7 +16453,7 @@
                   <a:srgbClr val="C9A227"/>
                 </a:solidFill>
               </a:rPr>
-              <a:t>HOUR 2 · THE ACCOUNTING SKILL DEMO</a:t>
+              <a:t>HOUR 2 · THE THREE LAB FILES</a:t>
             </a:r>
           </a:p>
         </p:txBody>
@@ -10275,7 +16488,7 @@
                 </a:solidFill>
                 <a:latin typeface="Georgia"/>
               </a:rPr>
-              <a:t>Claude's reconciliation skill does the checking</a:t>
+              <a:t>Three files, three points of view</a:t>
             </a:r>
           </a:p>
         </p:txBody>
@@ -10289,7 +16502,7 @@
         <p:spPr>
           <a:xfrm>
             <a:off x="548640" y="1463040"/>
-            <a:ext cx="3593592" cy="2002536"/>
+            <a:ext cx="5468112" cy="2002536"/>
           </a:xfrm>
           <a:prstGeom prst="rect">
             <a:avLst/>
@@ -10333,7 +16546,7 @@
         <p:spPr>
           <a:xfrm>
             <a:off x="548640" y="1463040"/>
-            <a:ext cx="3593592" cy="45720"/>
+            <a:ext cx="5468112" cy="45720"/>
           </a:xfrm>
           <a:prstGeom prst="rect">
             <a:avLst/>
@@ -10377,7 +16590,7 @@
         <p:spPr>
           <a:xfrm>
             <a:off x="804672" y="1664208"/>
-            <a:ext cx="3081528" cy="1728216"/>
+            <a:ext cx="4956048" cy="1728216"/>
           </a:xfrm>
           <a:prstGeom prst="rect">
             <a:avLst/>
@@ -10397,7 +16610,7 @@
                   <a:srgbClr val="3A5C9E"/>
                 </a:solidFill>
               </a:rPr>
-              <a:t>WHAT A SKILL IS</a:t>
+              <a:t>FILE 1 · fund_books.csv</a:t>
             </a:r>
           </a:p>
           <a:p>
@@ -10413,7 +16626,7 @@
                 </a:solidFill>
                 <a:latin typeface="Georgia"/>
               </a:rPr>
-              <a:t>Saved instructions for one job</a:t>
+              <a:t>The fund's own list of holdings</a:t>
             </a:r>
           </a:p>
           <a:p>
@@ -10428,7 +16641,7 @@
                   <a:srgbClr val="1B2A41"/>
                 </a:solidFill>
               </a:rPr>
-              <a:t>A skill tells Claude how accountants do a task. The finance reconciliation skill knows how a reconciliation is done.</a:t>
+              <a:t>Written by the fund accountant. For each holding it has the units the fund thinks it owns and today's price. We use it for market value.</a:t>
             </a:r>
           </a:p>
         </p:txBody>
@@ -10441,8 +16654,8 @@
         </p:nvSpPr>
         <p:spPr>
           <a:xfrm>
-            <a:off x="4297680" y="1463040"/>
-            <a:ext cx="3593592" cy="2002536"/>
+            <a:off x="6172200" y="1463040"/>
+            <a:ext cx="5468112" cy="2002536"/>
           </a:xfrm>
           <a:prstGeom prst="rect">
             <a:avLst/>
@@ -10485,8 +16698,8 @@
         </p:nvSpPr>
         <p:spPr>
           <a:xfrm>
-            <a:off x="4297680" y="1463040"/>
-            <a:ext cx="3593592" cy="45720"/>
+            <a:off x="6172200" y="1463040"/>
+            <a:ext cx="5468112" cy="45720"/>
           </a:xfrm>
           <a:prstGeom prst="rect">
             <a:avLst/>
@@ -10529,8 +16742,8 @@
         </p:nvSpPr>
         <p:spPr>
           <a:xfrm>
-            <a:off x="4553712" y="1664208"/>
-            <a:ext cx="3081528" cy="1728216"/>
+            <a:off x="6428232" y="1664208"/>
+            <a:ext cx="4956048" cy="1728216"/>
           </a:xfrm>
           <a:prstGeom prst="rect">
             <a:avLst/>
@@ -10550,7 +16763,7 @@
                   <a:srgbClr val="3A5C9E"/>
                 </a:solidFill>
               </a:rPr>
-              <a:t>WHAT IT DOES · 1</a:t>
+              <a:t>FILE 2 · custodian.csv</a:t>
             </a:r>
           </a:p>
           <a:p>
@@ -10566,7 +16779,7 @@
                 </a:solidFill>
                 <a:latin typeface="Georgia"/>
               </a:rPr>
-              <a:t>Compares two records</a:t>
+              <a:t>The bank's statement</a:t>
             </a:r>
           </a:p>
           <a:p>
@@ -10581,7 +16794,7 @@
                   <a:srgbClr val="1B2A41"/>
                 </a:solidFill>
               </a:rPr>
-              <a:t>It lines up the fund's books against the custodian and the transfer agent.</a:t>
+              <a:t>Written by the custodian bank. It has the units the bank actually holds for each holding, and the cash in the fund's account.</a:t>
             </a:r>
           </a:p>
         </p:txBody>
@@ -10594,8 +16807,8 @@
         </p:nvSpPr>
         <p:spPr>
           <a:xfrm>
-            <a:off x="8046720" y="1463040"/>
-            <a:ext cx="3593592" cy="2002536"/>
+            <a:off x="548640" y="3621024"/>
+            <a:ext cx="5468112" cy="2002536"/>
           </a:xfrm>
           <a:prstGeom prst="rect">
             <a:avLst/>
@@ -10638,8 +16851,8 @@
         </p:nvSpPr>
         <p:spPr>
           <a:xfrm>
-            <a:off x="8046720" y="1463040"/>
-            <a:ext cx="3593592" cy="45720"/>
+            <a:off x="548640" y="3621024"/>
+            <a:ext cx="5468112" cy="45720"/>
           </a:xfrm>
           <a:prstGeom prst="rect">
             <a:avLst/>
@@ -10682,8 +16895,8 @@
         </p:nvSpPr>
         <p:spPr>
           <a:xfrm>
-            <a:off x="8302752" y="1664208"/>
-            <a:ext cx="3081528" cy="1728216"/>
+            <a:off x="804672" y="3822192"/>
+            <a:ext cx="4956048" cy="1728216"/>
           </a:xfrm>
           <a:prstGeom prst="rect">
             <a:avLst/>
@@ -10703,7 +16916,7 @@
                   <a:srgbClr val="3A5C9E"/>
                 </a:solidFill>
               </a:rPr>
-              <a:t>WHAT IT DOES · 2</a:t>
+              <a:t>FILE 3 · fund_info.csv</a:t>
             </a:r>
           </a:p>
           <a:p>
@@ -10719,7 +16932,7 @@
                 </a:solidFill>
                 <a:latin typeface="Georgia"/>
               </a:rPr>
-              <a:t>Sorts every difference</a:t>
+              <a:t>Four more numbers for the NAV</a:t>
             </a:r>
           </a:p>
           <a:p>
@@ -10734,7 +16947,7 @@
                   <a:srgbClr val="1B2A41"/>
                 </a:solidFill>
               </a:rPr>
-              <a:t>Timing, error or missing entry. It says how old each break is.</a:t>
+              <a:t>Cash per the books ₹2,60,00,000. Accrued expenses ₹8,50,000. Units outstanding per the books 1,00,00,000. Units outstanding per the transfer agent 99,80,000.</a:t>
             </a:r>
           </a:p>
         </p:txBody>
@@ -10747,14 +16960,14 @@
         </p:nvSpPr>
         <p:spPr>
           <a:xfrm>
-            <a:off x="548640" y="3621024"/>
-            <a:ext cx="3593592" cy="2002536"/>
-          </a:xfrm>
-          <a:prstGeom prst="rect">
-            <a:avLst/>
-          </a:prstGeom>
-          <a:solidFill>
-            <a:srgbClr val="FFFFFF"/>
+            <a:off x="6172200" y="3621024"/>
+            <a:ext cx="5468112" cy="2002536"/>
+          </a:xfrm>
+          <a:prstGeom prst="rect">
+            <a:avLst/>
+          </a:prstGeom>
+          <a:solidFill>
+            <a:srgbClr val="0F2145"/>
           </a:solidFill>
           <a:ln>
             <a:noFill/>
@@ -10791,8 +17004,8 @@
         </p:nvSpPr>
         <p:spPr>
           <a:xfrm>
-            <a:off x="548640" y="3621024"/>
-            <a:ext cx="3593592" cy="45720"/>
+            <a:off x="6172200" y="3621024"/>
+            <a:ext cx="5468112" cy="45720"/>
           </a:xfrm>
           <a:prstGeom prst="rect">
             <a:avLst/>
@@ -10835,8 +17048,8 @@
         </p:nvSpPr>
         <p:spPr>
           <a:xfrm>
-            <a:off x="804672" y="3822192"/>
-            <a:ext cx="3081528" cy="1728216"/>
+            <a:off x="6428232" y="3822192"/>
+            <a:ext cx="4956048" cy="1728216"/>
           </a:xfrm>
           <a:prstGeom prst="rect">
             <a:avLst/>
@@ -10853,10 +17066,10 @@
             <a:r>
               <a:rPr sz="1000" b="1">
                 <a:solidFill>
-                  <a:srgbClr val="3A5C9E"/>
-                </a:solidFill>
-              </a:rPr>
-              <a:t>WHAT IT DOES · 3</a:t>
+                  <a:srgbClr val="C9A227"/>
+                </a:solidFill>
+              </a:rPr>
+              <a:t>WORD TO KNOW</a:t>
             </a:r>
           </a:p>
           <a:p>
@@ -10868,11 +17081,11 @@
             <a:r>
               <a:rPr sz="1600" b="1">
                 <a:solidFill>
-                  <a:srgbClr val="0F2145"/>
+                  <a:srgbClr val="FFFFFF"/>
                 </a:solidFill>
                 <a:latin typeface="Georgia"/>
               </a:rPr>
-              <a:t>Suggests the fix</a:t>
+              <a:t>Accrued expenses</a:t>
             </a:r>
           </a:p>
           <a:p>
@@ -10884,10 +17097,10 @@
             <a:r>
               <a:rPr sz="1200" b="0">
                 <a:solidFill>
-                  <a:srgbClr val="1B2A41"/>
-                </a:solidFill>
-              </a:rPr>
-              <a:t>It proposes the correcting entry. The journal-entry skill drafts it.</a:t>
+                  <a:srgbClr val="C9D6EE"/>
+                </a:solidFill>
+              </a:rPr>
+              <a:t>Money the fund owes but has not paid yet, such as this month's fee to the fund manager. NAV subtracts it today, before the cash leaves.</a:t>
             </a:r>
           </a:p>
         </p:txBody>
@@ -10900,14 +17113,14 @@
         </p:nvSpPr>
         <p:spPr>
           <a:xfrm>
-            <a:off x="4297680" y="3621024"/>
-            <a:ext cx="3593592" cy="2002536"/>
-          </a:xfrm>
-          <a:prstGeom prst="rect">
-            <a:avLst/>
-          </a:prstGeom>
-          <a:solidFill>
-            <a:srgbClr val="FFFFFF"/>
+            <a:off x="548640" y="5760720"/>
+            <a:ext cx="11091672" cy="603504"/>
+          </a:xfrm>
+          <a:prstGeom prst="rect">
+            <a:avLst/>
+          </a:prstGeom>
+          <a:solidFill>
+            <a:srgbClr val="0F2145"/>
           </a:solidFill>
           <a:ln>
             <a:noFill/>
@@ -10944,8 +17157,8 @@
         </p:nvSpPr>
         <p:spPr>
           <a:xfrm>
-            <a:off x="4297680" y="3621024"/>
-            <a:ext cx="3593592" cy="45720"/>
+            <a:off x="548640" y="5760720"/>
+            <a:ext cx="64008" cy="603504"/>
           </a:xfrm>
           <a:prstGeom prst="rect">
             <a:avLst/>
@@ -10988,8 +17201,50 @@
         </p:nvSpPr>
         <p:spPr>
           <a:xfrm>
-            <a:off x="4553712" y="3822192"/>
-            <a:ext cx="3081528" cy="1728216"/>
+            <a:off x="822960" y="5760720"/>
+            <a:ext cx="10543032" cy="603504"/>
+          </a:xfrm>
+          <a:prstGeom prst="rect">
+            <a:avLst/>
+          </a:prstGeom>
+          <a:noFill/>
+        </p:spPr>
+        <p:txBody>
+          <a:bodyPr wrap="square" anchor="ctr" lIns="0" rIns="0" tIns="0" bIns="0">
+            <a:spAutoFit/>
+          </a:bodyPr>
+          <a:lstStyle/>
+          <a:p>
+            <a:pPr algn="l"/>
+            <a:r>
+              <a:rPr sz="1200" b="1">
+                <a:solidFill>
+                  <a:srgbClr val="C9A227"/>
+                </a:solidFill>
+              </a:rPr>
+              <a:t>What to compare:  </a:t>
+            </a:r>
+            <a:r>
+              <a:rPr sz="1200" b="0">
+                <a:solidFill>
+                  <a:srgbClr val="FFFFFF"/>
+                </a:solidFill>
+              </a:rPr>
+              <a:t>books against the custodian for units and cash. Books against the transfer agent for units outstanding.</a:t>
+            </a:r>
+          </a:p>
+        </p:txBody>
+      </p:sp>
+      <p:sp>
+        <p:nvSpPr>
+          <p:cNvPr id="20" name="TextBox 19"/>
+          <p:cNvSpPr txBox="1"/>
+          <p:nvPr/>
+        </p:nvSpPr>
+        <p:spPr>
+          <a:xfrm>
+            <a:off x="548640" y="6473952"/>
+            <a:ext cx="7315200" cy="228600"/>
           </a:xfrm>
           <a:prstGeom prst="rect">
             <a:avLst/>
@@ -11004,354 +17259,6 @@
           <a:p>
             <a:pPr algn="l"/>
             <a:r>
-              <a:rPr sz="1000" b="1">
-                <a:solidFill>
-                  <a:srgbClr val="3A5C9E"/>
-                </a:solidFill>
-              </a:rPr>
-              <a:t>RELATED SKILL</a:t>
-            </a:r>
-          </a:p>
-          <a:p>
-            <a:pPr algn="l">
-              <a:spcBef>
-                <a:spcPts val="400"/>
-              </a:spcBef>
-            </a:pPr>
-            <a:r>
-              <a:rPr sz="1600" b="1">
-                <a:solidFill>
-                  <a:srgbClr val="0F2145"/>
-                </a:solidFill>
-                <a:latin typeface="Georgia"/>
-              </a:rPr>
-              <a:t>Variance analysis</a:t>
-            </a:r>
-          </a:p>
-          <a:p>
-            <a:pPr algn="l">
-              <a:spcBef>
-                <a:spcPts val="600"/>
-              </a:spcBef>
-            </a:pPr>
-            <a:r>
-              <a:rPr sz="1200" b="0">
-                <a:solidFill>
-                  <a:srgbClr val="1B2A41"/>
-                </a:solidFill>
-              </a:rPr>
-              <a:t>Explains why the NAV moved from yesterday to today.</a:t>
-            </a:r>
-          </a:p>
-        </p:txBody>
-      </p:sp>
-      <p:sp>
-        <p:nvSpPr>
-          <p:cNvPr id="20" name="Rectangle 19"/>
-          <p:cNvSpPr/>
-          <p:nvPr/>
-        </p:nvSpPr>
-        <p:spPr>
-          <a:xfrm>
-            <a:off x="8046720" y="3621024"/>
-            <a:ext cx="3593592" cy="2002536"/>
-          </a:xfrm>
-          <a:prstGeom prst="rect">
-            <a:avLst/>
-          </a:prstGeom>
-          <a:solidFill>
-            <a:srgbClr val="0F2145"/>
-          </a:solidFill>
-          <a:ln>
-            <a:noFill/>
-          </a:ln>
-          <a:effectLst/>
-        </p:spPr>
-        <p:style>
-          <a:lnRef idx="1">
-            <a:schemeClr val="accent1"/>
-          </a:lnRef>
-          <a:fillRef idx="3">
-            <a:schemeClr val="accent1"/>
-          </a:fillRef>
-          <a:effectRef idx="2">
-            <a:schemeClr val="accent1"/>
-          </a:effectRef>
-          <a:fontRef idx="minor">
-            <a:schemeClr val="lt1"/>
-          </a:fontRef>
-        </p:style>
-        <p:txBody>
-          <a:bodyPr rtlCol="0" anchor="ctr"/>
-          <a:lstStyle/>
-          <a:p>
-            <a:pPr algn="ctr"/>
-          </a:p>
-        </p:txBody>
-      </p:sp>
-      <p:sp>
-        <p:nvSpPr>
-          <p:cNvPr id="21" name="Rectangle 20"/>
-          <p:cNvSpPr/>
-          <p:nvPr/>
-        </p:nvSpPr>
-        <p:spPr>
-          <a:xfrm>
-            <a:off x="8046720" y="3621024"/>
-            <a:ext cx="3593592" cy="45720"/>
-          </a:xfrm>
-          <a:prstGeom prst="rect">
-            <a:avLst/>
-          </a:prstGeom>
-          <a:solidFill>
-            <a:srgbClr val="C9A227"/>
-          </a:solidFill>
-          <a:ln>
-            <a:noFill/>
-          </a:ln>
-          <a:effectLst/>
-        </p:spPr>
-        <p:style>
-          <a:lnRef idx="1">
-            <a:schemeClr val="accent1"/>
-          </a:lnRef>
-          <a:fillRef idx="3">
-            <a:schemeClr val="accent1"/>
-          </a:fillRef>
-          <a:effectRef idx="2">
-            <a:schemeClr val="accent1"/>
-          </a:effectRef>
-          <a:fontRef idx="minor">
-            <a:schemeClr val="lt1"/>
-          </a:fontRef>
-        </p:style>
-        <p:txBody>
-          <a:bodyPr rtlCol="0" anchor="ctr"/>
-          <a:lstStyle/>
-          <a:p>
-            <a:pPr algn="ctr"/>
-          </a:p>
-        </p:txBody>
-      </p:sp>
-      <p:sp>
-        <p:nvSpPr>
-          <p:cNvPr id="22" name="TextBox 21"/>
-          <p:cNvSpPr txBox="1"/>
-          <p:nvPr/>
-        </p:nvSpPr>
-        <p:spPr>
-          <a:xfrm>
-            <a:off x="8302752" y="3822192"/>
-            <a:ext cx="3081528" cy="1728216"/>
-          </a:xfrm>
-          <a:prstGeom prst="rect">
-            <a:avLst/>
-          </a:prstGeom>
-          <a:noFill/>
-        </p:spPr>
-        <p:txBody>
-          <a:bodyPr wrap="square" anchor="t" lIns="0" rIns="0" tIns="0" bIns="0">
-            <a:spAutoFit/>
-          </a:bodyPr>
-          <a:lstStyle/>
-          <a:p>
-            <a:pPr algn="l"/>
-            <a:r>
-              <a:rPr sz="1000" b="1">
-                <a:solidFill>
-                  <a:srgbClr val="C9A227"/>
-                </a:solidFill>
-              </a:rPr>
-              <a:t>THE HUMAN</a:t>
-            </a:r>
-          </a:p>
-          <a:p>
-            <a:pPr algn="l">
-              <a:spcBef>
-                <a:spcPts val="400"/>
-              </a:spcBef>
-            </a:pPr>
-            <a:r>
-              <a:rPr sz="1600" b="1">
-                <a:solidFill>
-                  <a:srgbClr val="FFFFFF"/>
-                </a:solidFill>
-                <a:latin typeface="Georgia"/>
-              </a:rPr>
-              <a:t>Reviews and signs</a:t>
-            </a:r>
-          </a:p>
-          <a:p>
-            <a:pPr algn="l">
-              <a:spcBef>
-                <a:spcPts val="600"/>
-              </a:spcBef>
-            </a:pPr>
-            <a:r>
-              <a:rPr sz="1200" b="0">
-                <a:solidFill>
-                  <a:srgbClr val="C9D6EE"/>
-                </a:solidFill>
-              </a:rPr>
-              <a:t>The skill never posts an entry. The fund accountant approves every fix.</a:t>
-            </a:r>
-          </a:p>
-        </p:txBody>
-      </p:sp>
-      <p:sp>
-        <p:nvSpPr>
-          <p:cNvPr id="23" name="Rectangle 22"/>
-          <p:cNvSpPr/>
-          <p:nvPr/>
-        </p:nvSpPr>
-        <p:spPr>
-          <a:xfrm>
-            <a:off x="548640" y="5760720"/>
-            <a:ext cx="11091672" cy="603504"/>
-          </a:xfrm>
-          <a:prstGeom prst="rect">
-            <a:avLst/>
-          </a:prstGeom>
-          <a:solidFill>
-            <a:srgbClr val="0F2145"/>
-          </a:solidFill>
-          <a:ln>
-            <a:noFill/>
-          </a:ln>
-          <a:effectLst/>
-        </p:spPr>
-        <p:style>
-          <a:lnRef idx="1">
-            <a:schemeClr val="accent1"/>
-          </a:lnRef>
-          <a:fillRef idx="3">
-            <a:schemeClr val="accent1"/>
-          </a:fillRef>
-          <a:effectRef idx="2">
-            <a:schemeClr val="accent1"/>
-          </a:effectRef>
-          <a:fontRef idx="minor">
-            <a:schemeClr val="lt1"/>
-          </a:fontRef>
-        </p:style>
-        <p:txBody>
-          <a:bodyPr rtlCol="0" anchor="ctr"/>
-          <a:lstStyle/>
-          <a:p>
-            <a:pPr algn="ctr"/>
-          </a:p>
-        </p:txBody>
-      </p:sp>
-      <p:sp>
-        <p:nvSpPr>
-          <p:cNvPr id="24" name="Rectangle 23"/>
-          <p:cNvSpPr/>
-          <p:nvPr/>
-        </p:nvSpPr>
-        <p:spPr>
-          <a:xfrm>
-            <a:off x="548640" y="5760720"/>
-            <a:ext cx="64008" cy="603504"/>
-          </a:xfrm>
-          <a:prstGeom prst="rect">
-            <a:avLst/>
-          </a:prstGeom>
-          <a:solidFill>
-            <a:srgbClr val="C9A227"/>
-          </a:solidFill>
-          <a:ln>
-            <a:noFill/>
-          </a:ln>
-          <a:effectLst/>
-        </p:spPr>
-        <p:style>
-          <a:lnRef idx="1">
-            <a:schemeClr val="accent1"/>
-          </a:lnRef>
-          <a:fillRef idx="3">
-            <a:schemeClr val="accent1"/>
-          </a:fillRef>
-          <a:effectRef idx="2">
-            <a:schemeClr val="accent1"/>
-          </a:effectRef>
-          <a:fontRef idx="minor">
-            <a:schemeClr val="lt1"/>
-          </a:fontRef>
-        </p:style>
-        <p:txBody>
-          <a:bodyPr rtlCol="0" anchor="ctr"/>
-          <a:lstStyle/>
-          <a:p>
-            <a:pPr algn="ctr"/>
-          </a:p>
-        </p:txBody>
-      </p:sp>
-      <p:sp>
-        <p:nvSpPr>
-          <p:cNvPr id="25" name="TextBox 24"/>
-          <p:cNvSpPr txBox="1"/>
-          <p:nvPr/>
-        </p:nvSpPr>
-        <p:spPr>
-          <a:xfrm>
-            <a:off x="822960" y="5760720"/>
-            <a:ext cx="10543032" cy="603504"/>
-          </a:xfrm>
-          <a:prstGeom prst="rect">
-            <a:avLst/>
-          </a:prstGeom>
-          <a:noFill/>
-        </p:spPr>
-        <p:txBody>
-          <a:bodyPr wrap="square" anchor="ctr" lIns="0" rIns="0" tIns="0" bIns="0">
-            <a:spAutoFit/>
-          </a:bodyPr>
-          <a:lstStyle/>
-          <a:p>
-            <a:pPr algn="l"/>
-            <a:r>
-              <a:rPr sz="1200" b="1">
-                <a:solidFill>
-                  <a:srgbClr val="C9A227"/>
-                </a:solidFill>
-              </a:rPr>
-              <a:t>No subscription?  </a:t>
-            </a:r>
-            <a:r>
-              <a:rPr sz="1200" b="0">
-                <a:solidFill>
-                  <a:srgbClr val="FFFFFF"/>
-                </a:solidFill>
-              </a:rPr>
-              <a:t>the lab does the same steps with a free Python script and any free AI chat.</a:t>
-            </a:r>
-          </a:p>
-        </p:txBody>
-      </p:sp>
-      <p:sp>
-        <p:nvSpPr>
-          <p:cNvPr id="26" name="TextBox 25"/>
-          <p:cNvSpPr txBox="1"/>
-          <p:nvPr/>
-        </p:nvSpPr>
-        <p:spPr>
-          <a:xfrm>
-            <a:off x="548640" y="6473952"/>
-            <a:ext cx="7315200" cy="228600"/>
-          </a:xfrm>
-          <a:prstGeom prst="rect">
-            <a:avLst/>
-          </a:prstGeom>
-          <a:noFill/>
-        </p:spPr>
-        <p:txBody>
-          <a:bodyPr wrap="square" anchor="t" lIns="0" rIns="0" tIns="0" bIns="0">
-            <a:spAutoFit/>
-          </a:bodyPr>
-          <a:lstStyle/>
-          <a:p>
-            <a:pPr algn="l"/>
-            <a:r>
               <a:rPr sz="800" b="0">
                 <a:solidFill>
                   <a:srgbClr val="5D6B7E"/>
@@ -11364,7 +17271,7 @@
       </p:sp>
       <p:sp>
         <p:nvSpPr>
-          <p:cNvPr id="27" name="TextBox 26"/>
+          <p:cNvPr id="21" name="TextBox 20"/>
           <p:cNvSpPr txBox="1"/>
           <p:nvPr/>
         </p:nvSpPr>
@@ -11495,7 +17402,7 @@
                   <a:srgbClr val="C9A227"/>
                 </a:solidFill>
               </a:rPr>
-              <a:t>HOUR 3 · THE LIVE LAB</a:t>
+              <a:t>HOUR 2 · BREAK 1 OF 3 · CORPORATE ACTION</a:t>
             </a:r>
           </a:p>
         </p:txBody>
@@ -11530,7 +17437,7 @@
                 </a:solidFill>
                 <a:latin typeface="Georgia"/>
               </a:rPr>
-              <a:t>Build a NAV report, reconcile it, explain it</a:t>
+              <a:t>Break 1: a stock split the books missed</a:t>
             </a:r>
           </a:p>
         </p:txBody>
@@ -11544,7 +17451,7 @@
         <p:spPr>
           <a:xfrm>
             <a:off x="548640" y="1463040"/>
-            <a:ext cx="3593592" cy="4160520"/>
+            <a:ext cx="3611880" cy="1417320"/>
           </a:xfrm>
           <a:prstGeom prst="rect">
             <a:avLst/>
@@ -11588,7 +17495,7 @@
         <p:spPr>
           <a:xfrm>
             <a:off x="548640" y="1463040"/>
-            <a:ext cx="3593592" cy="45720"/>
+            <a:ext cx="3611880" cy="45720"/>
           </a:xfrm>
           <a:prstGeom prst="rect">
             <a:avLst/>
@@ -11631,8 +17538,8 @@
         </p:nvSpPr>
         <p:spPr>
           <a:xfrm>
-            <a:off x="804672" y="1664208"/>
-            <a:ext cx="3081528" cy="3886200"/>
+            <a:off x="804672" y="1600200"/>
+            <a:ext cx="3154680" cy="1234440"/>
           </a:xfrm>
           <a:prstGeom prst="rect">
             <a:avLst/>
@@ -11652,7 +17559,7 @@
                   <a:srgbClr val="3A5C9E"/>
                 </a:solidFill>
               </a:rPr>
-              <a:t>PART A · 20 MIN</a:t>
+              <a:t>THE FUND'S BOOKS</a:t>
             </a:r>
           </a:p>
           <a:p>
@@ -11662,13 +17569,472 @@
               </a:spcBef>
             </a:pPr>
             <a:r>
+              <a:rPr sz="2400" b="1">
+                <a:solidFill>
+                  <a:srgbClr val="0F2145"/>
+                </a:solidFill>
+                <a:latin typeface="Georgia"/>
+              </a:rPr>
+              <a:t>4,000 units</a:t>
+            </a:r>
+          </a:p>
+          <a:p>
+            <a:pPr algn="l">
+              <a:spcBef>
+                <a:spcPts val="400"/>
+              </a:spcBef>
+            </a:pPr>
+            <a:r>
+              <a:rPr sz="1100" b="0">
+                <a:solidFill>
+                  <a:srgbClr val="5D6B7E"/>
+                </a:solidFill>
+              </a:rPr>
+              <a:t>Stock H at ₹11,400 = ₹4.56 crore</a:t>
+            </a:r>
+          </a:p>
+        </p:txBody>
+      </p:sp>
+      <p:sp>
+        <p:nvSpPr>
+          <p:cNvPr id="8" name="Rectangle 7"/>
+          <p:cNvSpPr/>
+          <p:nvPr/>
+        </p:nvSpPr>
+        <p:spPr>
+          <a:xfrm>
+            <a:off x="4315968" y="1463040"/>
+            <a:ext cx="3611880" cy="1417320"/>
+          </a:xfrm>
+          <a:prstGeom prst="rect">
+            <a:avLst/>
+          </a:prstGeom>
+          <a:solidFill>
+            <a:srgbClr val="FFFFFF"/>
+          </a:solidFill>
+          <a:ln>
+            <a:noFill/>
+          </a:ln>
+          <a:effectLst/>
+        </p:spPr>
+        <p:style>
+          <a:lnRef idx="1">
+            <a:schemeClr val="accent1"/>
+          </a:lnRef>
+          <a:fillRef idx="3">
+            <a:schemeClr val="accent1"/>
+          </a:fillRef>
+          <a:effectRef idx="2">
+            <a:schemeClr val="accent1"/>
+          </a:effectRef>
+          <a:fontRef idx="minor">
+            <a:schemeClr val="lt1"/>
+          </a:fontRef>
+        </p:style>
+        <p:txBody>
+          <a:bodyPr rtlCol="0" anchor="ctr"/>
+          <a:lstStyle/>
+          <a:p>
+            <a:pPr algn="ctr"/>
+          </a:p>
+        </p:txBody>
+      </p:sp>
+      <p:sp>
+        <p:nvSpPr>
+          <p:cNvPr id="9" name="Rectangle 8"/>
+          <p:cNvSpPr/>
+          <p:nvPr/>
+        </p:nvSpPr>
+        <p:spPr>
+          <a:xfrm>
+            <a:off x="4315968" y="1463040"/>
+            <a:ext cx="3611880" cy="45720"/>
+          </a:xfrm>
+          <a:prstGeom prst="rect">
+            <a:avLst/>
+          </a:prstGeom>
+          <a:solidFill>
+            <a:srgbClr val="C9A227"/>
+          </a:solidFill>
+          <a:ln>
+            <a:noFill/>
+          </a:ln>
+          <a:effectLst/>
+        </p:spPr>
+        <p:style>
+          <a:lnRef idx="1">
+            <a:schemeClr val="accent1"/>
+          </a:lnRef>
+          <a:fillRef idx="3">
+            <a:schemeClr val="accent1"/>
+          </a:fillRef>
+          <a:effectRef idx="2">
+            <a:schemeClr val="accent1"/>
+          </a:effectRef>
+          <a:fontRef idx="minor">
+            <a:schemeClr val="lt1"/>
+          </a:fontRef>
+        </p:style>
+        <p:txBody>
+          <a:bodyPr rtlCol="0" anchor="ctr"/>
+          <a:lstStyle/>
+          <a:p>
+            <a:pPr algn="ctr"/>
+          </a:p>
+        </p:txBody>
+      </p:sp>
+      <p:sp>
+        <p:nvSpPr>
+          <p:cNvPr id="10" name="TextBox 9"/>
+          <p:cNvSpPr txBox="1"/>
+          <p:nvPr/>
+        </p:nvSpPr>
+        <p:spPr>
+          <a:xfrm>
+            <a:off x="4572000" y="1600200"/>
+            <a:ext cx="3154680" cy="1234440"/>
+          </a:xfrm>
+          <a:prstGeom prst="rect">
+            <a:avLst/>
+          </a:prstGeom>
+          <a:noFill/>
+        </p:spPr>
+        <p:txBody>
+          <a:bodyPr wrap="square" anchor="t" lIns="0" rIns="0" tIns="0" bIns="0">
+            <a:spAutoFit/>
+          </a:bodyPr>
+          <a:lstStyle/>
+          <a:p>
+            <a:pPr algn="l"/>
+            <a:r>
+              <a:rPr sz="1000" b="1">
+                <a:solidFill>
+                  <a:srgbClr val="3A5C9E"/>
+                </a:solidFill>
+              </a:rPr>
+              <a:t>THE CUSTODIAN</a:t>
+            </a:r>
+          </a:p>
+          <a:p>
+            <a:pPr algn="l">
+              <a:spcBef>
+                <a:spcPts val="400"/>
+              </a:spcBef>
+            </a:pPr>
+            <a:r>
+              <a:rPr sz="2400" b="1">
+                <a:solidFill>
+                  <a:srgbClr val="0F2145"/>
+                </a:solidFill>
+                <a:latin typeface="Georgia"/>
+              </a:rPr>
+              <a:t>8,000 units</a:t>
+            </a:r>
+          </a:p>
+          <a:p>
+            <a:pPr algn="l">
+              <a:spcBef>
+                <a:spcPts val="400"/>
+              </a:spcBef>
+            </a:pPr>
+            <a:r>
+              <a:rPr sz="1100" b="0">
+                <a:solidFill>
+                  <a:srgbClr val="5D6B7E"/>
+                </a:solidFill>
+              </a:rPr>
+              <a:t>what the bank actually holds</a:t>
+            </a:r>
+          </a:p>
+        </p:txBody>
+      </p:sp>
+      <p:sp>
+        <p:nvSpPr>
+          <p:cNvPr id="11" name="Rectangle 10"/>
+          <p:cNvSpPr/>
+          <p:nvPr/>
+        </p:nvSpPr>
+        <p:spPr>
+          <a:xfrm>
+            <a:off x="8083296" y="1463040"/>
+            <a:ext cx="3557016" cy="1417320"/>
+          </a:xfrm>
+          <a:prstGeom prst="rect">
+            <a:avLst/>
+          </a:prstGeom>
+          <a:solidFill>
+            <a:srgbClr val="0F2145"/>
+          </a:solidFill>
+          <a:ln>
+            <a:noFill/>
+          </a:ln>
+          <a:effectLst/>
+        </p:spPr>
+        <p:style>
+          <a:lnRef idx="1">
+            <a:schemeClr val="accent1"/>
+          </a:lnRef>
+          <a:fillRef idx="3">
+            <a:schemeClr val="accent1"/>
+          </a:fillRef>
+          <a:effectRef idx="2">
+            <a:schemeClr val="accent1"/>
+          </a:effectRef>
+          <a:fontRef idx="minor">
+            <a:schemeClr val="lt1"/>
+          </a:fontRef>
+        </p:style>
+        <p:txBody>
+          <a:bodyPr rtlCol="0" anchor="ctr"/>
+          <a:lstStyle/>
+          <a:p>
+            <a:pPr algn="ctr"/>
+          </a:p>
+        </p:txBody>
+      </p:sp>
+      <p:sp>
+        <p:nvSpPr>
+          <p:cNvPr id="12" name="Rectangle 11"/>
+          <p:cNvSpPr/>
+          <p:nvPr/>
+        </p:nvSpPr>
+        <p:spPr>
+          <a:xfrm>
+            <a:off x="8083296" y="1463040"/>
+            <a:ext cx="3557016" cy="45720"/>
+          </a:xfrm>
+          <a:prstGeom prst="rect">
+            <a:avLst/>
+          </a:prstGeom>
+          <a:solidFill>
+            <a:srgbClr val="C9A227"/>
+          </a:solidFill>
+          <a:ln>
+            <a:noFill/>
+          </a:ln>
+          <a:effectLst/>
+        </p:spPr>
+        <p:style>
+          <a:lnRef idx="1">
+            <a:schemeClr val="accent1"/>
+          </a:lnRef>
+          <a:fillRef idx="3">
+            <a:schemeClr val="accent1"/>
+          </a:fillRef>
+          <a:effectRef idx="2">
+            <a:schemeClr val="accent1"/>
+          </a:effectRef>
+          <a:fontRef idx="minor">
+            <a:schemeClr val="lt1"/>
+          </a:fontRef>
+        </p:style>
+        <p:txBody>
+          <a:bodyPr rtlCol="0" anchor="ctr"/>
+          <a:lstStyle/>
+          <a:p>
+            <a:pPr algn="ctr"/>
+          </a:p>
+        </p:txBody>
+      </p:sp>
+      <p:sp>
+        <p:nvSpPr>
+          <p:cNvPr id="13" name="TextBox 12"/>
+          <p:cNvSpPr txBox="1"/>
+          <p:nvPr/>
+        </p:nvSpPr>
+        <p:spPr>
+          <a:xfrm>
+            <a:off x="8339327" y="1600200"/>
+            <a:ext cx="3099816" cy="1234440"/>
+          </a:xfrm>
+          <a:prstGeom prst="rect">
+            <a:avLst/>
+          </a:prstGeom>
+          <a:noFill/>
+        </p:spPr>
+        <p:txBody>
+          <a:bodyPr wrap="square" anchor="t" lIns="0" rIns="0" tIns="0" bIns="0">
+            <a:spAutoFit/>
+          </a:bodyPr>
+          <a:lstStyle/>
+          <a:p>
+            <a:pPr algn="l"/>
+            <a:r>
+              <a:rPr sz="1000" b="1">
+                <a:solidFill>
+                  <a:srgbClr val="C9A227"/>
+                </a:solidFill>
+              </a:rPr>
+              <a:t>THE DIFFERENCE</a:t>
+            </a:r>
+          </a:p>
+          <a:p>
+            <a:pPr algn="l">
+              <a:spcBef>
+                <a:spcPts val="400"/>
+              </a:spcBef>
+            </a:pPr>
+            <a:r>
+              <a:rPr sz="2400" b="1">
+                <a:solidFill>
+                  <a:srgbClr val="C9A227"/>
+                </a:solidFill>
+                <a:latin typeface="Georgia"/>
+              </a:rPr>
+              <a:t>+4,000 units</a:t>
+            </a:r>
+          </a:p>
+          <a:p>
+            <a:pPr algn="l">
+              <a:spcBef>
+                <a:spcPts val="400"/>
+              </a:spcBef>
+            </a:pPr>
+            <a:r>
+              <a:rPr sz="1100" b="0">
+                <a:solidFill>
+                  <a:srgbClr val="C9D6EE"/>
+                </a:solidFill>
+              </a:rPr>
+              <a:t>exactly 2 times the books</a:t>
+            </a:r>
+          </a:p>
+        </p:txBody>
+      </p:sp>
+      <p:sp>
+        <p:nvSpPr>
+          <p:cNvPr id="14" name="Rectangle 13"/>
+          <p:cNvSpPr/>
+          <p:nvPr/>
+        </p:nvSpPr>
+        <p:spPr>
+          <a:xfrm>
+            <a:off x="548640" y="3063240"/>
+            <a:ext cx="3593592" cy="2560320"/>
+          </a:xfrm>
+          <a:prstGeom prst="rect">
+            <a:avLst/>
+          </a:prstGeom>
+          <a:solidFill>
+            <a:srgbClr val="FFFFFF"/>
+          </a:solidFill>
+          <a:ln>
+            <a:noFill/>
+          </a:ln>
+          <a:effectLst/>
+        </p:spPr>
+        <p:style>
+          <a:lnRef idx="1">
+            <a:schemeClr val="accent1"/>
+          </a:lnRef>
+          <a:fillRef idx="3">
+            <a:schemeClr val="accent1"/>
+          </a:fillRef>
+          <a:effectRef idx="2">
+            <a:schemeClr val="accent1"/>
+          </a:effectRef>
+          <a:fontRef idx="minor">
+            <a:schemeClr val="lt1"/>
+          </a:fontRef>
+        </p:style>
+        <p:txBody>
+          <a:bodyPr rtlCol="0" anchor="ctr"/>
+          <a:lstStyle/>
+          <a:p>
+            <a:pPr algn="ctr"/>
+          </a:p>
+        </p:txBody>
+      </p:sp>
+      <p:sp>
+        <p:nvSpPr>
+          <p:cNvPr id="15" name="Rectangle 14"/>
+          <p:cNvSpPr/>
+          <p:nvPr/>
+        </p:nvSpPr>
+        <p:spPr>
+          <a:xfrm>
+            <a:off x="548640" y="3063240"/>
+            <a:ext cx="3593592" cy="45720"/>
+          </a:xfrm>
+          <a:prstGeom prst="rect">
+            <a:avLst/>
+          </a:prstGeom>
+          <a:solidFill>
+            <a:srgbClr val="C9A227"/>
+          </a:solidFill>
+          <a:ln>
+            <a:noFill/>
+          </a:ln>
+          <a:effectLst/>
+        </p:spPr>
+        <p:style>
+          <a:lnRef idx="1">
+            <a:schemeClr val="accent1"/>
+          </a:lnRef>
+          <a:fillRef idx="3">
+            <a:schemeClr val="accent1"/>
+          </a:fillRef>
+          <a:effectRef idx="2">
+            <a:schemeClr val="accent1"/>
+          </a:effectRef>
+          <a:fontRef idx="minor">
+            <a:schemeClr val="lt1"/>
+          </a:fontRef>
+        </p:style>
+        <p:txBody>
+          <a:bodyPr rtlCol="0" anchor="ctr"/>
+          <a:lstStyle/>
+          <a:p>
+            <a:pPr algn="ctr"/>
+          </a:p>
+        </p:txBody>
+      </p:sp>
+      <p:sp>
+        <p:nvSpPr>
+          <p:cNvPr id="16" name="TextBox 15"/>
+          <p:cNvSpPr txBox="1"/>
+          <p:nvPr/>
+        </p:nvSpPr>
+        <p:spPr>
+          <a:xfrm>
+            <a:off x="804672" y="3264408"/>
+            <a:ext cx="3081528" cy="2286000"/>
+          </a:xfrm>
+          <a:prstGeom prst="rect">
+            <a:avLst/>
+          </a:prstGeom>
+          <a:noFill/>
+        </p:spPr>
+        <p:txBody>
+          <a:bodyPr wrap="square" anchor="t" lIns="0" rIns="0" tIns="0" bIns="0">
+            <a:spAutoFit/>
+          </a:bodyPr>
+          <a:lstStyle/>
+          <a:p>
+            <a:pPr algn="l"/>
+            <a:r>
+              <a:rPr sz="1000" b="1">
+                <a:solidFill>
+                  <a:srgbClr val="3A5C9E"/>
+                </a:solidFill>
+              </a:rPr>
+              <a:t>WHAT HAPPENED</a:t>
+            </a:r>
+          </a:p>
+          <a:p>
+            <a:pPr algn="l">
+              <a:spcBef>
+                <a:spcPts val="400"/>
+              </a:spcBef>
+            </a:pPr>
+            <a:r>
               <a:rPr sz="1600" b="1">
                 <a:solidFill>
                   <a:srgbClr val="0F2145"/>
                 </a:solidFill>
                 <a:latin typeface="Georgia"/>
               </a:rPr>
-              <a:t>Watch the skill</a:t>
+              <a:t>The story</a:t>
             </a:r>
           </a:p>
           <a:p>
@@ -11683,21 +18049,21 @@
                   <a:srgbClr val="1B2A41"/>
                 </a:solidFill>
               </a:rPr>
-              <a:t>The instructor runs Claude's reconciliation skill on the lab files and it finds the three breaks.</a:t>
-            </a:r>
-          </a:p>
-        </p:txBody>
-      </p:sp>
-      <p:sp>
-        <p:nvSpPr>
-          <p:cNvPr id="8" name="Rectangle 7"/>
+              <a:t>The company split each share into two. The price halved to ₹5,700. The custodian updated its records. The fund's books did not.</a:t>
+            </a:r>
+          </a:p>
+        </p:txBody>
+      </p:sp>
+      <p:sp>
+        <p:nvSpPr>
+          <p:cNvPr id="17" name="Rectangle 16"/>
           <p:cNvSpPr/>
           <p:nvPr/>
         </p:nvSpPr>
         <p:spPr>
           <a:xfrm>
-            <a:off x="4297680" y="1463040"/>
-            <a:ext cx="3593592" cy="4160520"/>
+            <a:off x="4297680" y="3063240"/>
+            <a:ext cx="3593592" cy="2560320"/>
           </a:xfrm>
           <a:prstGeom prst="rect">
             <a:avLst/>
@@ -11734,13 +18100,13 @@
       </p:sp>
       <p:sp>
         <p:nvSpPr>
-          <p:cNvPr id="9" name="Rectangle 8"/>
+          <p:cNvPr id="18" name="Rectangle 17"/>
           <p:cNvSpPr/>
           <p:nvPr/>
         </p:nvSpPr>
         <p:spPr>
           <a:xfrm>
-            <a:off x="4297680" y="1463040"/>
+            <a:off x="4297680" y="3063240"/>
             <a:ext cx="3593592" cy="45720"/>
           </a:xfrm>
           <a:prstGeom prst="rect">
@@ -11778,14 +18144,14 @@
       </p:sp>
       <p:sp>
         <p:nvSpPr>
-          <p:cNvPr id="10" name="TextBox 9"/>
+          <p:cNvPr id="19" name="TextBox 18"/>
           <p:cNvSpPr txBox="1"/>
           <p:nvPr/>
         </p:nvSpPr>
         <p:spPr>
           <a:xfrm>
-            <a:off x="4553712" y="1664208"/>
-            <a:ext cx="3081528" cy="3886200"/>
+            <a:off x="4553712" y="3264408"/>
+            <a:ext cx="3081528" cy="2286000"/>
           </a:xfrm>
           <a:prstGeom prst="rect">
             <a:avLst/>
@@ -11805,7 +18171,7 @@
                   <a:srgbClr val="3A5C9E"/>
                 </a:solidFill>
               </a:rPr>
-              <a:t>PART B · 30 MIN</a:t>
+              <a:t>THE FIX</a:t>
             </a:r>
           </a:p>
           <a:p>
@@ -11821,7 +18187,7 @@
                 </a:solidFill>
                 <a:latin typeface="Georgia"/>
               </a:rPr>
-              <a:t>Run the NAV engine</a:t>
+              <a:t>What the accountant books</a:t>
             </a:r>
           </a:p>
           <a:p>
@@ -11836,21 +18202,21 @@
                   <a:srgbClr val="1B2A41"/>
                 </a:solidFill>
               </a:rPr>
-              <a:t>Run nav_engine.py in Codex, Colab or any Python. It prices the fund, finds the breaks and writes nav_report.csv.</a:t>
-            </a:r>
-          </a:p>
-        </p:txBody>
-      </p:sp>
-      <p:sp>
-        <p:nvSpPr>
-          <p:cNvPr id="11" name="Rectangle 10"/>
+              <a:t>No money changes hands. Change the holding to 8,000 units at ₹5,700. The value stays ₹4.56 crore.</a:t>
+            </a:r>
+          </a:p>
+        </p:txBody>
+      </p:sp>
+      <p:sp>
+        <p:nvSpPr>
+          <p:cNvPr id="20" name="Rectangle 19"/>
           <p:cNvSpPr/>
           <p:nvPr/>
         </p:nvSpPr>
         <p:spPr>
           <a:xfrm>
-            <a:off x="8046720" y="1463040"/>
-            <a:ext cx="3593592" cy="4160520"/>
+            <a:off x="8046720" y="3063240"/>
+            <a:ext cx="3593592" cy="2560320"/>
           </a:xfrm>
           <a:prstGeom prst="rect">
             <a:avLst/>
@@ -11887,13 +18253,13 @@
       </p:sp>
       <p:sp>
         <p:nvSpPr>
-          <p:cNvPr id="12" name="Rectangle 11"/>
+          <p:cNvPr id="21" name="Rectangle 20"/>
           <p:cNvSpPr/>
           <p:nvPr/>
         </p:nvSpPr>
         <p:spPr>
           <a:xfrm>
-            <a:off x="8046720" y="1463040"/>
+            <a:off x="8046720" y="3063240"/>
             <a:ext cx="3593592" cy="45720"/>
           </a:xfrm>
           <a:prstGeom prst="rect">
@@ -11931,14 +18297,14 @@
       </p:sp>
       <p:sp>
         <p:nvSpPr>
-          <p:cNvPr id="13" name="TextBox 12"/>
+          <p:cNvPr id="22" name="TextBox 21"/>
           <p:cNvSpPr txBox="1"/>
           <p:nvPr/>
         </p:nvSpPr>
         <p:spPr>
           <a:xfrm>
-            <a:off x="8302752" y="1664208"/>
-            <a:ext cx="3081528" cy="3886200"/>
+            <a:off x="8302752" y="3264408"/>
+            <a:ext cx="3081528" cy="2286000"/>
           </a:xfrm>
           <a:prstGeom prst="rect">
             <a:avLst/>
@@ -11958,7 +18324,7 @@
                   <a:srgbClr val="C9A227"/>
                 </a:solidFill>
               </a:rPr>
-              <a:t>PART C · 30 MIN</a:t>
+              <a:t>NAV EFFECT</a:t>
             </a:r>
           </a:p>
           <a:p>
@@ -11974,7 +18340,7 @@
                 </a:solidFill>
                 <a:latin typeface="Georgia"/>
               </a:rPr>
-              <a:t>Write the commentary</a:t>
+              <a:t>Does the NAV move?</a:t>
             </a:r>
           </a:p>
           <a:p>
@@ -11989,14 +18355,14 @@
                   <a:srgbClr val="C9D6EE"/>
                 </a:solidFill>
               </a:rPr>
-              <a:t>Paste the printed prompt into any free AI chat. Check every number against nav_report.csv. Swap reports with the next desk.</a:t>
-            </a:r>
-          </a:p>
-        </p:txBody>
-      </p:sp>
-      <p:sp>
-        <p:nvSpPr>
-          <p:cNvPr id="14" name="Rectangle 13"/>
+              <a:t>None today. If it is missed, tomorrow's price of ₹5,700 is applied to 4,000 units. The NAV would then fall by ₹2.28 a unit for no reason.</a:t>
+            </a:r>
+          </a:p>
+        </p:txBody>
+      </p:sp>
+      <p:sp>
+        <p:nvSpPr>
+          <p:cNvPr id="23" name="Rectangle 22"/>
           <p:cNvSpPr/>
           <p:nvPr/>
         </p:nvSpPr>
@@ -12040,7 +18406,7 @@
       </p:sp>
       <p:sp>
         <p:nvSpPr>
-          <p:cNvPr id="15" name="Rectangle 14"/>
+          <p:cNvPr id="24" name="Rectangle 23"/>
           <p:cNvSpPr/>
           <p:nvPr/>
         </p:nvSpPr>
@@ -12084,7 +18450,7 @@
       </p:sp>
       <p:sp>
         <p:nvSpPr>
-          <p:cNvPr id="16" name="TextBox 15"/>
+          <p:cNvPr id="25" name="TextBox 24"/>
           <p:cNvSpPr txBox="1"/>
           <p:nvPr/>
         </p:nvSpPr>
@@ -12111,7 +18477,7 @@
                   <a:srgbClr val="C9A227"/>
                 </a:solidFill>
               </a:rPr>
-              <a:t>Free and keyless:  </a:t>
+              <a:t>How to spot it:  </a:t>
             </a:r>
             <a:r>
               <a:rPr sz="1200" b="0">
@@ -12119,14 +18485,14 @@
                   <a:srgbClr val="FFFFFF"/>
                 </a:solidFill>
               </a:rPr>
-              <a:t>built-in Python only, no API key and no installs. The fund is made up and the prices are illustrative.</a:t>
-            </a:r>
-          </a:p>
-        </p:txBody>
-      </p:sp>
-      <p:sp>
-        <p:nvSpPr>
-          <p:cNvPr id="17" name="TextBox 16"/>
+              <a:t>the units are an exact multiple of the books, such as 2 or 3 times. Look for a split or a bonus issue.</a:t>
+            </a:r>
+          </a:p>
+        </p:txBody>
+      </p:sp>
+      <p:sp>
+        <p:nvSpPr>
+          <p:cNvPr id="26" name="TextBox 25"/>
           <p:cNvSpPr txBox="1"/>
           <p:nvPr/>
         </p:nvSpPr>
@@ -12160,7 +18526,7 @@
       </p:sp>
       <p:sp>
         <p:nvSpPr>
-          <p:cNvPr id="18" name="TextBox 17"/>
+          <p:cNvPr id="27" name="TextBox 26"/>
           <p:cNvSpPr txBox="1"/>
           <p:nvPr/>
         </p:nvSpPr>
@@ -12291,7 +18657,7 @@
                   <a:srgbClr val="C9A227"/>
                 </a:solidFill>
               </a:rPr>
-              <a:t>PRACTICE QUESTIONS</a:t>
+              <a:t>HOUR 2 · BREAK 2 OF 3 · INCOME</a:t>
             </a:r>
           </a:p>
         </p:txBody>
@@ -12326,7 +18692,7 @@
                 </a:solidFill>
                 <a:latin typeface="Georgia"/>
               </a:rPr>
-              <a:t>Simple questions before the exam</a:t>
+              <a:t>Break 2: a dividend the books missed</a:t>
             </a:r>
           </a:p>
         </p:txBody>
@@ -12339,8 +18705,8 @@
         </p:nvSpPr>
         <p:spPr>
           <a:xfrm>
-            <a:off x="548640" y="1371600"/>
-            <a:ext cx="11091672" cy="548640"/>
+            <a:off x="548640" y="1463040"/>
+            <a:ext cx="3611880" cy="1417320"/>
           </a:xfrm>
           <a:prstGeom prst="rect">
             <a:avLst/>
@@ -12383,14 +18749,14 @@
         </p:nvSpPr>
         <p:spPr>
           <a:xfrm>
-            <a:off x="548640" y="1371600"/>
-            <a:ext cx="64008" cy="548640"/>
-          </a:xfrm>
-          <a:prstGeom prst="rect">
-            <a:avLst/>
-          </a:prstGeom>
-          <a:solidFill>
-            <a:srgbClr val="3A5C9E"/>
+            <a:off x="548640" y="1463040"/>
+            <a:ext cx="3611880" cy="45720"/>
+          </a:xfrm>
+          <a:prstGeom prst="rect">
+            <a:avLst/>
+          </a:prstGeom>
+          <a:solidFill>
+            <a:srgbClr val="C9A227"/>
           </a:solidFill>
           <a:ln>
             <a:noFill/>
@@ -12427,8 +18793,8 @@
         </p:nvSpPr>
         <p:spPr>
           <a:xfrm>
-            <a:off x="822960" y="1481328"/>
-            <a:ext cx="640080" cy="365760"/>
+            <a:off x="804672" y="1600200"/>
+            <a:ext cx="3154680" cy="1234440"/>
           </a:xfrm>
           <a:prstGeom prst="rect">
             <a:avLst/>
@@ -12443,84 +18809,57 @@
           <a:p>
             <a:pPr algn="l"/>
             <a:r>
-              <a:rPr sz="1300" b="1">
+              <a:rPr sz="1000" b="1">
                 <a:solidFill>
                   <a:srgbClr val="3A5C9E"/>
                 </a:solidFill>
-                <a:latin typeface="Georgia"/>
-              </a:rPr>
-              <a:t>Q1</a:t>
-            </a:r>
-          </a:p>
-        </p:txBody>
-      </p:sp>
-      <p:sp>
-        <p:nvSpPr>
-          <p:cNvPr id="8" name="TextBox 7"/>
-          <p:cNvSpPr txBox="1"/>
-          <p:nvPr/>
-        </p:nvSpPr>
-        <p:spPr>
-          <a:xfrm>
-            <a:off x="1508760" y="1426464"/>
-            <a:ext cx="9966960" cy="502920"/>
-          </a:xfrm>
-          <a:prstGeom prst="rect">
-            <a:avLst/>
-          </a:prstGeom>
-          <a:noFill/>
-        </p:spPr>
-        <p:txBody>
-          <a:bodyPr wrap="square" anchor="t" lIns="0" rIns="0" tIns="0" bIns="0">
-            <a:spAutoFit/>
-          </a:bodyPr>
-          <a:lstStyle/>
-          <a:p>
-            <a:pPr algn="l"/>
-            <a:r>
-              <a:rPr sz="1100" b="1">
-                <a:solidFill>
-                  <a:srgbClr val="1B2A41"/>
-                </a:solidFill>
-              </a:rPr>
-              <a:t>What is NAV, and how is it calculated?</a:t>
+              </a:rPr>
+              <a:t>THE FUND'S BOOKS</a:t>
             </a:r>
           </a:p>
           <a:p>
             <a:pPr algn="l">
               <a:spcBef>
-                <a:spcPts val="100"/>
+                <a:spcPts val="400"/>
               </a:spcBef>
             </a:pPr>
             <a:r>
-              <a:rPr sz="900" b="1">
-                <a:solidFill>
-                  <a:srgbClr val="C9A227"/>
-                </a:solidFill>
-              </a:rPr>
-              <a:t>TIP  </a:t>
-            </a:r>
-            <a:r>
-              <a:rPr sz="950" b="0">
+              <a:rPr sz="2400" b="1">
+                <a:solidFill>
+                  <a:srgbClr val="0F2145"/>
+                </a:solidFill>
+                <a:latin typeface="Georgia"/>
+              </a:rPr>
+              <a:t>₹2,60,00,000</a:t>
+            </a:r>
+          </a:p>
+          <a:p>
+            <a:pPr algn="l">
+              <a:spcBef>
+                <a:spcPts val="400"/>
+              </a:spcBef>
+            </a:pPr>
+            <a:r>
+              <a:rPr sz="1100" b="0">
                 <a:solidFill>
                   <a:srgbClr val="5D6B7E"/>
                 </a:solidFill>
               </a:rPr>
-              <a:t>Net asset value per unit: holdings at market price plus cash minus expenses, divided by units.</a:t>
-            </a:r>
-          </a:p>
-        </p:txBody>
-      </p:sp>
-      <p:sp>
-        <p:nvSpPr>
-          <p:cNvPr id="9" name="Rectangle 8"/>
+              <a:t>cash the books show</a:t>
+            </a:r>
+          </a:p>
+        </p:txBody>
+      </p:sp>
+      <p:sp>
+        <p:nvSpPr>
+          <p:cNvPr id="8" name="Rectangle 7"/>
           <p:cNvSpPr/>
           <p:nvPr/>
         </p:nvSpPr>
         <p:spPr>
           <a:xfrm>
-            <a:off x="548640" y="1984248"/>
-            <a:ext cx="11091672" cy="548640"/>
+            <a:off x="4315968" y="1463040"/>
+            <a:ext cx="3611880" cy="1417320"/>
           </a:xfrm>
           <a:prstGeom prst="rect">
             <a:avLst/>
@@ -12557,20 +18896,20 @@
       </p:sp>
       <p:sp>
         <p:nvSpPr>
-          <p:cNvPr id="10" name="Rectangle 9"/>
+          <p:cNvPr id="9" name="Rectangle 8"/>
           <p:cNvSpPr/>
           <p:nvPr/>
         </p:nvSpPr>
         <p:spPr>
           <a:xfrm>
-            <a:off x="548640" y="1984248"/>
-            <a:ext cx="64008" cy="548640"/>
-          </a:xfrm>
-          <a:prstGeom prst="rect">
-            <a:avLst/>
-          </a:prstGeom>
-          <a:solidFill>
-            <a:srgbClr val="3A5C9E"/>
+            <a:off x="4315968" y="1463040"/>
+            <a:ext cx="3611880" cy="45720"/>
+          </a:xfrm>
+          <a:prstGeom prst="rect">
+            <a:avLst/>
+          </a:prstGeom>
+          <a:solidFill>
+            <a:srgbClr val="C9A227"/>
           </a:solidFill>
           <a:ln>
             <a:noFill/>
@@ -12601,14 +18940,14 @@
       </p:sp>
       <p:sp>
         <p:nvSpPr>
-          <p:cNvPr id="11" name="TextBox 10"/>
+          <p:cNvPr id="10" name="TextBox 9"/>
           <p:cNvSpPr txBox="1"/>
           <p:nvPr/>
         </p:nvSpPr>
         <p:spPr>
           <a:xfrm>
-            <a:off x="822960" y="2093976"/>
-            <a:ext cx="640080" cy="365760"/>
+            <a:off x="4572000" y="1600200"/>
+            <a:ext cx="3154680" cy="1234440"/>
           </a:xfrm>
           <a:prstGeom prst="rect">
             <a:avLst/>
@@ -12623,90 +18962,63 @@
           <a:p>
             <a:pPr algn="l"/>
             <a:r>
-              <a:rPr sz="1300" b="1">
+              <a:rPr sz="1000" b="1">
                 <a:solidFill>
                   <a:srgbClr val="3A5C9E"/>
                 </a:solidFill>
-                <a:latin typeface="Georgia"/>
-              </a:rPr>
-              <a:t>Q2</a:t>
-            </a:r>
-          </a:p>
-        </p:txBody>
-      </p:sp>
-      <p:sp>
-        <p:nvSpPr>
-          <p:cNvPr id="12" name="TextBox 11"/>
-          <p:cNvSpPr txBox="1"/>
-          <p:nvPr/>
-        </p:nvSpPr>
-        <p:spPr>
-          <a:xfrm>
-            <a:off x="1508760" y="2039112"/>
-            <a:ext cx="9966960" cy="502920"/>
-          </a:xfrm>
-          <a:prstGeom prst="rect">
-            <a:avLst/>
-          </a:prstGeom>
-          <a:noFill/>
-        </p:spPr>
-        <p:txBody>
-          <a:bodyPr wrap="square" anchor="t" lIns="0" rIns="0" tIns="0" bIns="0">
-            <a:spAutoFit/>
-          </a:bodyPr>
-          <a:lstStyle/>
-          <a:p>
-            <a:pPr algn="l"/>
-            <a:r>
-              <a:rPr sz="1100" b="1">
-                <a:solidFill>
-                  <a:srgbClr val="1B2A41"/>
-                </a:solidFill>
-              </a:rPr>
-              <a:t>What does a custodian do, and what does a transfer agent do?</a:t>
+              </a:rPr>
+              <a:t>THE CUSTODIAN</a:t>
             </a:r>
           </a:p>
           <a:p>
             <a:pPr algn="l">
               <a:spcBef>
-                <a:spcPts val="100"/>
+                <a:spcPts val="400"/>
               </a:spcBef>
             </a:pPr>
             <a:r>
-              <a:rPr sz="900" b="1">
-                <a:solidFill>
-                  <a:srgbClr val="C9A227"/>
-                </a:solidFill>
-              </a:rPr>
-              <a:t>TIP  </a:t>
-            </a:r>
-            <a:r>
-              <a:rPr sz="950" b="0">
+              <a:rPr sz="2400" b="1">
+                <a:solidFill>
+                  <a:srgbClr val="0F2145"/>
+                </a:solidFill>
+                <a:latin typeface="Georgia"/>
+              </a:rPr>
+              <a:t>₹2,61,20,000</a:t>
+            </a:r>
+          </a:p>
+          <a:p>
+            <a:pPr algn="l">
+              <a:spcBef>
+                <a:spcPts val="400"/>
+              </a:spcBef>
+            </a:pPr>
+            <a:r>
+              <a:rPr sz="1100" b="0">
                 <a:solidFill>
                   <a:srgbClr val="5D6B7E"/>
                 </a:solidFill>
               </a:rPr>
-              <a:t>The custodian holds the fund's shares and cash. The transfer agent keeps the list of investors and their units.</a:t>
-            </a:r>
-          </a:p>
-        </p:txBody>
-      </p:sp>
-      <p:sp>
-        <p:nvSpPr>
-          <p:cNvPr id="13" name="Rectangle 12"/>
+              <a:t>cash in the bank account</a:t>
+            </a:r>
+          </a:p>
+        </p:txBody>
+      </p:sp>
+      <p:sp>
+        <p:nvSpPr>
+          <p:cNvPr id="11" name="Rectangle 10"/>
           <p:cNvSpPr/>
           <p:nvPr/>
         </p:nvSpPr>
         <p:spPr>
           <a:xfrm>
-            <a:off x="548640" y="2596896"/>
-            <a:ext cx="11091672" cy="548640"/>
-          </a:xfrm>
-          <a:prstGeom prst="rect">
-            <a:avLst/>
-          </a:prstGeom>
-          <a:solidFill>
-            <a:srgbClr val="FFFFFF"/>
+            <a:off x="8083296" y="1463040"/>
+            <a:ext cx="3557016" cy="1417320"/>
+          </a:xfrm>
+          <a:prstGeom prst="rect">
+            <a:avLst/>
+          </a:prstGeom>
+          <a:solidFill>
+            <a:srgbClr val="0F2145"/>
           </a:solidFill>
           <a:ln>
             <a:noFill/>
@@ -12737,20 +19049,20 @@
       </p:sp>
       <p:sp>
         <p:nvSpPr>
-          <p:cNvPr id="14" name="Rectangle 13"/>
+          <p:cNvPr id="12" name="Rectangle 11"/>
           <p:cNvSpPr/>
           <p:nvPr/>
         </p:nvSpPr>
         <p:spPr>
           <a:xfrm>
-            <a:off x="548640" y="2596896"/>
-            <a:ext cx="64008" cy="548640"/>
-          </a:xfrm>
-          <a:prstGeom prst="rect">
-            <a:avLst/>
-          </a:prstGeom>
-          <a:solidFill>
-            <a:srgbClr val="3A5C9E"/>
+            <a:off x="8083296" y="1463040"/>
+            <a:ext cx="3557016" cy="45720"/>
+          </a:xfrm>
+          <a:prstGeom prst="rect">
+            <a:avLst/>
+          </a:prstGeom>
+          <a:solidFill>
+            <a:srgbClr val="C9A227"/>
           </a:solidFill>
           <a:ln>
             <a:noFill/>
@@ -12781,14 +19093,14 @@
       </p:sp>
       <p:sp>
         <p:nvSpPr>
-          <p:cNvPr id="15" name="TextBox 14"/>
+          <p:cNvPr id="13" name="TextBox 12"/>
           <p:cNvSpPr txBox="1"/>
           <p:nvPr/>
         </p:nvSpPr>
         <p:spPr>
           <a:xfrm>
-            <a:off x="822960" y="2706624"/>
-            <a:ext cx="640080" cy="365760"/>
+            <a:off x="8339327" y="1600200"/>
+            <a:ext cx="3099816" cy="1234440"/>
           </a:xfrm>
           <a:prstGeom prst="rect">
             <a:avLst/>
@@ -12803,84 +19115,57 @@
           <a:p>
             <a:pPr algn="l"/>
             <a:r>
-              <a:rPr sz="1300" b="1">
-                <a:solidFill>
-                  <a:srgbClr val="3A5C9E"/>
-                </a:solidFill>
-                <a:latin typeface="Georgia"/>
-              </a:rPr>
-              <a:t>Q3</a:t>
-            </a:r>
-          </a:p>
-        </p:txBody>
-      </p:sp>
-      <p:sp>
-        <p:nvSpPr>
-          <p:cNvPr id="16" name="TextBox 15"/>
-          <p:cNvSpPr txBox="1"/>
-          <p:nvPr/>
-        </p:nvSpPr>
-        <p:spPr>
-          <a:xfrm>
-            <a:off x="1508760" y="2651760"/>
-            <a:ext cx="9966960" cy="502920"/>
-          </a:xfrm>
-          <a:prstGeom prst="rect">
-            <a:avLst/>
-          </a:prstGeom>
-          <a:noFill/>
-        </p:spPr>
-        <p:txBody>
-          <a:bodyPr wrap="square" anchor="t" lIns="0" rIns="0" tIns="0" bIns="0">
-            <a:spAutoFit/>
-          </a:bodyPr>
-          <a:lstStyle/>
-          <a:p>
-            <a:pPr algn="l"/>
-            <a:r>
-              <a:rPr sz="1100" b="1">
-                <a:solidFill>
-                  <a:srgbClr val="1B2A41"/>
-                </a:solidFill>
-              </a:rPr>
-              <a:t>Name two transfer agents for Indian mutual funds.</a:t>
+              <a:rPr sz="1000" b="1">
+                <a:solidFill>
+                  <a:srgbClr val="C9A227"/>
+                </a:solidFill>
+              </a:rPr>
+              <a:t>THE DIFFERENCE</a:t>
             </a:r>
           </a:p>
           <a:p>
             <a:pPr algn="l">
               <a:spcBef>
-                <a:spcPts val="100"/>
+                <a:spcPts val="400"/>
               </a:spcBef>
             </a:pPr>
             <a:r>
-              <a:rPr sz="900" b="1">
+              <a:rPr sz="2400" b="1">
                 <a:solidFill>
                   <a:srgbClr val="C9A227"/>
                 </a:solidFill>
-              </a:rPr>
-              <a:t>TIP  </a:t>
-            </a:r>
-            <a:r>
-              <a:rPr sz="950" b="0">
-                <a:solidFill>
-                  <a:srgbClr val="5D6B7E"/>
-                </a:solidFill>
-              </a:rPr>
-              <a:t>KFinTech and CAMS.</a:t>
-            </a:r>
-          </a:p>
-        </p:txBody>
-      </p:sp>
-      <p:sp>
-        <p:nvSpPr>
-          <p:cNvPr id="17" name="Rectangle 16"/>
+                <a:latin typeface="Georgia"/>
+              </a:rPr>
+              <a:t>+₹1,20,000</a:t>
+            </a:r>
+          </a:p>
+          <a:p>
+            <a:pPr algn="l">
+              <a:spcBef>
+                <a:spcPts val="400"/>
+              </a:spcBef>
+            </a:pPr>
+            <a:r>
+              <a:rPr sz="1100" b="0">
+                <a:solidFill>
+                  <a:srgbClr val="C9D6EE"/>
+                </a:solidFill>
+              </a:rPr>
+              <a:t>more cash at the bank</a:t>
+            </a:r>
+          </a:p>
+        </p:txBody>
+      </p:sp>
+      <p:sp>
+        <p:nvSpPr>
+          <p:cNvPr id="14" name="Rectangle 13"/>
           <p:cNvSpPr/>
           <p:nvPr/>
         </p:nvSpPr>
         <p:spPr>
           <a:xfrm>
-            <a:off x="548640" y="3209544"/>
-            <a:ext cx="11091672" cy="548640"/>
+            <a:off x="548640" y="3063240"/>
+            <a:ext cx="3593592" cy="2560320"/>
           </a:xfrm>
           <a:prstGeom prst="rect">
             <a:avLst/>
@@ -12917,20 +19202,20 @@
       </p:sp>
       <p:sp>
         <p:nvSpPr>
-          <p:cNvPr id="18" name="Rectangle 17"/>
+          <p:cNvPr id="15" name="Rectangle 14"/>
           <p:cNvSpPr/>
           <p:nvPr/>
         </p:nvSpPr>
         <p:spPr>
           <a:xfrm>
-            <a:off x="548640" y="3209544"/>
-            <a:ext cx="64008" cy="548640"/>
-          </a:xfrm>
-          <a:prstGeom prst="rect">
-            <a:avLst/>
-          </a:prstGeom>
-          <a:solidFill>
-            <a:srgbClr val="3A5C9E"/>
+            <a:off x="548640" y="3063240"/>
+            <a:ext cx="3593592" cy="45720"/>
+          </a:xfrm>
+          <a:prstGeom prst="rect">
+            <a:avLst/>
+          </a:prstGeom>
+          <a:solidFill>
+            <a:srgbClr val="C9A227"/>
           </a:solidFill>
           <a:ln>
             <a:noFill/>
@@ -12961,14 +19246,14 @@
       </p:sp>
       <p:sp>
         <p:nvSpPr>
-          <p:cNvPr id="19" name="TextBox 18"/>
+          <p:cNvPr id="16" name="TextBox 15"/>
           <p:cNvSpPr txBox="1"/>
           <p:nvPr/>
         </p:nvSpPr>
         <p:spPr>
           <a:xfrm>
-            <a:off x="822960" y="3319272"/>
-            <a:ext cx="640080" cy="365760"/>
+            <a:off x="804672" y="3264408"/>
+            <a:ext cx="3081528" cy="2286000"/>
           </a:xfrm>
           <a:prstGeom prst="rect">
             <a:avLst/>
@@ -12983,84 +19268,57 @@
           <a:p>
             <a:pPr algn="l"/>
             <a:r>
-              <a:rPr sz="1300" b="1">
+              <a:rPr sz="1000" b="1">
                 <a:solidFill>
                   <a:srgbClr val="3A5C9E"/>
                 </a:solidFill>
-                <a:latin typeface="Georgia"/>
-              </a:rPr>
-              <a:t>Q4</a:t>
-            </a:r>
-          </a:p>
-        </p:txBody>
-      </p:sp>
-      <p:sp>
-        <p:nvSpPr>
-          <p:cNvPr id="20" name="TextBox 19"/>
-          <p:cNvSpPr txBox="1"/>
-          <p:nvPr/>
-        </p:nvSpPr>
-        <p:spPr>
-          <a:xfrm>
-            <a:off x="1508760" y="3264408"/>
-            <a:ext cx="9966960" cy="502920"/>
-          </a:xfrm>
-          <a:prstGeom prst="rect">
-            <a:avLst/>
-          </a:prstGeom>
-          <a:noFill/>
-        </p:spPr>
-        <p:txBody>
-          <a:bodyPr wrap="square" anchor="t" lIns="0" rIns="0" tIns="0" bIns="0">
-            <a:spAutoFit/>
-          </a:bodyPr>
-          <a:lstStyle/>
-          <a:p>
-            <a:pPr algn="l"/>
-            <a:r>
-              <a:rPr sz="1100" b="1">
-                <a:solidFill>
-                  <a:srgbClr val="1B2A41"/>
-                </a:solidFill>
-              </a:rPr>
-              <a:t>An investor puts in ₹10,000 at a NAV of ₹25. How many units does the investor get?</a:t>
+              </a:rPr>
+              <a:t>WHAT HAPPENED</a:t>
             </a:r>
           </a:p>
           <a:p>
             <a:pPr algn="l">
               <a:spcBef>
-                <a:spcPts val="100"/>
+                <a:spcPts val="400"/>
               </a:spcBef>
             </a:pPr>
             <a:r>
-              <a:rPr sz="900" b="1">
-                <a:solidFill>
-                  <a:srgbClr val="C9A227"/>
-                </a:solidFill>
-              </a:rPr>
-              <a:t>TIP  </a:t>
-            </a:r>
-            <a:r>
-              <a:rPr sz="950" b="0">
-                <a:solidFill>
-                  <a:srgbClr val="5D6B7E"/>
-                </a:solidFill>
-              </a:rPr>
-              <a:t>₹10,000 ÷ ₹25 = 400 units.</a:t>
-            </a:r>
-          </a:p>
-        </p:txBody>
-      </p:sp>
-      <p:sp>
-        <p:nvSpPr>
-          <p:cNvPr id="21" name="Rectangle 20"/>
+              <a:rPr sz="1600" b="1">
+                <a:solidFill>
+                  <a:srgbClr val="0F2145"/>
+                </a:solidFill>
+                <a:latin typeface="Georgia"/>
+              </a:rPr>
+              <a:t>The story</a:t>
+            </a:r>
+          </a:p>
+          <a:p>
+            <a:pPr algn="l">
+              <a:spcBef>
+                <a:spcPts val="600"/>
+              </a:spcBef>
+            </a:pPr>
+            <a:r>
+              <a:rPr sz="1200" b="0">
+                <a:solidFill>
+                  <a:srgbClr val="1B2A41"/>
+                </a:solidFill>
+              </a:rPr>
+              <a:t>A company the fund owns paid a dividend. The money reached the fund's bank account. Nobody recorded it in the books.</a:t>
+            </a:r>
+          </a:p>
+        </p:txBody>
+      </p:sp>
+      <p:sp>
+        <p:nvSpPr>
+          <p:cNvPr id="17" name="Rectangle 16"/>
           <p:cNvSpPr/>
           <p:nvPr/>
         </p:nvSpPr>
         <p:spPr>
           <a:xfrm>
-            <a:off x="548640" y="3822191"/>
-            <a:ext cx="11091672" cy="548640"/>
+            <a:off x="4297680" y="3063240"/>
+            <a:ext cx="3593592" cy="2560320"/>
           </a:xfrm>
           <a:prstGeom prst="rect">
             <a:avLst/>
@@ -13097,20 +19355,20 @@
       </p:sp>
       <p:sp>
         <p:nvSpPr>
-          <p:cNvPr id="22" name="Rectangle 21"/>
+          <p:cNvPr id="18" name="Rectangle 17"/>
           <p:cNvSpPr/>
           <p:nvPr/>
         </p:nvSpPr>
         <p:spPr>
           <a:xfrm>
-            <a:off x="548640" y="3822191"/>
-            <a:ext cx="64008" cy="548640"/>
-          </a:xfrm>
-          <a:prstGeom prst="rect">
-            <a:avLst/>
-          </a:prstGeom>
-          <a:solidFill>
-            <a:srgbClr val="3A5C9E"/>
+            <a:off x="4297680" y="3063240"/>
+            <a:ext cx="3593592" cy="45720"/>
+          </a:xfrm>
+          <a:prstGeom prst="rect">
+            <a:avLst/>
+          </a:prstGeom>
+          <a:solidFill>
+            <a:srgbClr val="C9A227"/>
           </a:solidFill>
           <a:ln>
             <a:noFill/>
@@ -13141,14 +19399,14 @@
       </p:sp>
       <p:sp>
         <p:nvSpPr>
-          <p:cNvPr id="23" name="TextBox 22"/>
+          <p:cNvPr id="19" name="TextBox 18"/>
           <p:cNvSpPr txBox="1"/>
           <p:nvPr/>
         </p:nvSpPr>
         <p:spPr>
           <a:xfrm>
-            <a:off x="822960" y="3931920"/>
-            <a:ext cx="640080" cy="365760"/>
+            <a:off x="4553712" y="3264408"/>
+            <a:ext cx="3081528" cy="2286000"/>
           </a:xfrm>
           <a:prstGeom prst="rect">
             <a:avLst/>
@@ -13163,90 +19421,63 @@
           <a:p>
             <a:pPr algn="l"/>
             <a:r>
-              <a:rPr sz="1300" b="1">
+              <a:rPr sz="1000" b="1">
                 <a:solidFill>
                   <a:srgbClr val="3A5C9E"/>
                 </a:solidFill>
-                <a:latin typeface="Georgia"/>
-              </a:rPr>
-              <a:t>Q5</a:t>
-            </a:r>
-          </a:p>
-        </p:txBody>
-      </p:sp>
-      <p:sp>
-        <p:nvSpPr>
-          <p:cNvPr id="24" name="TextBox 23"/>
-          <p:cNvSpPr txBox="1"/>
-          <p:nvPr/>
-        </p:nvSpPr>
-        <p:spPr>
-          <a:xfrm>
-            <a:off x="1508760" y="3877055"/>
-            <a:ext cx="9966960" cy="502920"/>
-          </a:xfrm>
-          <a:prstGeom prst="rect">
-            <a:avLst/>
-          </a:prstGeom>
-          <a:noFill/>
-        </p:spPr>
-        <p:txBody>
-          <a:bodyPr wrap="square" anchor="t" lIns="0" rIns="0" tIns="0" bIns="0">
-            <a:spAutoFit/>
-          </a:bodyPr>
-          <a:lstStyle/>
-          <a:p>
-            <a:pPr algn="l"/>
-            <a:r>
-              <a:rPr sz="1100" b="1">
-                <a:solidFill>
-                  <a:srgbClr val="1B2A41"/>
-                </a:solidFill>
-              </a:rPr>
-              <a:t>What is a reconciliation break? Give one example.</a:t>
+              </a:rPr>
+              <a:t>THE FIX</a:t>
             </a:r>
           </a:p>
           <a:p>
             <a:pPr algn="l">
               <a:spcBef>
-                <a:spcPts val="100"/>
+                <a:spcPts val="400"/>
               </a:spcBef>
             </a:pPr>
             <a:r>
-              <a:rPr sz="900" b="1">
-                <a:solidFill>
-                  <a:srgbClr val="C9A227"/>
-                </a:solidFill>
-              </a:rPr>
-              <a:t>TIP  </a:t>
-            </a:r>
-            <a:r>
-              <a:rPr sz="950" b="0">
-                <a:solidFill>
-                  <a:srgbClr val="5D6B7E"/>
-                </a:solidFill>
-              </a:rPr>
-              <a:t>A difference between two records. Example: a dividend the custodian received that the books did not record.</a:t>
-            </a:r>
-          </a:p>
-        </p:txBody>
-      </p:sp>
-      <p:sp>
-        <p:nvSpPr>
-          <p:cNvPr id="25" name="Rectangle 24"/>
+              <a:rPr sz="1600" b="1">
+                <a:solidFill>
+                  <a:srgbClr val="0F2145"/>
+                </a:solidFill>
+                <a:latin typeface="Georgia"/>
+              </a:rPr>
+              <a:t>What the accountant books</a:t>
+            </a:r>
+          </a:p>
+          <a:p>
+            <a:pPr algn="l">
+              <a:spcBef>
+                <a:spcPts val="600"/>
+              </a:spcBef>
+            </a:pPr>
+            <a:r>
+              <a:rPr sz="1200" b="0">
+                <a:solidFill>
+                  <a:srgbClr val="1B2A41"/>
+                </a:solidFill>
+              </a:rPr>
+              <a:t>Debit cash ₹1,20,000, so cash goes up. Credit dividend income ₹1,20,000, so income goes up.</a:t>
+            </a:r>
+          </a:p>
+        </p:txBody>
+      </p:sp>
+      <p:sp>
+        <p:nvSpPr>
+          <p:cNvPr id="20" name="Rectangle 19"/>
           <p:cNvSpPr/>
           <p:nvPr/>
         </p:nvSpPr>
         <p:spPr>
           <a:xfrm>
-            <a:off x="548640" y="4434840"/>
-            <a:ext cx="11091672" cy="548640"/>
-          </a:xfrm>
-          <a:prstGeom prst="rect">
-            <a:avLst/>
-          </a:prstGeom>
-          <a:solidFill>
-            <a:srgbClr val="FFFFFF"/>
+            <a:off x="8046720" y="3063240"/>
+            <a:ext cx="3593592" cy="2560320"/>
+          </a:xfrm>
+          <a:prstGeom prst="rect">
+            <a:avLst/>
+          </a:prstGeom>
+          <a:solidFill>
+            <a:srgbClr val="0F2145"/>
           </a:solidFill>
           <a:ln>
             <a:noFill/>
@@ -13277,20 +19508,20 @@
       </p:sp>
       <p:sp>
         <p:nvSpPr>
-          <p:cNvPr id="26" name="Rectangle 25"/>
+          <p:cNvPr id="21" name="Rectangle 20"/>
           <p:cNvSpPr/>
           <p:nvPr/>
         </p:nvSpPr>
         <p:spPr>
           <a:xfrm>
-            <a:off x="548640" y="4434840"/>
-            <a:ext cx="64008" cy="548640"/>
-          </a:xfrm>
-          <a:prstGeom prst="rect">
-            <a:avLst/>
-          </a:prstGeom>
-          <a:solidFill>
-            <a:srgbClr val="3A5C9E"/>
+            <a:off x="8046720" y="3063240"/>
+            <a:ext cx="3593592" cy="45720"/>
+          </a:xfrm>
+          <a:prstGeom prst="rect">
+            <a:avLst/>
+          </a:prstGeom>
+          <a:solidFill>
+            <a:srgbClr val="C9A227"/>
           </a:solidFill>
           <a:ln>
             <a:noFill/>
@@ -13321,14 +19552,14 @@
       </p:sp>
       <p:sp>
         <p:nvSpPr>
-          <p:cNvPr id="27" name="TextBox 26"/>
+          <p:cNvPr id="22" name="TextBox 21"/>
           <p:cNvSpPr txBox="1"/>
           <p:nvPr/>
         </p:nvSpPr>
         <p:spPr>
           <a:xfrm>
-            <a:off x="822960" y="4544568"/>
-            <a:ext cx="640080" cy="365760"/>
+            <a:off x="8302752" y="3264408"/>
+            <a:ext cx="3081528" cy="2286000"/>
           </a:xfrm>
           <a:prstGeom prst="rect">
             <a:avLst/>
@@ -13343,90 +19574,63 @@
           <a:p>
             <a:pPr algn="l"/>
             <a:r>
-              <a:rPr sz="1300" b="1">
-                <a:solidFill>
-                  <a:srgbClr val="3A5C9E"/>
-                </a:solidFill>
-                <a:latin typeface="Georgia"/>
-              </a:rPr>
-              <a:t>Q6</a:t>
-            </a:r>
-          </a:p>
-        </p:txBody>
-      </p:sp>
-      <p:sp>
-        <p:nvSpPr>
-          <p:cNvPr id="28" name="TextBox 27"/>
-          <p:cNvSpPr txBox="1"/>
-          <p:nvPr/>
-        </p:nvSpPr>
-        <p:spPr>
-          <a:xfrm>
-            <a:off x="1508760" y="4489703"/>
-            <a:ext cx="9966960" cy="502920"/>
-          </a:xfrm>
-          <a:prstGeom prst="rect">
-            <a:avLst/>
-          </a:prstGeom>
-          <a:noFill/>
-        </p:spPr>
-        <p:txBody>
-          <a:bodyPr wrap="square" anchor="t" lIns="0" rIns="0" tIns="0" bIns="0">
-            <a:spAutoFit/>
-          </a:bodyPr>
-          <a:lstStyle/>
-          <a:p>
-            <a:pPr algn="l"/>
-            <a:r>
-              <a:rPr sz="1100" b="1">
-                <a:solidFill>
-                  <a:srgbClr val="1B2A41"/>
-                </a:solidFill>
-              </a:rPr>
-              <a:t>What is STP?</a:t>
+              <a:rPr sz="1000" b="1">
+                <a:solidFill>
+                  <a:srgbClr val="C9A227"/>
+                </a:solidFill>
+              </a:rPr>
+              <a:t>NAV EFFECT</a:t>
             </a:r>
           </a:p>
           <a:p>
             <a:pPr algn="l">
               <a:spcBef>
-                <a:spcPts val="100"/>
+                <a:spcPts val="400"/>
               </a:spcBef>
             </a:pPr>
             <a:r>
-              <a:rPr sz="900" b="1">
-                <a:solidFill>
-                  <a:srgbClr val="C9A227"/>
-                </a:solidFill>
-              </a:rPr>
-              <a:t>TIP  </a:t>
-            </a:r>
-            <a:r>
-              <a:rPr sz="950" b="0">
-                <a:solidFill>
-                  <a:srgbClr val="5D6B7E"/>
-                </a:solidFill>
-              </a:rPr>
-              <a:t>Straight-through processing: a transaction runs end to end with no manual step.</a:t>
-            </a:r>
-          </a:p>
-        </p:txBody>
-      </p:sp>
-      <p:sp>
-        <p:nvSpPr>
-          <p:cNvPr id="29" name="Rectangle 28"/>
+              <a:rPr sz="1600" b="1">
+                <a:solidFill>
+                  <a:srgbClr val="FFFFFF"/>
+                </a:solidFill>
+                <a:latin typeface="Georgia"/>
+              </a:rPr>
+              <a:t>Does the NAV move?</a:t>
+            </a:r>
+          </a:p>
+          <a:p>
+            <a:pPr algn="l">
+              <a:spcBef>
+                <a:spcPts val="600"/>
+              </a:spcBef>
+            </a:pPr>
+            <a:r>
+              <a:rPr sz="1200" b="0">
+                <a:solidFill>
+                  <a:srgbClr val="C9D6EE"/>
+                </a:solidFill>
+              </a:rPr>
+              <a:t>Yes. ₹1,20,000 ÷ 1 crore units = ₹0.0120 a unit. The NAV goes from ₹45.8800 to ₹45.8920.</a:t>
+            </a:r>
+          </a:p>
+        </p:txBody>
+      </p:sp>
+      <p:sp>
+        <p:nvSpPr>
+          <p:cNvPr id="23" name="Rectangle 22"/>
           <p:cNvSpPr/>
           <p:nvPr/>
         </p:nvSpPr>
         <p:spPr>
           <a:xfrm>
-            <a:off x="548640" y="5047488"/>
-            <a:ext cx="11091672" cy="548640"/>
-          </a:xfrm>
-          <a:prstGeom prst="rect">
-            <a:avLst/>
-          </a:prstGeom>
-          <a:solidFill>
-            <a:srgbClr val="FFFFFF"/>
+            <a:off x="548640" y="5760720"/>
+            <a:ext cx="11091672" cy="603504"/>
+          </a:xfrm>
+          <a:prstGeom prst="rect">
+            <a:avLst/>
+          </a:prstGeom>
+          <a:solidFill>
+            <a:srgbClr val="0F2145"/>
           </a:solidFill>
           <a:ln>
             <a:noFill/>
@@ -13457,20 +19661,20 @@
       </p:sp>
       <p:sp>
         <p:nvSpPr>
-          <p:cNvPr id="30" name="Rectangle 29"/>
+          <p:cNvPr id="24" name="Rectangle 23"/>
           <p:cNvSpPr/>
           <p:nvPr/>
         </p:nvSpPr>
         <p:spPr>
           <a:xfrm>
-            <a:off x="548640" y="5047488"/>
-            <a:ext cx="64008" cy="548640"/>
-          </a:xfrm>
-          <a:prstGeom prst="rect">
-            <a:avLst/>
-          </a:prstGeom>
-          <a:solidFill>
-            <a:srgbClr val="3A5C9E"/>
+            <a:off x="548640" y="5760720"/>
+            <a:ext cx="64008" cy="603504"/>
+          </a:xfrm>
+          <a:prstGeom prst="rect">
+            <a:avLst/>
+          </a:prstGeom>
+          <a:solidFill>
+            <a:srgbClr val="C9A227"/>
           </a:solidFill>
           <a:ln>
             <a:noFill/>
@@ -13501,14 +19705,56 @@
       </p:sp>
       <p:sp>
         <p:nvSpPr>
-          <p:cNvPr id="31" name="TextBox 30"/>
+          <p:cNvPr id="25" name="TextBox 24"/>
           <p:cNvSpPr txBox="1"/>
           <p:nvPr/>
         </p:nvSpPr>
         <p:spPr>
           <a:xfrm>
-            <a:off x="822960" y="5157216"/>
-            <a:ext cx="640080" cy="365760"/>
+            <a:off x="822960" y="5760720"/>
+            <a:ext cx="10543032" cy="603504"/>
+          </a:xfrm>
+          <a:prstGeom prst="rect">
+            <a:avLst/>
+          </a:prstGeom>
+          <a:noFill/>
+        </p:spPr>
+        <p:txBody>
+          <a:bodyPr wrap="square" anchor="ctr" lIns="0" rIns="0" tIns="0" bIns="0">
+            <a:spAutoFit/>
+          </a:bodyPr>
+          <a:lstStyle/>
+          <a:p>
+            <a:pPr algn="l"/>
+            <a:r>
+              <a:rPr sz="1200" b="1">
+                <a:solidFill>
+                  <a:srgbClr val="C9A227"/>
+                </a:solidFill>
+              </a:rPr>
+              <a:t>How to spot it:  </a:t>
+            </a:r>
+            <a:r>
+              <a:rPr sz="1200" b="0">
+                <a:solidFill>
+                  <a:srgbClr val="FFFFFF"/>
+                </a:solidFill>
+              </a:rPr>
+              <a:t>the bank has more cash than the books, close to a dividend date. Check the dividend notice before booking it.</a:t>
+            </a:r>
+          </a:p>
+        </p:txBody>
+      </p:sp>
+      <p:sp>
+        <p:nvSpPr>
+          <p:cNvPr id="26" name="TextBox 25"/>
+          <p:cNvSpPr txBox="1"/>
+          <p:nvPr/>
+        </p:nvSpPr>
+        <p:spPr>
+          <a:xfrm>
+            <a:off x="548640" y="6473952"/>
+            <a:ext cx="7315200" cy="228600"/>
           </a:xfrm>
           <a:prstGeom prst="rect">
             <a:avLst/>
@@ -13523,27 +19769,26 @@
           <a:p>
             <a:pPr algn="l"/>
             <a:r>
-              <a:rPr sz="1300" b="1">
-                <a:solidFill>
-                  <a:srgbClr val="3A5C9E"/>
-                </a:solidFill>
-                <a:latin typeface="Georgia"/>
-              </a:rPr>
-              <a:t>Q7</a:t>
-            </a:r>
-          </a:p>
-        </p:txBody>
-      </p:sp>
-      <p:sp>
-        <p:nvSpPr>
-          <p:cNvPr id="32" name="TextBox 31"/>
+              <a:rPr sz="800" b="0">
+                <a:solidFill>
+                  <a:srgbClr val="5D6B7E"/>
+                </a:solidFill>
+              </a:rPr>
+              <a:t>ISBMS · PGDM 2025–27 · AGENTIC AI &amp; ADVANCED ANALYTICS IN FINANCE</a:t>
+            </a:r>
+          </a:p>
+        </p:txBody>
+      </p:sp>
+      <p:sp>
+        <p:nvSpPr>
+          <p:cNvPr id="27" name="TextBox 26"/>
           <p:cNvSpPr txBox="1"/>
           <p:nvPr/>
         </p:nvSpPr>
         <p:spPr>
           <a:xfrm>
-            <a:off x="1508760" y="5102351"/>
-            <a:ext cx="9966960" cy="502920"/>
+            <a:off x="9262872" y="6473952"/>
+            <a:ext cx="2377440" cy="228600"/>
           </a:xfrm>
           <a:prstGeom prst="rect">
             <a:avLst/>
@@ -13556,285 +19801,14 @@
           </a:bodyPr>
           <a:lstStyle/>
           <a:p>
-            <a:pPr algn="l"/>
-            <a:r>
-              <a:rPr sz="1100" b="1">
-                <a:solidFill>
-                  <a:srgbClr val="1B2A41"/>
-                </a:solidFill>
-              </a:rPr>
-              <a:t>What is a Claude skill, and which one helps a fund accountant?</a:t>
-            </a:r>
-          </a:p>
-          <a:p>
-            <a:pPr algn="l">
-              <a:spcBef>
-                <a:spcPts val="100"/>
-              </a:spcBef>
-            </a:pPr>
-            <a:r>
-              <a:rPr sz="900" b="1">
-                <a:solidFill>
-                  <a:srgbClr val="C9A227"/>
-                </a:solidFill>
-              </a:rPr>
-              <a:t>TIP  </a:t>
-            </a:r>
-            <a:r>
-              <a:rPr sz="950" b="0">
+            <a:pPr algn="r"/>
+            <a:r>
+              <a:rPr sz="800" b="0">
                 <a:solidFill>
                   <a:srgbClr val="5D6B7E"/>
                 </a:solidFill>
               </a:rPr>
-              <a:t>Saved instructions for one job. The reconciliation skill compares records and sorts the breaks.</a:t>
-            </a:r>
-          </a:p>
-        </p:txBody>
-      </p:sp>
-      <p:sp>
-        <p:nvSpPr>
-          <p:cNvPr id="33" name="Rectangle 32"/>
-          <p:cNvSpPr/>
-          <p:nvPr/>
-        </p:nvSpPr>
-        <p:spPr>
-          <a:xfrm>
-            <a:off x="548640" y="5660136"/>
-            <a:ext cx="11091672" cy="548640"/>
-          </a:xfrm>
-          <a:prstGeom prst="rect">
-            <a:avLst/>
-          </a:prstGeom>
-          <a:solidFill>
-            <a:srgbClr val="FFFFFF"/>
-          </a:solidFill>
-          <a:ln>
-            <a:noFill/>
-          </a:ln>
-          <a:effectLst/>
-        </p:spPr>
-        <p:style>
-          <a:lnRef idx="1">
-            <a:schemeClr val="accent1"/>
-          </a:lnRef>
-          <a:fillRef idx="3">
-            <a:schemeClr val="accent1"/>
-          </a:fillRef>
-          <a:effectRef idx="2">
-            <a:schemeClr val="accent1"/>
-          </a:effectRef>
-          <a:fontRef idx="minor">
-            <a:schemeClr val="lt1"/>
-          </a:fontRef>
-        </p:style>
-        <p:txBody>
-          <a:bodyPr rtlCol="0" anchor="ctr"/>
-          <a:lstStyle/>
-          <a:p>
-            <a:pPr algn="ctr"/>
-          </a:p>
-        </p:txBody>
-      </p:sp>
-      <p:sp>
-        <p:nvSpPr>
-          <p:cNvPr id="34" name="Rectangle 33"/>
-          <p:cNvSpPr/>
-          <p:nvPr/>
-        </p:nvSpPr>
-        <p:spPr>
-          <a:xfrm>
-            <a:off x="548640" y="5660136"/>
-            <a:ext cx="64008" cy="548640"/>
-          </a:xfrm>
-          <a:prstGeom prst="rect">
-            <a:avLst/>
-          </a:prstGeom>
-          <a:solidFill>
-            <a:srgbClr val="3A5C9E"/>
-          </a:solidFill>
-          <a:ln>
-            <a:noFill/>
-          </a:ln>
-          <a:effectLst/>
-        </p:spPr>
-        <p:style>
-          <a:lnRef idx="1">
-            <a:schemeClr val="accent1"/>
-          </a:lnRef>
-          <a:fillRef idx="3">
-            <a:schemeClr val="accent1"/>
-          </a:fillRef>
-          <a:effectRef idx="2">
-            <a:schemeClr val="accent1"/>
-          </a:effectRef>
-          <a:fontRef idx="minor">
-            <a:schemeClr val="lt1"/>
-          </a:fontRef>
-        </p:style>
-        <p:txBody>
-          <a:bodyPr rtlCol="0" anchor="ctr"/>
-          <a:lstStyle/>
-          <a:p>
-            <a:pPr algn="ctr"/>
-          </a:p>
-        </p:txBody>
-      </p:sp>
-      <p:sp>
-        <p:nvSpPr>
-          <p:cNvPr id="35" name="TextBox 34"/>
-          <p:cNvSpPr txBox="1"/>
-          <p:nvPr/>
-        </p:nvSpPr>
-        <p:spPr>
-          <a:xfrm>
-            <a:off x="822960" y="5769864"/>
-            <a:ext cx="640080" cy="365760"/>
-          </a:xfrm>
-          <a:prstGeom prst="rect">
-            <a:avLst/>
-          </a:prstGeom>
-          <a:noFill/>
-        </p:spPr>
-        <p:txBody>
-          <a:bodyPr wrap="square" anchor="t" lIns="0" rIns="0" tIns="0" bIns="0">
-            <a:spAutoFit/>
-          </a:bodyPr>
-          <a:lstStyle/>
-          <a:p>
-            <a:pPr algn="l"/>
-            <a:r>
-              <a:rPr sz="1300" b="1">
-                <a:solidFill>
-                  <a:srgbClr val="3A5C9E"/>
-                </a:solidFill>
-                <a:latin typeface="Georgia"/>
-              </a:rPr>
-              <a:t>Q8</a:t>
-            </a:r>
-          </a:p>
-        </p:txBody>
-      </p:sp>
-      <p:sp>
-        <p:nvSpPr>
-          <p:cNvPr id="36" name="TextBox 35"/>
-          <p:cNvSpPr txBox="1"/>
-          <p:nvPr/>
-        </p:nvSpPr>
-        <p:spPr>
-          <a:xfrm>
-            <a:off x="1508760" y="5714999"/>
-            <a:ext cx="9966960" cy="502920"/>
-          </a:xfrm>
-          <a:prstGeom prst="rect">
-            <a:avLst/>
-          </a:prstGeom>
-          <a:noFill/>
-        </p:spPr>
-        <p:txBody>
-          <a:bodyPr wrap="square" anchor="t" lIns="0" rIns="0" tIns="0" bIns="0">
-            <a:spAutoFit/>
-          </a:bodyPr>
-          <a:lstStyle/>
-          <a:p>
-            <a:pPr algn="l"/>
-            <a:r>
-              <a:rPr sz="1100" b="1">
-                <a:solidFill>
-                  <a:srgbClr val="1B2A41"/>
-                </a:solidFill>
-              </a:rPr>
-              <a:t>Where can AI help in KYC, and what must a person still do?</a:t>
-            </a:r>
-          </a:p>
-          <a:p>
-            <a:pPr algn="l">
-              <a:spcBef>
-                <a:spcPts val="100"/>
-              </a:spcBef>
-            </a:pPr>
-            <a:r>
-              <a:rPr sz="900" b="1">
-                <a:solidFill>
-                  <a:srgbClr val="C9A227"/>
-                </a:solidFill>
-              </a:rPr>
-              <a:t>TIP  </a:t>
-            </a:r>
-            <a:r>
-              <a:rPr sz="950" b="0">
-                <a:solidFill>
-                  <a:srgbClr val="5D6B7E"/>
-                </a:solidFill>
-              </a:rPr>
-              <a:t>AI reads documents and matches names. A person approves the investor.</a:t>
-            </a:r>
-          </a:p>
-        </p:txBody>
-      </p:sp>
-      <p:sp>
-        <p:nvSpPr>
-          <p:cNvPr id="37" name="TextBox 36"/>
-          <p:cNvSpPr txBox="1"/>
-          <p:nvPr/>
-        </p:nvSpPr>
-        <p:spPr>
-          <a:xfrm>
-            <a:off x="548640" y="6473952"/>
-            <a:ext cx="7315200" cy="228600"/>
-          </a:xfrm>
-          <a:prstGeom prst="rect">
-            <a:avLst/>
-          </a:prstGeom>
-          <a:noFill/>
-        </p:spPr>
-        <p:txBody>
-          <a:bodyPr wrap="square" anchor="t" lIns="0" rIns="0" tIns="0" bIns="0">
-            <a:spAutoFit/>
-          </a:bodyPr>
-          <a:lstStyle/>
-          <a:p>
-            <a:pPr algn="l"/>
-            <a:r>
-              <a:rPr sz="800" b="0">
-                <a:solidFill>
-                  <a:srgbClr val="5D6B7E"/>
-                </a:solidFill>
-              </a:rPr>
-              <a:t>ISBMS · PGDM 2025–27 · AGENTIC AI &amp; ADVANCED ANALYTICS IN FINANCE</a:t>
-            </a:r>
-          </a:p>
-        </p:txBody>
-      </p:sp>
-      <p:sp>
-        <p:nvSpPr>
-          <p:cNvPr id="38" name="TextBox 37"/>
-          <p:cNvSpPr txBox="1"/>
-          <p:nvPr/>
-        </p:nvSpPr>
-        <p:spPr>
-          <a:xfrm>
-            <a:off x="9262872" y="6473952"/>
-            <a:ext cx="2377440" cy="228600"/>
-          </a:xfrm>
-          <a:prstGeom prst="rect">
-            <a:avLst/>
-          </a:prstGeom>
-          <a:noFill/>
-        </p:spPr>
-        <p:txBody>
-          <a:bodyPr wrap="square" anchor="t" lIns="0" rIns="0" tIns="0" bIns="0">
-            <a:spAutoFit/>
-          </a:bodyPr>
-          <a:lstStyle/>
-          <a:p>
-            <a:pPr algn="r"/>
-            <a:r>
-              <a:rPr sz="800" b="0">
-                <a:solidFill>
-                  <a:srgbClr val="5D6B7E"/>
-                </a:solidFill>
-              </a:rPr>
-              <a:t>MODULE 8  ·  09</a:t>
+              <a:t>MODULE 8  ·  08</a:t>
             </a:r>
           </a:p>
         </p:txBody>

--- a/slides/Module-08-Fund-Administration-NAV.pptx
+++ b/slides/Module-08-Fund-Administration-NAV.pptx
@@ -18,7 +18,6 @@
     <p:sldId id="266" r:id="rId17"/>
     <p:sldId id="267" r:id="rId18"/>
     <p:sldId id="268" r:id="rId19"/>
-    <p:sldId id="269" r:id="rId20"/>
   </p:sldIdLst>
   <p:sldSz cx="12191695" cy="6858000" type="screen4x3"/>
   <p:notesSz cx="6858000" cy="9144000"/>
@@ -5011,7 +5010,7 @@
                   <a:srgbClr val="5D6B7E"/>
                 </a:solidFill>
               </a:rPr>
-              <a:t>MODULE 8  ·  08</a:t>
+              <a:t>MODULE 8  ·  10</a:t>
             </a:r>
           </a:p>
         </p:txBody>
@@ -5115,7 +5114,7 @@
                   <a:srgbClr val="C9A227"/>
                 </a:solidFill>
               </a:rPr>
-              <a:t>HOUR 2 · THE ACCOUNTING SKILL DEMO</a:t>
+              <a:t>HOUR 2 · DOING IT EVERY DAY</a:t>
             </a:r>
           </a:p>
         </p:txBody>
@@ -5150,7 +5149,7 @@
                 </a:solidFill>
                 <a:latin typeface="Georgia"/>
               </a:rPr>
-              <a:t>Claude's reconciliation skill does the checking</a:t>
+              <a:t>Opus Fund Services, and where Claude's skills fit</a:t>
             </a:r>
           </a:p>
         </p:txBody>
@@ -5272,7 +5271,7 @@
                   <a:srgbClr val="3A5C9E"/>
                 </a:solidFill>
               </a:rPr>
-              <a:t>WHAT A SKILL IS</a:t>
+              <a:t>OPUS FUND SERVICES</a:t>
             </a:r>
           </a:p>
           <a:p>
@@ -5288,7 +5287,7 @@
                 </a:solidFill>
                 <a:latin typeface="Georgia"/>
               </a:rPr>
-              <a:t>Saved instructions for one job</a:t>
+              <a:t>A fund administrator</a:t>
             </a:r>
           </a:p>
           <a:p>
@@ -5303,7 +5302,7 @@
                   <a:srgbClr val="1B2A41"/>
                 </a:solidFill>
               </a:rPr>
-              <a:t>A skill tells Claude how accountants do a task. The finance reconciliation skill knows how a reconciliation is done.</a:t>
+              <a:t>It keeps the books, calculates NAVs and reconciles positions and cash every day.</a:t>
             </a:r>
           </a:p>
         </p:txBody>
@@ -5425,7 +5424,7 @@
                   <a:srgbClr val="3A5C9E"/>
                 </a:solidFill>
               </a:rPr>
-              <a:t>WHAT IT DOES · 1</a:t>
+              <a:t>AI IT ALREADY USES</a:t>
             </a:r>
           </a:p>
           <a:p>
@@ -5441,7 +5440,7 @@
                 </a:solidFill>
                 <a:latin typeface="Georgia"/>
               </a:rPr>
-              <a:t>Compares two records</a:t>
+              <a:t>Digital agents</a:t>
             </a:r>
           </a:p>
           <a:p>
@@ -5456,7 +5455,7 @@
                   <a:srgbClr val="1B2A41"/>
                 </a:solidFill>
               </a:rPr>
-              <a:t>It lines up the fund's books against the custodian and the transfer agent.</a:t>
+              <a:t>Its website says digital agents use desktop tools and machine learning to calculate NAVs.</a:t>
             </a:r>
           </a:p>
         </p:txBody>
@@ -5578,7 +5577,7 @@
                   <a:srgbClr val="3A5C9E"/>
                 </a:solidFill>
               </a:rPr>
-              <a:t>WHAT IT DOES · 2</a:t>
+              <a:t>WHAT A CLAUDE SKILL IS</a:t>
             </a:r>
           </a:p>
           <a:p>
@@ -5594,7 +5593,7 @@
                 </a:solidFill>
                 <a:latin typeface="Georgia"/>
               </a:rPr>
-              <a:t>Sorts every difference</a:t>
+              <a:t>Saved instructions for one job</a:t>
             </a:r>
           </a:p>
           <a:p>
@@ -5609,7 +5608,7 @@
                   <a:srgbClr val="1B2A41"/>
                 </a:solidFill>
               </a:rPr>
-              <a:t>Timing, error or missing entry. It says how old each break is.</a:t>
+              <a:t>A skill tells Claude how accountants do a task, step by step.</a:t>
             </a:r>
           </a:p>
         </p:txBody>
@@ -5731,7 +5730,7 @@
                   <a:srgbClr val="3A5C9E"/>
                 </a:solidFill>
               </a:rPr>
-              <a:t>WHAT IT DOES · 3</a:t>
+              <a:t>RECONCILIATION SKILL</a:t>
             </a:r>
           </a:p>
           <a:p>
@@ -5747,7 +5746,7 @@
                 </a:solidFill>
                 <a:latin typeface="Georgia"/>
               </a:rPr>
-              <a:t>Suggests the fix</a:t>
+              <a:t>Finds the breaks</a:t>
             </a:r>
           </a:p>
           <a:p>
@@ -5762,7 +5761,7 @@
                   <a:srgbClr val="1B2A41"/>
                 </a:solidFill>
               </a:rPr>
-              <a:t>It proposes the correcting entry. The journal-entry skill drafts it.</a:t>
+              <a:t>Lines up the books, the custodian and the transfer agent, and sorts each difference.</a:t>
             </a:r>
           </a:p>
         </p:txBody>
@@ -5884,7 +5883,7 @@
                   <a:srgbClr val="3A5C9E"/>
                 </a:solidFill>
               </a:rPr>
-              <a:t>RELATED SKILL</a:t>
+              <a:t>JOURNAL ENTRY AND VARIANCE SKILLS</a:t>
             </a:r>
           </a:p>
           <a:p>
@@ -5900,7 +5899,7 @@
                 </a:solidFill>
                 <a:latin typeface="Georgia"/>
               </a:rPr>
-              <a:t>Variance analysis</a:t>
+              <a:t>Drafts the fix, explains the move</a:t>
             </a:r>
           </a:p>
           <a:p>
@@ -5915,7 +5914,7 @@
                   <a:srgbClr val="1B2A41"/>
                 </a:solidFill>
               </a:rPr>
-              <a:t>Explains why the NAV moved from yesterday to today.</a:t>
+              <a:t>Writes the entry for each break, and says why today's NAV moved.</a:t>
             </a:r>
           </a:p>
         </p:txBody>
@@ -6053,7 +6052,7 @@
                 </a:solidFill>
                 <a:latin typeface="Georgia"/>
               </a:rPr>
-              <a:t>Reviews and signs</a:t>
+              <a:t>The fund accountant signs</a:t>
             </a:r>
           </a:p>
           <a:p>
@@ -6068,7 +6067,7 @@
                   <a:srgbClr val="C9D6EE"/>
                 </a:solidFill>
               </a:rPr>
-              <a:t>The skill never posts an entry. The fund accountant approves every fix.</a:t>
+              <a:t>Approves every entry. The skill never posts anything.</a:t>
             </a:r>
           </a:p>
         </p:txBody>
@@ -6190,7 +6189,7 @@
                   <a:srgbClr val="C9A227"/>
                 </a:solidFill>
               </a:rPr>
-              <a:t>No subscription?  </a:t>
+              <a:t>How it applies to us:  </a:t>
             </a:r>
             <a:r>
               <a:rPr sz="1200" b="0">
@@ -6198,7 +6197,7 @@
                   <a:srgbClr val="FFFFFF"/>
                 </a:solidFill>
               </a:rPr>
-              <a:t>the lab does the same steps with a free Python script and any free AI chat.</a:t>
+              <a:t>our lab is a small copy of Opus's daily job. The Claude mapping is our example, not Opus's own setup.</a:t>
             </a:r>
           </a:p>
         </p:txBody>
@@ -6266,7 +6265,7 @@
                   <a:srgbClr val="5D6B7E"/>
                 </a:solidFill>
               </a:rPr>
-              <a:t>MODULE 8  ·  09</a:t>
+              <a:t>MODULE 8  ·  11</a:t>
             </a:r>
           </a:p>
         </p:txBody>
@@ -6370,7 +6369,7 @@
                   <a:srgbClr val="C9A227"/>
                 </a:solidFill>
               </a:rPr>
-              <a:t>HOUR 2 · USE CASE</a:t>
+              <a:t>HOUR 3 · THE LIVE LAB</a:t>
             </a:r>
           </a:p>
         </p:txBody>
@@ -6405,7 +6404,7 @@
                 </a:solidFill>
                 <a:latin typeface="Georgia"/>
               </a:rPr>
-              <a:t>Use case: Opus Fund Services, and where Claude fits</a:t>
+              <a:t>Build a NAV report, reconcile it, explain it</a:t>
             </a:r>
           </a:p>
         </p:txBody>
@@ -6419,7 +6418,7 @@
         <p:spPr>
           <a:xfrm>
             <a:off x="548640" y="1463040"/>
-            <a:ext cx="3593592" cy="2002536"/>
+            <a:ext cx="3593592" cy="4160520"/>
           </a:xfrm>
           <a:prstGeom prst="rect">
             <a:avLst/>
@@ -6507,7 +6506,7 @@
         <p:spPr>
           <a:xfrm>
             <a:off x="804672" y="1664208"/>
-            <a:ext cx="3081528" cy="1728216"/>
+            <a:ext cx="3081528" cy="3886200"/>
           </a:xfrm>
           <a:prstGeom prst="rect">
             <a:avLst/>
@@ -6527,7 +6526,7 @@
                   <a:srgbClr val="3A5C9E"/>
                 </a:solidFill>
               </a:rPr>
-              <a:t>WHO OPUS IS</a:t>
+              <a:t>PART A · 20 MIN</a:t>
             </a:r>
           </a:p>
           <a:p>
@@ -6543,7 +6542,7 @@
                 </a:solidFill>
                 <a:latin typeface="Georgia"/>
               </a:rPr>
-              <a:t>A fund administrator</a:t>
+              <a:t>Watch the skill</a:t>
             </a:r>
           </a:p>
           <a:p>
@@ -6558,7 +6557,7 @@
                   <a:srgbClr val="1B2A41"/>
                 </a:solidFill>
               </a:rPr>
-              <a:t>It keeps the books and calculates the NAV for hedge funds and other funds.</a:t>
+              <a:t>The instructor runs Claude's reconciliation skill on the lab files and it finds the three breaks.</a:t>
             </a:r>
           </a:p>
         </p:txBody>
@@ -6572,7 +6571,7 @@
         <p:spPr>
           <a:xfrm>
             <a:off x="4297680" y="1463040"/>
-            <a:ext cx="3593592" cy="2002536"/>
+            <a:ext cx="3593592" cy="4160520"/>
           </a:xfrm>
           <a:prstGeom prst="rect">
             <a:avLst/>
@@ -6660,7 +6659,7 @@
         <p:spPr>
           <a:xfrm>
             <a:off x="4553712" y="1664208"/>
-            <a:ext cx="3081528" cy="1728216"/>
+            <a:ext cx="3081528" cy="3886200"/>
           </a:xfrm>
           <a:prstGeom prst="rect">
             <a:avLst/>
@@ -6680,7 +6679,7 @@
                   <a:srgbClr val="3A5C9E"/>
                 </a:solidFill>
               </a:rPr>
-              <a:t>ITS DAILY WORK</a:t>
+              <a:t>PART B · 30 MIN</a:t>
             </a:r>
           </a:p>
           <a:p>
@@ -6696,7 +6695,7 @@
                 </a:solidFill>
                 <a:latin typeface="Georgia"/>
               </a:rPr>
-              <a:t>The same three jobs as our lab</a:t>
+              <a:t>Run the NAV engine</a:t>
             </a:r>
           </a:p>
           <a:p>
@@ -6711,7 +6710,7 @@
                   <a:srgbClr val="1B2A41"/>
                 </a:solidFill>
               </a:rPr>
-              <a:t>It reconciles positions and cash every day, processes corporate actions and prices the portfolio.</a:t>
+              <a:t>Run nav_engine.py in Codex, Colab or any Python. It prices the fund, finds the breaks and writes nav_report.csv.</a:t>
             </a:r>
           </a:p>
         </p:txBody>
@@ -6725,13 +6724,13 @@
         <p:spPr>
           <a:xfrm>
             <a:off x="8046720" y="1463040"/>
-            <a:ext cx="3593592" cy="2002536"/>
+            <a:ext cx="3593592" cy="4160520"/>
           </a:xfrm>
           <a:prstGeom prst="rect">
             <a:avLst/>
           </a:prstGeom>
           <a:solidFill>
-            <a:srgbClr val="FFFFFF"/>
+            <a:srgbClr val="0F2145"/>
           </a:solidFill>
           <a:ln>
             <a:noFill/>
@@ -6813,7 +6812,7 @@
         <p:spPr>
           <a:xfrm>
             <a:off x="8302752" y="1664208"/>
-            <a:ext cx="3081528" cy="1728216"/>
+            <a:ext cx="3081528" cy="3886200"/>
           </a:xfrm>
           <a:prstGeom prst="rect">
             <a:avLst/>
@@ -6830,10 +6829,10 @@
             <a:r>
               <a:rPr sz="1000" b="1">
                 <a:solidFill>
-                  <a:srgbClr val="3A5C9E"/>
-                </a:solidFill>
-              </a:rPr>
-              <a:t>AI IT ALREADY USES</a:t>
+                  <a:srgbClr val="C9A227"/>
+                </a:solidFill>
+              </a:rPr>
+              <a:t>PART C · 30 MIN</a:t>
             </a:r>
           </a:p>
           <a:p>
@@ -6845,11 +6844,11 @@
             <a:r>
               <a:rPr sz="1600" b="1">
                 <a:solidFill>
-                  <a:srgbClr val="0F2145"/>
+                  <a:srgbClr val="FFFFFF"/>
                 </a:solidFill>
                 <a:latin typeface="Georgia"/>
               </a:rPr>
-              <a:t>Digital agents</a:t>
+              <a:t>Write the commentary</a:t>
             </a:r>
           </a:p>
           <a:p>
@@ -6861,10 +6860,10 @@
             <a:r>
               <a:rPr sz="1200" b="0">
                 <a:solidFill>
-                  <a:srgbClr val="1B2A41"/>
-                </a:solidFill>
-              </a:rPr>
-              <a:t>Its website says digital agents use desktop tools and machine learning to calculate NAVs.</a:t>
+                  <a:srgbClr val="C9D6EE"/>
+                </a:solidFill>
+              </a:rPr>
+              <a:t>Paste the printed prompt into any free AI chat. Check every number against nav_report.csv. Swap reports with the next desk.</a:t>
             </a:r>
           </a:p>
         </p:txBody>
@@ -6877,14 +6876,14 @@
         </p:nvSpPr>
         <p:spPr>
           <a:xfrm>
-            <a:off x="548640" y="3621024"/>
-            <a:ext cx="3593592" cy="2002536"/>
+            <a:off x="548640" y="5760720"/>
+            <a:ext cx="11091672" cy="603504"/>
           </a:xfrm>
           <a:prstGeom prst="rect">
             <a:avLst/>
           </a:prstGeom>
           <a:solidFill>
-            <a:srgbClr val="FFFFFF"/>
+            <a:srgbClr val="0F2145"/>
           </a:solidFill>
           <a:ln>
             <a:noFill/>
@@ -6921,8 +6920,8 @@
         </p:nvSpPr>
         <p:spPr>
           <a:xfrm>
-            <a:off x="548640" y="3621024"/>
-            <a:ext cx="3593592" cy="45720"/>
+            <a:off x="548640" y="5760720"/>
+            <a:ext cx="64008" cy="603504"/>
           </a:xfrm>
           <a:prstGeom prst="rect">
             <a:avLst/>
@@ -6965,8 +6964,50 @@
         </p:nvSpPr>
         <p:spPr>
           <a:xfrm>
-            <a:off x="804672" y="3822192"/>
-            <a:ext cx="3081528" cy="1728216"/>
+            <a:off x="822960" y="5760720"/>
+            <a:ext cx="10543032" cy="603504"/>
+          </a:xfrm>
+          <a:prstGeom prst="rect">
+            <a:avLst/>
+          </a:prstGeom>
+          <a:noFill/>
+        </p:spPr>
+        <p:txBody>
+          <a:bodyPr wrap="square" anchor="ctr" lIns="0" rIns="0" tIns="0" bIns="0">
+            <a:spAutoFit/>
+          </a:bodyPr>
+          <a:lstStyle/>
+          <a:p>
+            <a:pPr algn="l"/>
+            <a:r>
+              <a:rPr sz="1200" b="1">
+                <a:solidFill>
+                  <a:srgbClr val="C9A227"/>
+                </a:solidFill>
+              </a:rPr>
+              <a:t>Free and keyless:  </a:t>
+            </a:r>
+            <a:r>
+              <a:rPr sz="1200" b="0">
+                <a:solidFill>
+                  <a:srgbClr val="FFFFFF"/>
+                </a:solidFill>
+              </a:rPr>
+              <a:t>built-in Python only, no API key and no installs. The fund is made up and the prices are illustrative.</a:t>
+            </a:r>
+          </a:p>
+        </p:txBody>
+      </p:sp>
+      <p:sp>
+        <p:nvSpPr>
+          <p:cNvPr id="17" name="TextBox 16"/>
+          <p:cNvSpPr txBox="1"/>
+          <p:nvPr/>
+        </p:nvSpPr>
+        <p:spPr>
+          <a:xfrm>
+            <a:off x="548640" y="6473952"/>
+            <a:ext cx="7315200" cy="228600"/>
           </a:xfrm>
           <a:prstGeom prst="rect">
             <a:avLst/>
@@ -6981,145 +7022,26 @@
           <a:p>
             <a:pPr algn="l"/>
             <a:r>
-              <a:rPr sz="1000" b="1">
-                <a:solidFill>
-                  <a:srgbClr val="3A5C9E"/>
-                </a:solidFill>
-              </a:rPr>
-              <a:t>CLAUDE · RECONCILIATION SKILL</a:t>
-            </a:r>
-          </a:p>
-          <a:p>
-            <a:pPr algn="l">
-              <a:spcBef>
-                <a:spcPts val="400"/>
-              </a:spcBef>
-            </a:pPr>
-            <a:r>
-              <a:rPr sz="1600" b="1">
-                <a:solidFill>
-                  <a:srgbClr val="0F2145"/>
-                </a:solidFill>
-                <a:latin typeface="Georgia"/>
-              </a:rPr>
-              <a:t>Finds the breaks</a:t>
-            </a:r>
-          </a:p>
-          <a:p>
-            <a:pPr algn="l">
-              <a:spcBef>
-                <a:spcPts val="600"/>
-              </a:spcBef>
-            </a:pPr>
-            <a:r>
-              <a:rPr sz="1200" b="0">
-                <a:solidFill>
-                  <a:srgbClr val="1B2A41"/>
-                </a:solidFill>
-              </a:rPr>
-              <a:t>Lines up the books, the custodian and the transfer agent, like breaks 1, 2 and 3.</a:t>
-            </a:r>
-          </a:p>
-        </p:txBody>
-      </p:sp>
-      <p:sp>
-        <p:nvSpPr>
-          <p:cNvPr id="17" name="Rectangle 16"/>
-          <p:cNvSpPr/>
-          <p:nvPr/>
-        </p:nvSpPr>
-        <p:spPr>
-          <a:xfrm>
-            <a:off x="4297680" y="3621024"/>
-            <a:ext cx="3593592" cy="2002536"/>
-          </a:xfrm>
-          <a:prstGeom prst="rect">
-            <a:avLst/>
-          </a:prstGeom>
-          <a:solidFill>
-            <a:srgbClr val="FFFFFF"/>
-          </a:solidFill>
-          <a:ln>
-            <a:noFill/>
-          </a:ln>
-          <a:effectLst/>
-        </p:spPr>
-        <p:style>
-          <a:lnRef idx="1">
-            <a:schemeClr val="accent1"/>
-          </a:lnRef>
-          <a:fillRef idx="3">
-            <a:schemeClr val="accent1"/>
-          </a:fillRef>
-          <a:effectRef idx="2">
-            <a:schemeClr val="accent1"/>
-          </a:effectRef>
-          <a:fontRef idx="minor">
-            <a:schemeClr val="lt1"/>
-          </a:fontRef>
-        </p:style>
-        <p:txBody>
-          <a:bodyPr rtlCol="0" anchor="ctr"/>
-          <a:lstStyle/>
-          <a:p>
-            <a:pPr algn="ctr"/>
-          </a:p>
-        </p:txBody>
-      </p:sp>
-      <p:sp>
-        <p:nvSpPr>
-          <p:cNvPr id="18" name="Rectangle 17"/>
-          <p:cNvSpPr/>
-          <p:nvPr/>
-        </p:nvSpPr>
-        <p:spPr>
-          <a:xfrm>
-            <a:off x="4297680" y="3621024"/>
-            <a:ext cx="3593592" cy="45720"/>
-          </a:xfrm>
-          <a:prstGeom prst="rect">
-            <a:avLst/>
-          </a:prstGeom>
-          <a:solidFill>
-            <a:srgbClr val="C9A227"/>
-          </a:solidFill>
-          <a:ln>
-            <a:noFill/>
-          </a:ln>
-          <a:effectLst/>
-        </p:spPr>
-        <p:style>
-          <a:lnRef idx="1">
-            <a:schemeClr val="accent1"/>
-          </a:lnRef>
-          <a:fillRef idx="3">
-            <a:schemeClr val="accent1"/>
-          </a:fillRef>
-          <a:effectRef idx="2">
-            <a:schemeClr val="accent1"/>
-          </a:effectRef>
-          <a:fontRef idx="minor">
-            <a:schemeClr val="lt1"/>
-          </a:fontRef>
-        </p:style>
-        <p:txBody>
-          <a:bodyPr rtlCol="0" anchor="ctr"/>
-          <a:lstStyle/>
-          <a:p>
-            <a:pPr algn="ctr"/>
-          </a:p>
-        </p:txBody>
-      </p:sp>
-      <p:sp>
-        <p:nvSpPr>
-          <p:cNvPr id="19" name="TextBox 18"/>
+              <a:rPr sz="800" b="0">
+                <a:solidFill>
+                  <a:srgbClr val="5D6B7E"/>
+                </a:solidFill>
+              </a:rPr>
+              <a:t>ISBMS · PGDM 2025–27 · AGENTIC AI &amp; ADVANCED ANALYTICS IN FINANCE</a:t>
+            </a:r>
+          </a:p>
+        </p:txBody>
+      </p:sp>
+      <p:sp>
+        <p:nvSpPr>
+          <p:cNvPr id="18" name="TextBox 17"/>
           <p:cNvSpPr txBox="1"/>
           <p:nvPr/>
         </p:nvSpPr>
         <p:spPr>
           <a:xfrm>
-            <a:off x="4553712" y="3822192"/>
-            <a:ext cx="3081528" cy="1728216"/>
+            <a:off x="9262872" y="6473952"/>
+            <a:ext cx="2377440" cy="228600"/>
           </a:xfrm>
           <a:prstGeom prst="rect">
             <a:avLst/>
@@ -7132,396 +7054,14 @@
           </a:bodyPr>
           <a:lstStyle/>
           <a:p>
-            <a:pPr algn="l"/>
-            <a:r>
-              <a:rPr sz="1000" b="1">
-                <a:solidFill>
-                  <a:srgbClr val="3A5C9E"/>
-                </a:solidFill>
-              </a:rPr>
-              <a:t>CLAUDE · JOURNAL ENTRY AND VARIANCE SKILLS</a:t>
-            </a:r>
-          </a:p>
-          <a:p>
-            <a:pPr algn="l">
-              <a:spcBef>
-                <a:spcPts val="400"/>
-              </a:spcBef>
-            </a:pPr>
-            <a:r>
-              <a:rPr sz="1600" b="1">
-                <a:solidFill>
-                  <a:srgbClr val="0F2145"/>
-                </a:solidFill>
-                <a:latin typeface="Georgia"/>
-              </a:rPr>
-              <a:t>Drafts the fix, explains the move</a:t>
-            </a:r>
-          </a:p>
-          <a:p>
-            <a:pPr algn="l">
-              <a:spcBef>
-                <a:spcPts val="600"/>
-              </a:spcBef>
-            </a:pPr>
-            <a:r>
-              <a:rPr sz="1200" b="0">
-                <a:solidFill>
-                  <a:srgbClr val="1B2A41"/>
-                </a:solidFill>
-              </a:rPr>
-              <a:t>Writes the entry for each break, and says why today's NAV moved.</a:t>
-            </a:r>
-          </a:p>
-        </p:txBody>
-      </p:sp>
-      <p:sp>
-        <p:nvSpPr>
-          <p:cNvPr id="20" name="Rectangle 19"/>
-          <p:cNvSpPr/>
-          <p:nvPr/>
-        </p:nvSpPr>
-        <p:spPr>
-          <a:xfrm>
-            <a:off x="8046720" y="3621024"/>
-            <a:ext cx="3593592" cy="2002536"/>
-          </a:xfrm>
-          <a:prstGeom prst="rect">
-            <a:avLst/>
-          </a:prstGeom>
-          <a:solidFill>
-            <a:srgbClr val="0F2145"/>
-          </a:solidFill>
-          <a:ln>
-            <a:noFill/>
-          </a:ln>
-          <a:effectLst/>
-        </p:spPr>
-        <p:style>
-          <a:lnRef idx="1">
-            <a:schemeClr val="accent1"/>
-          </a:lnRef>
-          <a:fillRef idx="3">
-            <a:schemeClr val="accent1"/>
-          </a:fillRef>
-          <a:effectRef idx="2">
-            <a:schemeClr val="accent1"/>
-          </a:effectRef>
-          <a:fontRef idx="minor">
-            <a:schemeClr val="lt1"/>
-          </a:fontRef>
-        </p:style>
-        <p:txBody>
-          <a:bodyPr rtlCol="0" anchor="ctr"/>
-          <a:lstStyle/>
-          <a:p>
-            <a:pPr algn="ctr"/>
-          </a:p>
-        </p:txBody>
-      </p:sp>
-      <p:sp>
-        <p:nvSpPr>
-          <p:cNvPr id="21" name="Rectangle 20"/>
-          <p:cNvSpPr/>
-          <p:nvPr/>
-        </p:nvSpPr>
-        <p:spPr>
-          <a:xfrm>
-            <a:off x="8046720" y="3621024"/>
-            <a:ext cx="3593592" cy="45720"/>
-          </a:xfrm>
-          <a:prstGeom prst="rect">
-            <a:avLst/>
-          </a:prstGeom>
-          <a:solidFill>
-            <a:srgbClr val="C9A227"/>
-          </a:solidFill>
-          <a:ln>
-            <a:noFill/>
-          </a:ln>
-          <a:effectLst/>
-        </p:spPr>
-        <p:style>
-          <a:lnRef idx="1">
-            <a:schemeClr val="accent1"/>
-          </a:lnRef>
-          <a:fillRef idx="3">
-            <a:schemeClr val="accent1"/>
-          </a:fillRef>
-          <a:effectRef idx="2">
-            <a:schemeClr val="accent1"/>
-          </a:effectRef>
-          <a:fontRef idx="minor">
-            <a:schemeClr val="lt1"/>
-          </a:fontRef>
-        </p:style>
-        <p:txBody>
-          <a:bodyPr rtlCol="0" anchor="ctr"/>
-          <a:lstStyle/>
-          <a:p>
-            <a:pPr algn="ctr"/>
-          </a:p>
-        </p:txBody>
-      </p:sp>
-      <p:sp>
-        <p:nvSpPr>
-          <p:cNvPr id="22" name="TextBox 21"/>
-          <p:cNvSpPr txBox="1"/>
-          <p:nvPr/>
-        </p:nvSpPr>
-        <p:spPr>
-          <a:xfrm>
-            <a:off x="8302752" y="3822192"/>
-            <a:ext cx="3081528" cy="1728216"/>
-          </a:xfrm>
-          <a:prstGeom prst="rect">
-            <a:avLst/>
-          </a:prstGeom>
-          <a:noFill/>
-        </p:spPr>
-        <p:txBody>
-          <a:bodyPr wrap="square" anchor="t" lIns="0" rIns="0" tIns="0" bIns="0">
-            <a:spAutoFit/>
-          </a:bodyPr>
-          <a:lstStyle/>
-          <a:p>
-            <a:pPr algn="l"/>
-            <a:r>
-              <a:rPr sz="1000" b="1">
-                <a:solidFill>
-                  <a:srgbClr val="C9A227"/>
-                </a:solidFill>
-              </a:rPr>
-              <a:t>THE HUMAN</a:t>
-            </a:r>
-          </a:p>
-          <a:p>
-            <a:pPr algn="l">
-              <a:spcBef>
-                <a:spcPts val="400"/>
-              </a:spcBef>
-            </a:pPr>
-            <a:r>
-              <a:rPr sz="1600" b="1">
-                <a:solidFill>
-                  <a:srgbClr val="FFFFFF"/>
-                </a:solidFill>
-                <a:latin typeface="Georgia"/>
-              </a:rPr>
-              <a:t>The fund accountant signs</a:t>
-            </a:r>
-          </a:p>
-          <a:p>
-            <a:pPr algn="l">
-              <a:spcBef>
-                <a:spcPts val="600"/>
-              </a:spcBef>
-            </a:pPr>
-            <a:r>
-              <a:rPr sz="1200" b="0">
-                <a:solidFill>
-                  <a:srgbClr val="C9D6EE"/>
-                </a:solidFill>
-              </a:rPr>
-              <a:t>Approves every entry and releases the NAV.</a:t>
-            </a:r>
-          </a:p>
-        </p:txBody>
-      </p:sp>
-      <p:sp>
-        <p:nvSpPr>
-          <p:cNvPr id="23" name="Rectangle 22"/>
-          <p:cNvSpPr/>
-          <p:nvPr/>
-        </p:nvSpPr>
-        <p:spPr>
-          <a:xfrm>
-            <a:off x="548640" y="5760720"/>
-            <a:ext cx="11091672" cy="603504"/>
-          </a:xfrm>
-          <a:prstGeom prst="rect">
-            <a:avLst/>
-          </a:prstGeom>
-          <a:solidFill>
-            <a:srgbClr val="0F2145"/>
-          </a:solidFill>
-          <a:ln>
-            <a:noFill/>
-          </a:ln>
-          <a:effectLst/>
-        </p:spPr>
-        <p:style>
-          <a:lnRef idx="1">
-            <a:schemeClr val="accent1"/>
-          </a:lnRef>
-          <a:fillRef idx="3">
-            <a:schemeClr val="accent1"/>
-          </a:fillRef>
-          <a:effectRef idx="2">
-            <a:schemeClr val="accent1"/>
-          </a:effectRef>
-          <a:fontRef idx="minor">
-            <a:schemeClr val="lt1"/>
-          </a:fontRef>
-        </p:style>
-        <p:txBody>
-          <a:bodyPr rtlCol="0" anchor="ctr"/>
-          <a:lstStyle/>
-          <a:p>
-            <a:pPr algn="ctr"/>
-          </a:p>
-        </p:txBody>
-      </p:sp>
-      <p:sp>
-        <p:nvSpPr>
-          <p:cNvPr id="24" name="Rectangle 23"/>
-          <p:cNvSpPr/>
-          <p:nvPr/>
-        </p:nvSpPr>
-        <p:spPr>
-          <a:xfrm>
-            <a:off x="548640" y="5760720"/>
-            <a:ext cx="64008" cy="603504"/>
-          </a:xfrm>
-          <a:prstGeom prst="rect">
-            <a:avLst/>
-          </a:prstGeom>
-          <a:solidFill>
-            <a:srgbClr val="C9A227"/>
-          </a:solidFill>
-          <a:ln>
-            <a:noFill/>
-          </a:ln>
-          <a:effectLst/>
-        </p:spPr>
-        <p:style>
-          <a:lnRef idx="1">
-            <a:schemeClr val="accent1"/>
-          </a:lnRef>
-          <a:fillRef idx="3">
-            <a:schemeClr val="accent1"/>
-          </a:fillRef>
-          <a:effectRef idx="2">
-            <a:schemeClr val="accent1"/>
-          </a:effectRef>
-          <a:fontRef idx="minor">
-            <a:schemeClr val="lt1"/>
-          </a:fontRef>
-        </p:style>
-        <p:txBody>
-          <a:bodyPr rtlCol="0" anchor="ctr"/>
-          <a:lstStyle/>
-          <a:p>
-            <a:pPr algn="ctr"/>
-          </a:p>
-        </p:txBody>
-      </p:sp>
-      <p:sp>
-        <p:nvSpPr>
-          <p:cNvPr id="25" name="TextBox 24"/>
-          <p:cNvSpPr txBox="1"/>
-          <p:nvPr/>
-        </p:nvSpPr>
-        <p:spPr>
-          <a:xfrm>
-            <a:off x="822960" y="5760720"/>
-            <a:ext cx="10543032" cy="603504"/>
-          </a:xfrm>
-          <a:prstGeom prst="rect">
-            <a:avLst/>
-          </a:prstGeom>
-          <a:noFill/>
-        </p:spPr>
-        <p:txBody>
-          <a:bodyPr wrap="square" anchor="ctr" lIns="0" rIns="0" tIns="0" bIns="0">
-            <a:spAutoFit/>
-          </a:bodyPr>
-          <a:lstStyle/>
-          <a:p>
-            <a:pPr algn="l"/>
-            <a:r>
-              <a:rPr sz="1200" b="1">
-                <a:solidFill>
-                  <a:srgbClr val="C9A227"/>
-                </a:solidFill>
-              </a:rPr>
-              <a:t>How it applies to us:  </a:t>
-            </a:r>
-            <a:r>
-              <a:rPr sz="1200" b="0">
-                <a:solidFill>
-                  <a:srgbClr val="FFFFFF"/>
-                </a:solidFill>
-              </a:rPr>
-              <a:t>our lab is a small copy of this daily job. The Claude mapping is our example, not Opus's own setup.</a:t>
-            </a:r>
-          </a:p>
-        </p:txBody>
-      </p:sp>
-      <p:sp>
-        <p:nvSpPr>
-          <p:cNvPr id="26" name="TextBox 25"/>
-          <p:cNvSpPr txBox="1"/>
-          <p:nvPr/>
-        </p:nvSpPr>
-        <p:spPr>
-          <a:xfrm>
-            <a:off x="548640" y="6473952"/>
-            <a:ext cx="7315200" cy="228600"/>
-          </a:xfrm>
-          <a:prstGeom prst="rect">
-            <a:avLst/>
-          </a:prstGeom>
-          <a:noFill/>
-        </p:spPr>
-        <p:txBody>
-          <a:bodyPr wrap="square" anchor="t" lIns="0" rIns="0" tIns="0" bIns="0">
-            <a:spAutoFit/>
-          </a:bodyPr>
-          <a:lstStyle/>
-          <a:p>
-            <a:pPr algn="l"/>
+            <a:pPr algn="r"/>
             <a:r>
               <a:rPr sz="800" b="0">
                 <a:solidFill>
                   <a:srgbClr val="5D6B7E"/>
                 </a:solidFill>
               </a:rPr>
-              <a:t>ISBMS · PGDM 2025–27 · AGENTIC AI &amp; ADVANCED ANALYTICS IN FINANCE</a:t>
-            </a:r>
-          </a:p>
-        </p:txBody>
-      </p:sp>
-      <p:sp>
-        <p:nvSpPr>
-          <p:cNvPr id="27" name="TextBox 26"/>
-          <p:cNvSpPr txBox="1"/>
-          <p:nvPr/>
-        </p:nvSpPr>
-        <p:spPr>
-          <a:xfrm>
-            <a:off x="9262872" y="6473952"/>
-            <a:ext cx="2377440" cy="228600"/>
-          </a:xfrm>
-          <a:prstGeom prst="rect">
-            <a:avLst/>
-          </a:prstGeom>
-          <a:noFill/>
-        </p:spPr>
-        <p:txBody>
-          <a:bodyPr wrap="square" anchor="t" lIns="0" rIns="0" tIns="0" bIns="0">
-            <a:spAutoFit/>
-          </a:bodyPr>
-          <a:lstStyle/>
-          <a:p>
-            <a:pPr algn="r"/>
-            <a:r>
-              <a:rPr sz="800" b="0">
-                <a:solidFill>
-                  <a:srgbClr val="5D6B7E"/>
-                </a:solidFill>
-              </a:rPr>
-              <a:t>MODULE 8  ·  10</a:t>
+              <a:t>MODULE 8  ·  12</a:t>
             </a:r>
           </a:p>
         </p:txBody>
@@ -7625,7 +7165,7 @@
                   <a:srgbClr val="C9A227"/>
                 </a:solidFill>
               </a:rPr>
-              <a:t>HOUR 3 · THE LIVE LAB</a:t>
+              <a:t>PRACTICE QUESTIONS</a:t>
             </a:r>
           </a:p>
         </p:txBody>
@@ -7660,7 +7200,7 @@
                 </a:solidFill>
                 <a:latin typeface="Georgia"/>
               </a:rPr>
-              <a:t>Build a NAV report, reconcile it, explain it</a:t>
+              <a:t>Simple questions before the exam</a:t>
             </a:r>
           </a:p>
         </p:txBody>
@@ -7673,8 +7213,8 @@
         </p:nvSpPr>
         <p:spPr>
           <a:xfrm>
-            <a:off x="548640" y="1463040"/>
-            <a:ext cx="3593592" cy="4160520"/>
+            <a:off x="548640" y="1371600"/>
+            <a:ext cx="11091672" cy="548640"/>
           </a:xfrm>
           <a:prstGeom prst="rect">
             <a:avLst/>
@@ -7717,14 +7257,14 @@
         </p:nvSpPr>
         <p:spPr>
           <a:xfrm>
-            <a:off x="548640" y="1463040"/>
-            <a:ext cx="3593592" cy="45720"/>
+            <a:off x="548640" y="1371600"/>
+            <a:ext cx="64008" cy="548640"/>
           </a:xfrm>
           <a:prstGeom prst="rect">
             <a:avLst/>
           </a:prstGeom>
           <a:solidFill>
-            <a:srgbClr val="C9A227"/>
+            <a:srgbClr val="3A5C9E"/>
           </a:solidFill>
           <a:ln>
             <a:noFill/>
@@ -7761,8 +7301,8 @@
         </p:nvSpPr>
         <p:spPr>
           <a:xfrm>
-            <a:off x="804672" y="1664208"/>
-            <a:ext cx="3081528" cy="3886200"/>
+            <a:off x="822960" y="1481328"/>
+            <a:ext cx="640080" cy="365760"/>
           </a:xfrm>
           <a:prstGeom prst="rect">
             <a:avLst/>
@@ -7777,57 +7317,84 @@
           <a:p>
             <a:pPr algn="l"/>
             <a:r>
-              <a:rPr sz="1000" b="1">
+              <a:rPr sz="1300" b="1">
                 <a:solidFill>
                   <a:srgbClr val="3A5C9E"/>
                 </a:solidFill>
-              </a:rPr>
-              <a:t>PART A · 20 MIN</a:t>
+                <a:latin typeface="Georgia"/>
+              </a:rPr>
+              <a:t>Q1</a:t>
+            </a:r>
+          </a:p>
+        </p:txBody>
+      </p:sp>
+      <p:sp>
+        <p:nvSpPr>
+          <p:cNvPr id="8" name="TextBox 7"/>
+          <p:cNvSpPr txBox="1"/>
+          <p:nvPr/>
+        </p:nvSpPr>
+        <p:spPr>
+          <a:xfrm>
+            <a:off x="1508760" y="1426464"/>
+            <a:ext cx="9966960" cy="502920"/>
+          </a:xfrm>
+          <a:prstGeom prst="rect">
+            <a:avLst/>
+          </a:prstGeom>
+          <a:noFill/>
+        </p:spPr>
+        <p:txBody>
+          <a:bodyPr wrap="square" anchor="t" lIns="0" rIns="0" tIns="0" bIns="0">
+            <a:spAutoFit/>
+          </a:bodyPr>
+          <a:lstStyle/>
+          <a:p>
+            <a:pPr algn="l"/>
+            <a:r>
+              <a:rPr sz="1100" b="1">
+                <a:solidFill>
+                  <a:srgbClr val="1B2A41"/>
+                </a:solidFill>
+              </a:rPr>
+              <a:t>What is NAV, and how is it calculated?</a:t>
             </a:r>
           </a:p>
           <a:p>
             <a:pPr algn="l">
               <a:spcBef>
-                <a:spcPts val="400"/>
+                <a:spcPts val="100"/>
               </a:spcBef>
             </a:pPr>
             <a:r>
-              <a:rPr sz="1600" b="1">
-                <a:solidFill>
-                  <a:srgbClr val="0F2145"/>
-                </a:solidFill>
-                <a:latin typeface="Georgia"/>
-              </a:rPr>
-              <a:t>Watch the skill</a:t>
-            </a:r>
-          </a:p>
-          <a:p>
-            <a:pPr algn="l">
-              <a:spcBef>
-                <a:spcPts val="600"/>
-              </a:spcBef>
-            </a:pPr>
-            <a:r>
-              <a:rPr sz="1200" b="0">
-                <a:solidFill>
-                  <a:srgbClr val="1B2A41"/>
-                </a:solidFill>
-              </a:rPr>
-              <a:t>The instructor runs Claude's reconciliation skill on the lab files and it finds the three breaks.</a:t>
-            </a:r>
-          </a:p>
-        </p:txBody>
-      </p:sp>
-      <p:sp>
-        <p:nvSpPr>
-          <p:cNvPr id="8" name="Rectangle 7"/>
+              <a:rPr sz="900" b="1">
+                <a:solidFill>
+                  <a:srgbClr val="C9A227"/>
+                </a:solidFill>
+              </a:rPr>
+              <a:t>TIP  </a:t>
+            </a:r>
+            <a:r>
+              <a:rPr sz="950" b="0">
+                <a:solidFill>
+                  <a:srgbClr val="5D6B7E"/>
+                </a:solidFill>
+              </a:rPr>
+              <a:t>Net asset value per unit: holdings at market price plus cash minus expenses, divided by units.</a:t>
+            </a:r>
+          </a:p>
+        </p:txBody>
+      </p:sp>
+      <p:sp>
+        <p:nvSpPr>
+          <p:cNvPr id="9" name="Rectangle 8"/>
           <p:cNvSpPr/>
           <p:nvPr/>
         </p:nvSpPr>
         <p:spPr>
           <a:xfrm>
-            <a:off x="4297680" y="1463040"/>
-            <a:ext cx="3593592" cy="4160520"/>
+            <a:off x="548640" y="1984248"/>
+            <a:ext cx="11091672" cy="548640"/>
           </a:xfrm>
           <a:prstGeom prst="rect">
             <a:avLst/>
@@ -7864,20 +7431,20 @@
       </p:sp>
       <p:sp>
         <p:nvSpPr>
-          <p:cNvPr id="9" name="Rectangle 8"/>
+          <p:cNvPr id="10" name="Rectangle 9"/>
           <p:cNvSpPr/>
           <p:nvPr/>
         </p:nvSpPr>
         <p:spPr>
           <a:xfrm>
-            <a:off x="4297680" y="1463040"/>
-            <a:ext cx="3593592" cy="45720"/>
+            <a:off x="548640" y="1984248"/>
+            <a:ext cx="64008" cy="548640"/>
           </a:xfrm>
           <a:prstGeom prst="rect">
             <a:avLst/>
           </a:prstGeom>
           <a:solidFill>
-            <a:srgbClr val="C9A227"/>
+            <a:srgbClr val="3A5C9E"/>
           </a:solidFill>
           <a:ln>
             <a:noFill/>
@@ -7908,14 +7475,14 @@
       </p:sp>
       <p:sp>
         <p:nvSpPr>
-          <p:cNvPr id="10" name="TextBox 9"/>
+          <p:cNvPr id="11" name="TextBox 10"/>
           <p:cNvSpPr txBox="1"/>
           <p:nvPr/>
         </p:nvSpPr>
         <p:spPr>
           <a:xfrm>
-            <a:off x="4553712" y="1664208"/>
-            <a:ext cx="3081528" cy="3886200"/>
+            <a:off x="822960" y="2093976"/>
+            <a:ext cx="640080" cy="365760"/>
           </a:xfrm>
           <a:prstGeom prst="rect">
             <a:avLst/>
@@ -7930,145 +7497,27 @@
           <a:p>
             <a:pPr algn="l"/>
             <a:r>
-              <a:rPr sz="1000" b="1">
+              <a:rPr sz="1300" b="1">
                 <a:solidFill>
                   <a:srgbClr val="3A5C9E"/>
                 </a:solidFill>
-              </a:rPr>
-              <a:t>PART B · 30 MIN</a:t>
-            </a:r>
-          </a:p>
-          <a:p>
-            <a:pPr algn="l">
-              <a:spcBef>
-                <a:spcPts val="400"/>
-              </a:spcBef>
-            </a:pPr>
-            <a:r>
-              <a:rPr sz="1600" b="1">
-                <a:solidFill>
-                  <a:srgbClr val="0F2145"/>
-                </a:solidFill>
                 <a:latin typeface="Georgia"/>
               </a:rPr>
-              <a:t>Run the NAV engine</a:t>
-            </a:r>
-          </a:p>
-          <a:p>
-            <a:pPr algn="l">
-              <a:spcBef>
-                <a:spcPts val="600"/>
-              </a:spcBef>
-            </a:pPr>
-            <a:r>
-              <a:rPr sz="1200" b="0">
-                <a:solidFill>
-                  <a:srgbClr val="1B2A41"/>
-                </a:solidFill>
-              </a:rPr>
-              <a:t>Run nav_engine.py in Codex, Colab or any Python. It prices the fund, finds the breaks and writes nav_report.csv.</a:t>
-            </a:r>
-          </a:p>
-        </p:txBody>
-      </p:sp>
-      <p:sp>
-        <p:nvSpPr>
-          <p:cNvPr id="11" name="Rectangle 10"/>
-          <p:cNvSpPr/>
-          <p:nvPr/>
-        </p:nvSpPr>
-        <p:spPr>
-          <a:xfrm>
-            <a:off x="8046720" y="1463040"/>
-            <a:ext cx="3593592" cy="4160520"/>
-          </a:xfrm>
-          <a:prstGeom prst="rect">
-            <a:avLst/>
-          </a:prstGeom>
-          <a:solidFill>
-            <a:srgbClr val="0F2145"/>
-          </a:solidFill>
-          <a:ln>
-            <a:noFill/>
-          </a:ln>
-          <a:effectLst/>
-        </p:spPr>
-        <p:style>
-          <a:lnRef idx="1">
-            <a:schemeClr val="accent1"/>
-          </a:lnRef>
-          <a:fillRef idx="3">
-            <a:schemeClr val="accent1"/>
-          </a:fillRef>
-          <a:effectRef idx="2">
-            <a:schemeClr val="accent1"/>
-          </a:effectRef>
-          <a:fontRef idx="minor">
-            <a:schemeClr val="lt1"/>
-          </a:fontRef>
-        </p:style>
-        <p:txBody>
-          <a:bodyPr rtlCol="0" anchor="ctr"/>
-          <a:lstStyle/>
-          <a:p>
-            <a:pPr algn="ctr"/>
-          </a:p>
-        </p:txBody>
-      </p:sp>
-      <p:sp>
-        <p:nvSpPr>
-          <p:cNvPr id="12" name="Rectangle 11"/>
-          <p:cNvSpPr/>
-          <p:nvPr/>
-        </p:nvSpPr>
-        <p:spPr>
-          <a:xfrm>
-            <a:off x="8046720" y="1463040"/>
-            <a:ext cx="3593592" cy="45720"/>
-          </a:xfrm>
-          <a:prstGeom prst="rect">
-            <a:avLst/>
-          </a:prstGeom>
-          <a:solidFill>
-            <a:srgbClr val="C9A227"/>
-          </a:solidFill>
-          <a:ln>
-            <a:noFill/>
-          </a:ln>
-          <a:effectLst/>
-        </p:spPr>
-        <p:style>
-          <a:lnRef idx="1">
-            <a:schemeClr val="accent1"/>
-          </a:lnRef>
-          <a:fillRef idx="3">
-            <a:schemeClr val="accent1"/>
-          </a:fillRef>
-          <a:effectRef idx="2">
-            <a:schemeClr val="accent1"/>
-          </a:effectRef>
-          <a:fontRef idx="minor">
-            <a:schemeClr val="lt1"/>
-          </a:fontRef>
-        </p:style>
-        <p:txBody>
-          <a:bodyPr rtlCol="0" anchor="ctr"/>
-          <a:lstStyle/>
-          <a:p>
-            <a:pPr algn="ctr"/>
-          </a:p>
-        </p:txBody>
-      </p:sp>
-      <p:sp>
-        <p:nvSpPr>
-          <p:cNvPr id="13" name="TextBox 12"/>
+              <a:t>Q2</a:t>
+            </a:r>
+          </a:p>
+        </p:txBody>
+      </p:sp>
+      <p:sp>
+        <p:nvSpPr>
+          <p:cNvPr id="12" name="TextBox 11"/>
           <p:cNvSpPr txBox="1"/>
           <p:nvPr/>
         </p:nvSpPr>
         <p:spPr>
           <a:xfrm>
-            <a:off x="8302752" y="1664208"/>
-            <a:ext cx="3081528" cy="3886200"/>
+            <a:off x="1508760" y="2039112"/>
+            <a:ext cx="9966960" cy="502920"/>
           </a:xfrm>
           <a:prstGeom prst="rect">
             <a:avLst/>
@@ -8083,393 +7532,48 @@
           <a:p>
             <a:pPr algn="l"/>
             <a:r>
-              <a:rPr sz="1000" b="1">
-                <a:solidFill>
-                  <a:srgbClr val="C9A227"/>
-                </a:solidFill>
-              </a:rPr>
-              <a:t>PART C · 30 MIN</a:t>
+              <a:rPr sz="1100" b="1">
+                <a:solidFill>
+                  <a:srgbClr val="1B2A41"/>
+                </a:solidFill>
+              </a:rPr>
+              <a:t>What does a custodian do, and what does a transfer agent do?</a:t>
             </a:r>
           </a:p>
           <a:p>
             <a:pPr algn="l">
               <a:spcBef>
-                <a:spcPts val="400"/>
+                <a:spcPts val="100"/>
               </a:spcBef>
             </a:pPr>
             <a:r>
-              <a:rPr sz="1600" b="1">
-                <a:solidFill>
-                  <a:srgbClr val="FFFFFF"/>
-                </a:solidFill>
-                <a:latin typeface="Georgia"/>
-              </a:rPr>
-              <a:t>Write the commentary</a:t>
-            </a:r>
-          </a:p>
-          <a:p>
-            <a:pPr algn="l">
-              <a:spcBef>
-                <a:spcPts val="600"/>
-              </a:spcBef>
-            </a:pPr>
-            <a:r>
-              <a:rPr sz="1200" b="0">
-                <a:solidFill>
-                  <a:srgbClr val="C9D6EE"/>
-                </a:solidFill>
-              </a:rPr>
-              <a:t>Paste the printed prompt into any free AI chat. Check every number against nav_report.csv. Swap reports with the next desk.</a:t>
-            </a:r>
-          </a:p>
-        </p:txBody>
-      </p:sp>
-      <p:sp>
-        <p:nvSpPr>
-          <p:cNvPr id="14" name="Rectangle 13"/>
+              <a:rPr sz="900" b="1">
+                <a:solidFill>
+                  <a:srgbClr val="C9A227"/>
+                </a:solidFill>
+              </a:rPr>
+              <a:t>TIP  </a:t>
+            </a:r>
+            <a:r>
+              <a:rPr sz="950" b="0">
+                <a:solidFill>
+                  <a:srgbClr val="5D6B7E"/>
+                </a:solidFill>
+              </a:rPr>
+              <a:t>The custodian holds the fund's shares and cash. The transfer agent keeps the list of investors and their units.</a:t>
+            </a:r>
+          </a:p>
+        </p:txBody>
+      </p:sp>
+      <p:sp>
+        <p:nvSpPr>
+          <p:cNvPr id="13" name="Rectangle 12"/>
           <p:cNvSpPr/>
           <p:nvPr/>
         </p:nvSpPr>
         <p:spPr>
           <a:xfrm>
-            <a:off x="548640" y="5760720"/>
-            <a:ext cx="11091672" cy="603504"/>
-          </a:xfrm>
-          <a:prstGeom prst="rect">
-            <a:avLst/>
-          </a:prstGeom>
-          <a:solidFill>
-            <a:srgbClr val="0F2145"/>
-          </a:solidFill>
-          <a:ln>
-            <a:noFill/>
-          </a:ln>
-          <a:effectLst/>
-        </p:spPr>
-        <p:style>
-          <a:lnRef idx="1">
-            <a:schemeClr val="accent1"/>
-          </a:lnRef>
-          <a:fillRef idx="3">
-            <a:schemeClr val="accent1"/>
-          </a:fillRef>
-          <a:effectRef idx="2">
-            <a:schemeClr val="accent1"/>
-          </a:effectRef>
-          <a:fontRef idx="minor">
-            <a:schemeClr val="lt1"/>
-          </a:fontRef>
-        </p:style>
-        <p:txBody>
-          <a:bodyPr rtlCol="0" anchor="ctr"/>
-          <a:lstStyle/>
-          <a:p>
-            <a:pPr algn="ctr"/>
-          </a:p>
-        </p:txBody>
-      </p:sp>
-      <p:sp>
-        <p:nvSpPr>
-          <p:cNvPr id="15" name="Rectangle 14"/>
-          <p:cNvSpPr/>
-          <p:nvPr/>
-        </p:nvSpPr>
-        <p:spPr>
-          <a:xfrm>
-            <a:off x="548640" y="5760720"/>
-            <a:ext cx="64008" cy="603504"/>
-          </a:xfrm>
-          <a:prstGeom prst="rect">
-            <a:avLst/>
-          </a:prstGeom>
-          <a:solidFill>
-            <a:srgbClr val="C9A227"/>
-          </a:solidFill>
-          <a:ln>
-            <a:noFill/>
-          </a:ln>
-          <a:effectLst/>
-        </p:spPr>
-        <p:style>
-          <a:lnRef idx="1">
-            <a:schemeClr val="accent1"/>
-          </a:lnRef>
-          <a:fillRef idx="3">
-            <a:schemeClr val="accent1"/>
-          </a:fillRef>
-          <a:effectRef idx="2">
-            <a:schemeClr val="accent1"/>
-          </a:effectRef>
-          <a:fontRef idx="minor">
-            <a:schemeClr val="lt1"/>
-          </a:fontRef>
-        </p:style>
-        <p:txBody>
-          <a:bodyPr rtlCol="0" anchor="ctr"/>
-          <a:lstStyle/>
-          <a:p>
-            <a:pPr algn="ctr"/>
-          </a:p>
-        </p:txBody>
-      </p:sp>
-      <p:sp>
-        <p:nvSpPr>
-          <p:cNvPr id="16" name="TextBox 15"/>
-          <p:cNvSpPr txBox="1"/>
-          <p:nvPr/>
-        </p:nvSpPr>
-        <p:spPr>
-          <a:xfrm>
-            <a:off x="822960" y="5760720"/>
-            <a:ext cx="10543032" cy="603504"/>
-          </a:xfrm>
-          <a:prstGeom prst="rect">
-            <a:avLst/>
-          </a:prstGeom>
-          <a:noFill/>
-        </p:spPr>
-        <p:txBody>
-          <a:bodyPr wrap="square" anchor="ctr" lIns="0" rIns="0" tIns="0" bIns="0">
-            <a:spAutoFit/>
-          </a:bodyPr>
-          <a:lstStyle/>
-          <a:p>
-            <a:pPr algn="l"/>
-            <a:r>
-              <a:rPr sz="1200" b="1">
-                <a:solidFill>
-                  <a:srgbClr val="C9A227"/>
-                </a:solidFill>
-              </a:rPr>
-              <a:t>Free and keyless:  </a:t>
-            </a:r>
-            <a:r>
-              <a:rPr sz="1200" b="0">
-                <a:solidFill>
-                  <a:srgbClr val="FFFFFF"/>
-                </a:solidFill>
-              </a:rPr>
-              <a:t>built-in Python only, no API key and no installs. The fund is made up and the prices are illustrative.</a:t>
-            </a:r>
-          </a:p>
-        </p:txBody>
-      </p:sp>
-      <p:sp>
-        <p:nvSpPr>
-          <p:cNvPr id="17" name="TextBox 16"/>
-          <p:cNvSpPr txBox="1"/>
-          <p:nvPr/>
-        </p:nvSpPr>
-        <p:spPr>
-          <a:xfrm>
-            <a:off x="548640" y="6473952"/>
-            <a:ext cx="7315200" cy="228600"/>
-          </a:xfrm>
-          <a:prstGeom prst="rect">
-            <a:avLst/>
-          </a:prstGeom>
-          <a:noFill/>
-        </p:spPr>
-        <p:txBody>
-          <a:bodyPr wrap="square" anchor="t" lIns="0" rIns="0" tIns="0" bIns="0">
-            <a:spAutoFit/>
-          </a:bodyPr>
-          <a:lstStyle/>
-          <a:p>
-            <a:pPr algn="l"/>
-            <a:r>
-              <a:rPr sz="800" b="0">
-                <a:solidFill>
-                  <a:srgbClr val="5D6B7E"/>
-                </a:solidFill>
-              </a:rPr>
-              <a:t>ISBMS · PGDM 2025–27 · AGENTIC AI &amp; ADVANCED ANALYTICS IN FINANCE</a:t>
-            </a:r>
-          </a:p>
-        </p:txBody>
-      </p:sp>
-      <p:sp>
-        <p:nvSpPr>
-          <p:cNvPr id="18" name="TextBox 17"/>
-          <p:cNvSpPr txBox="1"/>
-          <p:nvPr/>
-        </p:nvSpPr>
-        <p:spPr>
-          <a:xfrm>
-            <a:off x="9262872" y="6473952"/>
-            <a:ext cx="2377440" cy="228600"/>
-          </a:xfrm>
-          <a:prstGeom prst="rect">
-            <a:avLst/>
-          </a:prstGeom>
-          <a:noFill/>
-        </p:spPr>
-        <p:txBody>
-          <a:bodyPr wrap="square" anchor="t" lIns="0" rIns="0" tIns="0" bIns="0">
-            <a:spAutoFit/>
-          </a:bodyPr>
-          <a:lstStyle/>
-          <a:p>
-            <a:pPr algn="r"/>
-            <a:r>
-              <a:rPr sz="800" b="0">
-                <a:solidFill>
-                  <a:srgbClr val="5D6B7E"/>
-                </a:solidFill>
-              </a:rPr>
-              <a:t>MODULE 8  ·  11</a:t>
-            </a:r>
-          </a:p>
-        </p:txBody>
-      </p:sp>
-    </p:spTree>
-  </p:cSld>
-  <p:clrMapOvr>
-    <a:masterClrMapping/>
-  </p:clrMapOvr>
-</p:sld>
-</file>
-
-<file path=ppt/slides/slide14.xml><?xml version="1.0" encoding="utf-8"?>
-<p:sld xmlns:a="http://schemas.openxmlformats.org/drawingml/2006/main" xmlns:p="http://schemas.openxmlformats.org/presentationml/2006/main" xmlns:r="http://schemas.openxmlformats.org/officeDocument/2006/relationships">
-  <p:cSld>
-    <p:bg>
-      <p:bgPr>
-        <a:solidFill>
-          <a:srgbClr val="F7F8FA"/>
-        </a:solidFill>
-        <a:effectLst/>
-      </p:bgPr>
-    </p:bg>
-    <p:spTree>
-      <p:nvGrpSpPr>
-        <p:cNvPr id="1" name=""/>
-        <p:cNvGrpSpPr/>
-        <p:nvPr/>
-      </p:nvGrpSpPr>
-      <p:grpSpPr/>
-      <p:sp>
-        <p:nvSpPr>
-          <p:cNvPr id="2" name="Rectangle 1"/>
-          <p:cNvSpPr/>
-          <p:nvPr/>
-        </p:nvSpPr>
-        <p:spPr>
-          <a:xfrm>
-            <a:off x="548640" y="402336"/>
-            <a:ext cx="118872" cy="118872"/>
-          </a:xfrm>
-          <a:prstGeom prst="rect">
-            <a:avLst/>
-          </a:prstGeom>
-          <a:solidFill>
-            <a:srgbClr val="C9A227"/>
-          </a:solidFill>
-          <a:ln>
-            <a:noFill/>
-          </a:ln>
-          <a:effectLst/>
-        </p:spPr>
-        <p:style>
-          <a:lnRef idx="1">
-            <a:schemeClr val="accent1"/>
-          </a:lnRef>
-          <a:fillRef idx="3">
-            <a:schemeClr val="accent1"/>
-          </a:fillRef>
-          <a:effectRef idx="2">
-            <a:schemeClr val="accent1"/>
-          </a:effectRef>
-          <a:fontRef idx="minor">
-            <a:schemeClr val="lt1"/>
-          </a:fontRef>
-        </p:style>
-        <p:txBody>
-          <a:bodyPr rtlCol="0" anchor="ctr"/>
-          <a:lstStyle/>
-          <a:p>
-            <a:pPr algn="ctr"/>
-          </a:p>
-        </p:txBody>
-      </p:sp>
-      <p:sp>
-        <p:nvSpPr>
-          <p:cNvPr id="3" name="TextBox 2"/>
-          <p:cNvSpPr txBox="1"/>
-          <p:nvPr/>
-        </p:nvSpPr>
-        <p:spPr>
-          <a:xfrm>
-            <a:off x="786384" y="310896"/>
-            <a:ext cx="10817352" cy="274320"/>
-          </a:xfrm>
-          <a:prstGeom prst="rect">
-            <a:avLst/>
-          </a:prstGeom>
-          <a:noFill/>
-        </p:spPr>
-        <p:txBody>
-          <a:bodyPr wrap="square" anchor="t" lIns="0" rIns="0" tIns="0" bIns="0">
-            <a:spAutoFit/>
-          </a:bodyPr>
-          <a:lstStyle/>
-          <a:p>
-            <a:pPr algn="l"/>
-            <a:r>
-              <a:rPr sz="1100" b="1">
-                <a:solidFill>
-                  <a:srgbClr val="C9A227"/>
-                </a:solidFill>
-              </a:rPr>
-              <a:t>PRACTICE QUESTIONS</a:t>
-            </a:r>
-          </a:p>
-        </p:txBody>
-      </p:sp>
-      <p:sp>
-        <p:nvSpPr>
-          <p:cNvPr id="4" name="TextBox 3"/>
-          <p:cNvSpPr txBox="1"/>
-          <p:nvPr/>
-        </p:nvSpPr>
-        <p:spPr>
-          <a:xfrm>
-            <a:off x="548640" y="621792"/>
-            <a:ext cx="11091672" cy="731520"/>
-          </a:xfrm>
-          <a:prstGeom prst="rect">
-            <a:avLst/>
-          </a:prstGeom>
-          <a:noFill/>
-        </p:spPr>
-        <p:txBody>
-          <a:bodyPr wrap="square" anchor="t" lIns="0" rIns="0" tIns="0" bIns="0">
-            <a:spAutoFit/>
-          </a:bodyPr>
-          <a:lstStyle/>
-          <a:p>
-            <a:pPr algn="l"/>
-            <a:r>
-              <a:rPr sz="2900" b="1">
-                <a:solidFill>
-                  <a:srgbClr val="0F2145"/>
-                </a:solidFill>
-                <a:latin typeface="Georgia"/>
-              </a:rPr>
-              <a:t>Simple questions before the exam</a:t>
-            </a:r>
-          </a:p>
-        </p:txBody>
-      </p:sp>
-      <p:sp>
-        <p:nvSpPr>
-          <p:cNvPr id="5" name="Rectangle 4"/>
-          <p:cNvSpPr/>
-          <p:nvPr/>
-        </p:nvSpPr>
-        <p:spPr>
-          <a:xfrm>
-            <a:off x="548640" y="1371600"/>
+            <a:off x="548640" y="2596896"/>
             <a:ext cx="11091672" cy="548640"/>
           </a:xfrm>
           <a:prstGeom prst="rect">
@@ -8507,13 +7611,13 @@
       </p:sp>
       <p:sp>
         <p:nvSpPr>
-          <p:cNvPr id="6" name="Rectangle 5"/>
+          <p:cNvPr id="14" name="Rectangle 13"/>
           <p:cNvSpPr/>
           <p:nvPr/>
         </p:nvSpPr>
         <p:spPr>
           <a:xfrm>
-            <a:off x="548640" y="1371600"/>
+            <a:off x="548640" y="2596896"/>
             <a:ext cx="64008" cy="548640"/>
           </a:xfrm>
           <a:prstGeom prst="rect">
@@ -8551,13 +7655,13 @@
       </p:sp>
       <p:sp>
         <p:nvSpPr>
-          <p:cNvPr id="7" name="TextBox 6"/>
+          <p:cNvPr id="15" name="TextBox 14"/>
           <p:cNvSpPr txBox="1"/>
           <p:nvPr/>
         </p:nvSpPr>
         <p:spPr>
           <a:xfrm>
-            <a:off x="822960" y="1481328"/>
+            <a:off x="822960" y="2706624"/>
             <a:ext cx="640080" cy="365760"/>
           </a:xfrm>
           <a:prstGeom prst="rect">
@@ -8579,20 +7683,20 @@
                 </a:solidFill>
                 <a:latin typeface="Georgia"/>
               </a:rPr>
-              <a:t>Q1</a:t>
-            </a:r>
-          </a:p>
-        </p:txBody>
-      </p:sp>
-      <p:sp>
-        <p:nvSpPr>
-          <p:cNvPr id="8" name="TextBox 7"/>
+              <a:t>Q3</a:t>
+            </a:r>
+          </a:p>
+        </p:txBody>
+      </p:sp>
+      <p:sp>
+        <p:nvSpPr>
+          <p:cNvPr id="16" name="TextBox 15"/>
           <p:cNvSpPr txBox="1"/>
           <p:nvPr/>
         </p:nvSpPr>
         <p:spPr>
           <a:xfrm>
-            <a:off x="1508760" y="1426464"/>
+            <a:off x="1508760" y="2651760"/>
             <a:ext cx="9966960" cy="502920"/>
           </a:xfrm>
           <a:prstGeom prst="rect">
@@ -8613,7 +7717,7 @@
                   <a:srgbClr val="1B2A41"/>
                 </a:solidFill>
               </a:rPr>
-              <a:t>What is NAV, and how is it calculated?</a:t>
+              <a:t>What is an accrued expense? Give one fund example.</a:t>
             </a:r>
           </a:p>
           <a:p>
@@ -8636,20 +7740,20 @@
                   <a:srgbClr val="5D6B7E"/>
                 </a:solidFill>
               </a:rPr>
-              <a:t>Net asset value per unit: holdings at market price plus cash minus expenses, divided by units.</a:t>
-            </a:r>
-          </a:p>
-        </p:txBody>
-      </p:sp>
-      <p:sp>
-        <p:nvSpPr>
-          <p:cNvPr id="9" name="Rectangle 8"/>
+              <a:t>Money owed but not yet paid. Example: this month's fee to the fund manager.</a:t>
+            </a:r>
+          </a:p>
+        </p:txBody>
+      </p:sp>
+      <p:sp>
+        <p:nvSpPr>
+          <p:cNvPr id="17" name="Rectangle 16"/>
           <p:cNvSpPr/>
           <p:nvPr/>
         </p:nvSpPr>
         <p:spPr>
           <a:xfrm>
-            <a:off x="548640" y="1984248"/>
+            <a:off x="548640" y="3209544"/>
             <a:ext cx="11091672" cy="548640"/>
           </a:xfrm>
           <a:prstGeom prst="rect">
@@ -8687,13 +7791,13 @@
       </p:sp>
       <p:sp>
         <p:nvSpPr>
-          <p:cNvPr id="10" name="Rectangle 9"/>
+          <p:cNvPr id="18" name="Rectangle 17"/>
           <p:cNvSpPr/>
           <p:nvPr/>
         </p:nvSpPr>
         <p:spPr>
           <a:xfrm>
-            <a:off x="548640" y="1984248"/>
+            <a:off x="548640" y="3209544"/>
             <a:ext cx="64008" cy="548640"/>
           </a:xfrm>
           <a:prstGeom prst="rect">
@@ -8731,13 +7835,13 @@
       </p:sp>
       <p:sp>
         <p:nvSpPr>
-          <p:cNvPr id="11" name="TextBox 10"/>
+          <p:cNvPr id="19" name="TextBox 18"/>
           <p:cNvSpPr txBox="1"/>
           <p:nvPr/>
         </p:nvSpPr>
         <p:spPr>
           <a:xfrm>
-            <a:off x="822960" y="2093976"/>
+            <a:off x="822960" y="3319272"/>
             <a:ext cx="640080" cy="365760"/>
           </a:xfrm>
           <a:prstGeom prst="rect">
@@ -8759,20 +7863,20 @@
                 </a:solidFill>
                 <a:latin typeface="Georgia"/>
               </a:rPr>
-              <a:t>Q2</a:t>
-            </a:r>
-          </a:p>
-        </p:txBody>
-      </p:sp>
-      <p:sp>
-        <p:nvSpPr>
-          <p:cNvPr id="12" name="TextBox 11"/>
+              <a:t>Q4</a:t>
+            </a:r>
+          </a:p>
+        </p:txBody>
+      </p:sp>
+      <p:sp>
+        <p:nvSpPr>
+          <p:cNvPr id="20" name="TextBox 19"/>
           <p:cNvSpPr txBox="1"/>
           <p:nvPr/>
         </p:nvSpPr>
         <p:spPr>
           <a:xfrm>
-            <a:off x="1508760" y="2039112"/>
+            <a:off x="1508760" y="3264408"/>
             <a:ext cx="9966960" cy="502920"/>
           </a:xfrm>
           <a:prstGeom prst="rect">
@@ -8793,7 +7897,7 @@
                   <a:srgbClr val="1B2A41"/>
                 </a:solidFill>
               </a:rPr>
-              <a:t>What does a custodian do, and what does a transfer agent do?</a:t>
+              <a:t>An investor puts in ₹10,000 at a NAV of ₹25. How many units does the investor get?</a:t>
             </a:r>
           </a:p>
           <a:p>
@@ -8816,20 +7920,20 @@
                   <a:srgbClr val="5D6B7E"/>
                 </a:solidFill>
               </a:rPr>
-              <a:t>The custodian holds the fund's shares and cash. The transfer agent keeps the list of investors and their units.</a:t>
-            </a:r>
-          </a:p>
-        </p:txBody>
-      </p:sp>
-      <p:sp>
-        <p:nvSpPr>
-          <p:cNvPr id="13" name="Rectangle 12"/>
+              <a:t>₹10,000 ÷ ₹25 = 400 units.</a:t>
+            </a:r>
+          </a:p>
+        </p:txBody>
+      </p:sp>
+      <p:sp>
+        <p:nvSpPr>
+          <p:cNvPr id="21" name="Rectangle 20"/>
           <p:cNvSpPr/>
           <p:nvPr/>
         </p:nvSpPr>
         <p:spPr>
           <a:xfrm>
-            <a:off x="548640" y="2596896"/>
+            <a:off x="548640" y="3822191"/>
             <a:ext cx="11091672" cy="548640"/>
           </a:xfrm>
           <a:prstGeom prst="rect">
@@ -8867,13 +7971,13 @@
       </p:sp>
       <p:sp>
         <p:nvSpPr>
-          <p:cNvPr id="14" name="Rectangle 13"/>
+          <p:cNvPr id="22" name="Rectangle 21"/>
           <p:cNvSpPr/>
           <p:nvPr/>
         </p:nvSpPr>
         <p:spPr>
           <a:xfrm>
-            <a:off x="548640" y="2596896"/>
+            <a:off x="548640" y="3822191"/>
             <a:ext cx="64008" cy="548640"/>
           </a:xfrm>
           <a:prstGeom prst="rect">
@@ -8911,13 +8015,13 @@
       </p:sp>
       <p:sp>
         <p:nvSpPr>
-          <p:cNvPr id="15" name="TextBox 14"/>
+          <p:cNvPr id="23" name="TextBox 22"/>
           <p:cNvSpPr txBox="1"/>
           <p:nvPr/>
         </p:nvSpPr>
         <p:spPr>
           <a:xfrm>
-            <a:off x="822960" y="2706624"/>
+            <a:off x="822960" y="3931920"/>
             <a:ext cx="640080" cy="365760"/>
           </a:xfrm>
           <a:prstGeom prst="rect">
@@ -8939,20 +8043,20 @@
                 </a:solidFill>
                 <a:latin typeface="Georgia"/>
               </a:rPr>
-              <a:t>Q3</a:t>
-            </a:r>
-          </a:p>
-        </p:txBody>
-      </p:sp>
-      <p:sp>
-        <p:nvSpPr>
-          <p:cNvPr id="16" name="TextBox 15"/>
+              <a:t>Q5</a:t>
+            </a:r>
+          </a:p>
+        </p:txBody>
+      </p:sp>
+      <p:sp>
+        <p:nvSpPr>
+          <p:cNvPr id="24" name="TextBox 23"/>
           <p:cNvSpPr txBox="1"/>
           <p:nvPr/>
         </p:nvSpPr>
         <p:spPr>
           <a:xfrm>
-            <a:off x="1508760" y="2651760"/>
+            <a:off x="1508760" y="3877055"/>
             <a:ext cx="9966960" cy="502920"/>
           </a:xfrm>
           <a:prstGeom prst="rect">
@@ -8973,7 +8077,7 @@
                   <a:srgbClr val="1B2A41"/>
                 </a:solidFill>
               </a:rPr>
-              <a:t>What is an accrued expense? Give one fund example.</a:t>
+              <a:t>What is a reconciliation break? Give one example.</a:t>
             </a:r>
           </a:p>
           <a:p>
@@ -8996,20 +8100,20 @@
                   <a:srgbClr val="5D6B7E"/>
                 </a:solidFill>
               </a:rPr>
-              <a:t>Money owed but not yet paid. Example: this month's fee to the fund manager.</a:t>
-            </a:r>
-          </a:p>
-        </p:txBody>
-      </p:sp>
-      <p:sp>
-        <p:nvSpPr>
-          <p:cNvPr id="17" name="Rectangle 16"/>
+              <a:t>A difference between two records. Example: a dividend the custodian received that the books did not record.</a:t>
+            </a:r>
+          </a:p>
+        </p:txBody>
+      </p:sp>
+      <p:sp>
+        <p:nvSpPr>
+          <p:cNvPr id="25" name="Rectangle 24"/>
           <p:cNvSpPr/>
           <p:nvPr/>
         </p:nvSpPr>
         <p:spPr>
           <a:xfrm>
-            <a:off x="548640" y="3209544"/>
+            <a:off x="548640" y="4434840"/>
             <a:ext cx="11091672" cy="548640"/>
           </a:xfrm>
           <a:prstGeom prst="rect">
@@ -9047,13 +8151,13 @@
       </p:sp>
       <p:sp>
         <p:nvSpPr>
-          <p:cNvPr id="18" name="Rectangle 17"/>
+          <p:cNvPr id="26" name="Rectangle 25"/>
           <p:cNvSpPr/>
           <p:nvPr/>
         </p:nvSpPr>
         <p:spPr>
           <a:xfrm>
-            <a:off x="548640" y="3209544"/>
+            <a:off x="548640" y="4434840"/>
             <a:ext cx="64008" cy="548640"/>
           </a:xfrm>
           <a:prstGeom prst="rect">
@@ -9091,13 +8195,13 @@
       </p:sp>
       <p:sp>
         <p:nvSpPr>
-          <p:cNvPr id="19" name="TextBox 18"/>
+          <p:cNvPr id="27" name="TextBox 26"/>
           <p:cNvSpPr txBox="1"/>
           <p:nvPr/>
         </p:nvSpPr>
         <p:spPr>
           <a:xfrm>
-            <a:off x="822960" y="3319272"/>
+            <a:off x="822960" y="4544568"/>
             <a:ext cx="640080" cy="365760"/>
           </a:xfrm>
           <a:prstGeom prst="rect">
@@ -9119,20 +8223,20 @@
                 </a:solidFill>
                 <a:latin typeface="Georgia"/>
               </a:rPr>
-              <a:t>Q4</a:t>
-            </a:r>
-          </a:p>
-        </p:txBody>
-      </p:sp>
-      <p:sp>
-        <p:nvSpPr>
-          <p:cNvPr id="20" name="TextBox 19"/>
+              <a:t>Q6</a:t>
+            </a:r>
+          </a:p>
+        </p:txBody>
+      </p:sp>
+      <p:sp>
+        <p:nvSpPr>
+          <p:cNvPr id="28" name="TextBox 27"/>
           <p:cNvSpPr txBox="1"/>
           <p:nvPr/>
         </p:nvSpPr>
         <p:spPr>
           <a:xfrm>
-            <a:off x="1508760" y="3264408"/>
+            <a:off x="1508760" y="4489703"/>
             <a:ext cx="9966960" cy="502920"/>
           </a:xfrm>
           <a:prstGeom prst="rect">
@@ -9153,7 +8257,7 @@
                   <a:srgbClr val="1B2A41"/>
                 </a:solidFill>
               </a:rPr>
-              <a:t>An investor puts in ₹10,000 at a NAV of ₹25. How many units does the investor get?</a:t>
+              <a:t>What is STP?</a:t>
             </a:r>
           </a:p>
           <a:p>
@@ -9176,20 +8280,20 @@
                   <a:srgbClr val="5D6B7E"/>
                 </a:solidFill>
               </a:rPr>
-              <a:t>₹10,000 ÷ ₹25 = 400 units.</a:t>
-            </a:r>
-          </a:p>
-        </p:txBody>
-      </p:sp>
-      <p:sp>
-        <p:nvSpPr>
-          <p:cNvPr id="21" name="Rectangle 20"/>
+              <a:t>Straight-through processing: a transaction runs end to end with no manual step.</a:t>
+            </a:r>
+          </a:p>
+        </p:txBody>
+      </p:sp>
+      <p:sp>
+        <p:nvSpPr>
+          <p:cNvPr id="29" name="Rectangle 28"/>
           <p:cNvSpPr/>
           <p:nvPr/>
         </p:nvSpPr>
         <p:spPr>
           <a:xfrm>
-            <a:off x="548640" y="3822191"/>
+            <a:off x="548640" y="5047488"/>
             <a:ext cx="11091672" cy="548640"/>
           </a:xfrm>
           <a:prstGeom prst="rect">
@@ -9227,13 +8331,13 @@
       </p:sp>
       <p:sp>
         <p:nvSpPr>
-          <p:cNvPr id="22" name="Rectangle 21"/>
+          <p:cNvPr id="30" name="Rectangle 29"/>
           <p:cNvSpPr/>
           <p:nvPr/>
         </p:nvSpPr>
         <p:spPr>
           <a:xfrm>
-            <a:off x="548640" y="3822191"/>
+            <a:off x="548640" y="5047488"/>
             <a:ext cx="64008" cy="548640"/>
           </a:xfrm>
           <a:prstGeom prst="rect">
@@ -9271,13 +8375,13 @@
       </p:sp>
       <p:sp>
         <p:nvSpPr>
-          <p:cNvPr id="23" name="TextBox 22"/>
+          <p:cNvPr id="31" name="TextBox 30"/>
           <p:cNvSpPr txBox="1"/>
           <p:nvPr/>
         </p:nvSpPr>
         <p:spPr>
           <a:xfrm>
-            <a:off x="822960" y="3931920"/>
+            <a:off x="822960" y="5157216"/>
             <a:ext cx="640080" cy="365760"/>
           </a:xfrm>
           <a:prstGeom prst="rect">
@@ -9299,20 +8403,20 @@
                 </a:solidFill>
                 <a:latin typeface="Georgia"/>
               </a:rPr>
-              <a:t>Q5</a:t>
-            </a:r>
-          </a:p>
-        </p:txBody>
-      </p:sp>
-      <p:sp>
-        <p:nvSpPr>
-          <p:cNvPr id="24" name="TextBox 23"/>
+              <a:t>Q7</a:t>
+            </a:r>
+          </a:p>
+        </p:txBody>
+      </p:sp>
+      <p:sp>
+        <p:nvSpPr>
+          <p:cNvPr id="32" name="TextBox 31"/>
           <p:cNvSpPr txBox="1"/>
           <p:nvPr/>
         </p:nvSpPr>
         <p:spPr>
           <a:xfrm>
-            <a:off x="1508760" y="3877055"/>
+            <a:off x="1508760" y="5102351"/>
             <a:ext cx="9966960" cy="502920"/>
           </a:xfrm>
           <a:prstGeom prst="rect">
@@ -9333,7 +8437,7 @@
                   <a:srgbClr val="1B2A41"/>
                 </a:solidFill>
               </a:rPr>
-              <a:t>What is a reconciliation break? Give one example.</a:t>
+              <a:t>What is a Claude skill, and which one helps a fund accountant?</a:t>
             </a:r>
           </a:p>
           <a:p>
@@ -9356,20 +8460,20 @@
                   <a:srgbClr val="5D6B7E"/>
                 </a:solidFill>
               </a:rPr>
-              <a:t>A difference between two records. Example: a dividend the custodian received that the books did not record.</a:t>
-            </a:r>
-          </a:p>
-        </p:txBody>
-      </p:sp>
-      <p:sp>
-        <p:nvSpPr>
-          <p:cNvPr id="25" name="Rectangle 24"/>
+              <a:t>Saved instructions for one job. The reconciliation skill compares records and sorts the breaks.</a:t>
+            </a:r>
+          </a:p>
+        </p:txBody>
+      </p:sp>
+      <p:sp>
+        <p:nvSpPr>
+          <p:cNvPr id="33" name="Rectangle 32"/>
           <p:cNvSpPr/>
           <p:nvPr/>
         </p:nvSpPr>
         <p:spPr>
           <a:xfrm>
-            <a:off x="548640" y="4434840"/>
+            <a:off x="548640" y="5660136"/>
             <a:ext cx="11091672" cy="548640"/>
           </a:xfrm>
           <a:prstGeom prst="rect">
@@ -9407,13 +8511,13 @@
       </p:sp>
       <p:sp>
         <p:nvSpPr>
-          <p:cNvPr id="26" name="Rectangle 25"/>
+          <p:cNvPr id="34" name="Rectangle 33"/>
           <p:cNvSpPr/>
           <p:nvPr/>
         </p:nvSpPr>
         <p:spPr>
           <a:xfrm>
-            <a:off x="548640" y="4434840"/>
+            <a:off x="548640" y="5660136"/>
             <a:ext cx="64008" cy="548640"/>
           </a:xfrm>
           <a:prstGeom prst="rect">
@@ -9451,13 +8555,13 @@
       </p:sp>
       <p:sp>
         <p:nvSpPr>
-          <p:cNvPr id="27" name="TextBox 26"/>
+          <p:cNvPr id="35" name="TextBox 34"/>
           <p:cNvSpPr txBox="1"/>
           <p:nvPr/>
         </p:nvSpPr>
         <p:spPr>
           <a:xfrm>
-            <a:off x="822960" y="4544568"/>
+            <a:off x="822960" y="5769864"/>
             <a:ext cx="640080" cy="365760"/>
           </a:xfrm>
           <a:prstGeom prst="rect">
@@ -9479,20 +8583,20 @@
                 </a:solidFill>
                 <a:latin typeface="Georgia"/>
               </a:rPr>
-              <a:t>Q6</a:t>
-            </a:r>
-          </a:p>
-        </p:txBody>
-      </p:sp>
-      <p:sp>
-        <p:nvSpPr>
-          <p:cNvPr id="28" name="TextBox 27"/>
+              <a:t>Q8</a:t>
+            </a:r>
+          </a:p>
+        </p:txBody>
+      </p:sp>
+      <p:sp>
+        <p:nvSpPr>
+          <p:cNvPr id="36" name="TextBox 35"/>
           <p:cNvSpPr txBox="1"/>
           <p:nvPr/>
         </p:nvSpPr>
         <p:spPr>
           <a:xfrm>
-            <a:off x="1508760" y="4489703"/>
+            <a:off x="1508760" y="5714999"/>
             <a:ext cx="9966960" cy="502920"/>
           </a:xfrm>
           <a:prstGeom prst="rect">
@@ -9513,7 +8617,7 @@
                   <a:srgbClr val="1B2A41"/>
                 </a:solidFill>
               </a:rPr>
-              <a:t>What is STP?</a:t>
+              <a:t>Where can AI help in KYC, and what must a person still do?</a:t>
             </a:r>
           </a:p>
           <a:p>
@@ -9536,109 +8640,21 @@
                   <a:srgbClr val="5D6B7E"/>
                 </a:solidFill>
               </a:rPr>
-              <a:t>Straight-through processing: a transaction runs end to end with no manual step.</a:t>
-            </a:r>
-          </a:p>
-        </p:txBody>
-      </p:sp>
-      <p:sp>
-        <p:nvSpPr>
-          <p:cNvPr id="29" name="Rectangle 28"/>
-          <p:cNvSpPr/>
-          <p:nvPr/>
-        </p:nvSpPr>
-        <p:spPr>
-          <a:xfrm>
-            <a:off x="548640" y="5047488"/>
-            <a:ext cx="11091672" cy="548640"/>
-          </a:xfrm>
-          <a:prstGeom prst="rect">
-            <a:avLst/>
-          </a:prstGeom>
-          <a:solidFill>
-            <a:srgbClr val="FFFFFF"/>
-          </a:solidFill>
-          <a:ln>
-            <a:noFill/>
-          </a:ln>
-          <a:effectLst/>
-        </p:spPr>
-        <p:style>
-          <a:lnRef idx="1">
-            <a:schemeClr val="accent1"/>
-          </a:lnRef>
-          <a:fillRef idx="3">
-            <a:schemeClr val="accent1"/>
-          </a:fillRef>
-          <a:effectRef idx="2">
-            <a:schemeClr val="accent1"/>
-          </a:effectRef>
-          <a:fontRef idx="minor">
-            <a:schemeClr val="lt1"/>
-          </a:fontRef>
-        </p:style>
-        <p:txBody>
-          <a:bodyPr rtlCol="0" anchor="ctr"/>
-          <a:lstStyle/>
-          <a:p>
-            <a:pPr algn="ctr"/>
-          </a:p>
-        </p:txBody>
-      </p:sp>
-      <p:sp>
-        <p:nvSpPr>
-          <p:cNvPr id="30" name="Rectangle 29"/>
-          <p:cNvSpPr/>
-          <p:nvPr/>
-        </p:nvSpPr>
-        <p:spPr>
-          <a:xfrm>
-            <a:off x="548640" y="5047488"/>
-            <a:ext cx="64008" cy="548640"/>
-          </a:xfrm>
-          <a:prstGeom prst="rect">
-            <a:avLst/>
-          </a:prstGeom>
-          <a:solidFill>
-            <a:srgbClr val="3A5C9E"/>
-          </a:solidFill>
-          <a:ln>
-            <a:noFill/>
-          </a:ln>
-          <a:effectLst/>
-        </p:spPr>
-        <p:style>
-          <a:lnRef idx="1">
-            <a:schemeClr val="accent1"/>
-          </a:lnRef>
-          <a:fillRef idx="3">
-            <a:schemeClr val="accent1"/>
-          </a:fillRef>
-          <a:effectRef idx="2">
-            <a:schemeClr val="accent1"/>
-          </a:effectRef>
-          <a:fontRef idx="minor">
-            <a:schemeClr val="lt1"/>
-          </a:fontRef>
-        </p:style>
-        <p:txBody>
-          <a:bodyPr rtlCol="0" anchor="ctr"/>
-          <a:lstStyle/>
-          <a:p>
-            <a:pPr algn="ctr"/>
-          </a:p>
-        </p:txBody>
-      </p:sp>
-      <p:sp>
-        <p:nvSpPr>
-          <p:cNvPr id="31" name="TextBox 30"/>
+              <a:t>AI reads documents and matches names. A person approves the investor.</a:t>
+            </a:r>
+          </a:p>
+        </p:txBody>
+      </p:sp>
+      <p:sp>
+        <p:nvSpPr>
+          <p:cNvPr id="37" name="TextBox 36"/>
           <p:cNvSpPr txBox="1"/>
           <p:nvPr/>
         </p:nvSpPr>
         <p:spPr>
           <a:xfrm>
-            <a:off x="822960" y="5157216"/>
-            <a:ext cx="640080" cy="365760"/>
+            <a:off x="548640" y="6473952"/>
+            <a:ext cx="7315200" cy="228600"/>
           </a:xfrm>
           <a:prstGeom prst="rect">
             <a:avLst/>
@@ -9653,27 +8669,26 @@
           <a:p>
             <a:pPr algn="l"/>
             <a:r>
-              <a:rPr sz="1300" b="1">
-                <a:solidFill>
-                  <a:srgbClr val="3A5C9E"/>
-                </a:solidFill>
-                <a:latin typeface="Georgia"/>
-              </a:rPr>
-              <a:t>Q7</a:t>
-            </a:r>
-          </a:p>
-        </p:txBody>
-      </p:sp>
-      <p:sp>
-        <p:nvSpPr>
-          <p:cNvPr id="32" name="TextBox 31"/>
+              <a:rPr sz="800" b="0">
+                <a:solidFill>
+                  <a:srgbClr val="5D6B7E"/>
+                </a:solidFill>
+              </a:rPr>
+              <a:t>ISBMS · PGDM 2025–27 · AGENTIC AI &amp; ADVANCED ANALYTICS IN FINANCE</a:t>
+            </a:r>
+          </a:p>
+        </p:txBody>
+      </p:sp>
+      <p:sp>
+        <p:nvSpPr>
+          <p:cNvPr id="38" name="TextBox 37"/>
           <p:cNvSpPr txBox="1"/>
           <p:nvPr/>
         </p:nvSpPr>
         <p:spPr>
           <a:xfrm>
-            <a:off x="1508760" y="5102351"/>
-            <a:ext cx="9966960" cy="502920"/>
+            <a:off x="9262872" y="6473952"/>
+            <a:ext cx="2377440" cy="228600"/>
           </a:xfrm>
           <a:prstGeom prst="rect">
             <a:avLst/>
@@ -9686,285 +8701,14 @@
           </a:bodyPr>
           <a:lstStyle/>
           <a:p>
-            <a:pPr algn="l"/>
-            <a:r>
-              <a:rPr sz="1100" b="1">
-                <a:solidFill>
-                  <a:srgbClr val="1B2A41"/>
-                </a:solidFill>
-              </a:rPr>
-              <a:t>What is a Claude skill, and which one helps a fund accountant?</a:t>
-            </a:r>
-          </a:p>
-          <a:p>
-            <a:pPr algn="l">
-              <a:spcBef>
-                <a:spcPts val="100"/>
-              </a:spcBef>
-            </a:pPr>
-            <a:r>
-              <a:rPr sz="900" b="1">
-                <a:solidFill>
-                  <a:srgbClr val="C9A227"/>
-                </a:solidFill>
-              </a:rPr>
-              <a:t>TIP  </a:t>
-            </a:r>
-            <a:r>
-              <a:rPr sz="950" b="0">
+            <a:pPr algn="r"/>
+            <a:r>
+              <a:rPr sz="800" b="0">
                 <a:solidFill>
                   <a:srgbClr val="5D6B7E"/>
                 </a:solidFill>
               </a:rPr>
-              <a:t>Saved instructions for one job. The reconciliation skill compares records and sorts the breaks.</a:t>
-            </a:r>
-          </a:p>
-        </p:txBody>
-      </p:sp>
-      <p:sp>
-        <p:nvSpPr>
-          <p:cNvPr id="33" name="Rectangle 32"/>
-          <p:cNvSpPr/>
-          <p:nvPr/>
-        </p:nvSpPr>
-        <p:spPr>
-          <a:xfrm>
-            <a:off x="548640" y="5660136"/>
-            <a:ext cx="11091672" cy="548640"/>
-          </a:xfrm>
-          <a:prstGeom prst="rect">
-            <a:avLst/>
-          </a:prstGeom>
-          <a:solidFill>
-            <a:srgbClr val="FFFFFF"/>
-          </a:solidFill>
-          <a:ln>
-            <a:noFill/>
-          </a:ln>
-          <a:effectLst/>
-        </p:spPr>
-        <p:style>
-          <a:lnRef idx="1">
-            <a:schemeClr val="accent1"/>
-          </a:lnRef>
-          <a:fillRef idx="3">
-            <a:schemeClr val="accent1"/>
-          </a:fillRef>
-          <a:effectRef idx="2">
-            <a:schemeClr val="accent1"/>
-          </a:effectRef>
-          <a:fontRef idx="minor">
-            <a:schemeClr val="lt1"/>
-          </a:fontRef>
-        </p:style>
-        <p:txBody>
-          <a:bodyPr rtlCol="0" anchor="ctr"/>
-          <a:lstStyle/>
-          <a:p>
-            <a:pPr algn="ctr"/>
-          </a:p>
-        </p:txBody>
-      </p:sp>
-      <p:sp>
-        <p:nvSpPr>
-          <p:cNvPr id="34" name="Rectangle 33"/>
-          <p:cNvSpPr/>
-          <p:nvPr/>
-        </p:nvSpPr>
-        <p:spPr>
-          <a:xfrm>
-            <a:off x="548640" y="5660136"/>
-            <a:ext cx="64008" cy="548640"/>
-          </a:xfrm>
-          <a:prstGeom prst="rect">
-            <a:avLst/>
-          </a:prstGeom>
-          <a:solidFill>
-            <a:srgbClr val="3A5C9E"/>
-          </a:solidFill>
-          <a:ln>
-            <a:noFill/>
-          </a:ln>
-          <a:effectLst/>
-        </p:spPr>
-        <p:style>
-          <a:lnRef idx="1">
-            <a:schemeClr val="accent1"/>
-          </a:lnRef>
-          <a:fillRef idx="3">
-            <a:schemeClr val="accent1"/>
-          </a:fillRef>
-          <a:effectRef idx="2">
-            <a:schemeClr val="accent1"/>
-          </a:effectRef>
-          <a:fontRef idx="minor">
-            <a:schemeClr val="lt1"/>
-          </a:fontRef>
-        </p:style>
-        <p:txBody>
-          <a:bodyPr rtlCol="0" anchor="ctr"/>
-          <a:lstStyle/>
-          <a:p>
-            <a:pPr algn="ctr"/>
-          </a:p>
-        </p:txBody>
-      </p:sp>
-      <p:sp>
-        <p:nvSpPr>
-          <p:cNvPr id="35" name="TextBox 34"/>
-          <p:cNvSpPr txBox="1"/>
-          <p:nvPr/>
-        </p:nvSpPr>
-        <p:spPr>
-          <a:xfrm>
-            <a:off x="822960" y="5769864"/>
-            <a:ext cx="640080" cy="365760"/>
-          </a:xfrm>
-          <a:prstGeom prst="rect">
-            <a:avLst/>
-          </a:prstGeom>
-          <a:noFill/>
-        </p:spPr>
-        <p:txBody>
-          <a:bodyPr wrap="square" anchor="t" lIns="0" rIns="0" tIns="0" bIns="0">
-            <a:spAutoFit/>
-          </a:bodyPr>
-          <a:lstStyle/>
-          <a:p>
-            <a:pPr algn="l"/>
-            <a:r>
-              <a:rPr sz="1300" b="1">
-                <a:solidFill>
-                  <a:srgbClr val="3A5C9E"/>
-                </a:solidFill>
-                <a:latin typeface="Georgia"/>
-              </a:rPr>
-              <a:t>Q8</a:t>
-            </a:r>
-          </a:p>
-        </p:txBody>
-      </p:sp>
-      <p:sp>
-        <p:nvSpPr>
-          <p:cNvPr id="36" name="TextBox 35"/>
-          <p:cNvSpPr txBox="1"/>
-          <p:nvPr/>
-        </p:nvSpPr>
-        <p:spPr>
-          <a:xfrm>
-            <a:off x="1508760" y="5714999"/>
-            <a:ext cx="9966960" cy="502920"/>
-          </a:xfrm>
-          <a:prstGeom prst="rect">
-            <a:avLst/>
-          </a:prstGeom>
-          <a:noFill/>
-        </p:spPr>
-        <p:txBody>
-          <a:bodyPr wrap="square" anchor="t" lIns="0" rIns="0" tIns="0" bIns="0">
-            <a:spAutoFit/>
-          </a:bodyPr>
-          <a:lstStyle/>
-          <a:p>
-            <a:pPr algn="l"/>
-            <a:r>
-              <a:rPr sz="1100" b="1">
-                <a:solidFill>
-                  <a:srgbClr val="1B2A41"/>
-                </a:solidFill>
-              </a:rPr>
-              <a:t>Where can AI help in KYC, and what must a person still do?</a:t>
-            </a:r>
-          </a:p>
-          <a:p>
-            <a:pPr algn="l">
-              <a:spcBef>
-                <a:spcPts val="100"/>
-              </a:spcBef>
-            </a:pPr>
-            <a:r>
-              <a:rPr sz="900" b="1">
-                <a:solidFill>
-                  <a:srgbClr val="C9A227"/>
-                </a:solidFill>
-              </a:rPr>
-              <a:t>TIP  </a:t>
-            </a:r>
-            <a:r>
-              <a:rPr sz="950" b="0">
-                <a:solidFill>
-                  <a:srgbClr val="5D6B7E"/>
-                </a:solidFill>
-              </a:rPr>
-              <a:t>AI reads documents and matches names. A person approves the investor.</a:t>
-            </a:r>
-          </a:p>
-        </p:txBody>
-      </p:sp>
-      <p:sp>
-        <p:nvSpPr>
-          <p:cNvPr id="37" name="TextBox 36"/>
-          <p:cNvSpPr txBox="1"/>
-          <p:nvPr/>
-        </p:nvSpPr>
-        <p:spPr>
-          <a:xfrm>
-            <a:off x="548640" y="6473952"/>
-            <a:ext cx="7315200" cy="228600"/>
-          </a:xfrm>
-          <a:prstGeom prst="rect">
-            <a:avLst/>
-          </a:prstGeom>
-          <a:noFill/>
-        </p:spPr>
-        <p:txBody>
-          <a:bodyPr wrap="square" anchor="t" lIns="0" rIns="0" tIns="0" bIns="0">
-            <a:spAutoFit/>
-          </a:bodyPr>
-          <a:lstStyle/>
-          <a:p>
-            <a:pPr algn="l"/>
-            <a:r>
-              <a:rPr sz="800" b="0">
-                <a:solidFill>
-                  <a:srgbClr val="5D6B7E"/>
-                </a:solidFill>
-              </a:rPr>
-              <a:t>ISBMS · PGDM 2025–27 · AGENTIC AI &amp; ADVANCED ANALYTICS IN FINANCE</a:t>
-            </a:r>
-          </a:p>
-        </p:txBody>
-      </p:sp>
-      <p:sp>
-        <p:nvSpPr>
-          <p:cNvPr id="38" name="TextBox 37"/>
-          <p:cNvSpPr txBox="1"/>
-          <p:nvPr/>
-        </p:nvSpPr>
-        <p:spPr>
-          <a:xfrm>
-            <a:off x="9262872" y="6473952"/>
-            <a:ext cx="2377440" cy="228600"/>
-          </a:xfrm>
-          <a:prstGeom prst="rect">
-            <a:avLst/>
-          </a:prstGeom>
-          <a:noFill/>
-        </p:spPr>
-        <p:txBody>
-          <a:bodyPr wrap="square" anchor="t" lIns="0" rIns="0" tIns="0" bIns="0">
-            <a:spAutoFit/>
-          </a:bodyPr>
-          <a:lstStyle/>
-          <a:p>
-            <a:pPr algn="r"/>
-            <a:r>
-              <a:rPr sz="800" b="0">
-                <a:solidFill>
-                  <a:srgbClr val="5D6B7E"/>
-                </a:solidFill>
-              </a:rPr>
-              <a:t>MODULE 8  ·  12</a:t>
+              <a:t>MODULE 8  ·  13</a:t>
             </a:r>
           </a:p>
         </p:txBody>
@@ -11323,7 +10067,7 @@
                   <a:srgbClr val="C9A227"/>
                 </a:solidFill>
               </a:rPr>
-              <a:t>HOUR 1 · FUND TYPES AND THE BACK OFFICE</a:t>
+              <a:t>HOUR 1 · THE TWO BACK-OFFICE JOBS</a:t>
             </a:r>
           </a:p>
         </p:txBody>
@@ -11358,7 +10102,7 @@
                 </a:solidFill>
                 <a:latin typeface="Georgia"/>
               </a:rPr>
-              <a:t>Four kinds of fund, one back office</a:t>
+              <a:t>What an RTA does, and what a fund administrator does</a:t>
             </a:r>
           </a:p>
         </p:txBody>
@@ -11372,7 +10116,7 @@
         <p:spPr>
           <a:xfrm>
             <a:off x="548640" y="1463040"/>
-            <a:ext cx="3593592" cy="2002536"/>
+            <a:ext cx="5468112" cy="4160520"/>
           </a:xfrm>
           <a:prstGeom prst="rect">
             <a:avLst/>
@@ -11416,7 +10160,7 @@
         <p:spPr>
           <a:xfrm>
             <a:off x="548640" y="1463040"/>
-            <a:ext cx="3593592" cy="45720"/>
+            <a:ext cx="5468112" cy="45720"/>
           </a:xfrm>
           <a:prstGeom prst="rect">
             <a:avLst/>
@@ -11459,8 +10203,8 @@
         </p:nvSpPr>
         <p:spPr>
           <a:xfrm>
-            <a:off x="804672" y="1664208"/>
-            <a:ext cx="3081528" cy="1728216"/>
+            <a:off x="822959" y="1627632"/>
+            <a:ext cx="4919472" cy="731520"/>
           </a:xfrm>
           <a:prstGeom prst="rect">
             <a:avLst/>
@@ -11480,38 +10224,23 @@
                   <a:srgbClr val="3A5C9E"/>
                 </a:solidFill>
               </a:rPr>
-              <a:t>MUTUAL FUND</a:t>
+              <a:t>RTA · REGISTRAR AND TRANSFER AGENT</a:t>
             </a:r>
           </a:p>
           <a:p>
             <a:pPr algn="l">
               <a:spcBef>
-                <a:spcPts val="400"/>
+                <a:spcPts val="300"/>
               </a:spcBef>
             </a:pPr>
             <a:r>
-              <a:rPr sz="1600" b="1">
+              <a:rPr sz="1700" b="1">
                 <a:solidFill>
                   <a:srgbClr val="0F2145"/>
                 </a:solidFill>
                 <a:latin typeface="Georgia"/>
               </a:rPr>
-              <a:t>NAV every day</a:t>
-            </a:r>
-          </a:p>
-          <a:p>
-            <a:pPr algn="l">
-              <a:spcBef>
-                <a:spcPts val="600"/>
-              </a:spcBef>
-            </a:pPr>
-            <a:r>
-              <a:rPr sz="1200" b="0">
-                <a:solidFill>
-                  <a:srgbClr val="1B2A41"/>
-                </a:solidFill>
-              </a:rPr>
-              <a:t>Open to anyone. The NAV is published every business day.</a:t>
+              <a:t>Looks after the investors</a:t>
             </a:r>
           </a:p>
         </p:txBody>
@@ -11524,14 +10253,14 @@
         </p:nvSpPr>
         <p:spPr>
           <a:xfrm>
-            <a:off x="4297680" y="1463040"/>
-            <a:ext cx="3593592" cy="2002536"/>
+            <a:off x="822959" y="2432304"/>
+            <a:ext cx="4919472" cy="9144"/>
           </a:xfrm>
           <a:prstGeom prst="rect">
             <a:avLst/>
           </a:prstGeom>
           <a:solidFill>
-            <a:srgbClr val="FFFFFF"/>
+            <a:srgbClr val="D5E1F2"/>
           </a:solidFill>
           <a:ln>
             <a:noFill/>
@@ -11562,14 +10291,574 @@
       </p:sp>
       <p:sp>
         <p:nvSpPr>
-          <p:cNvPr id="9" name="Rectangle 8"/>
+          <p:cNvPr id="9" name="TextBox 8"/>
+          <p:cNvSpPr txBox="1"/>
+          <p:nvPr/>
+        </p:nvSpPr>
+        <p:spPr>
+          <a:xfrm>
+            <a:off x="822959" y="2487168"/>
+            <a:ext cx="1371600" cy="548640"/>
+          </a:xfrm>
+          <a:prstGeom prst="rect">
+            <a:avLst/>
+          </a:prstGeom>
+          <a:noFill/>
+        </p:spPr>
+        <p:txBody>
+          <a:bodyPr wrap="square" anchor="t" lIns="0" rIns="0" tIns="0" bIns="0">
+            <a:spAutoFit/>
+          </a:bodyPr>
+          <a:lstStyle/>
+          <a:p>
+            <a:pPr algn="l"/>
+            <a:r>
+              <a:rPr sz="1050" b="1">
+                <a:solidFill>
+                  <a:srgbClr val="3A5C9E"/>
+                </a:solidFill>
+              </a:rPr>
+              <a:t>Looks after</a:t>
+            </a:r>
+          </a:p>
+        </p:txBody>
+      </p:sp>
+      <p:sp>
+        <p:nvSpPr>
+          <p:cNvPr id="10" name="TextBox 9"/>
+          <p:cNvSpPr txBox="1"/>
+          <p:nvPr/>
+        </p:nvSpPr>
+        <p:spPr>
+          <a:xfrm>
+            <a:off x="2194560" y="2487168"/>
+            <a:ext cx="3547872" cy="566928"/>
+          </a:xfrm>
+          <a:prstGeom prst="rect">
+            <a:avLst/>
+          </a:prstGeom>
+          <a:noFill/>
+        </p:spPr>
+        <p:txBody>
+          <a:bodyPr wrap="square" anchor="t" lIns="0" rIns="0" tIns="0" bIns="0">
+            <a:spAutoFit/>
+          </a:bodyPr>
+          <a:lstStyle/>
+          <a:p>
+            <a:pPr algn="l"/>
+            <a:r>
+              <a:rPr sz="1100" b="0">
+                <a:solidFill>
+                  <a:srgbClr val="1B2A41"/>
+                </a:solidFill>
+              </a:rPr>
+              <a:t>The fund's investors</a:t>
+            </a:r>
+          </a:p>
+        </p:txBody>
+      </p:sp>
+      <p:sp>
+        <p:nvSpPr>
+          <p:cNvPr id="11" name="Rectangle 10"/>
           <p:cNvSpPr/>
           <p:nvPr/>
         </p:nvSpPr>
         <p:spPr>
           <a:xfrm>
-            <a:off x="4297680" y="1463040"/>
-            <a:ext cx="3593592" cy="45720"/>
+            <a:off x="822959" y="3054096"/>
+            <a:ext cx="4919472" cy="9144"/>
+          </a:xfrm>
+          <a:prstGeom prst="rect">
+            <a:avLst/>
+          </a:prstGeom>
+          <a:solidFill>
+            <a:srgbClr val="D5E1F2"/>
+          </a:solidFill>
+          <a:ln>
+            <a:noFill/>
+          </a:ln>
+          <a:effectLst/>
+        </p:spPr>
+        <p:style>
+          <a:lnRef idx="1">
+            <a:schemeClr val="accent1"/>
+          </a:lnRef>
+          <a:fillRef idx="3">
+            <a:schemeClr val="accent1"/>
+          </a:fillRef>
+          <a:effectRef idx="2">
+            <a:schemeClr val="accent1"/>
+          </a:effectRef>
+          <a:fontRef idx="minor">
+            <a:schemeClr val="lt1"/>
+          </a:fontRef>
+        </p:style>
+        <p:txBody>
+          <a:bodyPr rtlCol="0" anchor="ctr"/>
+          <a:lstStyle/>
+          <a:p>
+            <a:pPr algn="ctr"/>
+          </a:p>
+        </p:txBody>
+      </p:sp>
+      <p:sp>
+        <p:nvSpPr>
+          <p:cNvPr id="12" name="TextBox 11"/>
+          <p:cNvSpPr txBox="1"/>
+          <p:nvPr/>
+        </p:nvSpPr>
+        <p:spPr>
+          <a:xfrm>
+            <a:off x="822959" y="3108960"/>
+            <a:ext cx="1371600" cy="548640"/>
+          </a:xfrm>
+          <a:prstGeom prst="rect">
+            <a:avLst/>
+          </a:prstGeom>
+          <a:noFill/>
+        </p:spPr>
+        <p:txBody>
+          <a:bodyPr wrap="square" anchor="t" lIns="0" rIns="0" tIns="0" bIns="0">
+            <a:spAutoFit/>
+          </a:bodyPr>
+          <a:lstStyle/>
+          <a:p>
+            <a:pPr algn="l"/>
+            <a:r>
+              <a:rPr sz="1050" b="1">
+                <a:solidFill>
+                  <a:srgbClr val="3A5C9E"/>
+                </a:solidFill>
+              </a:rPr>
+              <a:t>Keeps</a:t>
+            </a:r>
+          </a:p>
+        </p:txBody>
+      </p:sp>
+      <p:sp>
+        <p:nvSpPr>
+          <p:cNvPr id="13" name="TextBox 12"/>
+          <p:cNvSpPr txBox="1"/>
+          <p:nvPr/>
+        </p:nvSpPr>
+        <p:spPr>
+          <a:xfrm>
+            <a:off x="2194560" y="3108960"/>
+            <a:ext cx="3547872" cy="566928"/>
+          </a:xfrm>
+          <a:prstGeom prst="rect">
+            <a:avLst/>
+          </a:prstGeom>
+          <a:noFill/>
+        </p:spPr>
+        <p:txBody>
+          <a:bodyPr wrap="square" anchor="t" lIns="0" rIns="0" tIns="0" bIns="0">
+            <a:spAutoFit/>
+          </a:bodyPr>
+          <a:lstStyle/>
+          <a:p>
+            <a:pPr algn="l"/>
+            <a:r>
+              <a:rPr sz="1100" b="0">
+                <a:solidFill>
+                  <a:srgbClr val="1B2A41"/>
+                </a:solidFill>
+              </a:rPr>
+              <a:t>The investor register: who owns how many units</a:t>
+            </a:r>
+          </a:p>
+        </p:txBody>
+      </p:sp>
+      <p:sp>
+        <p:nvSpPr>
+          <p:cNvPr id="14" name="Rectangle 13"/>
+          <p:cNvSpPr/>
+          <p:nvPr/>
+        </p:nvSpPr>
+        <p:spPr>
+          <a:xfrm>
+            <a:off x="822959" y="3675888"/>
+            <a:ext cx="4919472" cy="9144"/>
+          </a:xfrm>
+          <a:prstGeom prst="rect">
+            <a:avLst/>
+          </a:prstGeom>
+          <a:solidFill>
+            <a:srgbClr val="D5E1F2"/>
+          </a:solidFill>
+          <a:ln>
+            <a:noFill/>
+          </a:ln>
+          <a:effectLst/>
+        </p:spPr>
+        <p:style>
+          <a:lnRef idx="1">
+            <a:schemeClr val="accent1"/>
+          </a:lnRef>
+          <a:fillRef idx="3">
+            <a:schemeClr val="accent1"/>
+          </a:fillRef>
+          <a:effectRef idx="2">
+            <a:schemeClr val="accent1"/>
+          </a:effectRef>
+          <a:fontRef idx="minor">
+            <a:schemeClr val="lt1"/>
+          </a:fontRef>
+        </p:style>
+        <p:txBody>
+          <a:bodyPr rtlCol="0" anchor="ctr"/>
+          <a:lstStyle/>
+          <a:p>
+            <a:pPr algn="ctr"/>
+          </a:p>
+        </p:txBody>
+      </p:sp>
+      <p:sp>
+        <p:nvSpPr>
+          <p:cNvPr id="15" name="TextBox 14"/>
+          <p:cNvSpPr txBox="1"/>
+          <p:nvPr/>
+        </p:nvSpPr>
+        <p:spPr>
+          <a:xfrm>
+            <a:off x="822959" y="3730752"/>
+            <a:ext cx="1371600" cy="548640"/>
+          </a:xfrm>
+          <a:prstGeom prst="rect">
+            <a:avLst/>
+          </a:prstGeom>
+          <a:noFill/>
+        </p:spPr>
+        <p:txBody>
+          <a:bodyPr wrap="square" anchor="t" lIns="0" rIns="0" tIns="0" bIns="0">
+            <a:spAutoFit/>
+          </a:bodyPr>
+          <a:lstStyle/>
+          <a:p>
+            <a:pPr algn="l"/>
+            <a:r>
+              <a:rPr sz="1050" b="1">
+                <a:solidFill>
+                  <a:srgbClr val="3A5C9E"/>
+                </a:solidFill>
+              </a:rPr>
+              <a:t>Daily jobs</a:t>
+            </a:r>
+          </a:p>
+        </p:txBody>
+      </p:sp>
+      <p:sp>
+        <p:nvSpPr>
+          <p:cNvPr id="16" name="TextBox 15"/>
+          <p:cNvSpPr txBox="1"/>
+          <p:nvPr/>
+        </p:nvSpPr>
+        <p:spPr>
+          <a:xfrm>
+            <a:off x="2194560" y="3730752"/>
+            <a:ext cx="3547872" cy="566928"/>
+          </a:xfrm>
+          <a:prstGeom prst="rect">
+            <a:avLst/>
+          </a:prstGeom>
+          <a:noFill/>
+        </p:spPr>
+        <p:txBody>
+          <a:bodyPr wrap="square" anchor="t" lIns="0" rIns="0" tIns="0" bIns="0">
+            <a:spAutoFit/>
+          </a:bodyPr>
+          <a:lstStyle/>
+          <a:p>
+            <a:pPr algn="l"/>
+            <a:r>
+              <a:rPr sz="1100" b="0">
+                <a:solidFill>
+                  <a:srgbClr val="1B2A41"/>
+                </a:solidFill>
+              </a:rPr>
+              <a:t>KYC, subscriptions, redemptions, dividends, account statements</a:t>
+            </a:r>
+          </a:p>
+        </p:txBody>
+      </p:sp>
+      <p:sp>
+        <p:nvSpPr>
+          <p:cNvPr id="17" name="Rectangle 16"/>
+          <p:cNvSpPr/>
+          <p:nvPr/>
+        </p:nvSpPr>
+        <p:spPr>
+          <a:xfrm>
+            <a:off x="822959" y="4297680"/>
+            <a:ext cx="4919472" cy="9144"/>
+          </a:xfrm>
+          <a:prstGeom prst="rect">
+            <a:avLst/>
+          </a:prstGeom>
+          <a:solidFill>
+            <a:srgbClr val="D5E1F2"/>
+          </a:solidFill>
+          <a:ln>
+            <a:noFill/>
+          </a:ln>
+          <a:effectLst/>
+        </p:spPr>
+        <p:style>
+          <a:lnRef idx="1">
+            <a:schemeClr val="accent1"/>
+          </a:lnRef>
+          <a:fillRef idx="3">
+            <a:schemeClr val="accent1"/>
+          </a:fillRef>
+          <a:effectRef idx="2">
+            <a:schemeClr val="accent1"/>
+          </a:effectRef>
+          <a:fontRef idx="minor">
+            <a:schemeClr val="lt1"/>
+          </a:fontRef>
+        </p:style>
+        <p:txBody>
+          <a:bodyPr rtlCol="0" anchor="ctr"/>
+          <a:lstStyle/>
+          <a:p>
+            <a:pPr algn="ctr"/>
+          </a:p>
+        </p:txBody>
+      </p:sp>
+      <p:sp>
+        <p:nvSpPr>
+          <p:cNvPr id="18" name="TextBox 17"/>
+          <p:cNvSpPr txBox="1"/>
+          <p:nvPr/>
+        </p:nvSpPr>
+        <p:spPr>
+          <a:xfrm>
+            <a:off x="822959" y="4352544"/>
+            <a:ext cx="1371600" cy="548640"/>
+          </a:xfrm>
+          <a:prstGeom prst="rect">
+            <a:avLst/>
+          </a:prstGeom>
+          <a:noFill/>
+        </p:spPr>
+        <p:txBody>
+          <a:bodyPr wrap="square" anchor="t" lIns="0" rIns="0" tIns="0" bIns="0">
+            <a:spAutoFit/>
+          </a:bodyPr>
+          <a:lstStyle/>
+          <a:p>
+            <a:pPr algn="l"/>
+            <a:r>
+              <a:rPr sz="1050" b="1">
+                <a:solidFill>
+                  <a:srgbClr val="3A5C9E"/>
+                </a:solidFill>
+              </a:rPr>
+              <a:t>Example</a:t>
+            </a:r>
+          </a:p>
+        </p:txBody>
+      </p:sp>
+      <p:sp>
+        <p:nvSpPr>
+          <p:cNvPr id="19" name="TextBox 18"/>
+          <p:cNvSpPr txBox="1"/>
+          <p:nvPr/>
+        </p:nvSpPr>
+        <p:spPr>
+          <a:xfrm>
+            <a:off x="2194560" y="4352544"/>
+            <a:ext cx="3547872" cy="566928"/>
+          </a:xfrm>
+          <a:prstGeom prst="rect">
+            <a:avLst/>
+          </a:prstGeom>
+          <a:noFill/>
+        </p:spPr>
+        <p:txBody>
+          <a:bodyPr wrap="square" anchor="t" lIns="0" rIns="0" tIns="0" bIns="0">
+            <a:spAutoFit/>
+          </a:bodyPr>
+          <a:lstStyle/>
+          <a:p>
+            <a:pPr algn="l"/>
+            <a:r>
+              <a:rPr sz="1100" b="0">
+                <a:solidFill>
+                  <a:srgbClr val="1B2A41"/>
+                </a:solidFill>
+              </a:rPr>
+              <a:t>CAMS: you start a ₹5,000 SIP, CAMS records your units and emails your statement</a:t>
+            </a:r>
+          </a:p>
+        </p:txBody>
+      </p:sp>
+      <p:sp>
+        <p:nvSpPr>
+          <p:cNvPr id="20" name="Rectangle 19"/>
+          <p:cNvSpPr/>
+          <p:nvPr/>
+        </p:nvSpPr>
+        <p:spPr>
+          <a:xfrm>
+            <a:off x="822959" y="4919472"/>
+            <a:ext cx="4919472" cy="9144"/>
+          </a:xfrm>
+          <a:prstGeom prst="rect">
+            <a:avLst/>
+          </a:prstGeom>
+          <a:solidFill>
+            <a:srgbClr val="D5E1F2"/>
+          </a:solidFill>
+          <a:ln>
+            <a:noFill/>
+          </a:ln>
+          <a:effectLst/>
+        </p:spPr>
+        <p:style>
+          <a:lnRef idx="1">
+            <a:schemeClr val="accent1"/>
+          </a:lnRef>
+          <a:fillRef idx="3">
+            <a:schemeClr val="accent1"/>
+          </a:fillRef>
+          <a:effectRef idx="2">
+            <a:schemeClr val="accent1"/>
+          </a:effectRef>
+          <a:fontRef idx="minor">
+            <a:schemeClr val="lt1"/>
+          </a:fontRef>
+        </p:style>
+        <p:txBody>
+          <a:bodyPr rtlCol="0" anchor="ctr"/>
+          <a:lstStyle/>
+          <a:p>
+            <a:pPr algn="ctr"/>
+          </a:p>
+        </p:txBody>
+      </p:sp>
+      <p:sp>
+        <p:nvSpPr>
+          <p:cNvPr id="21" name="TextBox 20"/>
+          <p:cNvSpPr txBox="1"/>
+          <p:nvPr/>
+        </p:nvSpPr>
+        <p:spPr>
+          <a:xfrm>
+            <a:off x="822959" y="4974336"/>
+            <a:ext cx="1371600" cy="548640"/>
+          </a:xfrm>
+          <a:prstGeom prst="rect">
+            <a:avLst/>
+          </a:prstGeom>
+          <a:noFill/>
+        </p:spPr>
+        <p:txBody>
+          <a:bodyPr wrap="square" anchor="t" lIns="0" rIns="0" tIns="0" bIns="0">
+            <a:spAutoFit/>
+          </a:bodyPr>
+          <a:lstStyle/>
+          <a:p>
+            <a:pPr algn="l"/>
+            <a:r>
+              <a:rPr sz="1050" b="1">
+                <a:solidFill>
+                  <a:srgbClr val="3A5C9E"/>
+                </a:solidFill>
+              </a:rPr>
+              <a:t>Answers</a:t>
+            </a:r>
+          </a:p>
+        </p:txBody>
+      </p:sp>
+      <p:sp>
+        <p:nvSpPr>
+          <p:cNvPr id="22" name="TextBox 21"/>
+          <p:cNvSpPr txBox="1"/>
+          <p:nvPr/>
+        </p:nvSpPr>
+        <p:spPr>
+          <a:xfrm>
+            <a:off x="2194560" y="4974336"/>
+            <a:ext cx="3547872" cy="566928"/>
+          </a:xfrm>
+          <a:prstGeom prst="rect">
+            <a:avLst/>
+          </a:prstGeom>
+          <a:noFill/>
+        </p:spPr>
+        <p:txBody>
+          <a:bodyPr wrap="square" anchor="t" lIns="0" rIns="0" tIns="0" bIns="0">
+            <a:spAutoFit/>
+          </a:bodyPr>
+          <a:lstStyle/>
+          <a:p>
+            <a:pPr algn="l"/>
+            <a:r>
+              <a:rPr sz="1100" b="0">
+                <a:solidFill>
+                  <a:srgbClr val="1B2A41"/>
+                </a:solidFill>
+              </a:rPr>
+              <a:t>Who owns the fund?</a:t>
+            </a:r>
+          </a:p>
+        </p:txBody>
+      </p:sp>
+      <p:sp>
+        <p:nvSpPr>
+          <p:cNvPr id="23" name="Rectangle 22"/>
+          <p:cNvSpPr/>
+          <p:nvPr/>
+        </p:nvSpPr>
+        <p:spPr>
+          <a:xfrm>
+            <a:off x="6172200" y="1463040"/>
+            <a:ext cx="5468112" cy="4160520"/>
+          </a:xfrm>
+          <a:prstGeom prst="rect">
+            <a:avLst/>
+          </a:prstGeom>
+          <a:solidFill>
+            <a:srgbClr val="0F2145"/>
+          </a:solidFill>
+          <a:ln>
+            <a:noFill/>
+          </a:ln>
+          <a:effectLst/>
+        </p:spPr>
+        <p:style>
+          <a:lnRef idx="1">
+            <a:schemeClr val="accent1"/>
+          </a:lnRef>
+          <a:fillRef idx="3">
+            <a:schemeClr val="accent1"/>
+          </a:fillRef>
+          <a:effectRef idx="2">
+            <a:schemeClr val="accent1"/>
+          </a:effectRef>
+          <a:fontRef idx="minor">
+            <a:schemeClr val="lt1"/>
+          </a:fontRef>
+        </p:style>
+        <p:txBody>
+          <a:bodyPr rtlCol="0" anchor="ctr"/>
+          <a:lstStyle/>
+          <a:p>
+            <a:pPr algn="ctr"/>
+          </a:p>
+        </p:txBody>
+      </p:sp>
+      <p:sp>
+        <p:nvSpPr>
+          <p:cNvPr id="24" name="Rectangle 23"/>
+          <p:cNvSpPr/>
+          <p:nvPr/>
+        </p:nvSpPr>
+        <p:spPr>
+          <a:xfrm>
+            <a:off x="6172200" y="1463040"/>
+            <a:ext cx="5468112" cy="45720"/>
           </a:xfrm>
           <a:prstGeom prst="rect">
             <a:avLst/>
@@ -11606,14 +10895,14 @@
       </p:sp>
       <p:sp>
         <p:nvSpPr>
-          <p:cNvPr id="10" name="TextBox 9"/>
+          <p:cNvPr id="25" name="TextBox 24"/>
           <p:cNvSpPr txBox="1"/>
           <p:nvPr/>
         </p:nvSpPr>
         <p:spPr>
           <a:xfrm>
-            <a:off x="4553712" y="1664208"/>
-            <a:ext cx="3081528" cy="1728216"/>
+            <a:off x="6446520" y="1627632"/>
+            <a:ext cx="4919472" cy="731520"/>
           </a:xfrm>
           <a:prstGeom prst="rect">
             <a:avLst/>
@@ -11630,61 +10919,46 @@
             <a:r>
               <a:rPr sz="1000" b="1">
                 <a:solidFill>
-                  <a:srgbClr val="3A5C9E"/>
-                </a:solidFill>
-              </a:rPr>
-              <a:t>HEDGE FUND</a:t>
+                  <a:srgbClr val="C9A227"/>
+                </a:solidFill>
+              </a:rPr>
+              <a:t>FUND ADMINISTRATOR</a:t>
             </a:r>
           </a:p>
           <a:p>
             <a:pPr algn="l">
               <a:spcBef>
-                <a:spcPts val="400"/>
+                <a:spcPts val="300"/>
               </a:spcBef>
             </a:pPr>
             <a:r>
-              <a:rPr sz="1600" b="1">
-                <a:solidFill>
-                  <a:srgbClr val="0F2145"/>
+              <a:rPr sz="1700" b="1">
+                <a:solidFill>
+                  <a:srgbClr val="FFFFFF"/>
                 </a:solidFill>
                 <a:latin typeface="Georgia"/>
               </a:rPr>
-              <a:t>NAV every month</a:t>
-            </a:r>
-          </a:p>
-          <a:p>
-            <a:pPr algn="l">
-              <a:spcBef>
-                <a:spcPts val="600"/>
-              </a:spcBef>
-            </a:pPr>
-            <a:r>
-              <a:rPr sz="1200" b="0">
-                <a:solidFill>
-                  <a:srgbClr val="1B2A41"/>
-                </a:solidFill>
-              </a:rPr>
-              <a:t>For large investors. Uses complex trades such as short selling.</a:t>
-            </a:r>
-          </a:p>
-        </p:txBody>
-      </p:sp>
-      <p:sp>
-        <p:nvSpPr>
-          <p:cNvPr id="11" name="Rectangle 10"/>
+              <a:t>Looks after the fund's books</a:t>
+            </a:r>
+          </a:p>
+        </p:txBody>
+      </p:sp>
+      <p:sp>
+        <p:nvSpPr>
+          <p:cNvPr id="26" name="Rectangle 25"/>
           <p:cNvSpPr/>
           <p:nvPr/>
         </p:nvSpPr>
         <p:spPr>
           <a:xfrm>
-            <a:off x="8046720" y="1463040"/>
-            <a:ext cx="3593592" cy="2002536"/>
+            <a:off x="6446520" y="2432304"/>
+            <a:ext cx="4919472" cy="9144"/>
           </a:xfrm>
           <a:prstGeom prst="rect">
             <a:avLst/>
           </a:prstGeom>
           <a:solidFill>
-            <a:srgbClr val="FFFFFF"/>
+            <a:srgbClr val="8FA1C4"/>
           </a:solidFill>
           <a:ln>
             <a:noFill/>
@@ -11715,14 +10989,574 @@
       </p:sp>
       <p:sp>
         <p:nvSpPr>
-          <p:cNvPr id="12" name="Rectangle 11"/>
+          <p:cNvPr id="27" name="TextBox 26"/>
+          <p:cNvSpPr txBox="1"/>
+          <p:nvPr/>
+        </p:nvSpPr>
+        <p:spPr>
+          <a:xfrm>
+            <a:off x="6446520" y="2487168"/>
+            <a:ext cx="1371600" cy="548640"/>
+          </a:xfrm>
+          <a:prstGeom prst="rect">
+            <a:avLst/>
+          </a:prstGeom>
+          <a:noFill/>
+        </p:spPr>
+        <p:txBody>
+          <a:bodyPr wrap="square" anchor="t" lIns="0" rIns="0" tIns="0" bIns="0">
+            <a:spAutoFit/>
+          </a:bodyPr>
+          <a:lstStyle/>
+          <a:p>
+            <a:pPr algn="l"/>
+            <a:r>
+              <a:rPr sz="1050" b="1">
+                <a:solidFill>
+                  <a:srgbClr val="C9A227"/>
+                </a:solidFill>
+              </a:rPr>
+              <a:t>Looks after</a:t>
+            </a:r>
+          </a:p>
+        </p:txBody>
+      </p:sp>
+      <p:sp>
+        <p:nvSpPr>
+          <p:cNvPr id="28" name="TextBox 27"/>
+          <p:cNvSpPr txBox="1"/>
+          <p:nvPr/>
+        </p:nvSpPr>
+        <p:spPr>
+          <a:xfrm>
+            <a:off x="7818120" y="2487168"/>
+            <a:ext cx="3547872" cy="566928"/>
+          </a:xfrm>
+          <a:prstGeom prst="rect">
+            <a:avLst/>
+          </a:prstGeom>
+          <a:noFill/>
+        </p:spPr>
+        <p:txBody>
+          <a:bodyPr wrap="square" anchor="t" lIns="0" rIns="0" tIns="0" bIns="0">
+            <a:spAutoFit/>
+          </a:bodyPr>
+          <a:lstStyle/>
+          <a:p>
+            <a:pPr algn="l"/>
+            <a:r>
+              <a:rPr sz="1100" b="0">
+                <a:solidFill>
+                  <a:srgbClr val="FFFFFF"/>
+                </a:solidFill>
+              </a:rPr>
+              <a:t>The fund itself</a:t>
+            </a:r>
+          </a:p>
+        </p:txBody>
+      </p:sp>
+      <p:sp>
+        <p:nvSpPr>
+          <p:cNvPr id="29" name="Rectangle 28"/>
           <p:cNvSpPr/>
           <p:nvPr/>
         </p:nvSpPr>
         <p:spPr>
           <a:xfrm>
-            <a:off x="8046720" y="1463040"/>
-            <a:ext cx="3593592" cy="45720"/>
+            <a:off x="6446520" y="3054096"/>
+            <a:ext cx="4919472" cy="9144"/>
+          </a:xfrm>
+          <a:prstGeom prst="rect">
+            <a:avLst/>
+          </a:prstGeom>
+          <a:solidFill>
+            <a:srgbClr val="8FA1C4"/>
+          </a:solidFill>
+          <a:ln>
+            <a:noFill/>
+          </a:ln>
+          <a:effectLst/>
+        </p:spPr>
+        <p:style>
+          <a:lnRef idx="1">
+            <a:schemeClr val="accent1"/>
+          </a:lnRef>
+          <a:fillRef idx="3">
+            <a:schemeClr val="accent1"/>
+          </a:fillRef>
+          <a:effectRef idx="2">
+            <a:schemeClr val="accent1"/>
+          </a:effectRef>
+          <a:fontRef idx="minor">
+            <a:schemeClr val="lt1"/>
+          </a:fontRef>
+        </p:style>
+        <p:txBody>
+          <a:bodyPr rtlCol="0" anchor="ctr"/>
+          <a:lstStyle/>
+          <a:p>
+            <a:pPr algn="ctr"/>
+          </a:p>
+        </p:txBody>
+      </p:sp>
+      <p:sp>
+        <p:nvSpPr>
+          <p:cNvPr id="30" name="TextBox 29"/>
+          <p:cNvSpPr txBox="1"/>
+          <p:nvPr/>
+        </p:nvSpPr>
+        <p:spPr>
+          <a:xfrm>
+            <a:off x="6446520" y="3108960"/>
+            <a:ext cx="1371600" cy="548640"/>
+          </a:xfrm>
+          <a:prstGeom prst="rect">
+            <a:avLst/>
+          </a:prstGeom>
+          <a:noFill/>
+        </p:spPr>
+        <p:txBody>
+          <a:bodyPr wrap="square" anchor="t" lIns="0" rIns="0" tIns="0" bIns="0">
+            <a:spAutoFit/>
+          </a:bodyPr>
+          <a:lstStyle/>
+          <a:p>
+            <a:pPr algn="l"/>
+            <a:r>
+              <a:rPr sz="1050" b="1">
+                <a:solidFill>
+                  <a:srgbClr val="C9A227"/>
+                </a:solidFill>
+              </a:rPr>
+              <a:t>Keeps</a:t>
+            </a:r>
+          </a:p>
+        </p:txBody>
+      </p:sp>
+      <p:sp>
+        <p:nvSpPr>
+          <p:cNvPr id="31" name="TextBox 30"/>
+          <p:cNvSpPr txBox="1"/>
+          <p:nvPr/>
+        </p:nvSpPr>
+        <p:spPr>
+          <a:xfrm>
+            <a:off x="7818120" y="3108960"/>
+            <a:ext cx="3547872" cy="566928"/>
+          </a:xfrm>
+          <a:prstGeom prst="rect">
+            <a:avLst/>
+          </a:prstGeom>
+          <a:noFill/>
+        </p:spPr>
+        <p:txBody>
+          <a:bodyPr wrap="square" anchor="t" lIns="0" rIns="0" tIns="0" bIns="0">
+            <a:spAutoFit/>
+          </a:bodyPr>
+          <a:lstStyle/>
+          <a:p>
+            <a:pPr algn="l"/>
+            <a:r>
+              <a:rPr sz="1100" b="0">
+                <a:solidFill>
+                  <a:srgbClr val="FFFFFF"/>
+                </a:solidFill>
+              </a:rPr>
+              <a:t>The ledger: holdings, cash, expenses owed</a:t>
+            </a:r>
+          </a:p>
+        </p:txBody>
+      </p:sp>
+      <p:sp>
+        <p:nvSpPr>
+          <p:cNvPr id="32" name="Rectangle 31"/>
+          <p:cNvSpPr/>
+          <p:nvPr/>
+        </p:nvSpPr>
+        <p:spPr>
+          <a:xfrm>
+            <a:off x="6446520" y="3675888"/>
+            <a:ext cx="4919472" cy="9144"/>
+          </a:xfrm>
+          <a:prstGeom prst="rect">
+            <a:avLst/>
+          </a:prstGeom>
+          <a:solidFill>
+            <a:srgbClr val="8FA1C4"/>
+          </a:solidFill>
+          <a:ln>
+            <a:noFill/>
+          </a:ln>
+          <a:effectLst/>
+        </p:spPr>
+        <p:style>
+          <a:lnRef idx="1">
+            <a:schemeClr val="accent1"/>
+          </a:lnRef>
+          <a:fillRef idx="3">
+            <a:schemeClr val="accent1"/>
+          </a:fillRef>
+          <a:effectRef idx="2">
+            <a:schemeClr val="accent1"/>
+          </a:effectRef>
+          <a:fontRef idx="minor">
+            <a:schemeClr val="lt1"/>
+          </a:fontRef>
+        </p:style>
+        <p:txBody>
+          <a:bodyPr rtlCol="0" anchor="ctr"/>
+          <a:lstStyle/>
+          <a:p>
+            <a:pPr algn="ctr"/>
+          </a:p>
+        </p:txBody>
+      </p:sp>
+      <p:sp>
+        <p:nvSpPr>
+          <p:cNvPr id="33" name="TextBox 32"/>
+          <p:cNvSpPr txBox="1"/>
+          <p:nvPr/>
+        </p:nvSpPr>
+        <p:spPr>
+          <a:xfrm>
+            <a:off x="6446520" y="3730752"/>
+            <a:ext cx="1371600" cy="548640"/>
+          </a:xfrm>
+          <a:prstGeom prst="rect">
+            <a:avLst/>
+          </a:prstGeom>
+          <a:noFill/>
+        </p:spPr>
+        <p:txBody>
+          <a:bodyPr wrap="square" anchor="t" lIns="0" rIns="0" tIns="0" bIns="0">
+            <a:spAutoFit/>
+          </a:bodyPr>
+          <a:lstStyle/>
+          <a:p>
+            <a:pPr algn="l"/>
+            <a:r>
+              <a:rPr sz="1050" b="1">
+                <a:solidFill>
+                  <a:srgbClr val="C9A227"/>
+                </a:solidFill>
+              </a:rPr>
+              <a:t>Daily jobs</a:t>
+            </a:r>
+          </a:p>
+        </p:txBody>
+      </p:sp>
+      <p:sp>
+        <p:nvSpPr>
+          <p:cNvPr id="34" name="TextBox 33"/>
+          <p:cNvSpPr txBox="1"/>
+          <p:nvPr/>
+        </p:nvSpPr>
+        <p:spPr>
+          <a:xfrm>
+            <a:off x="7818120" y="3730752"/>
+            <a:ext cx="3547872" cy="566928"/>
+          </a:xfrm>
+          <a:prstGeom prst="rect">
+            <a:avLst/>
+          </a:prstGeom>
+          <a:noFill/>
+        </p:spPr>
+        <p:txBody>
+          <a:bodyPr wrap="square" anchor="t" lIns="0" rIns="0" tIns="0" bIns="0">
+            <a:spAutoFit/>
+          </a:bodyPr>
+          <a:lstStyle/>
+          <a:p>
+            <a:pPr algn="l"/>
+            <a:r>
+              <a:rPr sz="1100" b="0">
+                <a:solidFill>
+                  <a:srgbClr val="FFFFFF"/>
+                </a:solidFill>
+              </a:rPr>
+              <a:t>Price holdings, book trades and corporate actions, reconcile, calculate NAV</a:t>
+            </a:r>
+          </a:p>
+        </p:txBody>
+      </p:sp>
+      <p:sp>
+        <p:nvSpPr>
+          <p:cNvPr id="35" name="Rectangle 34"/>
+          <p:cNvSpPr/>
+          <p:nvPr/>
+        </p:nvSpPr>
+        <p:spPr>
+          <a:xfrm>
+            <a:off x="6446520" y="4297680"/>
+            <a:ext cx="4919472" cy="9144"/>
+          </a:xfrm>
+          <a:prstGeom prst="rect">
+            <a:avLst/>
+          </a:prstGeom>
+          <a:solidFill>
+            <a:srgbClr val="8FA1C4"/>
+          </a:solidFill>
+          <a:ln>
+            <a:noFill/>
+          </a:ln>
+          <a:effectLst/>
+        </p:spPr>
+        <p:style>
+          <a:lnRef idx="1">
+            <a:schemeClr val="accent1"/>
+          </a:lnRef>
+          <a:fillRef idx="3">
+            <a:schemeClr val="accent1"/>
+          </a:fillRef>
+          <a:effectRef idx="2">
+            <a:schemeClr val="accent1"/>
+          </a:effectRef>
+          <a:fontRef idx="minor">
+            <a:schemeClr val="lt1"/>
+          </a:fontRef>
+        </p:style>
+        <p:txBody>
+          <a:bodyPr rtlCol="0" anchor="ctr"/>
+          <a:lstStyle/>
+          <a:p>
+            <a:pPr algn="ctr"/>
+          </a:p>
+        </p:txBody>
+      </p:sp>
+      <p:sp>
+        <p:nvSpPr>
+          <p:cNvPr id="36" name="TextBox 35"/>
+          <p:cNvSpPr txBox="1"/>
+          <p:nvPr/>
+        </p:nvSpPr>
+        <p:spPr>
+          <a:xfrm>
+            <a:off x="6446520" y="4352544"/>
+            <a:ext cx="1371600" cy="548640"/>
+          </a:xfrm>
+          <a:prstGeom prst="rect">
+            <a:avLst/>
+          </a:prstGeom>
+          <a:noFill/>
+        </p:spPr>
+        <p:txBody>
+          <a:bodyPr wrap="square" anchor="t" lIns="0" rIns="0" tIns="0" bIns="0">
+            <a:spAutoFit/>
+          </a:bodyPr>
+          <a:lstStyle/>
+          <a:p>
+            <a:pPr algn="l"/>
+            <a:r>
+              <a:rPr sz="1050" b="1">
+                <a:solidFill>
+                  <a:srgbClr val="C9A227"/>
+                </a:solidFill>
+              </a:rPr>
+              <a:t>Example</a:t>
+            </a:r>
+          </a:p>
+        </p:txBody>
+      </p:sp>
+      <p:sp>
+        <p:nvSpPr>
+          <p:cNvPr id="37" name="TextBox 36"/>
+          <p:cNvSpPr txBox="1"/>
+          <p:nvPr/>
+        </p:nvSpPr>
+        <p:spPr>
+          <a:xfrm>
+            <a:off x="7818120" y="4352544"/>
+            <a:ext cx="3547872" cy="566928"/>
+          </a:xfrm>
+          <a:prstGeom prst="rect">
+            <a:avLst/>
+          </a:prstGeom>
+          <a:noFill/>
+        </p:spPr>
+        <p:txBody>
+          <a:bodyPr wrap="square" anchor="t" lIns="0" rIns="0" tIns="0" bIns="0">
+            <a:spAutoFit/>
+          </a:bodyPr>
+          <a:lstStyle/>
+          <a:p>
+            <a:pPr algn="l"/>
+            <a:r>
+              <a:rPr sz="1100" b="0">
+                <a:solidFill>
+                  <a:srgbClr val="FFFFFF"/>
+                </a:solidFill>
+              </a:rPr>
+              <a:t>Opus Fund Services: calculates a fund's NAV and reconciles positions and cash daily</a:t>
+            </a:r>
+          </a:p>
+        </p:txBody>
+      </p:sp>
+      <p:sp>
+        <p:nvSpPr>
+          <p:cNvPr id="38" name="Rectangle 37"/>
+          <p:cNvSpPr/>
+          <p:nvPr/>
+        </p:nvSpPr>
+        <p:spPr>
+          <a:xfrm>
+            <a:off x="6446520" y="4919472"/>
+            <a:ext cx="4919472" cy="9144"/>
+          </a:xfrm>
+          <a:prstGeom prst="rect">
+            <a:avLst/>
+          </a:prstGeom>
+          <a:solidFill>
+            <a:srgbClr val="8FA1C4"/>
+          </a:solidFill>
+          <a:ln>
+            <a:noFill/>
+          </a:ln>
+          <a:effectLst/>
+        </p:spPr>
+        <p:style>
+          <a:lnRef idx="1">
+            <a:schemeClr val="accent1"/>
+          </a:lnRef>
+          <a:fillRef idx="3">
+            <a:schemeClr val="accent1"/>
+          </a:fillRef>
+          <a:effectRef idx="2">
+            <a:schemeClr val="accent1"/>
+          </a:effectRef>
+          <a:fontRef idx="minor">
+            <a:schemeClr val="lt1"/>
+          </a:fontRef>
+        </p:style>
+        <p:txBody>
+          <a:bodyPr rtlCol="0" anchor="ctr"/>
+          <a:lstStyle/>
+          <a:p>
+            <a:pPr algn="ctr"/>
+          </a:p>
+        </p:txBody>
+      </p:sp>
+      <p:sp>
+        <p:nvSpPr>
+          <p:cNvPr id="39" name="TextBox 38"/>
+          <p:cNvSpPr txBox="1"/>
+          <p:nvPr/>
+        </p:nvSpPr>
+        <p:spPr>
+          <a:xfrm>
+            <a:off x="6446520" y="4974336"/>
+            <a:ext cx="1371600" cy="548640"/>
+          </a:xfrm>
+          <a:prstGeom prst="rect">
+            <a:avLst/>
+          </a:prstGeom>
+          <a:noFill/>
+        </p:spPr>
+        <p:txBody>
+          <a:bodyPr wrap="square" anchor="t" lIns="0" rIns="0" tIns="0" bIns="0">
+            <a:spAutoFit/>
+          </a:bodyPr>
+          <a:lstStyle/>
+          <a:p>
+            <a:pPr algn="l"/>
+            <a:r>
+              <a:rPr sz="1050" b="1">
+                <a:solidFill>
+                  <a:srgbClr val="C9A227"/>
+                </a:solidFill>
+              </a:rPr>
+              <a:t>Answers</a:t>
+            </a:r>
+          </a:p>
+        </p:txBody>
+      </p:sp>
+      <p:sp>
+        <p:nvSpPr>
+          <p:cNvPr id="40" name="TextBox 39"/>
+          <p:cNvSpPr txBox="1"/>
+          <p:nvPr/>
+        </p:nvSpPr>
+        <p:spPr>
+          <a:xfrm>
+            <a:off x="7818120" y="4974336"/>
+            <a:ext cx="3547872" cy="566928"/>
+          </a:xfrm>
+          <a:prstGeom prst="rect">
+            <a:avLst/>
+          </a:prstGeom>
+          <a:noFill/>
+        </p:spPr>
+        <p:txBody>
+          <a:bodyPr wrap="square" anchor="t" lIns="0" rIns="0" tIns="0" bIns="0">
+            <a:spAutoFit/>
+          </a:bodyPr>
+          <a:lstStyle/>
+          <a:p>
+            <a:pPr algn="l"/>
+            <a:r>
+              <a:rPr sz="1100" b="0">
+                <a:solidFill>
+                  <a:srgbClr val="FFFFFF"/>
+                </a:solidFill>
+              </a:rPr>
+              <a:t>What is the fund worth?</a:t>
+            </a:r>
+          </a:p>
+        </p:txBody>
+      </p:sp>
+      <p:sp>
+        <p:nvSpPr>
+          <p:cNvPr id="41" name="Rectangle 40"/>
+          <p:cNvSpPr/>
+          <p:nvPr/>
+        </p:nvSpPr>
+        <p:spPr>
+          <a:xfrm>
+            <a:off x="548640" y="5760720"/>
+            <a:ext cx="11091672" cy="603504"/>
+          </a:xfrm>
+          <a:prstGeom prst="rect">
+            <a:avLst/>
+          </a:prstGeom>
+          <a:solidFill>
+            <a:srgbClr val="0F2145"/>
+          </a:solidFill>
+          <a:ln>
+            <a:noFill/>
+          </a:ln>
+          <a:effectLst/>
+        </p:spPr>
+        <p:style>
+          <a:lnRef idx="1">
+            <a:schemeClr val="accent1"/>
+          </a:lnRef>
+          <a:fillRef idx="3">
+            <a:schemeClr val="accent1"/>
+          </a:fillRef>
+          <a:effectRef idx="2">
+            <a:schemeClr val="accent1"/>
+          </a:effectRef>
+          <a:fontRef idx="minor">
+            <a:schemeClr val="lt1"/>
+          </a:fontRef>
+        </p:style>
+        <p:txBody>
+          <a:bodyPr rtlCol="0" anchor="ctr"/>
+          <a:lstStyle/>
+          <a:p>
+            <a:pPr algn="ctr"/>
+          </a:p>
+        </p:txBody>
+      </p:sp>
+      <p:sp>
+        <p:nvSpPr>
+          <p:cNvPr id="42" name="Rectangle 41"/>
+          <p:cNvSpPr/>
+          <p:nvPr/>
+        </p:nvSpPr>
+        <p:spPr>
+          <a:xfrm>
+            <a:off x="548640" y="5760720"/>
+            <a:ext cx="64008" cy="603504"/>
           </a:xfrm>
           <a:prstGeom prst="rect">
             <a:avLst/>
@@ -11759,14 +11593,56 @@
       </p:sp>
       <p:sp>
         <p:nvSpPr>
-          <p:cNvPr id="13" name="TextBox 12"/>
+          <p:cNvPr id="43" name="TextBox 42"/>
           <p:cNvSpPr txBox="1"/>
           <p:nvPr/>
         </p:nvSpPr>
         <p:spPr>
           <a:xfrm>
-            <a:off x="8302752" y="1664208"/>
-            <a:ext cx="3081528" cy="1728216"/>
+            <a:off x="822960" y="5760720"/>
+            <a:ext cx="10543032" cy="603504"/>
+          </a:xfrm>
+          <a:prstGeom prst="rect">
+            <a:avLst/>
+          </a:prstGeom>
+          <a:noFill/>
+        </p:spPr>
+        <p:txBody>
+          <a:bodyPr wrap="square" anchor="ctr" lIns="0" rIns="0" tIns="0" bIns="0">
+            <a:spAutoFit/>
+          </a:bodyPr>
+          <a:lstStyle/>
+          <a:p>
+            <a:pPr algn="l"/>
+            <a:r>
+              <a:rPr sz="1200" b="1">
+                <a:solidFill>
+                  <a:srgbClr val="C9A227"/>
+                </a:solidFill>
+              </a:rPr>
+              <a:t>Easy way to remember:  </a:t>
+            </a:r>
+            <a:r>
+              <a:rPr sz="1200" b="0">
+                <a:solidFill>
+                  <a:srgbClr val="FFFFFF"/>
+                </a:solidFill>
+              </a:rPr>
+              <a:t>the RTA counts the units, the fund administrator values the fund. NAV = the fund's value ÷ the units.</a:t>
+            </a:r>
+          </a:p>
+        </p:txBody>
+      </p:sp>
+      <p:sp>
+        <p:nvSpPr>
+          <p:cNvPr id="44" name="TextBox 43"/>
+          <p:cNvSpPr txBox="1"/>
+          <p:nvPr/>
+        </p:nvSpPr>
+        <p:spPr>
+          <a:xfrm>
+            <a:off x="548640" y="6473952"/>
+            <a:ext cx="7315200" cy="228600"/>
           </a:xfrm>
           <a:prstGeom prst="rect">
             <a:avLst/>
@@ -11781,660 +11657,6 @@
           <a:p>
             <a:pPr algn="l"/>
             <a:r>
-              <a:rPr sz="1000" b="1">
-                <a:solidFill>
-                  <a:srgbClr val="3A5C9E"/>
-                </a:solidFill>
-              </a:rPr>
-              <a:t>PRIVATE EQUITY AND VC</a:t>
-            </a:r>
-          </a:p>
-          <a:p>
-            <a:pPr algn="l">
-              <a:spcBef>
-                <a:spcPts val="400"/>
-              </a:spcBef>
-            </a:pPr>
-            <a:r>
-              <a:rPr sz="1600" b="1">
-                <a:solidFill>
-                  <a:srgbClr val="0F2145"/>
-                </a:solidFill>
-                <a:latin typeface="Georgia"/>
-              </a:rPr>
-              <a:t>Valued every quarter</a:t>
-            </a:r>
-          </a:p>
-          <a:p>
-            <a:pPr algn="l">
-              <a:spcBef>
-                <a:spcPts val="600"/>
-              </a:spcBef>
-            </a:pPr>
-            <a:r>
-              <a:rPr sz="1200" b="0">
-                <a:solidFill>
-                  <a:srgbClr val="1B2A41"/>
-                </a:solidFill>
-              </a:rPr>
-              <a:t>Buys whole companies or start-ups. Few deals, hard to price.</a:t>
-            </a:r>
-          </a:p>
-        </p:txBody>
-      </p:sp>
-      <p:sp>
-        <p:nvSpPr>
-          <p:cNvPr id="14" name="Rectangle 13"/>
-          <p:cNvSpPr/>
-          <p:nvPr/>
-        </p:nvSpPr>
-        <p:spPr>
-          <a:xfrm>
-            <a:off x="548640" y="3621024"/>
-            <a:ext cx="3593592" cy="2002536"/>
-          </a:xfrm>
-          <a:prstGeom prst="rect">
-            <a:avLst/>
-          </a:prstGeom>
-          <a:solidFill>
-            <a:srgbClr val="FFFFFF"/>
-          </a:solidFill>
-          <a:ln>
-            <a:noFill/>
-          </a:ln>
-          <a:effectLst/>
-        </p:spPr>
-        <p:style>
-          <a:lnRef idx="1">
-            <a:schemeClr val="accent1"/>
-          </a:lnRef>
-          <a:fillRef idx="3">
-            <a:schemeClr val="accent1"/>
-          </a:fillRef>
-          <a:effectRef idx="2">
-            <a:schemeClr val="accent1"/>
-          </a:effectRef>
-          <a:fontRef idx="minor">
-            <a:schemeClr val="lt1"/>
-          </a:fontRef>
-        </p:style>
-        <p:txBody>
-          <a:bodyPr rtlCol="0" anchor="ctr"/>
-          <a:lstStyle/>
-          <a:p>
-            <a:pPr algn="ctr"/>
-          </a:p>
-        </p:txBody>
-      </p:sp>
-      <p:sp>
-        <p:nvSpPr>
-          <p:cNvPr id="15" name="Rectangle 14"/>
-          <p:cNvSpPr/>
-          <p:nvPr/>
-        </p:nvSpPr>
-        <p:spPr>
-          <a:xfrm>
-            <a:off x="548640" y="3621024"/>
-            <a:ext cx="3593592" cy="45720"/>
-          </a:xfrm>
-          <a:prstGeom prst="rect">
-            <a:avLst/>
-          </a:prstGeom>
-          <a:solidFill>
-            <a:srgbClr val="C9A227"/>
-          </a:solidFill>
-          <a:ln>
-            <a:noFill/>
-          </a:ln>
-          <a:effectLst/>
-        </p:spPr>
-        <p:style>
-          <a:lnRef idx="1">
-            <a:schemeClr val="accent1"/>
-          </a:lnRef>
-          <a:fillRef idx="3">
-            <a:schemeClr val="accent1"/>
-          </a:fillRef>
-          <a:effectRef idx="2">
-            <a:schemeClr val="accent1"/>
-          </a:effectRef>
-          <a:fontRef idx="minor">
-            <a:schemeClr val="lt1"/>
-          </a:fontRef>
-        </p:style>
-        <p:txBody>
-          <a:bodyPr rtlCol="0" anchor="ctr"/>
-          <a:lstStyle/>
-          <a:p>
-            <a:pPr algn="ctr"/>
-          </a:p>
-        </p:txBody>
-      </p:sp>
-      <p:sp>
-        <p:nvSpPr>
-          <p:cNvPr id="16" name="TextBox 15"/>
-          <p:cNvSpPr txBox="1"/>
-          <p:nvPr/>
-        </p:nvSpPr>
-        <p:spPr>
-          <a:xfrm>
-            <a:off x="804672" y="3822192"/>
-            <a:ext cx="3081528" cy="1728216"/>
-          </a:xfrm>
-          <a:prstGeom prst="rect">
-            <a:avLst/>
-          </a:prstGeom>
-          <a:noFill/>
-        </p:spPr>
-        <p:txBody>
-          <a:bodyPr wrap="square" anchor="t" lIns="0" rIns="0" tIns="0" bIns="0">
-            <a:spAutoFit/>
-          </a:bodyPr>
-          <a:lstStyle/>
-          <a:p>
-            <a:pPr algn="l"/>
-            <a:r>
-              <a:rPr sz="1000" b="1">
-                <a:solidFill>
-                  <a:srgbClr val="3A5C9E"/>
-                </a:solidFill>
-              </a:rPr>
-              <a:t>AIF</a:t>
-            </a:r>
-          </a:p>
-          <a:p>
-            <a:pPr algn="l">
-              <a:spcBef>
-                <a:spcPts val="400"/>
-              </a:spcBef>
-            </a:pPr>
-            <a:r>
-              <a:rPr sz="1600" b="1">
-                <a:solidFill>
-                  <a:srgbClr val="0F2145"/>
-                </a:solidFill>
-                <a:latin typeface="Georgia"/>
-              </a:rPr>
-              <a:t>India's category for large investors</a:t>
-            </a:r>
-          </a:p>
-          <a:p>
-            <a:pPr algn="l">
-              <a:spcBef>
-                <a:spcPts val="600"/>
-              </a:spcBef>
-            </a:pPr>
-            <a:r>
-              <a:rPr sz="1200" b="0">
-                <a:solidFill>
-                  <a:srgbClr val="1B2A41"/>
-                </a:solidFill>
-              </a:rPr>
-              <a:t>A SEBI category for funds sold to wealthy investors. The minimum is ₹1 crore.</a:t>
-            </a:r>
-          </a:p>
-        </p:txBody>
-      </p:sp>
-      <p:sp>
-        <p:nvSpPr>
-          <p:cNvPr id="17" name="Rectangle 16"/>
-          <p:cNvSpPr/>
-          <p:nvPr/>
-        </p:nvSpPr>
-        <p:spPr>
-          <a:xfrm>
-            <a:off x="4297680" y="3621024"/>
-            <a:ext cx="3593592" cy="2002536"/>
-          </a:xfrm>
-          <a:prstGeom prst="rect">
-            <a:avLst/>
-          </a:prstGeom>
-          <a:solidFill>
-            <a:srgbClr val="FFFFFF"/>
-          </a:solidFill>
-          <a:ln>
-            <a:noFill/>
-          </a:ln>
-          <a:effectLst/>
-        </p:spPr>
-        <p:style>
-          <a:lnRef idx="1">
-            <a:schemeClr val="accent1"/>
-          </a:lnRef>
-          <a:fillRef idx="3">
-            <a:schemeClr val="accent1"/>
-          </a:fillRef>
-          <a:effectRef idx="2">
-            <a:schemeClr val="accent1"/>
-          </a:effectRef>
-          <a:fontRef idx="minor">
-            <a:schemeClr val="lt1"/>
-          </a:fontRef>
-        </p:style>
-        <p:txBody>
-          <a:bodyPr rtlCol="0" anchor="ctr"/>
-          <a:lstStyle/>
-          <a:p>
-            <a:pPr algn="ctr"/>
-          </a:p>
-        </p:txBody>
-      </p:sp>
-      <p:sp>
-        <p:nvSpPr>
-          <p:cNvPr id="18" name="Rectangle 17"/>
-          <p:cNvSpPr/>
-          <p:nvPr/>
-        </p:nvSpPr>
-        <p:spPr>
-          <a:xfrm>
-            <a:off x="4297680" y="3621024"/>
-            <a:ext cx="3593592" cy="45720"/>
-          </a:xfrm>
-          <a:prstGeom prst="rect">
-            <a:avLst/>
-          </a:prstGeom>
-          <a:solidFill>
-            <a:srgbClr val="C9A227"/>
-          </a:solidFill>
-          <a:ln>
-            <a:noFill/>
-          </a:ln>
-          <a:effectLst/>
-        </p:spPr>
-        <p:style>
-          <a:lnRef idx="1">
-            <a:schemeClr val="accent1"/>
-          </a:lnRef>
-          <a:fillRef idx="3">
-            <a:schemeClr val="accent1"/>
-          </a:fillRef>
-          <a:effectRef idx="2">
-            <a:schemeClr val="accent1"/>
-          </a:effectRef>
-          <a:fontRef idx="minor">
-            <a:schemeClr val="lt1"/>
-          </a:fontRef>
-        </p:style>
-        <p:txBody>
-          <a:bodyPr rtlCol="0" anchor="ctr"/>
-          <a:lstStyle/>
-          <a:p>
-            <a:pPr algn="ctr"/>
-          </a:p>
-        </p:txBody>
-      </p:sp>
-      <p:sp>
-        <p:nvSpPr>
-          <p:cNvPr id="19" name="TextBox 18"/>
-          <p:cNvSpPr txBox="1"/>
-          <p:nvPr/>
-        </p:nvSpPr>
-        <p:spPr>
-          <a:xfrm>
-            <a:off x="4553712" y="3822192"/>
-            <a:ext cx="3081528" cy="1728216"/>
-          </a:xfrm>
-          <a:prstGeom prst="rect">
-            <a:avLst/>
-          </a:prstGeom>
-          <a:noFill/>
-        </p:spPr>
-        <p:txBody>
-          <a:bodyPr wrap="square" anchor="t" lIns="0" rIns="0" tIns="0" bIns="0">
-            <a:spAutoFit/>
-          </a:bodyPr>
-          <a:lstStyle/>
-          <a:p>
-            <a:pPr algn="l"/>
-            <a:r>
-              <a:rPr sz="1000" b="1">
-                <a:solidFill>
-                  <a:srgbClr val="3A5C9E"/>
-                </a:solidFill>
-              </a:rPr>
-              <a:t>WHO DOES THE WORK</a:t>
-            </a:r>
-          </a:p>
-          <a:p>
-            <a:pPr algn="l">
-              <a:spcBef>
-                <a:spcPts val="400"/>
-              </a:spcBef>
-            </a:pPr>
-            <a:r>
-              <a:rPr sz="1600" b="1">
-                <a:solidFill>
-                  <a:srgbClr val="0F2145"/>
-                </a:solidFill>
-                <a:latin typeface="Georgia"/>
-              </a:rPr>
-              <a:t>Fund administrators</a:t>
-            </a:r>
-          </a:p>
-          <a:p>
-            <a:pPr algn="l">
-              <a:spcBef>
-                <a:spcPts val="600"/>
-              </a:spcBef>
-            </a:pPr>
-            <a:r>
-              <a:rPr sz="1200" b="0">
-                <a:solidFill>
-                  <a:srgbClr val="1B2A41"/>
-                </a:solidFill>
-              </a:rPr>
-              <a:t>SS&amp;C GlobeOp, Apex Group, HC Global and Opus Fund Services run this work for many funds.</a:t>
-            </a:r>
-          </a:p>
-        </p:txBody>
-      </p:sp>
-      <p:sp>
-        <p:nvSpPr>
-          <p:cNvPr id="20" name="Rectangle 19"/>
-          <p:cNvSpPr/>
-          <p:nvPr/>
-        </p:nvSpPr>
-        <p:spPr>
-          <a:xfrm>
-            <a:off x="8046720" y="3621024"/>
-            <a:ext cx="3593592" cy="2002536"/>
-          </a:xfrm>
-          <a:prstGeom prst="rect">
-            <a:avLst/>
-          </a:prstGeom>
-          <a:solidFill>
-            <a:srgbClr val="0F2145"/>
-          </a:solidFill>
-          <a:ln>
-            <a:noFill/>
-          </a:ln>
-          <a:effectLst/>
-        </p:spPr>
-        <p:style>
-          <a:lnRef idx="1">
-            <a:schemeClr val="accent1"/>
-          </a:lnRef>
-          <a:fillRef idx="3">
-            <a:schemeClr val="accent1"/>
-          </a:fillRef>
-          <a:effectRef idx="2">
-            <a:schemeClr val="accent1"/>
-          </a:effectRef>
-          <a:fontRef idx="minor">
-            <a:schemeClr val="lt1"/>
-          </a:fontRef>
-        </p:style>
-        <p:txBody>
-          <a:bodyPr rtlCol="0" anchor="ctr"/>
-          <a:lstStyle/>
-          <a:p>
-            <a:pPr algn="ctr"/>
-          </a:p>
-        </p:txBody>
-      </p:sp>
-      <p:sp>
-        <p:nvSpPr>
-          <p:cNvPr id="21" name="Rectangle 20"/>
-          <p:cNvSpPr/>
-          <p:nvPr/>
-        </p:nvSpPr>
-        <p:spPr>
-          <a:xfrm>
-            <a:off x="8046720" y="3621024"/>
-            <a:ext cx="3593592" cy="45720"/>
-          </a:xfrm>
-          <a:prstGeom prst="rect">
-            <a:avLst/>
-          </a:prstGeom>
-          <a:solidFill>
-            <a:srgbClr val="C9A227"/>
-          </a:solidFill>
-          <a:ln>
-            <a:noFill/>
-          </a:ln>
-          <a:effectLst/>
-        </p:spPr>
-        <p:style>
-          <a:lnRef idx="1">
-            <a:schemeClr val="accent1"/>
-          </a:lnRef>
-          <a:fillRef idx="3">
-            <a:schemeClr val="accent1"/>
-          </a:fillRef>
-          <a:effectRef idx="2">
-            <a:schemeClr val="accent1"/>
-          </a:effectRef>
-          <a:fontRef idx="minor">
-            <a:schemeClr val="lt1"/>
-          </a:fontRef>
-        </p:style>
-        <p:txBody>
-          <a:bodyPr rtlCol="0" anchor="ctr"/>
-          <a:lstStyle/>
-          <a:p>
-            <a:pPr algn="ctr"/>
-          </a:p>
-        </p:txBody>
-      </p:sp>
-      <p:sp>
-        <p:nvSpPr>
-          <p:cNvPr id="22" name="TextBox 21"/>
-          <p:cNvSpPr txBox="1"/>
-          <p:nvPr/>
-        </p:nvSpPr>
-        <p:spPr>
-          <a:xfrm>
-            <a:off x="8302752" y="3822192"/>
-            <a:ext cx="3081528" cy="1728216"/>
-          </a:xfrm>
-          <a:prstGeom prst="rect">
-            <a:avLst/>
-          </a:prstGeom>
-          <a:noFill/>
-        </p:spPr>
-        <p:txBody>
-          <a:bodyPr wrap="square" anchor="t" lIns="0" rIns="0" tIns="0" bIns="0">
-            <a:spAutoFit/>
-          </a:bodyPr>
-          <a:lstStyle/>
-          <a:p>
-            <a:pPr algn="l"/>
-            <a:r>
-              <a:rPr sz="1000" b="1">
-                <a:solidFill>
-                  <a:srgbClr val="C9A227"/>
-                </a:solidFill>
-              </a:rPr>
-              <a:t>WHERE AI HELPS</a:t>
-            </a:r>
-          </a:p>
-          <a:p>
-            <a:pPr algn="l">
-              <a:spcBef>
-                <a:spcPts val="400"/>
-              </a:spcBef>
-            </a:pPr>
-            <a:r>
-              <a:rPr sz="1600" b="1">
-                <a:solidFill>
-                  <a:srgbClr val="FFFFFF"/>
-                </a:solidFill>
-                <a:latin typeface="Georgia"/>
-              </a:rPr>
-              <a:t>The checking</a:t>
-            </a:r>
-          </a:p>
-          <a:p>
-            <a:pPr algn="l">
-              <a:spcBef>
-                <a:spcPts val="600"/>
-              </a:spcBef>
-            </a:pPr>
-            <a:r>
-              <a:rPr sz="1200" b="0">
-                <a:solidFill>
-                  <a:srgbClr val="C9D6EE"/>
-                </a:solidFill>
-              </a:rPr>
-              <a:t>Price checks, finding breaks, reading corporate action notices and drafting reports.</a:t>
-            </a:r>
-          </a:p>
-        </p:txBody>
-      </p:sp>
-      <p:sp>
-        <p:nvSpPr>
-          <p:cNvPr id="23" name="Rectangle 22"/>
-          <p:cNvSpPr/>
-          <p:nvPr/>
-        </p:nvSpPr>
-        <p:spPr>
-          <a:xfrm>
-            <a:off x="548640" y="5760720"/>
-            <a:ext cx="11091672" cy="603504"/>
-          </a:xfrm>
-          <a:prstGeom prst="rect">
-            <a:avLst/>
-          </a:prstGeom>
-          <a:solidFill>
-            <a:srgbClr val="0F2145"/>
-          </a:solidFill>
-          <a:ln>
-            <a:noFill/>
-          </a:ln>
-          <a:effectLst/>
-        </p:spPr>
-        <p:style>
-          <a:lnRef idx="1">
-            <a:schemeClr val="accent1"/>
-          </a:lnRef>
-          <a:fillRef idx="3">
-            <a:schemeClr val="accent1"/>
-          </a:fillRef>
-          <a:effectRef idx="2">
-            <a:schemeClr val="accent1"/>
-          </a:effectRef>
-          <a:fontRef idx="minor">
-            <a:schemeClr val="lt1"/>
-          </a:fontRef>
-        </p:style>
-        <p:txBody>
-          <a:bodyPr rtlCol="0" anchor="ctr"/>
-          <a:lstStyle/>
-          <a:p>
-            <a:pPr algn="ctr"/>
-          </a:p>
-        </p:txBody>
-      </p:sp>
-      <p:sp>
-        <p:nvSpPr>
-          <p:cNvPr id="24" name="Rectangle 23"/>
-          <p:cNvSpPr/>
-          <p:nvPr/>
-        </p:nvSpPr>
-        <p:spPr>
-          <a:xfrm>
-            <a:off x="548640" y="5760720"/>
-            <a:ext cx="64008" cy="603504"/>
-          </a:xfrm>
-          <a:prstGeom prst="rect">
-            <a:avLst/>
-          </a:prstGeom>
-          <a:solidFill>
-            <a:srgbClr val="C9A227"/>
-          </a:solidFill>
-          <a:ln>
-            <a:noFill/>
-          </a:ln>
-          <a:effectLst/>
-        </p:spPr>
-        <p:style>
-          <a:lnRef idx="1">
-            <a:schemeClr val="accent1"/>
-          </a:lnRef>
-          <a:fillRef idx="3">
-            <a:schemeClr val="accent1"/>
-          </a:fillRef>
-          <a:effectRef idx="2">
-            <a:schemeClr val="accent1"/>
-          </a:effectRef>
-          <a:fontRef idx="minor">
-            <a:schemeClr val="lt1"/>
-          </a:fontRef>
-        </p:style>
-        <p:txBody>
-          <a:bodyPr rtlCol="0" anchor="ctr"/>
-          <a:lstStyle/>
-          <a:p>
-            <a:pPr algn="ctr"/>
-          </a:p>
-        </p:txBody>
-      </p:sp>
-      <p:sp>
-        <p:nvSpPr>
-          <p:cNvPr id="25" name="TextBox 24"/>
-          <p:cNvSpPr txBox="1"/>
-          <p:nvPr/>
-        </p:nvSpPr>
-        <p:spPr>
-          <a:xfrm>
-            <a:off x="822960" y="5760720"/>
-            <a:ext cx="10543032" cy="603504"/>
-          </a:xfrm>
-          <a:prstGeom prst="rect">
-            <a:avLst/>
-          </a:prstGeom>
-          <a:noFill/>
-        </p:spPr>
-        <p:txBody>
-          <a:bodyPr wrap="square" anchor="ctr" lIns="0" rIns="0" tIns="0" bIns="0">
-            <a:spAutoFit/>
-          </a:bodyPr>
-          <a:lstStyle/>
-          <a:p>
-            <a:pPr algn="l"/>
-            <a:r>
-              <a:rPr sz="1200" b="1">
-                <a:solidFill>
-                  <a:srgbClr val="C9A227"/>
-                </a:solidFill>
-              </a:rPr>
-              <a:t>Today's case:  </a:t>
-            </a:r>
-            <a:r>
-              <a:rPr sz="1200" b="0">
-                <a:solidFill>
-                  <a:srgbClr val="FFFFFF"/>
-                </a:solidFill>
-              </a:rPr>
-              <a:t>Opus Fund Services, a fund administrator that uses AI to automate NAV work.</a:t>
-            </a:r>
-          </a:p>
-        </p:txBody>
-      </p:sp>
-      <p:sp>
-        <p:nvSpPr>
-          <p:cNvPr id="26" name="TextBox 25"/>
-          <p:cNvSpPr txBox="1"/>
-          <p:nvPr/>
-        </p:nvSpPr>
-        <p:spPr>
-          <a:xfrm>
-            <a:off x="548640" y="6473952"/>
-            <a:ext cx="7315200" cy="228600"/>
-          </a:xfrm>
-          <a:prstGeom prst="rect">
-            <a:avLst/>
-          </a:prstGeom>
-          <a:noFill/>
-        </p:spPr>
-        <p:txBody>
-          <a:bodyPr wrap="square" anchor="t" lIns="0" rIns="0" tIns="0" bIns="0">
-            <a:spAutoFit/>
-          </a:bodyPr>
-          <a:lstStyle/>
-          <a:p>
-            <a:pPr algn="l"/>
-            <a:r>
               <a:rPr sz="800" b="0">
                 <a:solidFill>
                   <a:srgbClr val="5D6B7E"/>
@@ -12447,7 +11669,7 @@
       </p:sp>
       <p:sp>
         <p:nvSpPr>
-          <p:cNvPr id="27" name="TextBox 26"/>
+          <p:cNvPr id="45" name="TextBox 44"/>
           <p:cNvSpPr txBox="1"/>
           <p:nvPr/>
         </p:nvSpPr>
@@ -12578,7 +11800,7 @@
                   <a:srgbClr val="C9A227"/>
                 </a:solidFill>
               </a:rPr>
-              <a:t>HOUR 1 · THE NAV IN SIX STEPS</a:t>
+              <a:t>HOUR 1 · FUND TYPES AND THE BACK OFFICE</a:t>
             </a:r>
           </a:p>
         </p:txBody>
@@ -12613,7 +11835,7 @@
                 </a:solidFill>
                 <a:latin typeface="Georgia"/>
               </a:rPr>
-              <a:t>NAV: what one unit of the fund is worth today</a:t>
+              <a:t>Four kinds of fund, one back office</a:t>
             </a:r>
           </a:p>
         </p:txBody>
@@ -12627,7 +11849,7 @@
         <p:spPr>
           <a:xfrm>
             <a:off x="548640" y="1463040"/>
-            <a:ext cx="5760720" cy="4160520"/>
+            <a:ext cx="3593592" cy="2002536"/>
           </a:xfrm>
           <a:prstGeom prst="rect">
             <a:avLst/>
@@ -12671,7 +11893,7 @@
         <p:spPr>
           <a:xfrm>
             <a:off x="548640" y="1463040"/>
-            <a:ext cx="5760720" cy="45720"/>
+            <a:ext cx="3593592" cy="45720"/>
           </a:xfrm>
           <a:prstGeom prst="rect">
             <a:avLst/>
@@ -12714,8 +11936,8 @@
         </p:nvSpPr>
         <p:spPr>
           <a:xfrm>
-            <a:off x="804672" y="1645920"/>
-            <a:ext cx="5303520" cy="274320"/>
+            <a:off x="804672" y="1664208"/>
+            <a:ext cx="3081528" cy="1728216"/>
           </a:xfrm>
           <a:prstGeom prst="rect">
             <a:avLst/>
@@ -12735,21 +11957,140 @@
                   <a:srgbClr val="3A5C9E"/>
                 </a:solidFill>
               </a:rPr>
-              <a:t>THE DAILY STEPS</a:t>
-            </a:r>
-          </a:p>
-        </p:txBody>
-      </p:sp>
-      <p:sp>
-        <p:nvSpPr>
-          <p:cNvPr id="8" name="TextBox 7"/>
+              <a:t>MUTUAL FUND</a:t>
+            </a:r>
+          </a:p>
+          <a:p>
+            <a:pPr algn="l">
+              <a:spcBef>
+                <a:spcPts val="400"/>
+              </a:spcBef>
+            </a:pPr>
+            <a:r>
+              <a:rPr sz="1600" b="1">
+                <a:solidFill>
+                  <a:srgbClr val="0F2145"/>
+                </a:solidFill>
+                <a:latin typeface="Georgia"/>
+              </a:rPr>
+              <a:t>NAV every day</a:t>
+            </a:r>
+          </a:p>
+          <a:p>
+            <a:pPr algn="l">
+              <a:spcBef>
+                <a:spcPts val="600"/>
+              </a:spcBef>
+            </a:pPr>
+            <a:r>
+              <a:rPr sz="1200" b="0">
+                <a:solidFill>
+                  <a:srgbClr val="1B2A41"/>
+                </a:solidFill>
+              </a:rPr>
+              <a:t>Open to anyone. The NAV is published every business day.</a:t>
+            </a:r>
+          </a:p>
+        </p:txBody>
+      </p:sp>
+      <p:sp>
+        <p:nvSpPr>
+          <p:cNvPr id="8" name="Rectangle 7"/>
+          <p:cNvSpPr/>
+          <p:nvPr/>
+        </p:nvSpPr>
+        <p:spPr>
+          <a:xfrm>
+            <a:off x="4297680" y="1463040"/>
+            <a:ext cx="3593592" cy="2002536"/>
+          </a:xfrm>
+          <a:prstGeom prst="rect">
+            <a:avLst/>
+          </a:prstGeom>
+          <a:solidFill>
+            <a:srgbClr val="FFFFFF"/>
+          </a:solidFill>
+          <a:ln>
+            <a:noFill/>
+          </a:ln>
+          <a:effectLst/>
+        </p:spPr>
+        <p:style>
+          <a:lnRef idx="1">
+            <a:schemeClr val="accent1"/>
+          </a:lnRef>
+          <a:fillRef idx="3">
+            <a:schemeClr val="accent1"/>
+          </a:fillRef>
+          <a:effectRef idx="2">
+            <a:schemeClr val="accent1"/>
+          </a:effectRef>
+          <a:fontRef idx="minor">
+            <a:schemeClr val="lt1"/>
+          </a:fontRef>
+        </p:style>
+        <p:txBody>
+          <a:bodyPr rtlCol="0" anchor="ctr"/>
+          <a:lstStyle/>
+          <a:p>
+            <a:pPr algn="ctr"/>
+          </a:p>
+        </p:txBody>
+      </p:sp>
+      <p:sp>
+        <p:nvSpPr>
+          <p:cNvPr id="9" name="Rectangle 8"/>
+          <p:cNvSpPr/>
+          <p:nvPr/>
+        </p:nvSpPr>
+        <p:spPr>
+          <a:xfrm>
+            <a:off x="4297680" y="1463040"/>
+            <a:ext cx="3593592" cy="45720"/>
+          </a:xfrm>
+          <a:prstGeom prst="rect">
+            <a:avLst/>
+          </a:prstGeom>
+          <a:solidFill>
+            <a:srgbClr val="C9A227"/>
+          </a:solidFill>
+          <a:ln>
+            <a:noFill/>
+          </a:ln>
+          <a:effectLst/>
+        </p:spPr>
+        <p:style>
+          <a:lnRef idx="1">
+            <a:schemeClr val="accent1"/>
+          </a:lnRef>
+          <a:fillRef idx="3">
+            <a:schemeClr val="accent1"/>
+          </a:fillRef>
+          <a:effectRef idx="2">
+            <a:schemeClr val="accent1"/>
+          </a:effectRef>
+          <a:fontRef idx="minor">
+            <a:schemeClr val="lt1"/>
+          </a:fontRef>
+        </p:style>
+        <p:txBody>
+          <a:bodyPr rtlCol="0" anchor="ctr"/>
+          <a:lstStyle/>
+          <a:p>
+            <a:pPr algn="ctr"/>
+          </a:p>
+        </p:txBody>
+      </p:sp>
+      <p:sp>
+        <p:nvSpPr>
+          <p:cNvPr id="10" name="TextBox 9"/>
           <p:cNvSpPr txBox="1"/>
           <p:nvPr/>
         </p:nvSpPr>
         <p:spPr>
           <a:xfrm>
-            <a:off x="804672" y="2029968"/>
-            <a:ext cx="365760" cy="457200"/>
+            <a:off x="4553712" y="1664208"/>
+            <a:ext cx="3081528" cy="1728216"/>
           </a:xfrm>
           <a:prstGeom prst="rect">
             <a:avLst/>
@@ -12764,27 +12105,145 @@
           <a:p>
             <a:pPr algn="l"/>
             <a:r>
+              <a:rPr sz="1000" b="1">
+                <a:solidFill>
+                  <a:srgbClr val="3A5C9E"/>
+                </a:solidFill>
+              </a:rPr>
+              <a:t>HEDGE FUND</a:t>
+            </a:r>
+          </a:p>
+          <a:p>
+            <a:pPr algn="l">
+              <a:spcBef>
+                <a:spcPts val="400"/>
+              </a:spcBef>
+            </a:pPr>
+            <a:r>
               <a:rPr sz="1600" b="1">
                 <a:solidFill>
-                  <a:srgbClr val="C9A227"/>
+                  <a:srgbClr val="0F2145"/>
                 </a:solidFill>
                 <a:latin typeface="Georgia"/>
               </a:rPr>
-              <a:t>1</a:t>
-            </a:r>
-          </a:p>
-        </p:txBody>
-      </p:sp>
-      <p:sp>
-        <p:nvSpPr>
-          <p:cNvPr id="9" name="TextBox 8"/>
+              <a:t>NAV every month</a:t>
+            </a:r>
+          </a:p>
+          <a:p>
+            <a:pPr algn="l">
+              <a:spcBef>
+                <a:spcPts val="600"/>
+              </a:spcBef>
+            </a:pPr>
+            <a:r>
+              <a:rPr sz="1200" b="0">
+                <a:solidFill>
+                  <a:srgbClr val="1B2A41"/>
+                </a:solidFill>
+              </a:rPr>
+              <a:t>For large investors. Uses complex trades such as short selling.</a:t>
+            </a:r>
+          </a:p>
+        </p:txBody>
+      </p:sp>
+      <p:sp>
+        <p:nvSpPr>
+          <p:cNvPr id="11" name="Rectangle 10"/>
+          <p:cNvSpPr/>
+          <p:nvPr/>
+        </p:nvSpPr>
+        <p:spPr>
+          <a:xfrm>
+            <a:off x="8046720" y="1463040"/>
+            <a:ext cx="3593592" cy="2002536"/>
+          </a:xfrm>
+          <a:prstGeom prst="rect">
+            <a:avLst/>
+          </a:prstGeom>
+          <a:solidFill>
+            <a:srgbClr val="FFFFFF"/>
+          </a:solidFill>
+          <a:ln>
+            <a:noFill/>
+          </a:ln>
+          <a:effectLst/>
+        </p:spPr>
+        <p:style>
+          <a:lnRef idx="1">
+            <a:schemeClr val="accent1"/>
+          </a:lnRef>
+          <a:fillRef idx="3">
+            <a:schemeClr val="accent1"/>
+          </a:fillRef>
+          <a:effectRef idx="2">
+            <a:schemeClr val="accent1"/>
+          </a:effectRef>
+          <a:fontRef idx="minor">
+            <a:schemeClr val="lt1"/>
+          </a:fontRef>
+        </p:style>
+        <p:txBody>
+          <a:bodyPr rtlCol="0" anchor="ctr"/>
+          <a:lstStyle/>
+          <a:p>
+            <a:pPr algn="ctr"/>
+          </a:p>
+        </p:txBody>
+      </p:sp>
+      <p:sp>
+        <p:nvSpPr>
+          <p:cNvPr id="12" name="Rectangle 11"/>
+          <p:cNvSpPr/>
+          <p:nvPr/>
+        </p:nvSpPr>
+        <p:spPr>
+          <a:xfrm>
+            <a:off x="8046720" y="1463040"/>
+            <a:ext cx="3593592" cy="45720"/>
+          </a:xfrm>
+          <a:prstGeom prst="rect">
+            <a:avLst/>
+          </a:prstGeom>
+          <a:solidFill>
+            <a:srgbClr val="C9A227"/>
+          </a:solidFill>
+          <a:ln>
+            <a:noFill/>
+          </a:ln>
+          <a:effectLst/>
+        </p:spPr>
+        <p:style>
+          <a:lnRef idx="1">
+            <a:schemeClr val="accent1"/>
+          </a:lnRef>
+          <a:fillRef idx="3">
+            <a:schemeClr val="accent1"/>
+          </a:fillRef>
+          <a:effectRef idx="2">
+            <a:schemeClr val="accent1"/>
+          </a:effectRef>
+          <a:fontRef idx="minor">
+            <a:schemeClr val="lt1"/>
+          </a:fontRef>
+        </p:style>
+        <p:txBody>
+          <a:bodyPr rtlCol="0" anchor="ctr"/>
+          <a:lstStyle/>
+          <a:p>
+            <a:pPr algn="ctr"/>
+          </a:p>
+        </p:txBody>
+      </p:sp>
+      <p:sp>
+        <p:nvSpPr>
+          <p:cNvPr id="13" name="TextBox 12"/>
           <p:cNvSpPr txBox="1"/>
           <p:nvPr/>
         </p:nvSpPr>
         <p:spPr>
           <a:xfrm>
-            <a:off x="1234440" y="2066544"/>
-            <a:ext cx="4937760" cy="502920"/>
+            <a:off x="8302752" y="1664208"/>
+            <a:ext cx="3081528" cy="1728216"/>
           </a:xfrm>
           <a:prstGeom prst="rect">
             <a:avLst/>
@@ -12799,26 +12258,145 @@
           <a:p>
             <a:pPr algn="l"/>
             <a:r>
+              <a:rPr sz="1000" b="1">
+                <a:solidFill>
+                  <a:srgbClr val="3A5C9E"/>
+                </a:solidFill>
+              </a:rPr>
+              <a:t>PRIVATE EQUITY AND VC</a:t>
+            </a:r>
+          </a:p>
+          <a:p>
+            <a:pPr algn="l">
+              <a:spcBef>
+                <a:spcPts val="400"/>
+              </a:spcBef>
+            </a:pPr>
+            <a:r>
+              <a:rPr sz="1600" b="1">
+                <a:solidFill>
+                  <a:srgbClr val="0F2145"/>
+                </a:solidFill>
+                <a:latin typeface="Georgia"/>
+              </a:rPr>
+              <a:t>Valued every quarter</a:t>
+            </a:r>
+          </a:p>
+          <a:p>
+            <a:pPr algn="l">
+              <a:spcBef>
+                <a:spcPts val="600"/>
+              </a:spcBef>
+            </a:pPr>
+            <a:r>
               <a:rPr sz="1200" b="0">
                 <a:solidFill>
                   <a:srgbClr val="1B2A41"/>
                 </a:solidFill>
               </a:rPr>
-              <a:t>Capture every trade done today.</a:t>
-            </a:r>
-          </a:p>
-        </p:txBody>
-      </p:sp>
-      <p:sp>
-        <p:nvSpPr>
-          <p:cNvPr id="10" name="TextBox 9"/>
+              <a:t>Buys whole companies or start-ups. Few deals, hard to price.</a:t>
+            </a:r>
+          </a:p>
+        </p:txBody>
+      </p:sp>
+      <p:sp>
+        <p:nvSpPr>
+          <p:cNvPr id="14" name="Rectangle 13"/>
+          <p:cNvSpPr/>
+          <p:nvPr/>
+        </p:nvSpPr>
+        <p:spPr>
+          <a:xfrm>
+            <a:off x="548640" y="3621024"/>
+            <a:ext cx="3593592" cy="2002536"/>
+          </a:xfrm>
+          <a:prstGeom prst="rect">
+            <a:avLst/>
+          </a:prstGeom>
+          <a:solidFill>
+            <a:srgbClr val="FFFFFF"/>
+          </a:solidFill>
+          <a:ln>
+            <a:noFill/>
+          </a:ln>
+          <a:effectLst/>
+        </p:spPr>
+        <p:style>
+          <a:lnRef idx="1">
+            <a:schemeClr val="accent1"/>
+          </a:lnRef>
+          <a:fillRef idx="3">
+            <a:schemeClr val="accent1"/>
+          </a:fillRef>
+          <a:effectRef idx="2">
+            <a:schemeClr val="accent1"/>
+          </a:effectRef>
+          <a:fontRef idx="minor">
+            <a:schemeClr val="lt1"/>
+          </a:fontRef>
+        </p:style>
+        <p:txBody>
+          <a:bodyPr rtlCol="0" anchor="ctr"/>
+          <a:lstStyle/>
+          <a:p>
+            <a:pPr algn="ctr"/>
+          </a:p>
+        </p:txBody>
+      </p:sp>
+      <p:sp>
+        <p:nvSpPr>
+          <p:cNvPr id="15" name="Rectangle 14"/>
+          <p:cNvSpPr/>
+          <p:nvPr/>
+        </p:nvSpPr>
+        <p:spPr>
+          <a:xfrm>
+            <a:off x="548640" y="3621024"/>
+            <a:ext cx="3593592" cy="45720"/>
+          </a:xfrm>
+          <a:prstGeom prst="rect">
+            <a:avLst/>
+          </a:prstGeom>
+          <a:solidFill>
+            <a:srgbClr val="C9A227"/>
+          </a:solidFill>
+          <a:ln>
+            <a:noFill/>
+          </a:ln>
+          <a:effectLst/>
+        </p:spPr>
+        <p:style>
+          <a:lnRef idx="1">
+            <a:schemeClr val="accent1"/>
+          </a:lnRef>
+          <a:fillRef idx="3">
+            <a:schemeClr val="accent1"/>
+          </a:fillRef>
+          <a:effectRef idx="2">
+            <a:schemeClr val="accent1"/>
+          </a:effectRef>
+          <a:fontRef idx="minor">
+            <a:schemeClr val="lt1"/>
+          </a:fontRef>
+        </p:style>
+        <p:txBody>
+          <a:bodyPr rtlCol="0" anchor="ctr"/>
+          <a:lstStyle/>
+          <a:p>
+            <a:pPr algn="ctr"/>
+          </a:p>
+        </p:txBody>
+      </p:sp>
+      <p:sp>
+        <p:nvSpPr>
+          <p:cNvPr id="16" name="TextBox 15"/>
           <p:cNvSpPr txBox="1"/>
           <p:nvPr/>
         </p:nvSpPr>
         <p:spPr>
           <a:xfrm>
-            <a:off x="804672" y="2596896"/>
-            <a:ext cx="365760" cy="457200"/>
+            <a:off x="804672" y="3822192"/>
+            <a:ext cx="3081528" cy="1728216"/>
           </a:xfrm>
           <a:prstGeom prst="rect">
             <a:avLst/>
@@ -12833,27 +12411,145 @@
           <a:p>
             <a:pPr algn="l"/>
             <a:r>
+              <a:rPr sz="1000" b="1">
+                <a:solidFill>
+                  <a:srgbClr val="3A5C9E"/>
+                </a:solidFill>
+              </a:rPr>
+              <a:t>AIF</a:t>
+            </a:r>
+          </a:p>
+          <a:p>
+            <a:pPr algn="l">
+              <a:spcBef>
+                <a:spcPts val="400"/>
+              </a:spcBef>
+            </a:pPr>
+            <a:r>
               <a:rPr sz="1600" b="1">
                 <a:solidFill>
-                  <a:srgbClr val="C9A227"/>
+                  <a:srgbClr val="0F2145"/>
                 </a:solidFill>
                 <a:latin typeface="Georgia"/>
               </a:rPr>
-              <a:t>2</a:t>
-            </a:r>
-          </a:p>
-        </p:txBody>
-      </p:sp>
-      <p:sp>
-        <p:nvSpPr>
-          <p:cNvPr id="11" name="TextBox 10"/>
+              <a:t>India's category for large investors</a:t>
+            </a:r>
+          </a:p>
+          <a:p>
+            <a:pPr algn="l">
+              <a:spcBef>
+                <a:spcPts val="600"/>
+              </a:spcBef>
+            </a:pPr>
+            <a:r>
+              <a:rPr sz="1200" b="0">
+                <a:solidFill>
+                  <a:srgbClr val="1B2A41"/>
+                </a:solidFill>
+              </a:rPr>
+              <a:t>A SEBI category for funds sold to wealthy investors. The minimum is ₹1 crore.</a:t>
+            </a:r>
+          </a:p>
+        </p:txBody>
+      </p:sp>
+      <p:sp>
+        <p:nvSpPr>
+          <p:cNvPr id="17" name="Rectangle 16"/>
+          <p:cNvSpPr/>
+          <p:nvPr/>
+        </p:nvSpPr>
+        <p:spPr>
+          <a:xfrm>
+            <a:off x="4297680" y="3621024"/>
+            <a:ext cx="3593592" cy="2002536"/>
+          </a:xfrm>
+          <a:prstGeom prst="rect">
+            <a:avLst/>
+          </a:prstGeom>
+          <a:solidFill>
+            <a:srgbClr val="FFFFFF"/>
+          </a:solidFill>
+          <a:ln>
+            <a:noFill/>
+          </a:ln>
+          <a:effectLst/>
+        </p:spPr>
+        <p:style>
+          <a:lnRef idx="1">
+            <a:schemeClr val="accent1"/>
+          </a:lnRef>
+          <a:fillRef idx="3">
+            <a:schemeClr val="accent1"/>
+          </a:fillRef>
+          <a:effectRef idx="2">
+            <a:schemeClr val="accent1"/>
+          </a:effectRef>
+          <a:fontRef idx="minor">
+            <a:schemeClr val="lt1"/>
+          </a:fontRef>
+        </p:style>
+        <p:txBody>
+          <a:bodyPr rtlCol="0" anchor="ctr"/>
+          <a:lstStyle/>
+          <a:p>
+            <a:pPr algn="ctr"/>
+          </a:p>
+        </p:txBody>
+      </p:sp>
+      <p:sp>
+        <p:nvSpPr>
+          <p:cNvPr id="18" name="Rectangle 17"/>
+          <p:cNvSpPr/>
+          <p:nvPr/>
+        </p:nvSpPr>
+        <p:spPr>
+          <a:xfrm>
+            <a:off x="4297680" y="3621024"/>
+            <a:ext cx="3593592" cy="45720"/>
+          </a:xfrm>
+          <a:prstGeom prst="rect">
+            <a:avLst/>
+          </a:prstGeom>
+          <a:solidFill>
+            <a:srgbClr val="C9A227"/>
+          </a:solidFill>
+          <a:ln>
+            <a:noFill/>
+          </a:ln>
+          <a:effectLst/>
+        </p:spPr>
+        <p:style>
+          <a:lnRef idx="1">
+            <a:schemeClr val="accent1"/>
+          </a:lnRef>
+          <a:fillRef idx="3">
+            <a:schemeClr val="accent1"/>
+          </a:fillRef>
+          <a:effectRef idx="2">
+            <a:schemeClr val="accent1"/>
+          </a:effectRef>
+          <a:fontRef idx="minor">
+            <a:schemeClr val="lt1"/>
+          </a:fontRef>
+        </p:style>
+        <p:txBody>
+          <a:bodyPr rtlCol="0" anchor="ctr"/>
+          <a:lstStyle/>
+          <a:p>
+            <a:pPr algn="ctr"/>
+          </a:p>
+        </p:txBody>
+      </p:sp>
+      <p:sp>
+        <p:nvSpPr>
+          <p:cNvPr id="19" name="TextBox 18"/>
           <p:cNvSpPr txBox="1"/>
           <p:nvPr/>
         </p:nvSpPr>
         <p:spPr>
           <a:xfrm>
-            <a:off x="1234440" y="2633472"/>
-            <a:ext cx="4937760" cy="502920"/>
+            <a:off x="4553712" y="3822192"/>
+            <a:ext cx="3081528" cy="1728216"/>
           </a:xfrm>
           <a:prstGeom prst="rect">
             <a:avLst/>
@@ -12868,288 +12564,43 @@
           <a:p>
             <a:pPr algn="l"/>
             <a:r>
+              <a:rPr sz="1000" b="1">
+                <a:solidFill>
+                  <a:srgbClr val="3A5C9E"/>
+                </a:solidFill>
+              </a:rPr>
+              <a:t>WHO DOES THE WORK</a:t>
+            </a:r>
+          </a:p>
+          <a:p>
+            <a:pPr algn="l">
+              <a:spcBef>
+                <a:spcPts val="400"/>
+              </a:spcBef>
+            </a:pPr>
+            <a:r>
+              <a:rPr sz="1600" b="1">
+                <a:solidFill>
+                  <a:srgbClr val="0F2145"/>
+                </a:solidFill>
+                <a:latin typeface="Georgia"/>
+              </a:rPr>
+              <a:t>Fund administrators</a:t>
+            </a:r>
+          </a:p>
+          <a:p>
+            <a:pPr algn="l">
+              <a:spcBef>
+                <a:spcPts val="600"/>
+              </a:spcBef>
+            </a:pPr>
+            <a:r>
               <a:rPr sz="1200" b="0">
                 <a:solidFill>
                   <a:srgbClr val="1B2A41"/>
                 </a:solidFill>
               </a:rPr>
-              <a:t>Price every holding at today's closing price.</a:t>
-            </a:r>
-          </a:p>
-        </p:txBody>
-      </p:sp>
-      <p:sp>
-        <p:nvSpPr>
-          <p:cNvPr id="12" name="TextBox 11"/>
-          <p:cNvSpPr txBox="1"/>
-          <p:nvPr/>
-        </p:nvSpPr>
-        <p:spPr>
-          <a:xfrm>
-            <a:off x="804672" y="3163824"/>
-            <a:ext cx="365760" cy="457200"/>
-          </a:xfrm>
-          <a:prstGeom prst="rect">
-            <a:avLst/>
-          </a:prstGeom>
-          <a:noFill/>
-        </p:spPr>
-        <p:txBody>
-          <a:bodyPr wrap="square" anchor="t" lIns="0" rIns="0" tIns="0" bIns="0">
-            <a:spAutoFit/>
-          </a:bodyPr>
-          <a:lstStyle/>
-          <a:p>
-            <a:pPr algn="l"/>
-            <a:r>
-              <a:rPr sz="1600" b="1">
-                <a:solidFill>
-                  <a:srgbClr val="C9A227"/>
-                </a:solidFill>
-                <a:latin typeface="Georgia"/>
-              </a:rPr>
-              <a:t>3</a:t>
-            </a:r>
-          </a:p>
-        </p:txBody>
-      </p:sp>
-      <p:sp>
-        <p:nvSpPr>
-          <p:cNvPr id="13" name="TextBox 12"/>
-          <p:cNvSpPr txBox="1"/>
-          <p:nvPr/>
-        </p:nvSpPr>
-        <p:spPr>
-          <a:xfrm>
-            <a:off x="1234440" y="3200400"/>
-            <a:ext cx="4937760" cy="502920"/>
-          </a:xfrm>
-          <a:prstGeom prst="rect">
-            <a:avLst/>
-          </a:prstGeom>
-          <a:noFill/>
-        </p:spPr>
-        <p:txBody>
-          <a:bodyPr wrap="square" anchor="t" lIns="0" rIns="0" tIns="0" bIns="0">
-            <a:spAutoFit/>
-          </a:bodyPr>
-          <a:lstStyle/>
-          <a:p>
-            <a:pPr algn="l"/>
-            <a:r>
-              <a:rPr sz="1200" b="0">
-                <a:solidFill>
-                  <a:srgbClr val="1B2A41"/>
-                </a:solidFill>
-              </a:rPr>
-              <a:t>Book income and corporate actions, such as dividends and splits.</a:t>
-            </a:r>
-          </a:p>
-        </p:txBody>
-      </p:sp>
-      <p:sp>
-        <p:nvSpPr>
-          <p:cNvPr id="14" name="TextBox 13"/>
-          <p:cNvSpPr txBox="1"/>
-          <p:nvPr/>
-        </p:nvSpPr>
-        <p:spPr>
-          <a:xfrm>
-            <a:off x="804672" y="3730752"/>
-            <a:ext cx="365760" cy="457200"/>
-          </a:xfrm>
-          <a:prstGeom prst="rect">
-            <a:avLst/>
-          </a:prstGeom>
-          <a:noFill/>
-        </p:spPr>
-        <p:txBody>
-          <a:bodyPr wrap="square" anchor="t" lIns="0" rIns="0" tIns="0" bIns="0">
-            <a:spAutoFit/>
-          </a:bodyPr>
-          <a:lstStyle/>
-          <a:p>
-            <a:pPr algn="l"/>
-            <a:r>
-              <a:rPr sz="1600" b="1">
-                <a:solidFill>
-                  <a:srgbClr val="C9A227"/>
-                </a:solidFill>
-                <a:latin typeface="Georgia"/>
-              </a:rPr>
-              <a:t>4</a:t>
-            </a:r>
-          </a:p>
-        </p:txBody>
-      </p:sp>
-      <p:sp>
-        <p:nvSpPr>
-          <p:cNvPr id="15" name="TextBox 14"/>
-          <p:cNvSpPr txBox="1"/>
-          <p:nvPr/>
-        </p:nvSpPr>
-        <p:spPr>
-          <a:xfrm>
-            <a:off x="1234440" y="3767328"/>
-            <a:ext cx="4937760" cy="502920"/>
-          </a:xfrm>
-          <a:prstGeom prst="rect">
-            <a:avLst/>
-          </a:prstGeom>
-          <a:noFill/>
-        </p:spPr>
-        <p:txBody>
-          <a:bodyPr wrap="square" anchor="t" lIns="0" rIns="0" tIns="0" bIns="0">
-            <a:spAutoFit/>
-          </a:bodyPr>
-          <a:lstStyle/>
-          <a:p>
-            <a:pPr algn="l"/>
-            <a:r>
-              <a:rPr sz="1200" b="0">
-                <a:solidFill>
-                  <a:srgbClr val="1B2A41"/>
-                </a:solidFill>
-              </a:rPr>
-              <a:t>Subtract expenses, such as the management fee.</a:t>
-            </a:r>
-          </a:p>
-        </p:txBody>
-      </p:sp>
-      <p:sp>
-        <p:nvSpPr>
-          <p:cNvPr id="16" name="TextBox 15"/>
-          <p:cNvSpPr txBox="1"/>
-          <p:nvPr/>
-        </p:nvSpPr>
-        <p:spPr>
-          <a:xfrm>
-            <a:off x="804672" y="4297680"/>
-            <a:ext cx="365760" cy="457200"/>
-          </a:xfrm>
-          <a:prstGeom prst="rect">
-            <a:avLst/>
-          </a:prstGeom>
-          <a:noFill/>
-        </p:spPr>
-        <p:txBody>
-          <a:bodyPr wrap="square" anchor="t" lIns="0" rIns="0" tIns="0" bIns="0">
-            <a:spAutoFit/>
-          </a:bodyPr>
-          <a:lstStyle/>
-          <a:p>
-            <a:pPr algn="l"/>
-            <a:r>
-              <a:rPr sz="1600" b="1">
-                <a:solidFill>
-                  <a:srgbClr val="C9A227"/>
-                </a:solidFill>
-                <a:latin typeface="Georgia"/>
-              </a:rPr>
-              <a:t>5</a:t>
-            </a:r>
-          </a:p>
-        </p:txBody>
-      </p:sp>
-      <p:sp>
-        <p:nvSpPr>
-          <p:cNvPr id="17" name="TextBox 16"/>
-          <p:cNvSpPr txBox="1"/>
-          <p:nvPr/>
-        </p:nvSpPr>
-        <p:spPr>
-          <a:xfrm>
-            <a:off x="1234440" y="4334256"/>
-            <a:ext cx="4937760" cy="502920"/>
-          </a:xfrm>
-          <a:prstGeom prst="rect">
-            <a:avLst/>
-          </a:prstGeom>
-          <a:noFill/>
-        </p:spPr>
-        <p:txBody>
-          <a:bodyPr wrap="square" anchor="t" lIns="0" rIns="0" tIns="0" bIns="0">
-            <a:spAutoFit/>
-          </a:bodyPr>
-          <a:lstStyle/>
-          <a:p>
-            <a:pPr algn="l"/>
-            <a:r>
-              <a:rPr sz="1200" b="0">
-                <a:solidFill>
-                  <a:srgbClr val="1B2A41"/>
-                </a:solidFill>
-              </a:rPr>
-              <a:t>Divide what is left by the number of units.</a:t>
-            </a:r>
-          </a:p>
-        </p:txBody>
-      </p:sp>
-      <p:sp>
-        <p:nvSpPr>
-          <p:cNvPr id="18" name="TextBox 17"/>
-          <p:cNvSpPr txBox="1"/>
-          <p:nvPr/>
-        </p:nvSpPr>
-        <p:spPr>
-          <a:xfrm>
-            <a:off x="804672" y="4864608"/>
-            <a:ext cx="365760" cy="457200"/>
-          </a:xfrm>
-          <a:prstGeom prst="rect">
-            <a:avLst/>
-          </a:prstGeom>
-          <a:noFill/>
-        </p:spPr>
-        <p:txBody>
-          <a:bodyPr wrap="square" anchor="t" lIns="0" rIns="0" tIns="0" bIns="0">
-            <a:spAutoFit/>
-          </a:bodyPr>
-          <a:lstStyle/>
-          <a:p>
-            <a:pPr algn="l"/>
-            <a:r>
-              <a:rPr sz="1600" b="1">
-                <a:solidFill>
-                  <a:srgbClr val="C9A227"/>
-                </a:solidFill>
-                <a:latin typeface="Georgia"/>
-              </a:rPr>
-              <a:t>6</a:t>
-            </a:r>
-          </a:p>
-        </p:txBody>
-      </p:sp>
-      <p:sp>
-        <p:nvSpPr>
-          <p:cNvPr id="19" name="TextBox 18"/>
-          <p:cNvSpPr txBox="1"/>
-          <p:nvPr/>
-        </p:nvSpPr>
-        <p:spPr>
-          <a:xfrm>
-            <a:off x="1234440" y="4901184"/>
-            <a:ext cx="4937760" cy="502920"/>
-          </a:xfrm>
-          <a:prstGeom prst="rect">
-            <a:avLst/>
-          </a:prstGeom>
-          <a:noFill/>
-        </p:spPr>
-        <p:txBody>
-          <a:bodyPr wrap="square" anchor="t" lIns="0" rIns="0" tIns="0" bIns="0">
-            <a:spAutoFit/>
-          </a:bodyPr>
-          <a:lstStyle/>
-          <a:p>
-            <a:pPr algn="l"/>
-            <a:r>
-              <a:rPr sz="1200" b="0">
-                <a:solidFill>
-                  <a:srgbClr val="1B2A41"/>
-                </a:solidFill>
-              </a:rPr>
-              <a:t>Reconcile with the custodian and the transfer agent, then publish.</a:t>
+              <a:t>SS&amp;C GlobeOp, Apex Group, HC Global and Opus Fund Services run this work for many funds.</a:t>
             </a:r>
           </a:p>
         </p:txBody>
@@ -13162,8 +12613,8 @@
         </p:nvSpPr>
         <p:spPr>
           <a:xfrm>
-            <a:off x="6492240" y="1463040"/>
-            <a:ext cx="5148072" cy="4160520"/>
+            <a:off x="8046720" y="3621024"/>
+            <a:ext cx="3593592" cy="2002536"/>
           </a:xfrm>
           <a:prstGeom prst="rect">
             <a:avLst/>
@@ -13200,14 +12651,58 @@
       </p:sp>
       <p:sp>
         <p:nvSpPr>
-          <p:cNvPr id="21" name="TextBox 20"/>
+          <p:cNvPr id="21" name="Rectangle 20"/>
+          <p:cNvSpPr/>
+          <p:nvPr/>
+        </p:nvSpPr>
+        <p:spPr>
+          <a:xfrm>
+            <a:off x="8046720" y="3621024"/>
+            <a:ext cx="3593592" cy="45720"/>
+          </a:xfrm>
+          <a:prstGeom prst="rect">
+            <a:avLst/>
+          </a:prstGeom>
+          <a:solidFill>
+            <a:srgbClr val="C9A227"/>
+          </a:solidFill>
+          <a:ln>
+            <a:noFill/>
+          </a:ln>
+          <a:effectLst/>
+        </p:spPr>
+        <p:style>
+          <a:lnRef idx="1">
+            <a:schemeClr val="accent1"/>
+          </a:lnRef>
+          <a:fillRef idx="3">
+            <a:schemeClr val="accent1"/>
+          </a:fillRef>
+          <a:effectRef idx="2">
+            <a:schemeClr val="accent1"/>
+          </a:effectRef>
+          <a:fontRef idx="minor">
+            <a:schemeClr val="lt1"/>
+          </a:fontRef>
+        </p:style>
+        <p:txBody>
+          <a:bodyPr rtlCol="0" anchor="ctr"/>
+          <a:lstStyle/>
+          <a:p>
+            <a:pPr algn="ctr"/>
+          </a:p>
+        </p:txBody>
+      </p:sp>
+      <p:sp>
+        <p:nvSpPr>
+          <p:cNvPr id="22" name="TextBox 21"/>
           <p:cNvSpPr txBox="1"/>
           <p:nvPr/>
         </p:nvSpPr>
         <p:spPr>
           <a:xfrm>
-            <a:off x="6748272" y="1645920"/>
-            <a:ext cx="4663440" cy="274320"/>
+            <a:off x="8302752" y="3822192"/>
+            <a:ext cx="3081528" cy="1728216"/>
           </a:xfrm>
           <a:prstGeom prst="rect">
             <a:avLst/>
@@ -13227,428 +12722,45 @@
                   <a:srgbClr val="C9A227"/>
                 </a:solidFill>
               </a:rPr>
-              <a:t>TODAY'S LAB FUND, BEFORE RECONCILIATION</a:t>
-            </a:r>
-          </a:p>
-        </p:txBody>
-      </p:sp>
-      <p:sp>
-        <p:nvSpPr>
-          <p:cNvPr id="22" name="TextBox 21"/>
-          <p:cNvSpPr txBox="1"/>
-          <p:nvPr/>
-        </p:nvSpPr>
-        <p:spPr>
-          <a:xfrm>
-            <a:off x="6748272" y="2057400"/>
-            <a:ext cx="2743200" cy="411480"/>
-          </a:xfrm>
-          <a:prstGeom prst="rect">
-            <a:avLst/>
-          </a:prstGeom>
-          <a:noFill/>
-        </p:spPr>
-        <p:txBody>
-          <a:bodyPr wrap="square" anchor="t" lIns="0" rIns="0" tIns="0" bIns="0">
-            <a:spAutoFit/>
-          </a:bodyPr>
-          <a:lstStyle/>
-          <a:p>
-            <a:pPr algn="l"/>
+              <a:t>WHERE AI HELPS</a:t>
+            </a:r>
+          </a:p>
+          <a:p>
+            <a:pPr algn="l">
+              <a:spcBef>
+                <a:spcPts val="400"/>
+              </a:spcBef>
+            </a:pPr>
+            <a:r>
+              <a:rPr sz="1600" b="1">
+                <a:solidFill>
+                  <a:srgbClr val="FFFFFF"/>
+                </a:solidFill>
+                <a:latin typeface="Georgia"/>
+              </a:rPr>
+              <a:t>The checking</a:t>
+            </a:r>
+          </a:p>
+          <a:p>
+            <a:pPr algn="l">
+              <a:spcBef>
+                <a:spcPts val="600"/>
+              </a:spcBef>
+            </a:pPr>
             <a:r>
               <a:rPr sz="1200" b="0">
                 <a:solidFill>
                   <a:srgbClr val="C9D6EE"/>
                 </a:solidFill>
               </a:rPr>
-              <a:t>10 holdings at market price</a:t>
-            </a:r>
-          </a:p>
-        </p:txBody>
-      </p:sp>
-      <p:sp>
-        <p:nvSpPr>
-          <p:cNvPr id="23" name="TextBox 22"/>
-          <p:cNvSpPr txBox="1"/>
-          <p:nvPr/>
-        </p:nvSpPr>
-        <p:spPr>
-          <a:xfrm>
-            <a:off x="9326880" y="2020824"/>
-            <a:ext cx="2103120" cy="411480"/>
-          </a:xfrm>
-          <a:prstGeom prst="rect">
-            <a:avLst/>
-          </a:prstGeom>
-          <a:noFill/>
-        </p:spPr>
-        <p:txBody>
-          <a:bodyPr wrap="square" anchor="t" lIns="0" rIns="0" tIns="0" bIns="0">
-            <a:spAutoFit/>
-          </a:bodyPr>
-          <a:lstStyle/>
-          <a:p>
-            <a:pPr algn="r"/>
-            <a:r>
-              <a:rPr sz="1300" b="1">
-                <a:solidFill>
-                  <a:srgbClr val="FFFFFF"/>
-                </a:solidFill>
-                <a:latin typeface="Georgia"/>
-              </a:rPr>
-              <a:t>₹43.37 crore</a:t>
-            </a:r>
-          </a:p>
-        </p:txBody>
-      </p:sp>
-      <p:sp>
-        <p:nvSpPr>
-          <p:cNvPr id="24" name="TextBox 23"/>
-          <p:cNvSpPr txBox="1"/>
-          <p:nvPr/>
-        </p:nvSpPr>
-        <p:spPr>
-          <a:xfrm>
-            <a:off x="6748272" y="2606040"/>
-            <a:ext cx="2743200" cy="411480"/>
-          </a:xfrm>
-          <a:prstGeom prst="rect">
-            <a:avLst/>
-          </a:prstGeom>
-          <a:noFill/>
-        </p:spPr>
-        <p:txBody>
-          <a:bodyPr wrap="square" anchor="t" lIns="0" rIns="0" tIns="0" bIns="0">
-            <a:spAutoFit/>
-          </a:bodyPr>
-          <a:lstStyle/>
-          <a:p>
-            <a:pPr algn="l"/>
-            <a:r>
-              <a:rPr sz="1200" b="0">
-                <a:solidFill>
-                  <a:srgbClr val="C9D6EE"/>
-                </a:solidFill>
-              </a:rPr>
-              <a:t>Add cash</a:t>
-            </a:r>
-          </a:p>
-        </p:txBody>
-      </p:sp>
-      <p:sp>
-        <p:nvSpPr>
-          <p:cNvPr id="25" name="TextBox 24"/>
-          <p:cNvSpPr txBox="1"/>
-          <p:nvPr/>
-        </p:nvSpPr>
-        <p:spPr>
-          <a:xfrm>
-            <a:off x="9326880" y="2569464"/>
-            <a:ext cx="2103120" cy="411480"/>
-          </a:xfrm>
-          <a:prstGeom prst="rect">
-            <a:avLst/>
-          </a:prstGeom>
-          <a:noFill/>
-        </p:spPr>
-        <p:txBody>
-          <a:bodyPr wrap="square" anchor="t" lIns="0" rIns="0" tIns="0" bIns="0">
-            <a:spAutoFit/>
-          </a:bodyPr>
-          <a:lstStyle/>
-          <a:p>
-            <a:pPr algn="r"/>
-            <a:r>
-              <a:rPr sz="1300" b="1">
-                <a:solidFill>
-                  <a:srgbClr val="FFFFFF"/>
-                </a:solidFill>
-                <a:latin typeface="Georgia"/>
-              </a:rPr>
-              <a:t>₹2.60 crore</a:t>
-            </a:r>
-          </a:p>
-        </p:txBody>
-      </p:sp>
-      <p:sp>
-        <p:nvSpPr>
-          <p:cNvPr id="26" name="TextBox 25"/>
-          <p:cNvSpPr txBox="1"/>
-          <p:nvPr/>
-        </p:nvSpPr>
-        <p:spPr>
-          <a:xfrm>
-            <a:off x="6748272" y="3154680"/>
-            <a:ext cx="2743200" cy="411480"/>
-          </a:xfrm>
-          <a:prstGeom prst="rect">
-            <a:avLst/>
-          </a:prstGeom>
-          <a:noFill/>
-        </p:spPr>
-        <p:txBody>
-          <a:bodyPr wrap="square" anchor="t" lIns="0" rIns="0" tIns="0" bIns="0">
-            <a:spAutoFit/>
-          </a:bodyPr>
-          <a:lstStyle/>
-          <a:p>
-            <a:pPr algn="l"/>
-            <a:r>
-              <a:rPr sz="1200" b="0">
-                <a:solidFill>
-                  <a:srgbClr val="C9D6EE"/>
-                </a:solidFill>
-              </a:rPr>
-              <a:t>Less expenses</a:t>
-            </a:r>
-          </a:p>
-        </p:txBody>
-      </p:sp>
-      <p:sp>
-        <p:nvSpPr>
-          <p:cNvPr id="27" name="TextBox 26"/>
-          <p:cNvSpPr txBox="1"/>
-          <p:nvPr/>
-        </p:nvSpPr>
-        <p:spPr>
-          <a:xfrm>
-            <a:off x="9326880" y="3118104"/>
-            <a:ext cx="2103120" cy="411480"/>
-          </a:xfrm>
-          <a:prstGeom prst="rect">
-            <a:avLst/>
-          </a:prstGeom>
-          <a:noFill/>
-        </p:spPr>
-        <p:txBody>
-          <a:bodyPr wrap="square" anchor="t" lIns="0" rIns="0" tIns="0" bIns="0">
-            <a:spAutoFit/>
-          </a:bodyPr>
-          <a:lstStyle/>
-          <a:p>
-            <a:pPr algn="r"/>
-            <a:r>
-              <a:rPr sz="1300" b="1">
-                <a:solidFill>
-                  <a:srgbClr val="FFFFFF"/>
-                </a:solidFill>
-                <a:latin typeface="Georgia"/>
-              </a:rPr>
-              <a:t>₹0.09 crore</a:t>
-            </a:r>
-          </a:p>
-        </p:txBody>
-      </p:sp>
-      <p:sp>
-        <p:nvSpPr>
-          <p:cNvPr id="28" name="TextBox 27"/>
-          <p:cNvSpPr txBox="1"/>
-          <p:nvPr/>
-        </p:nvSpPr>
-        <p:spPr>
-          <a:xfrm>
-            <a:off x="6748272" y="3703320"/>
-            <a:ext cx="2743200" cy="411480"/>
-          </a:xfrm>
-          <a:prstGeom prst="rect">
-            <a:avLst/>
-          </a:prstGeom>
-          <a:noFill/>
-        </p:spPr>
-        <p:txBody>
-          <a:bodyPr wrap="square" anchor="t" lIns="0" rIns="0" tIns="0" bIns="0">
-            <a:spAutoFit/>
-          </a:bodyPr>
-          <a:lstStyle/>
-          <a:p>
-            <a:pPr algn="l"/>
-            <a:r>
-              <a:rPr sz="1200" b="1">
-                <a:solidFill>
-                  <a:srgbClr val="FFFFFF"/>
-                </a:solidFill>
-              </a:rPr>
-              <a:t>Net assets</a:t>
-            </a:r>
-          </a:p>
-        </p:txBody>
-      </p:sp>
-      <p:sp>
-        <p:nvSpPr>
-          <p:cNvPr id="29" name="TextBox 28"/>
-          <p:cNvSpPr txBox="1"/>
-          <p:nvPr/>
-        </p:nvSpPr>
-        <p:spPr>
-          <a:xfrm>
-            <a:off x="9326880" y="3666744"/>
-            <a:ext cx="2103120" cy="411480"/>
-          </a:xfrm>
-          <a:prstGeom prst="rect">
-            <a:avLst/>
-          </a:prstGeom>
-          <a:noFill/>
-        </p:spPr>
-        <p:txBody>
-          <a:bodyPr wrap="square" anchor="t" lIns="0" rIns="0" tIns="0" bIns="0">
-            <a:spAutoFit/>
-          </a:bodyPr>
-          <a:lstStyle/>
-          <a:p>
-            <a:pPr algn="r"/>
-            <a:r>
-              <a:rPr sz="1500" b="1">
-                <a:solidFill>
-                  <a:srgbClr val="C9A227"/>
-                </a:solidFill>
-                <a:latin typeface="Georgia"/>
-              </a:rPr>
-              <a:t>₹45.88 crore</a:t>
-            </a:r>
-          </a:p>
-        </p:txBody>
-      </p:sp>
-      <p:sp>
-        <p:nvSpPr>
-          <p:cNvPr id="30" name="TextBox 29"/>
-          <p:cNvSpPr txBox="1"/>
-          <p:nvPr/>
-        </p:nvSpPr>
-        <p:spPr>
-          <a:xfrm>
-            <a:off x="6748272" y="4251959"/>
-            <a:ext cx="2743200" cy="411480"/>
-          </a:xfrm>
-          <a:prstGeom prst="rect">
-            <a:avLst/>
-          </a:prstGeom>
-          <a:noFill/>
-        </p:spPr>
-        <p:txBody>
-          <a:bodyPr wrap="square" anchor="t" lIns="0" rIns="0" tIns="0" bIns="0">
-            <a:spAutoFit/>
-          </a:bodyPr>
-          <a:lstStyle/>
-          <a:p>
-            <a:pPr algn="l"/>
-            <a:r>
-              <a:rPr sz="1200" b="0">
-                <a:solidFill>
-                  <a:srgbClr val="C9D6EE"/>
-                </a:solidFill>
-              </a:rPr>
-              <a:t>Units outstanding</a:t>
-            </a:r>
-          </a:p>
-        </p:txBody>
-      </p:sp>
-      <p:sp>
-        <p:nvSpPr>
-          <p:cNvPr id="31" name="TextBox 30"/>
-          <p:cNvSpPr txBox="1"/>
-          <p:nvPr/>
-        </p:nvSpPr>
-        <p:spPr>
-          <a:xfrm>
-            <a:off x="9326880" y="4215383"/>
-            <a:ext cx="2103120" cy="411480"/>
-          </a:xfrm>
-          <a:prstGeom prst="rect">
-            <a:avLst/>
-          </a:prstGeom>
-          <a:noFill/>
-        </p:spPr>
-        <p:txBody>
-          <a:bodyPr wrap="square" anchor="t" lIns="0" rIns="0" tIns="0" bIns="0">
-            <a:spAutoFit/>
-          </a:bodyPr>
-          <a:lstStyle/>
-          <a:p>
-            <a:pPr algn="r"/>
-            <a:r>
-              <a:rPr sz="1300" b="1">
-                <a:solidFill>
-                  <a:srgbClr val="FFFFFF"/>
-                </a:solidFill>
-                <a:latin typeface="Georgia"/>
-              </a:rPr>
-              <a:t>1 crore</a:t>
-            </a:r>
-          </a:p>
-        </p:txBody>
-      </p:sp>
-      <p:sp>
-        <p:nvSpPr>
-          <p:cNvPr id="32" name="TextBox 31"/>
-          <p:cNvSpPr txBox="1"/>
-          <p:nvPr/>
-        </p:nvSpPr>
-        <p:spPr>
-          <a:xfrm>
-            <a:off x="6748272" y="4800599"/>
-            <a:ext cx="2743200" cy="411480"/>
-          </a:xfrm>
-          <a:prstGeom prst="rect">
-            <a:avLst/>
-          </a:prstGeom>
-          <a:noFill/>
-        </p:spPr>
-        <p:txBody>
-          <a:bodyPr wrap="square" anchor="t" lIns="0" rIns="0" tIns="0" bIns="0">
-            <a:spAutoFit/>
-          </a:bodyPr>
-          <a:lstStyle/>
-          <a:p>
-            <a:pPr algn="l"/>
-            <a:r>
-              <a:rPr sz="1200" b="1">
-                <a:solidFill>
-                  <a:srgbClr val="FFFFFF"/>
-                </a:solidFill>
-              </a:rPr>
-              <a:t>NAV per unit</a:t>
-            </a:r>
-          </a:p>
-        </p:txBody>
-      </p:sp>
-      <p:sp>
-        <p:nvSpPr>
-          <p:cNvPr id="33" name="TextBox 32"/>
-          <p:cNvSpPr txBox="1"/>
-          <p:nvPr/>
-        </p:nvSpPr>
-        <p:spPr>
-          <a:xfrm>
-            <a:off x="9326880" y="4764023"/>
-            <a:ext cx="2103120" cy="411480"/>
-          </a:xfrm>
-          <a:prstGeom prst="rect">
-            <a:avLst/>
-          </a:prstGeom>
-          <a:noFill/>
-        </p:spPr>
-        <p:txBody>
-          <a:bodyPr wrap="square" anchor="t" lIns="0" rIns="0" tIns="0" bIns="0">
-            <a:spAutoFit/>
-          </a:bodyPr>
-          <a:lstStyle/>
-          <a:p>
-            <a:pPr algn="r"/>
-            <a:r>
-              <a:rPr sz="1500" b="1">
-                <a:solidFill>
-                  <a:srgbClr val="C9A227"/>
-                </a:solidFill>
-                <a:latin typeface="Georgia"/>
-              </a:rPr>
-              <a:t>₹45.8800</a:t>
-            </a:r>
-          </a:p>
-        </p:txBody>
-      </p:sp>
-      <p:sp>
-        <p:nvSpPr>
-          <p:cNvPr id="34" name="Rectangle 33"/>
+              <a:t>Price checks, finding breaks, reading corporate action notices and drafting reports.</a:t>
+            </a:r>
+          </a:p>
+        </p:txBody>
+      </p:sp>
+      <p:sp>
+        <p:nvSpPr>
+          <p:cNvPr id="23" name="Rectangle 22"/>
           <p:cNvSpPr/>
           <p:nvPr/>
         </p:nvSpPr>
@@ -13692,7 +12804,7 @@
       </p:sp>
       <p:sp>
         <p:nvSpPr>
-          <p:cNvPr id="35" name="Rectangle 34"/>
+          <p:cNvPr id="24" name="Rectangle 23"/>
           <p:cNvSpPr/>
           <p:nvPr/>
         </p:nvSpPr>
@@ -13736,7 +12848,7 @@
       </p:sp>
       <p:sp>
         <p:nvSpPr>
-          <p:cNvPr id="36" name="TextBox 35"/>
+          <p:cNvPr id="25" name="TextBox 24"/>
           <p:cNvSpPr txBox="1"/>
           <p:nvPr/>
         </p:nvSpPr>
@@ -13763,7 +12875,7 @@
                   <a:srgbClr val="C9A227"/>
                 </a:solidFill>
               </a:rPr>
-              <a:t>The formula:  </a:t>
+              <a:t>Today's case:  </a:t>
             </a:r>
             <a:r>
               <a:rPr sz="1200" b="0">
@@ -13771,14 +12883,14 @@
                   <a:srgbClr val="FFFFFF"/>
                 </a:solidFill>
               </a:rPr>
-              <a:t>NAV = (holdings at market price + cash − expenses) ÷ units. Indian mutual funds publish it on the AMFI website every day.</a:t>
-            </a:r>
-          </a:p>
-        </p:txBody>
-      </p:sp>
-      <p:sp>
-        <p:nvSpPr>
-          <p:cNvPr id="37" name="TextBox 36"/>
+              <a:t>Opus Fund Services, a fund administrator that uses AI to automate NAV work.</a:t>
+            </a:r>
+          </a:p>
+        </p:txBody>
+      </p:sp>
+      <p:sp>
+        <p:nvSpPr>
+          <p:cNvPr id="26" name="TextBox 25"/>
           <p:cNvSpPr txBox="1"/>
           <p:nvPr/>
         </p:nvSpPr>
@@ -13812,7 +12924,7 @@
       </p:sp>
       <p:sp>
         <p:nvSpPr>
-          <p:cNvPr id="38" name="TextBox 37"/>
+          <p:cNvPr id="27" name="TextBox 26"/>
           <p:cNvSpPr txBox="1"/>
           <p:nvPr/>
         </p:nvSpPr>
@@ -13943,7 +13055,7 @@
                   <a:srgbClr val="C9A227"/>
                 </a:solidFill>
               </a:rPr>
-              <a:t>HOUR 2 · TRANSFER AGENCY AND KYC</a:t>
+              <a:t>HOUR 1 · THE NAV IN SIX STEPS</a:t>
             </a:r>
           </a:p>
         </p:txBody>
@@ -13978,7 +13090,7 @@
                 </a:solidFill>
                 <a:latin typeface="Georgia"/>
               </a:rPr>
-              <a:t>How investors get in and out of a fund</a:t>
+              <a:t>NAV: what one unit of the fund is worth today</a:t>
             </a:r>
           </a:p>
         </p:txBody>
@@ -13992,7 +13104,7 @@
         <p:spPr>
           <a:xfrm>
             <a:off x="548640" y="1463040"/>
-            <a:ext cx="3593592" cy="2002536"/>
+            <a:ext cx="5760720" cy="4160520"/>
           </a:xfrm>
           <a:prstGeom prst="rect">
             <a:avLst/>
@@ -14036,7 +13148,7 @@
         <p:spPr>
           <a:xfrm>
             <a:off x="548640" y="1463040"/>
-            <a:ext cx="3593592" cy="45720"/>
+            <a:ext cx="5760720" cy="45720"/>
           </a:xfrm>
           <a:prstGeom prst="rect">
             <a:avLst/>
@@ -14079,8 +13191,8 @@
         </p:nvSpPr>
         <p:spPr>
           <a:xfrm>
-            <a:off x="804672" y="1664208"/>
-            <a:ext cx="3081528" cy="1728216"/>
+            <a:off x="804672" y="1645920"/>
+            <a:ext cx="5303520" cy="274320"/>
           </a:xfrm>
           <a:prstGeom prst="rect">
             <a:avLst/>
@@ -14100,58 +13212,441 @@
                   <a:srgbClr val="3A5C9E"/>
                 </a:solidFill>
               </a:rPr>
-              <a:t>STEP 1 · KYC</a:t>
-            </a:r>
-          </a:p>
-          <a:p>
-            <a:pPr algn="l">
-              <a:spcBef>
-                <a:spcPts val="400"/>
-              </a:spcBef>
-            </a:pPr>
+              <a:t>THE DAILY STEPS</a:t>
+            </a:r>
+          </a:p>
+        </p:txBody>
+      </p:sp>
+      <p:sp>
+        <p:nvSpPr>
+          <p:cNvPr id="8" name="TextBox 7"/>
+          <p:cNvSpPr txBox="1"/>
+          <p:nvPr/>
+        </p:nvSpPr>
+        <p:spPr>
+          <a:xfrm>
+            <a:off x="804672" y="2029968"/>
+            <a:ext cx="365760" cy="457200"/>
+          </a:xfrm>
+          <a:prstGeom prst="rect">
+            <a:avLst/>
+          </a:prstGeom>
+          <a:noFill/>
+        </p:spPr>
+        <p:txBody>
+          <a:bodyPr wrap="square" anchor="t" lIns="0" rIns="0" tIns="0" bIns="0">
+            <a:spAutoFit/>
+          </a:bodyPr>
+          <a:lstStyle/>
+          <a:p>
+            <a:pPr algn="l"/>
             <a:r>
               <a:rPr sz="1600" b="1">
                 <a:solidFill>
-                  <a:srgbClr val="0F2145"/>
+                  <a:srgbClr val="C9A227"/>
                 </a:solidFill>
                 <a:latin typeface="Georgia"/>
               </a:rPr>
-              <a:t>Know your customer</a:t>
-            </a:r>
-          </a:p>
-          <a:p>
-            <a:pPr algn="l">
-              <a:spcBef>
-                <a:spcPts val="600"/>
-              </a:spcBef>
-            </a:pPr>
+              <a:t>1</a:t>
+            </a:r>
+          </a:p>
+        </p:txBody>
+      </p:sp>
+      <p:sp>
+        <p:nvSpPr>
+          <p:cNvPr id="9" name="TextBox 8"/>
+          <p:cNvSpPr txBox="1"/>
+          <p:nvPr/>
+        </p:nvSpPr>
+        <p:spPr>
+          <a:xfrm>
+            <a:off x="1234440" y="2066544"/>
+            <a:ext cx="4937760" cy="502920"/>
+          </a:xfrm>
+          <a:prstGeom prst="rect">
+            <a:avLst/>
+          </a:prstGeom>
+          <a:noFill/>
+        </p:spPr>
+        <p:txBody>
+          <a:bodyPr wrap="square" anchor="t" lIns="0" rIns="0" tIns="0" bIns="0">
+            <a:spAutoFit/>
+          </a:bodyPr>
+          <a:lstStyle/>
+          <a:p>
+            <a:pPr algn="l"/>
             <a:r>
               <a:rPr sz="1200" b="0">
                 <a:solidFill>
                   <a:srgbClr val="1B2A41"/>
                 </a:solidFill>
               </a:rPr>
-              <a:t>The investor gives PAN and Aadhaar. Under SEBI rules KYC is done once and stored with a KYC registration agency.</a:t>
-            </a:r>
-          </a:p>
-        </p:txBody>
-      </p:sp>
-      <p:sp>
-        <p:nvSpPr>
-          <p:cNvPr id="8" name="Rectangle 7"/>
+              <a:t>Capture every trade done today.</a:t>
+            </a:r>
+          </a:p>
+        </p:txBody>
+      </p:sp>
+      <p:sp>
+        <p:nvSpPr>
+          <p:cNvPr id="10" name="TextBox 9"/>
+          <p:cNvSpPr txBox="1"/>
+          <p:nvPr/>
+        </p:nvSpPr>
+        <p:spPr>
+          <a:xfrm>
+            <a:off x="804672" y="2596896"/>
+            <a:ext cx="365760" cy="457200"/>
+          </a:xfrm>
+          <a:prstGeom prst="rect">
+            <a:avLst/>
+          </a:prstGeom>
+          <a:noFill/>
+        </p:spPr>
+        <p:txBody>
+          <a:bodyPr wrap="square" anchor="t" lIns="0" rIns="0" tIns="0" bIns="0">
+            <a:spAutoFit/>
+          </a:bodyPr>
+          <a:lstStyle/>
+          <a:p>
+            <a:pPr algn="l"/>
+            <a:r>
+              <a:rPr sz="1600" b="1">
+                <a:solidFill>
+                  <a:srgbClr val="C9A227"/>
+                </a:solidFill>
+                <a:latin typeface="Georgia"/>
+              </a:rPr>
+              <a:t>2</a:t>
+            </a:r>
+          </a:p>
+        </p:txBody>
+      </p:sp>
+      <p:sp>
+        <p:nvSpPr>
+          <p:cNvPr id="11" name="TextBox 10"/>
+          <p:cNvSpPr txBox="1"/>
+          <p:nvPr/>
+        </p:nvSpPr>
+        <p:spPr>
+          <a:xfrm>
+            <a:off x="1234440" y="2633472"/>
+            <a:ext cx="4937760" cy="502920"/>
+          </a:xfrm>
+          <a:prstGeom prst="rect">
+            <a:avLst/>
+          </a:prstGeom>
+          <a:noFill/>
+        </p:spPr>
+        <p:txBody>
+          <a:bodyPr wrap="square" anchor="t" lIns="0" rIns="0" tIns="0" bIns="0">
+            <a:spAutoFit/>
+          </a:bodyPr>
+          <a:lstStyle/>
+          <a:p>
+            <a:pPr algn="l"/>
+            <a:r>
+              <a:rPr sz="1200" b="0">
+                <a:solidFill>
+                  <a:srgbClr val="1B2A41"/>
+                </a:solidFill>
+              </a:rPr>
+              <a:t>Price every holding at today's closing price.</a:t>
+            </a:r>
+          </a:p>
+        </p:txBody>
+      </p:sp>
+      <p:sp>
+        <p:nvSpPr>
+          <p:cNvPr id="12" name="TextBox 11"/>
+          <p:cNvSpPr txBox="1"/>
+          <p:nvPr/>
+        </p:nvSpPr>
+        <p:spPr>
+          <a:xfrm>
+            <a:off x="804672" y="3163824"/>
+            <a:ext cx="365760" cy="457200"/>
+          </a:xfrm>
+          <a:prstGeom prst="rect">
+            <a:avLst/>
+          </a:prstGeom>
+          <a:noFill/>
+        </p:spPr>
+        <p:txBody>
+          <a:bodyPr wrap="square" anchor="t" lIns="0" rIns="0" tIns="0" bIns="0">
+            <a:spAutoFit/>
+          </a:bodyPr>
+          <a:lstStyle/>
+          <a:p>
+            <a:pPr algn="l"/>
+            <a:r>
+              <a:rPr sz="1600" b="1">
+                <a:solidFill>
+                  <a:srgbClr val="C9A227"/>
+                </a:solidFill>
+                <a:latin typeface="Georgia"/>
+              </a:rPr>
+              <a:t>3</a:t>
+            </a:r>
+          </a:p>
+        </p:txBody>
+      </p:sp>
+      <p:sp>
+        <p:nvSpPr>
+          <p:cNvPr id="13" name="TextBox 12"/>
+          <p:cNvSpPr txBox="1"/>
+          <p:nvPr/>
+        </p:nvSpPr>
+        <p:spPr>
+          <a:xfrm>
+            <a:off x="1234440" y="3200400"/>
+            <a:ext cx="4937760" cy="502920"/>
+          </a:xfrm>
+          <a:prstGeom prst="rect">
+            <a:avLst/>
+          </a:prstGeom>
+          <a:noFill/>
+        </p:spPr>
+        <p:txBody>
+          <a:bodyPr wrap="square" anchor="t" lIns="0" rIns="0" tIns="0" bIns="0">
+            <a:spAutoFit/>
+          </a:bodyPr>
+          <a:lstStyle/>
+          <a:p>
+            <a:pPr algn="l"/>
+            <a:r>
+              <a:rPr sz="1200" b="0">
+                <a:solidFill>
+                  <a:srgbClr val="1B2A41"/>
+                </a:solidFill>
+              </a:rPr>
+              <a:t>Book income and corporate actions, such as dividends and splits.</a:t>
+            </a:r>
+          </a:p>
+        </p:txBody>
+      </p:sp>
+      <p:sp>
+        <p:nvSpPr>
+          <p:cNvPr id="14" name="TextBox 13"/>
+          <p:cNvSpPr txBox="1"/>
+          <p:nvPr/>
+        </p:nvSpPr>
+        <p:spPr>
+          <a:xfrm>
+            <a:off x="804672" y="3730752"/>
+            <a:ext cx="365760" cy="457200"/>
+          </a:xfrm>
+          <a:prstGeom prst="rect">
+            <a:avLst/>
+          </a:prstGeom>
+          <a:noFill/>
+        </p:spPr>
+        <p:txBody>
+          <a:bodyPr wrap="square" anchor="t" lIns="0" rIns="0" tIns="0" bIns="0">
+            <a:spAutoFit/>
+          </a:bodyPr>
+          <a:lstStyle/>
+          <a:p>
+            <a:pPr algn="l"/>
+            <a:r>
+              <a:rPr sz="1600" b="1">
+                <a:solidFill>
+                  <a:srgbClr val="C9A227"/>
+                </a:solidFill>
+                <a:latin typeface="Georgia"/>
+              </a:rPr>
+              <a:t>4</a:t>
+            </a:r>
+          </a:p>
+        </p:txBody>
+      </p:sp>
+      <p:sp>
+        <p:nvSpPr>
+          <p:cNvPr id="15" name="TextBox 14"/>
+          <p:cNvSpPr txBox="1"/>
+          <p:nvPr/>
+        </p:nvSpPr>
+        <p:spPr>
+          <a:xfrm>
+            <a:off x="1234440" y="3767328"/>
+            <a:ext cx="4937760" cy="502920"/>
+          </a:xfrm>
+          <a:prstGeom prst="rect">
+            <a:avLst/>
+          </a:prstGeom>
+          <a:noFill/>
+        </p:spPr>
+        <p:txBody>
+          <a:bodyPr wrap="square" anchor="t" lIns="0" rIns="0" tIns="0" bIns="0">
+            <a:spAutoFit/>
+          </a:bodyPr>
+          <a:lstStyle/>
+          <a:p>
+            <a:pPr algn="l"/>
+            <a:r>
+              <a:rPr sz="1200" b="0">
+                <a:solidFill>
+                  <a:srgbClr val="1B2A41"/>
+                </a:solidFill>
+              </a:rPr>
+              <a:t>Subtract expenses, such as the management fee.</a:t>
+            </a:r>
+          </a:p>
+        </p:txBody>
+      </p:sp>
+      <p:sp>
+        <p:nvSpPr>
+          <p:cNvPr id="16" name="TextBox 15"/>
+          <p:cNvSpPr txBox="1"/>
+          <p:nvPr/>
+        </p:nvSpPr>
+        <p:spPr>
+          <a:xfrm>
+            <a:off x="804672" y="4297680"/>
+            <a:ext cx="365760" cy="457200"/>
+          </a:xfrm>
+          <a:prstGeom prst="rect">
+            <a:avLst/>
+          </a:prstGeom>
+          <a:noFill/>
+        </p:spPr>
+        <p:txBody>
+          <a:bodyPr wrap="square" anchor="t" lIns="0" rIns="0" tIns="0" bIns="0">
+            <a:spAutoFit/>
+          </a:bodyPr>
+          <a:lstStyle/>
+          <a:p>
+            <a:pPr algn="l"/>
+            <a:r>
+              <a:rPr sz="1600" b="1">
+                <a:solidFill>
+                  <a:srgbClr val="C9A227"/>
+                </a:solidFill>
+                <a:latin typeface="Georgia"/>
+              </a:rPr>
+              <a:t>5</a:t>
+            </a:r>
+          </a:p>
+        </p:txBody>
+      </p:sp>
+      <p:sp>
+        <p:nvSpPr>
+          <p:cNvPr id="17" name="TextBox 16"/>
+          <p:cNvSpPr txBox="1"/>
+          <p:nvPr/>
+        </p:nvSpPr>
+        <p:spPr>
+          <a:xfrm>
+            <a:off x="1234440" y="4334256"/>
+            <a:ext cx="4937760" cy="502920"/>
+          </a:xfrm>
+          <a:prstGeom prst="rect">
+            <a:avLst/>
+          </a:prstGeom>
+          <a:noFill/>
+        </p:spPr>
+        <p:txBody>
+          <a:bodyPr wrap="square" anchor="t" lIns="0" rIns="0" tIns="0" bIns="0">
+            <a:spAutoFit/>
+          </a:bodyPr>
+          <a:lstStyle/>
+          <a:p>
+            <a:pPr algn="l"/>
+            <a:r>
+              <a:rPr sz="1200" b="0">
+                <a:solidFill>
+                  <a:srgbClr val="1B2A41"/>
+                </a:solidFill>
+              </a:rPr>
+              <a:t>Divide what is left by the number of units.</a:t>
+            </a:r>
+          </a:p>
+        </p:txBody>
+      </p:sp>
+      <p:sp>
+        <p:nvSpPr>
+          <p:cNvPr id="18" name="TextBox 17"/>
+          <p:cNvSpPr txBox="1"/>
+          <p:nvPr/>
+        </p:nvSpPr>
+        <p:spPr>
+          <a:xfrm>
+            <a:off x="804672" y="4864608"/>
+            <a:ext cx="365760" cy="457200"/>
+          </a:xfrm>
+          <a:prstGeom prst="rect">
+            <a:avLst/>
+          </a:prstGeom>
+          <a:noFill/>
+        </p:spPr>
+        <p:txBody>
+          <a:bodyPr wrap="square" anchor="t" lIns="0" rIns="0" tIns="0" bIns="0">
+            <a:spAutoFit/>
+          </a:bodyPr>
+          <a:lstStyle/>
+          <a:p>
+            <a:pPr algn="l"/>
+            <a:r>
+              <a:rPr sz="1600" b="1">
+                <a:solidFill>
+                  <a:srgbClr val="C9A227"/>
+                </a:solidFill>
+                <a:latin typeface="Georgia"/>
+              </a:rPr>
+              <a:t>6</a:t>
+            </a:r>
+          </a:p>
+        </p:txBody>
+      </p:sp>
+      <p:sp>
+        <p:nvSpPr>
+          <p:cNvPr id="19" name="TextBox 18"/>
+          <p:cNvSpPr txBox="1"/>
+          <p:nvPr/>
+        </p:nvSpPr>
+        <p:spPr>
+          <a:xfrm>
+            <a:off x="1234440" y="4901184"/>
+            <a:ext cx="4937760" cy="502920"/>
+          </a:xfrm>
+          <a:prstGeom prst="rect">
+            <a:avLst/>
+          </a:prstGeom>
+          <a:noFill/>
+        </p:spPr>
+        <p:txBody>
+          <a:bodyPr wrap="square" anchor="t" lIns="0" rIns="0" tIns="0" bIns="0">
+            <a:spAutoFit/>
+          </a:bodyPr>
+          <a:lstStyle/>
+          <a:p>
+            <a:pPr algn="l"/>
+            <a:r>
+              <a:rPr sz="1200" b="0">
+                <a:solidFill>
+                  <a:srgbClr val="1B2A41"/>
+                </a:solidFill>
+              </a:rPr>
+              <a:t>Reconcile with the custodian and the transfer agent, then publish.</a:t>
+            </a:r>
+          </a:p>
+        </p:txBody>
+      </p:sp>
+      <p:sp>
+        <p:nvSpPr>
+          <p:cNvPr id="20" name="Rectangle 19"/>
           <p:cNvSpPr/>
           <p:nvPr/>
         </p:nvSpPr>
         <p:spPr>
           <a:xfrm>
-            <a:off x="4297680" y="1463040"/>
-            <a:ext cx="3593592" cy="2002536"/>
+            <a:off x="6492240" y="1463040"/>
+            <a:ext cx="5148072" cy="4160520"/>
           </a:xfrm>
           <a:prstGeom prst="rect">
             <a:avLst/>
           </a:prstGeom>
           <a:solidFill>
-            <a:srgbClr val="FFFFFF"/>
+            <a:srgbClr val="0F2145"/>
           </a:solidFill>
           <a:ln>
             <a:noFill/>
@@ -14182,14 +13677,506 @@
       </p:sp>
       <p:sp>
         <p:nvSpPr>
-          <p:cNvPr id="9" name="Rectangle 8"/>
+          <p:cNvPr id="21" name="TextBox 20"/>
+          <p:cNvSpPr txBox="1"/>
+          <p:nvPr/>
+        </p:nvSpPr>
+        <p:spPr>
+          <a:xfrm>
+            <a:off x="6748272" y="1645920"/>
+            <a:ext cx="4663440" cy="274320"/>
+          </a:xfrm>
+          <a:prstGeom prst="rect">
+            <a:avLst/>
+          </a:prstGeom>
+          <a:noFill/>
+        </p:spPr>
+        <p:txBody>
+          <a:bodyPr wrap="square" anchor="t" lIns="0" rIns="0" tIns="0" bIns="0">
+            <a:spAutoFit/>
+          </a:bodyPr>
+          <a:lstStyle/>
+          <a:p>
+            <a:pPr algn="l"/>
+            <a:r>
+              <a:rPr sz="1000" b="1">
+                <a:solidFill>
+                  <a:srgbClr val="C9A227"/>
+                </a:solidFill>
+              </a:rPr>
+              <a:t>TODAY'S LAB FUND, BEFORE RECONCILIATION</a:t>
+            </a:r>
+          </a:p>
+        </p:txBody>
+      </p:sp>
+      <p:sp>
+        <p:nvSpPr>
+          <p:cNvPr id="22" name="TextBox 21"/>
+          <p:cNvSpPr txBox="1"/>
+          <p:nvPr/>
+        </p:nvSpPr>
+        <p:spPr>
+          <a:xfrm>
+            <a:off x="6748272" y="2057400"/>
+            <a:ext cx="2743200" cy="411480"/>
+          </a:xfrm>
+          <a:prstGeom prst="rect">
+            <a:avLst/>
+          </a:prstGeom>
+          <a:noFill/>
+        </p:spPr>
+        <p:txBody>
+          <a:bodyPr wrap="square" anchor="t" lIns="0" rIns="0" tIns="0" bIns="0">
+            <a:spAutoFit/>
+          </a:bodyPr>
+          <a:lstStyle/>
+          <a:p>
+            <a:pPr algn="l"/>
+            <a:r>
+              <a:rPr sz="1200" b="0">
+                <a:solidFill>
+                  <a:srgbClr val="C9D6EE"/>
+                </a:solidFill>
+              </a:rPr>
+              <a:t>10 holdings at market price</a:t>
+            </a:r>
+          </a:p>
+        </p:txBody>
+      </p:sp>
+      <p:sp>
+        <p:nvSpPr>
+          <p:cNvPr id="23" name="TextBox 22"/>
+          <p:cNvSpPr txBox="1"/>
+          <p:nvPr/>
+        </p:nvSpPr>
+        <p:spPr>
+          <a:xfrm>
+            <a:off x="9326880" y="2020824"/>
+            <a:ext cx="2103120" cy="411480"/>
+          </a:xfrm>
+          <a:prstGeom prst="rect">
+            <a:avLst/>
+          </a:prstGeom>
+          <a:noFill/>
+        </p:spPr>
+        <p:txBody>
+          <a:bodyPr wrap="square" anchor="t" lIns="0" rIns="0" tIns="0" bIns="0">
+            <a:spAutoFit/>
+          </a:bodyPr>
+          <a:lstStyle/>
+          <a:p>
+            <a:pPr algn="r"/>
+            <a:r>
+              <a:rPr sz="1300" b="1">
+                <a:solidFill>
+                  <a:srgbClr val="FFFFFF"/>
+                </a:solidFill>
+                <a:latin typeface="Georgia"/>
+              </a:rPr>
+              <a:t>₹43.37 crore</a:t>
+            </a:r>
+          </a:p>
+        </p:txBody>
+      </p:sp>
+      <p:sp>
+        <p:nvSpPr>
+          <p:cNvPr id="24" name="TextBox 23"/>
+          <p:cNvSpPr txBox="1"/>
+          <p:nvPr/>
+        </p:nvSpPr>
+        <p:spPr>
+          <a:xfrm>
+            <a:off x="6748272" y="2606040"/>
+            <a:ext cx="2743200" cy="411480"/>
+          </a:xfrm>
+          <a:prstGeom prst="rect">
+            <a:avLst/>
+          </a:prstGeom>
+          <a:noFill/>
+        </p:spPr>
+        <p:txBody>
+          <a:bodyPr wrap="square" anchor="t" lIns="0" rIns="0" tIns="0" bIns="0">
+            <a:spAutoFit/>
+          </a:bodyPr>
+          <a:lstStyle/>
+          <a:p>
+            <a:pPr algn="l"/>
+            <a:r>
+              <a:rPr sz="1200" b="0">
+                <a:solidFill>
+                  <a:srgbClr val="C9D6EE"/>
+                </a:solidFill>
+              </a:rPr>
+              <a:t>Add cash</a:t>
+            </a:r>
+          </a:p>
+        </p:txBody>
+      </p:sp>
+      <p:sp>
+        <p:nvSpPr>
+          <p:cNvPr id="25" name="TextBox 24"/>
+          <p:cNvSpPr txBox="1"/>
+          <p:nvPr/>
+        </p:nvSpPr>
+        <p:spPr>
+          <a:xfrm>
+            <a:off x="9326880" y="2569464"/>
+            <a:ext cx="2103120" cy="411480"/>
+          </a:xfrm>
+          <a:prstGeom prst="rect">
+            <a:avLst/>
+          </a:prstGeom>
+          <a:noFill/>
+        </p:spPr>
+        <p:txBody>
+          <a:bodyPr wrap="square" anchor="t" lIns="0" rIns="0" tIns="0" bIns="0">
+            <a:spAutoFit/>
+          </a:bodyPr>
+          <a:lstStyle/>
+          <a:p>
+            <a:pPr algn="r"/>
+            <a:r>
+              <a:rPr sz="1300" b="1">
+                <a:solidFill>
+                  <a:srgbClr val="FFFFFF"/>
+                </a:solidFill>
+                <a:latin typeface="Georgia"/>
+              </a:rPr>
+              <a:t>₹2.60 crore</a:t>
+            </a:r>
+          </a:p>
+        </p:txBody>
+      </p:sp>
+      <p:sp>
+        <p:nvSpPr>
+          <p:cNvPr id="26" name="TextBox 25"/>
+          <p:cNvSpPr txBox="1"/>
+          <p:nvPr/>
+        </p:nvSpPr>
+        <p:spPr>
+          <a:xfrm>
+            <a:off x="6748272" y="3154680"/>
+            <a:ext cx="2743200" cy="411480"/>
+          </a:xfrm>
+          <a:prstGeom prst="rect">
+            <a:avLst/>
+          </a:prstGeom>
+          <a:noFill/>
+        </p:spPr>
+        <p:txBody>
+          <a:bodyPr wrap="square" anchor="t" lIns="0" rIns="0" tIns="0" bIns="0">
+            <a:spAutoFit/>
+          </a:bodyPr>
+          <a:lstStyle/>
+          <a:p>
+            <a:pPr algn="l"/>
+            <a:r>
+              <a:rPr sz="1200" b="0">
+                <a:solidFill>
+                  <a:srgbClr val="C9D6EE"/>
+                </a:solidFill>
+              </a:rPr>
+              <a:t>Less expenses</a:t>
+            </a:r>
+          </a:p>
+        </p:txBody>
+      </p:sp>
+      <p:sp>
+        <p:nvSpPr>
+          <p:cNvPr id="27" name="TextBox 26"/>
+          <p:cNvSpPr txBox="1"/>
+          <p:nvPr/>
+        </p:nvSpPr>
+        <p:spPr>
+          <a:xfrm>
+            <a:off x="9326880" y="3118104"/>
+            <a:ext cx="2103120" cy="411480"/>
+          </a:xfrm>
+          <a:prstGeom prst="rect">
+            <a:avLst/>
+          </a:prstGeom>
+          <a:noFill/>
+        </p:spPr>
+        <p:txBody>
+          <a:bodyPr wrap="square" anchor="t" lIns="0" rIns="0" tIns="0" bIns="0">
+            <a:spAutoFit/>
+          </a:bodyPr>
+          <a:lstStyle/>
+          <a:p>
+            <a:pPr algn="r"/>
+            <a:r>
+              <a:rPr sz="1300" b="1">
+                <a:solidFill>
+                  <a:srgbClr val="FFFFFF"/>
+                </a:solidFill>
+                <a:latin typeface="Georgia"/>
+              </a:rPr>
+              <a:t>₹0.09 crore</a:t>
+            </a:r>
+          </a:p>
+        </p:txBody>
+      </p:sp>
+      <p:sp>
+        <p:nvSpPr>
+          <p:cNvPr id="28" name="TextBox 27"/>
+          <p:cNvSpPr txBox="1"/>
+          <p:nvPr/>
+        </p:nvSpPr>
+        <p:spPr>
+          <a:xfrm>
+            <a:off x="6748272" y="3703320"/>
+            <a:ext cx="2743200" cy="411480"/>
+          </a:xfrm>
+          <a:prstGeom prst="rect">
+            <a:avLst/>
+          </a:prstGeom>
+          <a:noFill/>
+        </p:spPr>
+        <p:txBody>
+          <a:bodyPr wrap="square" anchor="t" lIns="0" rIns="0" tIns="0" bIns="0">
+            <a:spAutoFit/>
+          </a:bodyPr>
+          <a:lstStyle/>
+          <a:p>
+            <a:pPr algn="l"/>
+            <a:r>
+              <a:rPr sz="1200" b="1">
+                <a:solidFill>
+                  <a:srgbClr val="FFFFFF"/>
+                </a:solidFill>
+              </a:rPr>
+              <a:t>Net assets</a:t>
+            </a:r>
+          </a:p>
+        </p:txBody>
+      </p:sp>
+      <p:sp>
+        <p:nvSpPr>
+          <p:cNvPr id="29" name="TextBox 28"/>
+          <p:cNvSpPr txBox="1"/>
+          <p:nvPr/>
+        </p:nvSpPr>
+        <p:spPr>
+          <a:xfrm>
+            <a:off x="9326880" y="3666744"/>
+            <a:ext cx="2103120" cy="411480"/>
+          </a:xfrm>
+          <a:prstGeom prst="rect">
+            <a:avLst/>
+          </a:prstGeom>
+          <a:noFill/>
+        </p:spPr>
+        <p:txBody>
+          <a:bodyPr wrap="square" anchor="t" lIns="0" rIns="0" tIns="0" bIns="0">
+            <a:spAutoFit/>
+          </a:bodyPr>
+          <a:lstStyle/>
+          <a:p>
+            <a:pPr algn="r"/>
+            <a:r>
+              <a:rPr sz="1500" b="1">
+                <a:solidFill>
+                  <a:srgbClr val="C9A227"/>
+                </a:solidFill>
+                <a:latin typeface="Georgia"/>
+              </a:rPr>
+              <a:t>₹45.88 crore</a:t>
+            </a:r>
+          </a:p>
+        </p:txBody>
+      </p:sp>
+      <p:sp>
+        <p:nvSpPr>
+          <p:cNvPr id="30" name="TextBox 29"/>
+          <p:cNvSpPr txBox="1"/>
+          <p:nvPr/>
+        </p:nvSpPr>
+        <p:spPr>
+          <a:xfrm>
+            <a:off x="6748272" y="4251959"/>
+            <a:ext cx="2743200" cy="411480"/>
+          </a:xfrm>
+          <a:prstGeom prst="rect">
+            <a:avLst/>
+          </a:prstGeom>
+          <a:noFill/>
+        </p:spPr>
+        <p:txBody>
+          <a:bodyPr wrap="square" anchor="t" lIns="0" rIns="0" tIns="0" bIns="0">
+            <a:spAutoFit/>
+          </a:bodyPr>
+          <a:lstStyle/>
+          <a:p>
+            <a:pPr algn="l"/>
+            <a:r>
+              <a:rPr sz="1200" b="0">
+                <a:solidFill>
+                  <a:srgbClr val="C9D6EE"/>
+                </a:solidFill>
+              </a:rPr>
+              <a:t>Units outstanding</a:t>
+            </a:r>
+          </a:p>
+        </p:txBody>
+      </p:sp>
+      <p:sp>
+        <p:nvSpPr>
+          <p:cNvPr id="31" name="TextBox 30"/>
+          <p:cNvSpPr txBox="1"/>
+          <p:nvPr/>
+        </p:nvSpPr>
+        <p:spPr>
+          <a:xfrm>
+            <a:off x="9326880" y="4215383"/>
+            <a:ext cx="2103120" cy="411480"/>
+          </a:xfrm>
+          <a:prstGeom prst="rect">
+            <a:avLst/>
+          </a:prstGeom>
+          <a:noFill/>
+        </p:spPr>
+        <p:txBody>
+          <a:bodyPr wrap="square" anchor="t" lIns="0" rIns="0" tIns="0" bIns="0">
+            <a:spAutoFit/>
+          </a:bodyPr>
+          <a:lstStyle/>
+          <a:p>
+            <a:pPr algn="r"/>
+            <a:r>
+              <a:rPr sz="1300" b="1">
+                <a:solidFill>
+                  <a:srgbClr val="FFFFFF"/>
+                </a:solidFill>
+                <a:latin typeface="Georgia"/>
+              </a:rPr>
+              <a:t>1 crore</a:t>
+            </a:r>
+          </a:p>
+        </p:txBody>
+      </p:sp>
+      <p:sp>
+        <p:nvSpPr>
+          <p:cNvPr id="32" name="TextBox 31"/>
+          <p:cNvSpPr txBox="1"/>
+          <p:nvPr/>
+        </p:nvSpPr>
+        <p:spPr>
+          <a:xfrm>
+            <a:off x="6748272" y="4800599"/>
+            <a:ext cx="2743200" cy="411480"/>
+          </a:xfrm>
+          <a:prstGeom prst="rect">
+            <a:avLst/>
+          </a:prstGeom>
+          <a:noFill/>
+        </p:spPr>
+        <p:txBody>
+          <a:bodyPr wrap="square" anchor="t" lIns="0" rIns="0" tIns="0" bIns="0">
+            <a:spAutoFit/>
+          </a:bodyPr>
+          <a:lstStyle/>
+          <a:p>
+            <a:pPr algn="l"/>
+            <a:r>
+              <a:rPr sz="1200" b="1">
+                <a:solidFill>
+                  <a:srgbClr val="FFFFFF"/>
+                </a:solidFill>
+              </a:rPr>
+              <a:t>NAV per unit</a:t>
+            </a:r>
+          </a:p>
+        </p:txBody>
+      </p:sp>
+      <p:sp>
+        <p:nvSpPr>
+          <p:cNvPr id="33" name="TextBox 32"/>
+          <p:cNvSpPr txBox="1"/>
+          <p:nvPr/>
+        </p:nvSpPr>
+        <p:spPr>
+          <a:xfrm>
+            <a:off x="9326880" y="4764023"/>
+            <a:ext cx="2103120" cy="411480"/>
+          </a:xfrm>
+          <a:prstGeom prst="rect">
+            <a:avLst/>
+          </a:prstGeom>
+          <a:noFill/>
+        </p:spPr>
+        <p:txBody>
+          <a:bodyPr wrap="square" anchor="t" lIns="0" rIns="0" tIns="0" bIns="0">
+            <a:spAutoFit/>
+          </a:bodyPr>
+          <a:lstStyle/>
+          <a:p>
+            <a:pPr algn="r"/>
+            <a:r>
+              <a:rPr sz="1500" b="1">
+                <a:solidFill>
+                  <a:srgbClr val="C9A227"/>
+                </a:solidFill>
+                <a:latin typeface="Georgia"/>
+              </a:rPr>
+              <a:t>₹45.8800</a:t>
+            </a:r>
+          </a:p>
+        </p:txBody>
+      </p:sp>
+      <p:sp>
+        <p:nvSpPr>
+          <p:cNvPr id="34" name="Rectangle 33"/>
           <p:cNvSpPr/>
           <p:nvPr/>
         </p:nvSpPr>
         <p:spPr>
           <a:xfrm>
-            <a:off x="4297680" y="1463040"/>
-            <a:ext cx="3593592" cy="45720"/>
+            <a:off x="548640" y="5760720"/>
+            <a:ext cx="11091672" cy="603504"/>
+          </a:xfrm>
+          <a:prstGeom prst="rect">
+            <a:avLst/>
+          </a:prstGeom>
+          <a:solidFill>
+            <a:srgbClr val="0F2145"/>
+          </a:solidFill>
+          <a:ln>
+            <a:noFill/>
+          </a:ln>
+          <a:effectLst/>
+        </p:spPr>
+        <p:style>
+          <a:lnRef idx="1">
+            <a:schemeClr val="accent1"/>
+          </a:lnRef>
+          <a:fillRef idx="3">
+            <a:schemeClr val="accent1"/>
+          </a:fillRef>
+          <a:effectRef idx="2">
+            <a:schemeClr val="accent1"/>
+          </a:effectRef>
+          <a:fontRef idx="minor">
+            <a:schemeClr val="lt1"/>
+          </a:fontRef>
+        </p:style>
+        <p:txBody>
+          <a:bodyPr rtlCol="0" anchor="ctr"/>
+          <a:lstStyle/>
+          <a:p>
+            <a:pPr algn="ctr"/>
+          </a:p>
+        </p:txBody>
+      </p:sp>
+      <p:sp>
+        <p:nvSpPr>
+          <p:cNvPr id="35" name="Rectangle 34"/>
+          <p:cNvSpPr/>
+          <p:nvPr/>
+        </p:nvSpPr>
+        <p:spPr>
+          <a:xfrm>
+            <a:off x="548640" y="5760720"/>
+            <a:ext cx="64008" cy="603504"/>
           </a:xfrm>
           <a:prstGeom prst="rect">
             <a:avLst/>
@@ -14226,14 +14213,56 @@
       </p:sp>
       <p:sp>
         <p:nvSpPr>
-          <p:cNvPr id="10" name="TextBox 9"/>
+          <p:cNvPr id="36" name="TextBox 35"/>
           <p:cNvSpPr txBox="1"/>
           <p:nvPr/>
         </p:nvSpPr>
         <p:spPr>
           <a:xfrm>
-            <a:off x="4553712" y="1664208"/>
-            <a:ext cx="3081528" cy="1728216"/>
+            <a:off x="822960" y="5760720"/>
+            <a:ext cx="10543032" cy="603504"/>
+          </a:xfrm>
+          <a:prstGeom prst="rect">
+            <a:avLst/>
+          </a:prstGeom>
+          <a:noFill/>
+        </p:spPr>
+        <p:txBody>
+          <a:bodyPr wrap="square" anchor="ctr" lIns="0" rIns="0" tIns="0" bIns="0">
+            <a:spAutoFit/>
+          </a:bodyPr>
+          <a:lstStyle/>
+          <a:p>
+            <a:pPr algn="l"/>
+            <a:r>
+              <a:rPr sz="1200" b="1">
+                <a:solidFill>
+                  <a:srgbClr val="C9A227"/>
+                </a:solidFill>
+              </a:rPr>
+              <a:t>The formula:  </a:t>
+            </a:r>
+            <a:r>
+              <a:rPr sz="1200" b="0">
+                <a:solidFill>
+                  <a:srgbClr val="FFFFFF"/>
+                </a:solidFill>
+              </a:rPr>
+              <a:t>NAV = (holdings at market price + cash − expenses) ÷ units. Indian mutual funds publish it on the AMFI website every day.</a:t>
+            </a:r>
+          </a:p>
+        </p:txBody>
+      </p:sp>
+      <p:sp>
+        <p:nvSpPr>
+          <p:cNvPr id="37" name="TextBox 36"/>
+          <p:cNvSpPr txBox="1"/>
+          <p:nvPr/>
+        </p:nvSpPr>
+        <p:spPr>
+          <a:xfrm>
+            <a:off x="548640" y="6473952"/>
+            <a:ext cx="7315200" cy="228600"/>
           </a:xfrm>
           <a:prstGeom prst="rect">
             <a:avLst/>
@@ -14248,813 +14277,6 @@
           <a:p>
             <a:pPr algn="l"/>
             <a:r>
-              <a:rPr sz="1000" b="1">
-                <a:solidFill>
-                  <a:srgbClr val="3A5C9E"/>
-                </a:solidFill>
-              </a:rPr>
-              <a:t>WHERE AI HELPS</a:t>
-            </a:r>
-          </a:p>
-          <a:p>
-            <a:pPr algn="l">
-              <a:spcBef>
-                <a:spcPts val="400"/>
-              </a:spcBef>
-            </a:pPr>
-            <a:r>
-              <a:rPr sz="1600" b="1">
-                <a:solidFill>
-                  <a:srgbClr val="0F2145"/>
-                </a:solidFill>
-                <a:latin typeface="Georgia"/>
-              </a:rPr>
-              <a:t>Reading and matching</a:t>
-            </a:r>
-          </a:p>
-          <a:p>
-            <a:pPr algn="l">
-              <a:spcBef>
-                <a:spcPts val="600"/>
-              </a:spcBef>
-            </a:pPr>
-            <a:r>
-              <a:rPr sz="1200" b="0">
-                <a:solidFill>
-                  <a:srgbClr val="1B2A41"/>
-                </a:solidFill>
-              </a:rPr>
-              <a:t>OCR reads the PAN card. AI matches “R. Kumar” on PAN with “Rajesh Kumar” at the bank. A person approves.</a:t>
-            </a:r>
-          </a:p>
-        </p:txBody>
-      </p:sp>
-      <p:sp>
-        <p:nvSpPr>
-          <p:cNvPr id="11" name="Rectangle 10"/>
-          <p:cNvSpPr/>
-          <p:nvPr/>
-        </p:nvSpPr>
-        <p:spPr>
-          <a:xfrm>
-            <a:off x="8046720" y="1463040"/>
-            <a:ext cx="3593592" cy="2002536"/>
-          </a:xfrm>
-          <a:prstGeom prst="rect">
-            <a:avLst/>
-          </a:prstGeom>
-          <a:solidFill>
-            <a:srgbClr val="FFFFFF"/>
-          </a:solidFill>
-          <a:ln>
-            <a:noFill/>
-          </a:ln>
-          <a:effectLst/>
-        </p:spPr>
-        <p:style>
-          <a:lnRef idx="1">
-            <a:schemeClr val="accent1"/>
-          </a:lnRef>
-          <a:fillRef idx="3">
-            <a:schemeClr val="accent1"/>
-          </a:fillRef>
-          <a:effectRef idx="2">
-            <a:schemeClr val="accent1"/>
-          </a:effectRef>
-          <a:fontRef idx="minor">
-            <a:schemeClr val="lt1"/>
-          </a:fontRef>
-        </p:style>
-        <p:txBody>
-          <a:bodyPr rtlCol="0" anchor="ctr"/>
-          <a:lstStyle/>
-          <a:p>
-            <a:pPr algn="ctr"/>
-          </a:p>
-        </p:txBody>
-      </p:sp>
-      <p:sp>
-        <p:nvSpPr>
-          <p:cNvPr id="12" name="Rectangle 11"/>
-          <p:cNvSpPr/>
-          <p:nvPr/>
-        </p:nvSpPr>
-        <p:spPr>
-          <a:xfrm>
-            <a:off x="8046720" y="1463040"/>
-            <a:ext cx="3593592" cy="45720"/>
-          </a:xfrm>
-          <a:prstGeom prst="rect">
-            <a:avLst/>
-          </a:prstGeom>
-          <a:solidFill>
-            <a:srgbClr val="C9A227"/>
-          </a:solidFill>
-          <a:ln>
-            <a:noFill/>
-          </a:ln>
-          <a:effectLst/>
-        </p:spPr>
-        <p:style>
-          <a:lnRef idx="1">
-            <a:schemeClr val="accent1"/>
-          </a:lnRef>
-          <a:fillRef idx="3">
-            <a:schemeClr val="accent1"/>
-          </a:fillRef>
-          <a:effectRef idx="2">
-            <a:schemeClr val="accent1"/>
-          </a:effectRef>
-          <a:fontRef idx="minor">
-            <a:schemeClr val="lt1"/>
-          </a:fontRef>
-        </p:style>
-        <p:txBody>
-          <a:bodyPr rtlCol="0" anchor="ctr"/>
-          <a:lstStyle/>
-          <a:p>
-            <a:pPr algn="ctr"/>
-          </a:p>
-        </p:txBody>
-      </p:sp>
-      <p:sp>
-        <p:nvSpPr>
-          <p:cNvPr id="13" name="TextBox 12"/>
-          <p:cNvSpPr txBox="1"/>
-          <p:nvPr/>
-        </p:nvSpPr>
-        <p:spPr>
-          <a:xfrm>
-            <a:off x="8302752" y="1664208"/>
-            <a:ext cx="3081528" cy="1728216"/>
-          </a:xfrm>
-          <a:prstGeom prst="rect">
-            <a:avLst/>
-          </a:prstGeom>
-          <a:noFill/>
-        </p:spPr>
-        <p:txBody>
-          <a:bodyPr wrap="square" anchor="t" lIns="0" rIns="0" tIns="0" bIns="0">
-            <a:spAutoFit/>
-          </a:bodyPr>
-          <a:lstStyle/>
-          <a:p>
-            <a:pPr algn="l"/>
-            <a:r>
-              <a:rPr sz="1000" b="1">
-                <a:solidFill>
-                  <a:srgbClr val="3A5C9E"/>
-                </a:solidFill>
-              </a:rPr>
-              <a:t>STEP 2 · SUBSCRIPTION</a:t>
-            </a:r>
-          </a:p>
-          <a:p>
-            <a:pPr algn="l">
-              <a:spcBef>
-                <a:spcPts val="400"/>
-              </a:spcBef>
-            </a:pPr>
-            <a:r>
-              <a:rPr sz="1600" b="1">
-                <a:solidFill>
-                  <a:srgbClr val="0F2145"/>
-                </a:solidFill>
-                <a:latin typeface="Georgia"/>
-              </a:rPr>
-              <a:t>Money in, units out</a:t>
-            </a:r>
-          </a:p>
-          <a:p>
-            <a:pPr algn="l">
-              <a:spcBef>
-                <a:spcPts val="600"/>
-              </a:spcBef>
-            </a:pPr>
-            <a:r>
-              <a:rPr sz="1200" b="0">
-                <a:solidFill>
-                  <a:srgbClr val="1B2A41"/>
-                </a:solidFill>
-              </a:rPr>
-              <a:t>Units = amount ÷ NAV. Example: ₹50,000 ÷ ₹45.8920 = 1,089.515 units.</a:t>
-            </a:r>
-          </a:p>
-        </p:txBody>
-      </p:sp>
-      <p:sp>
-        <p:nvSpPr>
-          <p:cNvPr id="14" name="Rectangle 13"/>
-          <p:cNvSpPr/>
-          <p:nvPr/>
-        </p:nvSpPr>
-        <p:spPr>
-          <a:xfrm>
-            <a:off x="548640" y="3621024"/>
-            <a:ext cx="3593592" cy="2002536"/>
-          </a:xfrm>
-          <a:prstGeom prst="rect">
-            <a:avLst/>
-          </a:prstGeom>
-          <a:solidFill>
-            <a:srgbClr val="FFFFFF"/>
-          </a:solidFill>
-          <a:ln>
-            <a:noFill/>
-          </a:ln>
-          <a:effectLst/>
-        </p:spPr>
-        <p:style>
-          <a:lnRef idx="1">
-            <a:schemeClr val="accent1"/>
-          </a:lnRef>
-          <a:fillRef idx="3">
-            <a:schemeClr val="accent1"/>
-          </a:fillRef>
-          <a:effectRef idx="2">
-            <a:schemeClr val="accent1"/>
-          </a:effectRef>
-          <a:fontRef idx="minor">
-            <a:schemeClr val="lt1"/>
-          </a:fontRef>
-        </p:style>
-        <p:txBody>
-          <a:bodyPr rtlCol="0" anchor="ctr"/>
-          <a:lstStyle/>
-          <a:p>
-            <a:pPr algn="ctr"/>
-          </a:p>
-        </p:txBody>
-      </p:sp>
-      <p:sp>
-        <p:nvSpPr>
-          <p:cNvPr id="15" name="Rectangle 14"/>
-          <p:cNvSpPr/>
-          <p:nvPr/>
-        </p:nvSpPr>
-        <p:spPr>
-          <a:xfrm>
-            <a:off x="548640" y="3621024"/>
-            <a:ext cx="3593592" cy="45720"/>
-          </a:xfrm>
-          <a:prstGeom prst="rect">
-            <a:avLst/>
-          </a:prstGeom>
-          <a:solidFill>
-            <a:srgbClr val="C9A227"/>
-          </a:solidFill>
-          <a:ln>
-            <a:noFill/>
-          </a:ln>
-          <a:effectLst/>
-        </p:spPr>
-        <p:style>
-          <a:lnRef idx="1">
-            <a:schemeClr val="accent1"/>
-          </a:lnRef>
-          <a:fillRef idx="3">
-            <a:schemeClr val="accent1"/>
-          </a:fillRef>
-          <a:effectRef idx="2">
-            <a:schemeClr val="accent1"/>
-          </a:effectRef>
-          <a:fontRef idx="minor">
-            <a:schemeClr val="lt1"/>
-          </a:fontRef>
-        </p:style>
-        <p:txBody>
-          <a:bodyPr rtlCol="0" anchor="ctr"/>
-          <a:lstStyle/>
-          <a:p>
-            <a:pPr algn="ctr"/>
-          </a:p>
-        </p:txBody>
-      </p:sp>
-      <p:sp>
-        <p:nvSpPr>
-          <p:cNvPr id="16" name="TextBox 15"/>
-          <p:cNvSpPr txBox="1"/>
-          <p:nvPr/>
-        </p:nvSpPr>
-        <p:spPr>
-          <a:xfrm>
-            <a:off x="804672" y="3822192"/>
-            <a:ext cx="3081528" cy="1728216"/>
-          </a:xfrm>
-          <a:prstGeom prst="rect">
-            <a:avLst/>
-          </a:prstGeom>
-          <a:noFill/>
-        </p:spPr>
-        <p:txBody>
-          <a:bodyPr wrap="square" anchor="t" lIns="0" rIns="0" tIns="0" bIns="0">
-            <a:spAutoFit/>
-          </a:bodyPr>
-          <a:lstStyle/>
-          <a:p>
-            <a:pPr algn="l"/>
-            <a:r>
-              <a:rPr sz="1000" b="1">
-                <a:solidFill>
-                  <a:srgbClr val="3A5C9E"/>
-                </a:solidFill>
-              </a:rPr>
-              <a:t>STEP 3 · REDEMPTION</a:t>
-            </a:r>
-          </a:p>
-          <a:p>
-            <a:pPr algn="l">
-              <a:spcBef>
-                <a:spcPts val="400"/>
-              </a:spcBef>
-            </a:pPr>
-            <a:r>
-              <a:rPr sz="1600" b="1">
-                <a:solidFill>
-                  <a:srgbClr val="0F2145"/>
-                </a:solidFill>
-                <a:latin typeface="Georgia"/>
-              </a:rPr>
-              <a:t>Units in, money out</a:t>
-            </a:r>
-          </a:p>
-          <a:p>
-            <a:pPr algn="l">
-              <a:spcBef>
-                <a:spcPts val="600"/>
-              </a:spcBef>
-            </a:pPr>
-            <a:r>
-              <a:rPr sz="1200" b="0">
-                <a:solidFill>
-                  <a:srgbClr val="1B2A41"/>
-                </a:solidFill>
-              </a:rPr>
-              <a:t>The investor sells units back. The fund pays units × NAV.</a:t>
-            </a:r>
-          </a:p>
-        </p:txBody>
-      </p:sp>
-      <p:sp>
-        <p:nvSpPr>
-          <p:cNvPr id="17" name="Rectangle 16"/>
-          <p:cNvSpPr/>
-          <p:nvPr/>
-        </p:nvSpPr>
-        <p:spPr>
-          <a:xfrm>
-            <a:off x="4297680" y="3621024"/>
-            <a:ext cx="3593592" cy="2002536"/>
-          </a:xfrm>
-          <a:prstGeom prst="rect">
-            <a:avLst/>
-          </a:prstGeom>
-          <a:solidFill>
-            <a:srgbClr val="FFFFFF"/>
-          </a:solidFill>
-          <a:ln>
-            <a:noFill/>
-          </a:ln>
-          <a:effectLst/>
-        </p:spPr>
-        <p:style>
-          <a:lnRef idx="1">
-            <a:schemeClr val="accent1"/>
-          </a:lnRef>
-          <a:fillRef idx="3">
-            <a:schemeClr val="accent1"/>
-          </a:fillRef>
-          <a:effectRef idx="2">
-            <a:schemeClr val="accent1"/>
-          </a:effectRef>
-          <a:fontRef idx="minor">
-            <a:schemeClr val="lt1"/>
-          </a:fontRef>
-        </p:style>
-        <p:txBody>
-          <a:bodyPr rtlCol="0" anchor="ctr"/>
-          <a:lstStyle/>
-          <a:p>
-            <a:pPr algn="ctr"/>
-          </a:p>
-        </p:txBody>
-      </p:sp>
-      <p:sp>
-        <p:nvSpPr>
-          <p:cNvPr id="18" name="Rectangle 17"/>
-          <p:cNvSpPr/>
-          <p:nvPr/>
-        </p:nvSpPr>
-        <p:spPr>
-          <a:xfrm>
-            <a:off x="4297680" y="3621024"/>
-            <a:ext cx="3593592" cy="45720"/>
-          </a:xfrm>
-          <a:prstGeom prst="rect">
-            <a:avLst/>
-          </a:prstGeom>
-          <a:solidFill>
-            <a:srgbClr val="C9A227"/>
-          </a:solidFill>
-          <a:ln>
-            <a:noFill/>
-          </a:ln>
-          <a:effectLst/>
-        </p:spPr>
-        <p:style>
-          <a:lnRef idx="1">
-            <a:schemeClr val="accent1"/>
-          </a:lnRef>
-          <a:fillRef idx="3">
-            <a:schemeClr val="accent1"/>
-          </a:fillRef>
-          <a:effectRef idx="2">
-            <a:schemeClr val="accent1"/>
-          </a:effectRef>
-          <a:fontRef idx="minor">
-            <a:schemeClr val="lt1"/>
-          </a:fontRef>
-        </p:style>
-        <p:txBody>
-          <a:bodyPr rtlCol="0" anchor="ctr"/>
-          <a:lstStyle/>
-          <a:p>
-            <a:pPr algn="ctr"/>
-          </a:p>
-        </p:txBody>
-      </p:sp>
-      <p:sp>
-        <p:nvSpPr>
-          <p:cNvPr id="19" name="TextBox 18"/>
-          <p:cNvSpPr txBox="1"/>
-          <p:nvPr/>
-        </p:nvSpPr>
-        <p:spPr>
-          <a:xfrm>
-            <a:off x="4553712" y="3822192"/>
-            <a:ext cx="3081528" cy="1728216"/>
-          </a:xfrm>
-          <a:prstGeom prst="rect">
-            <a:avLst/>
-          </a:prstGeom>
-          <a:noFill/>
-        </p:spPr>
-        <p:txBody>
-          <a:bodyPr wrap="square" anchor="t" lIns="0" rIns="0" tIns="0" bIns="0">
-            <a:spAutoFit/>
-          </a:bodyPr>
-          <a:lstStyle/>
-          <a:p>
-            <a:pPr algn="l"/>
-            <a:r>
-              <a:rPr sz="1000" b="1">
-                <a:solidFill>
-                  <a:srgbClr val="3A5C9E"/>
-                </a:solidFill>
-              </a:rPr>
-              <a:t>STEP 4 · DIVIDEND</a:t>
-            </a:r>
-          </a:p>
-          <a:p>
-            <a:pPr algn="l">
-              <a:spcBef>
-                <a:spcPts val="400"/>
-              </a:spcBef>
-            </a:pPr>
-            <a:r>
-              <a:rPr sz="1600" b="1">
-                <a:solidFill>
-                  <a:srgbClr val="0F2145"/>
-                </a:solidFill>
-                <a:latin typeface="Georgia"/>
-              </a:rPr>
-              <a:t>Income paid out</a:t>
-            </a:r>
-          </a:p>
-          <a:p>
-            <a:pPr algn="l">
-              <a:spcBef>
-                <a:spcPts val="600"/>
-              </a:spcBef>
-            </a:pPr>
-            <a:r>
-              <a:rPr sz="1200" b="0">
-                <a:solidFill>
-                  <a:srgbClr val="1B2A41"/>
-                </a:solidFill>
-              </a:rPr>
-              <a:t>When the fund pays income, the transfer agent sends each investor their share.</a:t>
-            </a:r>
-          </a:p>
-        </p:txBody>
-      </p:sp>
-      <p:sp>
-        <p:nvSpPr>
-          <p:cNvPr id="20" name="Rectangle 19"/>
-          <p:cNvSpPr/>
-          <p:nvPr/>
-        </p:nvSpPr>
-        <p:spPr>
-          <a:xfrm>
-            <a:off x="8046720" y="3621024"/>
-            <a:ext cx="3593592" cy="2002536"/>
-          </a:xfrm>
-          <a:prstGeom prst="rect">
-            <a:avLst/>
-          </a:prstGeom>
-          <a:solidFill>
-            <a:srgbClr val="0F2145"/>
-          </a:solidFill>
-          <a:ln>
-            <a:noFill/>
-          </a:ln>
-          <a:effectLst/>
-        </p:spPr>
-        <p:style>
-          <a:lnRef idx="1">
-            <a:schemeClr val="accent1"/>
-          </a:lnRef>
-          <a:fillRef idx="3">
-            <a:schemeClr val="accent1"/>
-          </a:fillRef>
-          <a:effectRef idx="2">
-            <a:schemeClr val="accent1"/>
-          </a:effectRef>
-          <a:fontRef idx="minor">
-            <a:schemeClr val="lt1"/>
-          </a:fontRef>
-        </p:style>
-        <p:txBody>
-          <a:bodyPr rtlCol="0" anchor="ctr"/>
-          <a:lstStyle/>
-          <a:p>
-            <a:pPr algn="ctr"/>
-          </a:p>
-        </p:txBody>
-      </p:sp>
-      <p:sp>
-        <p:nvSpPr>
-          <p:cNvPr id="21" name="Rectangle 20"/>
-          <p:cNvSpPr/>
-          <p:nvPr/>
-        </p:nvSpPr>
-        <p:spPr>
-          <a:xfrm>
-            <a:off x="8046720" y="3621024"/>
-            <a:ext cx="3593592" cy="45720"/>
-          </a:xfrm>
-          <a:prstGeom prst="rect">
-            <a:avLst/>
-          </a:prstGeom>
-          <a:solidFill>
-            <a:srgbClr val="C9A227"/>
-          </a:solidFill>
-          <a:ln>
-            <a:noFill/>
-          </a:ln>
-          <a:effectLst/>
-        </p:spPr>
-        <p:style>
-          <a:lnRef idx="1">
-            <a:schemeClr val="accent1"/>
-          </a:lnRef>
-          <a:fillRef idx="3">
-            <a:schemeClr val="accent1"/>
-          </a:fillRef>
-          <a:effectRef idx="2">
-            <a:schemeClr val="accent1"/>
-          </a:effectRef>
-          <a:fontRef idx="minor">
-            <a:schemeClr val="lt1"/>
-          </a:fontRef>
-        </p:style>
-        <p:txBody>
-          <a:bodyPr rtlCol="0" anchor="ctr"/>
-          <a:lstStyle/>
-          <a:p>
-            <a:pPr algn="ctr"/>
-          </a:p>
-        </p:txBody>
-      </p:sp>
-      <p:sp>
-        <p:nvSpPr>
-          <p:cNvPr id="22" name="TextBox 21"/>
-          <p:cNvSpPr txBox="1"/>
-          <p:nvPr/>
-        </p:nvSpPr>
-        <p:spPr>
-          <a:xfrm>
-            <a:off x="8302752" y="3822192"/>
-            <a:ext cx="3081528" cy="1728216"/>
-          </a:xfrm>
-          <a:prstGeom prst="rect">
-            <a:avLst/>
-          </a:prstGeom>
-          <a:noFill/>
-        </p:spPr>
-        <p:txBody>
-          <a:bodyPr wrap="square" anchor="t" lIns="0" rIns="0" tIns="0" bIns="0">
-            <a:spAutoFit/>
-          </a:bodyPr>
-          <a:lstStyle/>
-          <a:p>
-            <a:pPr algn="l"/>
-            <a:r>
-              <a:rPr sz="1000" b="1">
-                <a:solidFill>
-                  <a:srgbClr val="C9A227"/>
-                </a:solidFill>
-              </a:rPr>
-              <a:t>ROLE-PLAY</a:t>
-            </a:r>
-          </a:p>
-          <a:p>
-            <a:pPr algn="l">
-              <a:spcBef>
-                <a:spcPts val="400"/>
-              </a:spcBef>
-            </a:pPr>
-            <a:r>
-              <a:rPr sz="1600" b="1">
-                <a:solidFill>
-                  <a:srgbClr val="FFFFFF"/>
-                </a:solidFill>
-                <a:latin typeface="Georgia"/>
-              </a:rPr>
-              <a:t>Onboard an investor</a:t>
-            </a:r>
-          </a:p>
-          <a:p>
-            <a:pPr algn="l">
-              <a:spcBef>
-                <a:spcPts val="600"/>
-              </a:spcBef>
-            </a:pPr>
-            <a:r>
-              <a:rPr sz="1200" b="0">
-                <a:solidFill>
-                  <a:srgbClr val="C9D6EE"/>
-                </a:solidFill>
-              </a:rPr>
-              <a:t>One student is the investor, one the transfer agent, one the compliance checker.</a:t>
-            </a:r>
-          </a:p>
-        </p:txBody>
-      </p:sp>
-      <p:sp>
-        <p:nvSpPr>
-          <p:cNvPr id="23" name="Rectangle 22"/>
-          <p:cNvSpPr/>
-          <p:nvPr/>
-        </p:nvSpPr>
-        <p:spPr>
-          <a:xfrm>
-            <a:off x="548640" y="5760720"/>
-            <a:ext cx="11091672" cy="603504"/>
-          </a:xfrm>
-          <a:prstGeom prst="rect">
-            <a:avLst/>
-          </a:prstGeom>
-          <a:solidFill>
-            <a:srgbClr val="0F2145"/>
-          </a:solidFill>
-          <a:ln>
-            <a:noFill/>
-          </a:ln>
-          <a:effectLst/>
-        </p:spPr>
-        <p:style>
-          <a:lnRef idx="1">
-            <a:schemeClr val="accent1"/>
-          </a:lnRef>
-          <a:fillRef idx="3">
-            <a:schemeClr val="accent1"/>
-          </a:fillRef>
-          <a:effectRef idx="2">
-            <a:schemeClr val="accent1"/>
-          </a:effectRef>
-          <a:fontRef idx="minor">
-            <a:schemeClr val="lt1"/>
-          </a:fontRef>
-        </p:style>
-        <p:txBody>
-          <a:bodyPr rtlCol="0" anchor="ctr"/>
-          <a:lstStyle/>
-          <a:p>
-            <a:pPr algn="ctr"/>
-          </a:p>
-        </p:txBody>
-      </p:sp>
-      <p:sp>
-        <p:nvSpPr>
-          <p:cNvPr id="24" name="Rectangle 23"/>
-          <p:cNvSpPr/>
-          <p:nvPr/>
-        </p:nvSpPr>
-        <p:spPr>
-          <a:xfrm>
-            <a:off x="548640" y="5760720"/>
-            <a:ext cx="64008" cy="603504"/>
-          </a:xfrm>
-          <a:prstGeom prst="rect">
-            <a:avLst/>
-          </a:prstGeom>
-          <a:solidFill>
-            <a:srgbClr val="C9A227"/>
-          </a:solidFill>
-          <a:ln>
-            <a:noFill/>
-          </a:ln>
-          <a:effectLst/>
-        </p:spPr>
-        <p:style>
-          <a:lnRef idx="1">
-            <a:schemeClr val="accent1"/>
-          </a:lnRef>
-          <a:fillRef idx="3">
-            <a:schemeClr val="accent1"/>
-          </a:fillRef>
-          <a:effectRef idx="2">
-            <a:schemeClr val="accent1"/>
-          </a:effectRef>
-          <a:fontRef idx="minor">
-            <a:schemeClr val="lt1"/>
-          </a:fontRef>
-        </p:style>
-        <p:txBody>
-          <a:bodyPr rtlCol="0" anchor="ctr"/>
-          <a:lstStyle/>
-          <a:p>
-            <a:pPr algn="ctr"/>
-          </a:p>
-        </p:txBody>
-      </p:sp>
-      <p:sp>
-        <p:nvSpPr>
-          <p:cNvPr id="25" name="TextBox 24"/>
-          <p:cNvSpPr txBox="1"/>
-          <p:nvPr/>
-        </p:nvSpPr>
-        <p:spPr>
-          <a:xfrm>
-            <a:off x="822960" y="5760720"/>
-            <a:ext cx="10543032" cy="603504"/>
-          </a:xfrm>
-          <a:prstGeom prst="rect">
-            <a:avLst/>
-          </a:prstGeom>
-          <a:noFill/>
-        </p:spPr>
-        <p:txBody>
-          <a:bodyPr wrap="square" anchor="ctr" lIns="0" rIns="0" tIns="0" bIns="0">
-            <a:spAutoFit/>
-          </a:bodyPr>
-          <a:lstStyle/>
-          <a:p>
-            <a:pPr algn="l"/>
-            <a:r>
-              <a:rPr sz="1200" b="1">
-                <a:solidFill>
-                  <a:srgbClr val="C9A227"/>
-                </a:solidFill>
-              </a:rPr>
-              <a:t>STP in one line:  </a:t>
-            </a:r>
-            <a:r>
-              <a:rPr sz="1200" b="0">
-                <a:solidFill>
-                  <a:srgbClr val="FFFFFF"/>
-                </a:solidFill>
-              </a:rPr>
-              <a:t>straight-through processing means a transaction runs end to end with no manual step. When it breaks, someone reconciles.</a:t>
-            </a:r>
-          </a:p>
-        </p:txBody>
-      </p:sp>
-      <p:sp>
-        <p:nvSpPr>
-          <p:cNvPr id="26" name="TextBox 25"/>
-          <p:cNvSpPr txBox="1"/>
-          <p:nvPr/>
-        </p:nvSpPr>
-        <p:spPr>
-          <a:xfrm>
-            <a:off x="548640" y="6473952"/>
-            <a:ext cx="7315200" cy="228600"/>
-          </a:xfrm>
-          <a:prstGeom prst="rect">
-            <a:avLst/>
-          </a:prstGeom>
-          <a:noFill/>
-        </p:spPr>
-        <p:txBody>
-          <a:bodyPr wrap="square" anchor="t" lIns="0" rIns="0" tIns="0" bIns="0">
-            <a:spAutoFit/>
-          </a:bodyPr>
-          <a:lstStyle/>
-          <a:p>
-            <a:pPr algn="l"/>
-            <a:r>
               <a:rPr sz="800" b="0">
                 <a:solidFill>
                   <a:srgbClr val="5D6B7E"/>
@@ -15067,7 +14289,7 @@
       </p:sp>
       <p:sp>
         <p:nvSpPr>
-          <p:cNvPr id="27" name="TextBox 26"/>
+          <p:cNvPr id="38" name="TextBox 37"/>
           <p:cNvSpPr txBox="1"/>
           <p:nvPr/>
         </p:nvSpPr>
@@ -15198,7 +14420,7 @@
                   <a:srgbClr val="C9A227"/>
                 </a:solidFill>
               </a:rPr>
-              <a:t>HOUR 2 · RECONCILIATION</a:t>
+              <a:t>HOUR 2 · TRANSFER AGENCY AND KYC</a:t>
             </a:r>
           </a:p>
         </p:txBody>
@@ -15233,7 +14455,7 @@
                 </a:solidFill>
                 <a:latin typeface="Georgia"/>
               </a:rPr>
-              <a:t>Three records must agree before the NAV goes out</a:t>
+              <a:t>How investors get in and out of a fund</a:t>
             </a:r>
           </a:p>
         </p:txBody>
@@ -15247,7 +14469,7 @@
         <p:spPr>
           <a:xfrm>
             <a:off x="548640" y="1463040"/>
-            <a:ext cx="3593592" cy="1325880"/>
+            <a:ext cx="3593592" cy="2002536"/>
           </a:xfrm>
           <a:prstGeom prst="rect">
             <a:avLst/>
@@ -15335,7 +14557,7 @@
         <p:spPr>
           <a:xfrm>
             <a:off x="804672" y="1664208"/>
-            <a:ext cx="3081528" cy="1051560"/>
+            <a:ext cx="3081528" cy="1728216"/>
           </a:xfrm>
           <a:prstGeom prst="rect">
             <a:avLst/>
@@ -15355,7 +14577,7 @@
                   <a:srgbClr val="3A5C9E"/>
                 </a:solidFill>
               </a:rPr>
-              <a:t>RECORD 1</a:t>
+              <a:t>STEP 1 · KYC</a:t>
             </a:r>
           </a:p>
           <a:p>
@@ -15371,7 +14593,7 @@
                 </a:solidFill>
                 <a:latin typeface="Georgia"/>
               </a:rPr>
-              <a:t>The fund's books</a:t>
+              <a:t>Know your customer</a:t>
             </a:r>
           </a:p>
           <a:p>
@@ -15386,7 +14608,7 @@
                   <a:srgbClr val="1B2A41"/>
                 </a:solidFill>
               </a:rPr>
-              <a:t>What the fund accountant has recorded.</a:t>
+              <a:t>The investor gives PAN and Aadhaar. Under SEBI rules KYC is done once and stored with a KYC registration agency.</a:t>
             </a:r>
           </a:p>
         </p:txBody>
@@ -15400,7 +14622,7 @@
         <p:spPr>
           <a:xfrm>
             <a:off x="4297680" y="1463040"/>
-            <a:ext cx="3593592" cy="1325880"/>
+            <a:ext cx="3593592" cy="2002536"/>
           </a:xfrm>
           <a:prstGeom prst="rect">
             <a:avLst/>
@@ -15488,7 +14710,7 @@
         <p:spPr>
           <a:xfrm>
             <a:off x="4553712" y="1664208"/>
-            <a:ext cx="3081528" cy="1051560"/>
+            <a:ext cx="3081528" cy="1728216"/>
           </a:xfrm>
           <a:prstGeom prst="rect">
             <a:avLst/>
@@ -15508,7 +14730,7 @@
                   <a:srgbClr val="3A5C9E"/>
                 </a:solidFill>
               </a:rPr>
-              <a:t>RECORD 2</a:t>
+              <a:t>WHERE AI HELPS</a:t>
             </a:r>
           </a:p>
           <a:p>
@@ -15524,7 +14746,7 @@
                 </a:solidFill>
                 <a:latin typeface="Georgia"/>
               </a:rPr>
-              <a:t>The custodian</a:t>
+              <a:t>Reading and matching</a:t>
             </a:r>
           </a:p>
           <a:p>
@@ -15539,7 +14761,7 @@
                   <a:srgbClr val="1B2A41"/>
                 </a:solidFill>
               </a:rPr>
-              <a:t>The shares and cash the bank actually holds.</a:t>
+              <a:t>OCR reads the PAN card. AI matches “R. Kumar” on PAN with “Rajesh Kumar” at the bank. A person approves.</a:t>
             </a:r>
           </a:p>
         </p:txBody>
@@ -15553,7 +14775,7 @@
         <p:spPr>
           <a:xfrm>
             <a:off x="8046720" y="1463040"/>
-            <a:ext cx="3593592" cy="1325880"/>
+            <a:ext cx="3593592" cy="2002536"/>
           </a:xfrm>
           <a:prstGeom prst="rect">
             <a:avLst/>
@@ -15641,7 +14863,7 @@
         <p:spPr>
           <a:xfrm>
             <a:off x="8302752" y="1664208"/>
-            <a:ext cx="3081528" cy="1051560"/>
+            <a:ext cx="3081528" cy="1728216"/>
           </a:xfrm>
           <a:prstGeom prst="rect">
             <a:avLst/>
@@ -15661,7 +14883,7 @@
                   <a:srgbClr val="3A5C9E"/>
                 </a:solidFill>
               </a:rPr>
-              <a:t>RECORD 3</a:t>
+              <a:t>STEP 2 · SUBSCRIPTION</a:t>
             </a:r>
           </a:p>
           <a:p>
@@ -15677,7 +14899,7 @@
                 </a:solidFill>
                 <a:latin typeface="Georgia"/>
               </a:rPr>
-              <a:t>The transfer agent</a:t>
+              <a:t>Money in, units out</a:t>
             </a:r>
           </a:p>
           <a:p>
@@ -15692,7 +14914,7 @@
                   <a:srgbClr val="1B2A41"/>
                 </a:solidFill>
               </a:rPr>
-              <a:t>The units investors actually own.</a:t>
+              <a:t>Units = amount ÷ NAV. Example: ₹50,000 ÷ ₹45.8920 = 1,089.515 units.</a:t>
             </a:r>
           </a:p>
         </p:txBody>
@@ -15705,8 +14927,8 @@
         </p:nvSpPr>
         <p:spPr>
           <a:xfrm>
-            <a:off x="548640" y="2971800"/>
-            <a:ext cx="3593592" cy="2651760"/>
+            <a:off x="548640" y="3621024"/>
+            <a:ext cx="3593592" cy="2002536"/>
           </a:xfrm>
           <a:prstGeom prst="rect">
             <a:avLst/>
@@ -15749,7 +14971,7 @@
         </p:nvSpPr>
         <p:spPr>
           <a:xfrm>
-            <a:off x="548640" y="2971800"/>
+            <a:off x="548640" y="3621024"/>
             <a:ext cx="3593592" cy="45720"/>
           </a:xfrm>
           <a:prstGeom prst="rect">
@@ -15793,8 +15015,8 @@
         </p:nvSpPr>
         <p:spPr>
           <a:xfrm>
-            <a:off x="804672" y="3172968"/>
-            <a:ext cx="3081528" cy="2377440"/>
+            <a:off x="804672" y="3822192"/>
+            <a:ext cx="3081528" cy="1728216"/>
           </a:xfrm>
           <a:prstGeom prst="rect">
             <a:avLst/>
@@ -15814,7 +15036,7 @@
                   <a:srgbClr val="3A5C9E"/>
                 </a:solidFill>
               </a:rPr>
-              <a:t>BREAK 1 · IN OUR LAB</a:t>
+              <a:t>STEP 3 · REDEMPTION</a:t>
             </a:r>
           </a:p>
           <a:p>
@@ -15830,7 +15052,7 @@
                 </a:solidFill>
                 <a:latin typeface="Georgia"/>
               </a:rPr>
-              <a:t>A split not booked</a:t>
+              <a:t>Units in, money out</a:t>
             </a:r>
           </a:p>
           <a:p>
@@ -15845,7 +15067,7 @@
                   <a:srgbClr val="1B2A41"/>
                 </a:solidFill>
               </a:rPr>
-              <a:t>Stock H: 4,000 units in the books, 8,000 at the custodian. The value does not change.</a:t>
+              <a:t>The investor sells units back. The fund pays units × NAV.</a:t>
             </a:r>
           </a:p>
         </p:txBody>
@@ -15858,8 +15080,8 @@
         </p:nvSpPr>
         <p:spPr>
           <a:xfrm>
-            <a:off x="4297680" y="2971800"/>
-            <a:ext cx="3593592" cy="2651760"/>
+            <a:off x="4297680" y="3621024"/>
+            <a:ext cx="3593592" cy="2002536"/>
           </a:xfrm>
           <a:prstGeom prst="rect">
             <a:avLst/>
@@ -15902,7 +15124,7 @@
         </p:nvSpPr>
         <p:spPr>
           <a:xfrm>
-            <a:off x="4297680" y="2971800"/>
+            <a:off x="4297680" y="3621024"/>
             <a:ext cx="3593592" cy="45720"/>
           </a:xfrm>
           <a:prstGeom prst="rect">
@@ -15946,8 +15168,8 @@
         </p:nvSpPr>
         <p:spPr>
           <a:xfrm>
-            <a:off x="4553712" y="3172968"/>
-            <a:ext cx="3081528" cy="2377440"/>
+            <a:off x="4553712" y="3822192"/>
+            <a:ext cx="3081528" cy="1728216"/>
           </a:xfrm>
           <a:prstGeom prst="rect">
             <a:avLst/>
@@ -15967,7 +15189,7 @@
                   <a:srgbClr val="3A5C9E"/>
                 </a:solidFill>
               </a:rPr>
-              <a:t>BREAK 2 · IN OUR LAB</a:t>
+              <a:t>STEP 4 · DIVIDEND</a:t>
             </a:r>
           </a:p>
           <a:p>
@@ -15983,7 +15205,7 @@
                 </a:solidFill>
                 <a:latin typeface="Georgia"/>
               </a:rPr>
-              <a:t>A dividend not booked</a:t>
+              <a:t>Income paid out</a:t>
             </a:r>
           </a:p>
           <a:p>
@@ -15998,7 +15220,7 @@
                   <a:srgbClr val="1B2A41"/>
                 </a:solidFill>
               </a:rPr>
-              <a:t>The custodian holds ₹1,20,000 more cash than the books.</a:t>
+              <a:t>When the fund pays income, the transfer agent sends each investor their share.</a:t>
             </a:r>
           </a:p>
         </p:txBody>
@@ -16011,8 +15233,8 @@
         </p:nvSpPr>
         <p:spPr>
           <a:xfrm>
-            <a:off x="8046720" y="2971800"/>
-            <a:ext cx="3593592" cy="2651760"/>
+            <a:off x="8046720" y="3621024"/>
+            <a:ext cx="3593592" cy="2002536"/>
           </a:xfrm>
           <a:prstGeom prst="rect">
             <a:avLst/>
@@ -16055,7 +15277,7 @@
         </p:nvSpPr>
         <p:spPr>
           <a:xfrm>
-            <a:off x="8046720" y="2971800"/>
+            <a:off x="8046720" y="3621024"/>
             <a:ext cx="3593592" cy="45720"/>
           </a:xfrm>
           <a:prstGeom prst="rect">
@@ -16099,8 +15321,8 @@
         </p:nvSpPr>
         <p:spPr>
           <a:xfrm>
-            <a:off x="8302752" y="3172968"/>
-            <a:ext cx="3081528" cy="2377440"/>
+            <a:off x="8302752" y="3822192"/>
+            <a:ext cx="3081528" cy="1728216"/>
           </a:xfrm>
           <a:prstGeom prst="rect">
             <a:avLst/>
@@ -16120,7 +15342,7 @@
                   <a:srgbClr val="C9A227"/>
                 </a:solidFill>
               </a:rPr>
-              <a:t>BREAK 3 · IN OUR LAB</a:t>
+              <a:t>ROLE-PLAY</a:t>
             </a:r>
           </a:p>
           <a:p>
@@ -16136,7 +15358,7 @@
                 </a:solidFill>
                 <a:latin typeface="Georgia"/>
               </a:rPr>
-              <a:t>A redemption not booked</a:t>
+              <a:t>Onboard an investor</a:t>
             </a:r>
           </a:p>
           <a:p>
@@ -16151,7 +15373,7 @@
                   <a:srgbClr val="C9D6EE"/>
                 </a:solidFill>
               </a:rPr>
-              <a:t>The transfer agent shows 20,000 fewer units than the books.</a:t>
+              <a:t>One student is the investor, one the transfer agent, one the compliance checker.</a:t>
             </a:r>
           </a:p>
         </p:txBody>
@@ -16273,7 +15495,7 @@
                   <a:srgbClr val="C9A227"/>
                 </a:solidFill>
               </a:rPr>
-              <a:t>Result:  </a:t>
+              <a:t>STP in one line:  </a:t>
             </a:r>
             <a:r>
               <a:rPr sz="1200" b="0">
@@ -16281,7 +15503,7 @@
                   <a:srgbClr val="FFFFFF"/>
                 </a:solidFill>
               </a:rPr>
-              <a:t>after the three fixes the NAV moves from ₹45.8800 to ₹45.8920. A small change, but every investor's money depends on it.</a:t>
+              <a:t>straight-through processing means a transaction runs end to end with no manual step. When it breaks, someone reconciles.</a:t>
             </a:r>
           </a:p>
         </p:txBody>
@@ -16453,7 +15675,7 @@
                   <a:srgbClr val="C9A227"/>
                 </a:solidFill>
               </a:rPr>
-              <a:t>HOUR 2 · THE THREE LAB FILES</a:t>
+              <a:t>HOUR 2 · RECONCILIATION</a:t>
             </a:r>
           </a:p>
         </p:txBody>
@@ -16488,7 +15710,7 @@
                 </a:solidFill>
                 <a:latin typeface="Georgia"/>
               </a:rPr>
-              <a:t>Three files, three points of view</a:t>
+              <a:t>Three records must agree before the NAV goes out</a:t>
             </a:r>
           </a:p>
         </p:txBody>
@@ -16610,7 +15832,7 @@
                   <a:srgbClr val="3A5C9E"/>
                 </a:solidFill>
               </a:rPr>
-              <a:t>FILE 1 · fund_books.csv</a:t>
+              <a:t>RECORD 1 · fund_books.csv and fund_info.csv</a:t>
             </a:r>
           </a:p>
           <a:p>
@@ -16626,7 +15848,7 @@
                 </a:solidFill>
                 <a:latin typeface="Georgia"/>
               </a:rPr>
-              <a:t>The fund's own list of holdings</a:t>
+              <a:t>The fund's books</a:t>
             </a:r>
           </a:p>
           <a:p>
@@ -16641,7 +15863,7 @@
                   <a:srgbClr val="1B2A41"/>
                 </a:solidFill>
               </a:rPr>
-              <a:t>Written by the fund accountant. For each holding it has the units the fund thinks it owns and today's price. We use it for market value.</a:t>
+              <a:t>What the fund accountant recorded: units and price for each holding, cash ₹2,60,00,000, expenses owed ₹8,50,000 and 1,00,00,000 units.</a:t>
             </a:r>
           </a:p>
         </p:txBody>
@@ -16763,7 +15985,7 @@
                   <a:srgbClr val="3A5C9E"/>
                 </a:solidFill>
               </a:rPr>
-              <a:t>FILE 2 · custodian.csv</a:t>
+              <a:t>RECORD 2 · custodian.csv</a:t>
             </a:r>
           </a:p>
           <a:p>
@@ -16779,7 +16001,7 @@
                 </a:solidFill>
                 <a:latin typeface="Georgia"/>
               </a:rPr>
-              <a:t>The bank's statement</a:t>
+              <a:t>The custodian bank</a:t>
             </a:r>
           </a:p>
           <a:p>
@@ -16794,7 +16016,7 @@
                   <a:srgbClr val="1B2A41"/>
                 </a:solidFill>
               </a:rPr>
-              <a:t>Written by the custodian bank. It has the units the bank actually holds for each holding, and the cash in the fund's account.</a:t>
+              <a:t>The units and the cash the bank actually holds for the fund.</a:t>
             </a:r>
           </a:p>
         </p:txBody>
@@ -16916,7 +16138,7 @@
                   <a:srgbClr val="3A5C9E"/>
                 </a:solidFill>
               </a:rPr>
-              <a:t>FILE 3 · fund_info.csv</a:t>
+              <a:t>RECORD 3 · last line of fund_info.csv</a:t>
             </a:r>
           </a:p>
           <a:p>
@@ -16932,7 +16154,7 @@
                 </a:solidFill>
                 <a:latin typeface="Georgia"/>
               </a:rPr>
-              <a:t>Four more numbers for the NAV</a:t>
+              <a:t>The transfer agent</a:t>
             </a:r>
           </a:p>
           <a:p>
@@ -16947,7 +16169,7 @@
                   <a:srgbClr val="1B2A41"/>
                 </a:solidFill>
               </a:rPr>
-              <a:t>Cash per the books ₹2,60,00,000. Accrued expenses ₹8,50,000. Units outstanding per the books 1,00,00,000. Units outstanding per the transfer agent 99,80,000.</a:t>
+              <a:t>The units investors actually own, from the official register: 99,80,000.</a:t>
             </a:r>
           </a:p>
         </p:txBody>
@@ -17100,7 +16322,7 @@
                   <a:srgbClr val="C9D6EE"/>
                 </a:solidFill>
               </a:rPr>
-              <a:t>Money the fund owes but has not paid yet, such as this month's fee to the fund manager. NAV subtracts it today, before the cash leaves.</a:t>
+              <a:t>Money the fund owes but has not paid yet, such as the fund manager's fee. The NAV subtracts it today.</a:t>
             </a:r>
           </a:p>
         </p:txBody>
@@ -17222,7 +16444,7 @@
                   <a:srgbClr val="C9A227"/>
                 </a:solidFill>
               </a:rPr>
-              <a:t>What to compare:  </a:t>
+              <a:t>Reconciliation means:  </a:t>
             </a:r>
             <a:r>
               <a:rPr sz="1200" b="0">
@@ -17230,7 +16452,7 @@
                   <a:srgbClr val="FFFFFF"/>
                 </a:solidFill>
               </a:rPr>
-              <a:t>books against the custodian for units and cash. Books against the transfer agent for units outstanding.</a:t>
+              <a:t>compare the books with each of the other two records. Every difference is a break. Our lab fund has three.</a:t>
             </a:r>
           </a:p>
         </p:txBody>
@@ -19808,7 +19030,7 @@
                   <a:srgbClr val="5D6B7E"/>
                 </a:solidFill>
               </a:rPr>
-              <a:t>MODULE 8  ·  08</a:t>
+              <a:t>MODULE 8  ·  09</a:t>
             </a:r>
           </a:p>
         </p:txBody>

--- a/slides/Module-08-Fund-Administration-NAV.pptx
+++ b/slides/Module-08-Fund-Administration-NAV.pptx
@@ -6710,7 +6710,7 @@
                   <a:srgbClr val="1B2A41"/>
                 </a:solidFill>
               </a:rPr>
-              <a:t>Run nav_engine.py in Codex, Colab or any Python. It prices the fund, finds the breaks and writes nav_report.csv.</a:t>
+              <a:t>Run nav_engine.py in Codex, Colab or any Python. It prices the fund, finds the breaks and writes the NAV report. In Colab it also writes a formatted Excel report.</a:t>
             </a:r>
           </a:p>
         </p:txBody>
@@ -13350,7 +13350,7 @@
                   <a:srgbClr val="1B2A41"/>
                 </a:solidFill>
               </a:rPr>
-              <a:t>Price every holding at today's closing price.</a:t>
+              <a:t>Price every holding at today's close. This is mark-to-market, or fair value under IFRS 9.</a:t>
             </a:r>
           </a:p>
         </p:txBody>
@@ -14248,7 +14248,7 @@
                   <a:srgbClr val="FFFFFF"/>
                 </a:solidFill>
               </a:rPr>
-              <a:t>NAV = (holdings at market price + cash − expenses) ÷ units. Indian mutual funds publish it on the AMFI website every day.</a:t>
+              <a:t>NAV = (holdings at market price + cash − expenses) ÷ units. Investors then get the daily NAV on AMFI, a statement from the RTA and the portfolio every month.</a:t>
             </a:r>
           </a:p>
         </p:txBody>
@@ -14577,7 +14577,7 @@
                   <a:srgbClr val="3A5C9E"/>
                 </a:solidFill>
               </a:rPr>
-              <a:t>STEP 1 · KYC</a:t>
+              <a:t>STEP 1 · KYC AND AML</a:t>
             </a:r>
           </a:p>
           <a:p>
@@ -14608,7 +14608,7 @@
                   <a:srgbClr val="1B2A41"/>
                 </a:solidFill>
               </a:rPr>
-              <a:t>The investor gives PAN and Aadhaar. Under SEBI rules KYC is done once and stored with a KYC registration agency.</a:t>
+              <a:t>The investor gives PAN and Aadhaar. AML checks screen out money laundering. KYC is done once and stored with a KYC registration agency.</a:t>
             </a:r>
           </a:p>
         </p:txBody>

--- a/slides/Module-08-Fund-Administration-NAV.pptx
+++ b/slides/Module-08-Fund-Administration-NAV.pptx
@@ -11274,7 +11274,7 @@
                   <a:srgbClr val="FFFFFF"/>
                 </a:solidFill>
               </a:rPr>
-              <a:t>Price holdings, book trades and corporate actions, reconcile, calculate NAV</a:t>
+              <a:t>Record the manager's trades in the books, price holdings, process corporate actions, reconcile, calculate NAV</a:t>
             </a:r>
           </a:p>
         </p:txBody>
@@ -13281,7 +13281,7 @@
                   <a:srgbClr val="1B2A41"/>
                 </a:solidFill>
               </a:rPr>
-              <a:t>Capture every trade done today.</a:t>
+              <a:t>Record every trade the fund manager made today.</a:t>
             </a:r>
           </a:p>
         </p:txBody>
